--- a/output/wordlabs-spell-3day.pptx
+++ b/output/wordlabs-spell-3day.pptx
@@ -6040,7 +6040,7 @@
                 <a:ea typeface="Calibri" pitchFamily="34" charset="-122"/>
                 <a:cs typeface="Calibri" pitchFamily="34" charset="-120"/>
               </a:rPr>
-              <a:t>She used the </a:t>
+              <a:t>Sam was careful not to </a:t>
             </a:r>
             <a:pPr algn="l" indent="0" marL="0">
               <a:buNone/>
@@ -6057,7 +6057,7 @@
                 <a:ea typeface="Calibri" pitchFamily="34" charset="-122"/>
                 <a:cs typeface="Calibri" pitchFamily="34" charset="-120"/>
               </a:rPr>
-              <a:t>spellcheck</a:t>
+              <a:t>misspell</a:t>
             </a:r>
             <a:pPr algn="l" indent="0" marL="0">
               <a:buNone/>
@@ -6071,7 +6071,7 @@
                 <a:ea typeface="Calibri" pitchFamily="34" charset="-122"/>
                 <a:cs typeface="Calibri" pitchFamily="34" charset="-120"/>
               </a:rPr>
-              <a:t> tool to find the word she had </a:t>
+              <a:t> any words during the </a:t>
             </a:r>
             <a:pPr algn="l" indent="0" marL="0">
               <a:buNone/>
@@ -6088,7 +6088,7 @@
                 <a:ea typeface="Calibri" pitchFamily="34" charset="-122"/>
                 <a:cs typeface="Calibri" pitchFamily="34" charset="-120"/>
               </a:rPr>
-              <a:t>misspelled</a:t>
+              <a:t>spelling</a:t>
             </a:r>
             <a:pPr algn="l" indent="0" marL="0">
               <a:buNone/>
@@ -6102,7 +6102,7 @@
                 <a:ea typeface="Calibri" pitchFamily="34" charset="-122"/>
                 <a:cs typeface="Calibri" pitchFamily="34" charset="-120"/>
               </a:rPr>
-              <a:t> in her report.</a:t>
+              <a:t> test.</a:t>
             </a:r>
             <a:endParaRPr lang="en-US" sz="1800" dirty="0"/>
           </a:p>
@@ -6257,7 +6257,7 @@
                 <a:ea typeface="Trebuchet MS" pitchFamily="34" charset="-122"/>
                 <a:cs typeface="Trebuchet MS" pitchFamily="34" charset="-120"/>
               </a:rPr>
-              <a:t>spellcheck</a:t>
+              <a:t>misspell</a:t>
             </a:r>
             <a:endParaRPr lang="en-US" sz="1400" dirty="0"/>
           </a:p>
@@ -6385,7 +6385,7 @@
                 <a:ea typeface="Trebuchet MS" pitchFamily="34" charset="-122"/>
                 <a:cs typeface="Trebuchet MS" pitchFamily="34" charset="-120"/>
               </a:rPr>
-              <a:t>misspelled</a:t>
+              <a:t>spelling</a:t>
             </a:r>
             <a:endParaRPr lang="en-US" sz="1400" dirty="0"/>
           </a:p>
@@ -6855,7 +6855,7 @@
                 <a:ea typeface="Trebuchet MS" pitchFamily="34" charset="-122"/>
                 <a:cs typeface="Trebuchet MS" pitchFamily="34" charset="-120"/>
               </a:rPr>
-              <a:t>spellcheck</a:t>
+              <a:t>misspell</a:t>
             </a:r>
             <a:endParaRPr lang="en-US" sz="2800" dirty="0"/>
           </a:p>
@@ -7682,7 +7682,7 @@
                 <a:ea typeface="Trebuchet MS" pitchFamily="34" charset="-122"/>
                 <a:cs typeface="Trebuchet MS" pitchFamily="34" charset="-120"/>
               </a:rPr>
-              <a:t>spellcheck</a:t>
+              <a:t>misspell</a:t>
             </a:r>
             <a:endParaRPr lang="en-US" sz="2800" dirty="0"/>
           </a:p>
@@ -7771,11 +7771,11 @@
             </a:avLst>
           </a:prstGeom>
           <a:solidFill>
-            <a:srgbClr val="CCFBF1"/>
+            <a:srgbClr val="DDD6FE"/>
           </a:solidFill>
           <a:ln w="19050">
             <a:solidFill>
-              <a:srgbClr val="0D9488"/>
+              <a:srgbClr val="7C3AED"/>
             </a:solidFill>
             <a:prstDash val="solid"/>
           </a:ln>
@@ -7815,13 +7815,13 @@
             <a:r>
               <a:rPr lang="en-US" sz="1300" b="1" dirty="0">
                 <a:solidFill>
-                  <a:srgbClr val="0F766E"/>
+                  <a:srgbClr val="4C1D95"/>
                 </a:solidFill>
                 <a:latin typeface="Trebuchet MS" pitchFamily="34" charset="0"/>
                 <a:ea typeface="Trebuchet MS" pitchFamily="34" charset="-122"/>
                 <a:cs typeface="Trebuchet MS" pitchFamily="34" charset="-120"/>
               </a:rPr>
-              <a:t>spell</a:t>
+              <a:t>mis</a:t>
             </a:r>
             <a:endParaRPr lang="en-US" sz="1300" dirty="0"/>
           </a:p>
@@ -7860,7 +7860,7 @@
                 <a:ea typeface="Calibri" pitchFamily="34" charset="-122"/>
                 <a:cs typeface="Calibri" pitchFamily="34" charset="-120"/>
               </a:rPr>
-              <a:t>to name letters in order</a:t>
+              <a:t>wrongly, badly</a:t>
             </a:r>
             <a:endParaRPr lang="en-US" sz="850" dirty="0"/>
           </a:p>
@@ -7883,11 +7883,11 @@
             </a:avLst>
           </a:prstGeom>
           <a:solidFill>
-            <a:srgbClr val="FCE7F3"/>
+            <a:srgbClr val="CCFBF1"/>
           </a:solidFill>
           <a:ln w="19050">
             <a:solidFill>
-              <a:srgbClr val="DB2777"/>
+              <a:srgbClr val="0D9488"/>
             </a:solidFill>
             <a:prstDash val="solid"/>
           </a:ln>
@@ -7927,13 +7927,13 @@
             <a:r>
               <a:rPr lang="en-US" sz="1300" b="1" dirty="0">
                 <a:solidFill>
-                  <a:srgbClr val="9D174D"/>
+                  <a:srgbClr val="0F766E"/>
                 </a:solidFill>
                 <a:latin typeface="Trebuchet MS" pitchFamily="34" charset="0"/>
                 <a:ea typeface="Trebuchet MS" pitchFamily="34" charset="-122"/>
                 <a:cs typeface="Trebuchet MS" pitchFamily="34" charset="-120"/>
               </a:rPr>
-              <a:t>check</a:t>
+              <a:t>spell</a:t>
             </a:r>
             <a:endParaRPr lang="en-US" sz="1300" dirty="0"/>
           </a:p>
@@ -7972,7 +7972,7 @@
                 <a:ea typeface="Calibri" pitchFamily="34" charset="-122"/>
                 <a:cs typeface="Calibri" pitchFamily="34" charset="-120"/>
               </a:rPr>
-              <a:t>to look at carefully</a:t>
+              <a:t>to name letters in order</a:t>
             </a:r>
             <a:endParaRPr lang="en-US" sz="850" dirty="0"/>
           </a:p>
@@ -8667,7 +8667,7 @@
                 <a:ea typeface="Trebuchet MS" pitchFamily="34" charset="-122"/>
                 <a:cs typeface="Trebuchet MS" pitchFamily="34" charset="-120"/>
               </a:rPr>
-              <a:t>spellcheck</a:t>
+              <a:t>misspell</a:t>
             </a:r>
             <a:endParaRPr lang="en-US" sz="2800" dirty="0"/>
           </a:p>
@@ -8756,11 +8756,11 @@
             </a:avLst>
           </a:prstGeom>
           <a:solidFill>
-            <a:srgbClr val="CCFBF1"/>
+            <a:srgbClr val="DDD6FE"/>
           </a:solidFill>
           <a:ln w="19050">
             <a:solidFill>
-              <a:srgbClr val="0D9488"/>
+              <a:srgbClr val="7C3AED"/>
             </a:solidFill>
             <a:prstDash val="solid"/>
           </a:ln>
@@ -8800,13 +8800,13 @@
             <a:r>
               <a:rPr lang="en-US" sz="1300" b="1" dirty="0">
                 <a:solidFill>
-                  <a:srgbClr val="0F766E"/>
+                  <a:srgbClr val="4C1D95"/>
                 </a:solidFill>
                 <a:latin typeface="Trebuchet MS" pitchFamily="34" charset="0"/>
                 <a:ea typeface="Trebuchet MS" pitchFamily="34" charset="-122"/>
                 <a:cs typeface="Trebuchet MS" pitchFamily="34" charset="-120"/>
               </a:rPr>
-              <a:t>spell</a:t>
+              <a:t>mis</a:t>
             </a:r>
             <a:endParaRPr lang="en-US" sz="1300" dirty="0"/>
           </a:p>
@@ -8845,7 +8845,7 @@
                 <a:ea typeface="Calibri" pitchFamily="34" charset="-122"/>
                 <a:cs typeface="Calibri" pitchFamily="34" charset="-120"/>
               </a:rPr>
-              <a:t>to name letters in order</a:t>
+              <a:t>wrongly, badly</a:t>
             </a:r>
             <a:endParaRPr lang="en-US" sz="850" dirty="0"/>
           </a:p>
@@ -8868,11 +8868,11 @@
             </a:avLst>
           </a:prstGeom>
           <a:solidFill>
-            <a:srgbClr val="FCE7F3"/>
+            <a:srgbClr val="CCFBF1"/>
           </a:solidFill>
           <a:ln w="19050">
             <a:solidFill>
-              <a:srgbClr val="DB2777"/>
+              <a:srgbClr val="0D9488"/>
             </a:solidFill>
             <a:prstDash val="solid"/>
           </a:ln>
@@ -8912,13 +8912,13 @@
             <a:r>
               <a:rPr lang="en-US" sz="1300" b="1" dirty="0">
                 <a:solidFill>
-                  <a:srgbClr val="9D174D"/>
+                  <a:srgbClr val="0F766E"/>
                 </a:solidFill>
                 <a:latin typeface="Trebuchet MS" pitchFamily="34" charset="0"/>
                 <a:ea typeface="Trebuchet MS" pitchFamily="34" charset="-122"/>
                 <a:cs typeface="Trebuchet MS" pitchFamily="34" charset="-120"/>
               </a:rPr>
-              <a:t>check</a:t>
+              <a:t>spell</a:t>
             </a:r>
             <a:endParaRPr lang="en-US" sz="1300" dirty="0"/>
           </a:p>
@@ -8957,7 +8957,7 @@
                 <a:ea typeface="Calibri" pitchFamily="34" charset="-122"/>
                 <a:cs typeface="Calibri" pitchFamily="34" charset="-120"/>
               </a:rPr>
-              <a:t>to look at carefully</a:t>
+              <a:t>to name letters in order</a:t>
             </a:r>
             <a:endParaRPr lang="en-US" sz="850" dirty="0"/>
           </a:p>
@@ -9116,7 +9116,7 @@
                 <a:ea typeface="Trebuchet MS" pitchFamily="34" charset="-122"/>
                 <a:cs typeface="Trebuchet MS" pitchFamily="34" charset="-120"/>
               </a:rPr>
-              <a:t>spell</a:t>
+              <a:t>mis</a:t>
             </a:r>
             <a:endParaRPr lang="en-US" sz="1400" dirty="0"/>
           </a:p>
@@ -9221,7 +9221,7 @@
                 <a:ea typeface="Trebuchet MS" pitchFamily="34" charset="-122"/>
                 <a:cs typeface="Trebuchet MS" pitchFamily="34" charset="-120"/>
               </a:rPr>
-              <a:t>check</a:t>
+              <a:t>spell</a:t>
             </a:r>
             <a:endParaRPr lang="en-US" sz="1400" dirty="0"/>
           </a:p>
@@ -9784,7 +9784,7 @@
                 <a:ea typeface="Trebuchet MS" pitchFamily="34" charset="-122"/>
                 <a:cs typeface="Trebuchet MS" pitchFamily="34" charset="-120"/>
               </a:rPr>
-              <a:t>spellcheck</a:t>
+              <a:t>misspell</a:t>
             </a:r>
             <a:endParaRPr lang="en-US" sz="2800" dirty="0"/>
           </a:p>
@@ -9873,11 +9873,11 @@
             </a:avLst>
           </a:prstGeom>
           <a:solidFill>
-            <a:srgbClr val="CCFBF1"/>
+            <a:srgbClr val="DDD6FE"/>
           </a:solidFill>
           <a:ln w="19050">
             <a:solidFill>
-              <a:srgbClr val="0D9488"/>
+              <a:srgbClr val="7C3AED"/>
             </a:solidFill>
             <a:prstDash val="solid"/>
           </a:ln>
@@ -9917,13 +9917,13 @@
             <a:r>
               <a:rPr lang="en-US" sz="1300" b="1" dirty="0">
                 <a:solidFill>
-                  <a:srgbClr val="0F766E"/>
+                  <a:srgbClr val="4C1D95"/>
                 </a:solidFill>
                 <a:latin typeface="Trebuchet MS" pitchFamily="34" charset="0"/>
                 <a:ea typeface="Trebuchet MS" pitchFamily="34" charset="-122"/>
                 <a:cs typeface="Trebuchet MS" pitchFamily="34" charset="-120"/>
               </a:rPr>
-              <a:t>spell</a:t>
+              <a:t>mis</a:t>
             </a:r>
             <a:endParaRPr lang="en-US" sz="1300" dirty="0"/>
           </a:p>
@@ -9962,7 +9962,7 @@
                 <a:ea typeface="Calibri" pitchFamily="34" charset="-122"/>
                 <a:cs typeface="Calibri" pitchFamily="34" charset="-120"/>
               </a:rPr>
-              <a:t>to name letters in order</a:t>
+              <a:t>wrongly, badly</a:t>
             </a:r>
             <a:endParaRPr lang="en-US" sz="850" dirty="0"/>
           </a:p>
@@ -9985,11 +9985,11 @@
             </a:avLst>
           </a:prstGeom>
           <a:solidFill>
-            <a:srgbClr val="FCE7F3"/>
+            <a:srgbClr val="CCFBF1"/>
           </a:solidFill>
           <a:ln w="19050">
             <a:solidFill>
-              <a:srgbClr val="DB2777"/>
+              <a:srgbClr val="0D9488"/>
             </a:solidFill>
             <a:prstDash val="solid"/>
           </a:ln>
@@ -10029,13 +10029,13 @@
             <a:r>
               <a:rPr lang="en-US" sz="1300" b="1" dirty="0">
                 <a:solidFill>
-                  <a:srgbClr val="9D174D"/>
+                  <a:srgbClr val="0F766E"/>
                 </a:solidFill>
                 <a:latin typeface="Trebuchet MS" pitchFamily="34" charset="0"/>
                 <a:ea typeface="Trebuchet MS" pitchFamily="34" charset="-122"/>
                 <a:cs typeface="Trebuchet MS" pitchFamily="34" charset="-120"/>
               </a:rPr>
-              <a:t>check</a:t>
+              <a:t>spell</a:t>
             </a:r>
             <a:endParaRPr lang="en-US" sz="1300" dirty="0"/>
           </a:p>
@@ -10074,7 +10074,7 @@
                 <a:ea typeface="Calibri" pitchFamily="34" charset="-122"/>
                 <a:cs typeface="Calibri" pitchFamily="34" charset="-120"/>
               </a:rPr>
-              <a:t>to look at carefully</a:t>
+              <a:t>to name letters in order</a:t>
             </a:r>
             <a:endParaRPr lang="en-US" sz="850" dirty="0"/>
           </a:p>
@@ -10233,7 +10233,7 @@
                 <a:ea typeface="Trebuchet MS" pitchFamily="34" charset="-122"/>
                 <a:cs typeface="Trebuchet MS" pitchFamily="34" charset="-120"/>
               </a:rPr>
-              <a:t>spell</a:t>
+              <a:t>mis</a:t>
             </a:r>
             <a:endParaRPr lang="en-US" sz="1400" dirty="0"/>
           </a:p>
@@ -10338,7 +10338,7 @@
                 <a:ea typeface="Trebuchet MS" pitchFamily="34" charset="-122"/>
                 <a:cs typeface="Trebuchet MS" pitchFamily="34" charset="-120"/>
               </a:rPr>
-              <a:t>check</a:t>
+              <a:t>spell</a:t>
             </a:r>
             <a:endParaRPr lang="en-US" sz="1400" dirty="0"/>
           </a:p>
@@ -10419,11 +10419,11 @@
         <p:spPr>
           <a:xfrm>
             <a:off x="1874520" y="4096512"/>
-            <a:ext cx="6903720" cy="804672"/>
+            <a:ext cx="6903720" cy="658368"/>
           </a:xfrm>
           <a:prstGeom prst="rect">
             <a:avLst>
-              <a:gd name="adj" fmla="val 6818"/>
+              <a:gd name="adj" fmla="val 8333"/>
             </a:avLst>
           </a:prstGeom>
           <a:solidFill>
@@ -10446,11 +10446,11 @@
         <p:spPr>
           <a:xfrm>
             <a:off x="2124837" y="4169664"/>
-            <a:ext cx="685800" cy="384048"/>
+            <a:ext cx="685800" cy="475488"/>
           </a:xfrm>
           <a:prstGeom prst="rect">
             <a:avLst>
-              <a:gd name="adj" fmla="val 9524"/>
+              <a:gd name="adj" fmla="val 7692"/>
             </a:avLst>
           </a:prstGeom>
           <a:solidFill>
@@ -10473,7 +10473,7 @@
         <p:spPr>
           <a:xfrm>
             <a:off x="2124837" y="4169664"/>
-            <a:ext cx="685800" cy="384048"/>
+            <a:ext cx="685800" cy="475488"/>
           </a:xfrm>
           <a:prstGeom prst="rect">
             <a:avLst/>
@@ -10497,7 +10497,7 @@
                 <a:ea typeface="Trebuchet MS" pitchFamily="34" charset="-122"/>
                 <a:cs typeface="Trebuchet MS" pitchFamily="34" charset="-120"/>
               </a:rPr>
-              <a:t>s</a:t>
+              <a:t>m</a:t>
             </a:r>
             <a:endParaRPr lang="en-US" sz="900" dirty="0"/>
           </a:p>
@@ -10512,11 +10512,11 @@
         <p:spPr>
           <a:xfrm>
             <a:off x="3033522" y="4169664"/>
-            <a:ext cx="685800" cy="384048"/>
+            <a:ext cx="685800" cy="475488"/>
           </a:xfrm>
           <a:prstGeom prst="rect">
             <a:avLst>
-              <a:gd name="adj" fmla="val 9524"/>
+              <a:gd name="adj" fmla="val 7692"/>
             </a:avLst>
           </a:prstGeom>
           <a:solidFill>
@@ -10539,7 +10539,7 @@
         <p:spPr>
           <a:xfrm>
             <a:off x="3033522" y="4169664"/>
-            <a:ext cx="685800" cy="384048"/>
+            <a:ext cx="685800" cy="475488"/>
           </a:xfrm>
           <a:prstGeom prst="rect">
             <a:avLst/>
@@ -10563,7 +10563,7 @@
                 <a:ea typeface="Trebuchet MS" pitchFamily="34" charset="-122"/>
                 <a:cs typeface="Trebuchet MS" pitchFamily="34" charset="-120"/>
               </a:rPr>
-              <a:t>p</a:t>
+              <a:t>i</a:t>
             </a:r>
             <a:endParaRPr lang="en-US" sz="900" dirty="0"/>
           </a:p>
@@ -10578,11 +10578,11 @@
         <p:spPr>
           <a:xfrm>
             <a:off x="3942207" y="4169664"/>
-            <a:ext cx="685800" cy="384048"/>
+            <a:ext cx="685800" cy="475488"/>
           </a:xfrm>
           <a:prstGeom prst="rect">
             <a:avLst>
-              <a:gd name="adj" fmla="val 9524"/>
+              <a:gd name="adj" fmla="val 7692"/>
             </a:avLst>
           </a:prstGeom>
           <a:solidFill>
@@ -10605,7 +10605,7 @@
         <p:spPr>
           <a:xfrm>
             <a:off x="3942207" y="4169664"/>
-            <a:ext cx="685800" cy="384048"/>
+            <a:ext cx="685800" cy="475488"/>
           </a:xfrm>
           <a:prstGeom prst="rect">
             <a:avLst/>
@@ -10629,7 +10629,7 @@
                 <a:ea typeface="Trebuchet MS" pitchFamily="34" charset="-122"/>
                 <a:cs typeface="Trebuchet MS" pitchFamily="34" charset="-120"/>
               </a:rPr>
-              <a:t>e</a:t>
+              <a:t>s</a:t>
             </a:r>
             <a:endParaRPr lang="en-US" sz="900" dirty="0"/>
           </a:p>
@@ -10644,11 +10644,11 @@
         <p:spPr>
           <a:xfrm>
             <a:off x="4850892" y="4169664"/>
-            <a:ext cx="685800" cy="384048"/>
+            <a:ext cx="685800" cy="475488"/>
           </a:xfrm>
           <a:prstGeom prst="rect">
             <a:avLst>
-              <a:gd name="adj" fmla="val 9524"/>
+              <a:gd name="adj" fmla="val 7692"/>
             </a:avLst>
           </a:prstGeom>
           <a:solidFill>
@@ -10671,7 +10671,7 @@
         <p:spPr>
           <a:xfrm>
             <a:off x="4850892" y="4169664"/>
-            <a:ext cx="685800" cy="384048"/>
+            <a:ext cx="685800" cy="475488"/>
           </a:xfrm>
           <a:prstGeom prst="rect">
             <a:avLst/>
@@ -10695,7 +10695,7 @@
                 <a:ea typeface="Trebuchet MS" pitchFamily="34" charset="-122"/>
                 <a:cs typeface="Trebuchet MS" pitchFamily="34" charset="-120"/>
               </a:rPr>
-              <a:t>ll</a:t>
+              <a:t>s</a:t>
             </a:r>
             <a:endParaRPr lang="en-US" sz="900" dirty="0"/>
           </a:p>
@@ -10710,11 +10710,11 @@
         <p:spPr>
           <a:xfrm>
             <a:off x="5759577" y="4169664"/>
-            <a:ext cx="685800" cy="384048"/>
+            <a:ext cx="685800" cy="475488"/>
           </a:xfrm>
           <a:prstGeom prst="rect">
             <a:avLst>
-              <a:gd name="adj" fmla="val 9524"/>
+              <a:gd name="adj" fmla="val 7692"/>
             </a:avLst>
           </a:prstGeom>
           <a:solidFill>
@@ -10737,7 +10737,7 @@
         <p:spPr>
           <a:xfrm>
             <a:off x="5759577" y="4169664"/>
-            <a:ext cx="685800" cy="384048"/>
+            <a:ext cx="685800" cy="475488"/>
           </a:xfrm>
           <a:prstGeom prst="rect">
             <a:avLst/>
@@ -10761,7 +10761,7 @@
                 <a:ea typeface="Trebuchet MS" pitchFamily="34" charset="-122"/>
                 <a:cs typeface="Trebuchet MS" pitchFamily="34" charset="-120"/>
               </a:rPr>
-              <a:t>ch</a:t>
+              <a:t>p</a:t>
             </a:r>
             <a:endParaRPr lang="en-US" sz="900" dirty="0"/>
           </a:p>
@@ -10776,11 +10776,11 @@
         <p:spPr>
           <a:xfrm>
             <a:off x="6668262" y="4169664"/>
-            <a:ext cx="685800" cy="384048"/>
+            <a:ext cx="685800" cy="475488"/>
           </a:xfrm>
           <a:prstGeom prst="rect">
             <a:avLst>
-              <a:gd name="adj" fmla="val 9524"/>
+              <a:gd name="adj" fmla="val 7692"/>
             </a:avLst>
           </a:prstGeom>
           <a:solidFill>
@@ -10803,7 +10803,7 @@
         <p:spPr>
           <a:xfrm>
             <a:off x="6668262" y="4169664"/>
-            <a:ext cx="685800" cy="384048"/>
+            <a:ext cx="685800" cy="475488"/>
           </a:xfrm>
           <a:prstGeom prst="rect">
             <a:avLst/>
@@ -10842,11 +10842,11 @@
         <p:spPr>
           <a:xfrm>
             <a:off x="7576947" y="4169664"/>
-            <a:ext cx="685800" cy="384048"/>
+            <a:ext cx="685800" cy="475488"/>
           </a:xfrm>
           <a:prstGeom prst="rect">
             <a:avLst>
-              <a:gd name="adj" fmla="val 9524"/>
+              <a:gd name="adj" fmla="val 7692"/>
             </a:avLst>
           </a:prstGeom>
           <a:solidFill>
@@ -10869,7 +10869,7 @@
         <p:spPr>
           <a:xfrm>
             <a:off x="7576947" y="4169664"/>
-            <a:ext cx="685800" cy="384048"/>
+            <a:ext cx="685800" cy="475488"/>
           </a:xfrm>
           <a:prstGeom prst="rect">
             <a:avLst/>
@@ -10893,48 +10893,9 @@
                 <a:ea typeface="Trebuchet MS" pitchFamily="34" charset="-122"/>
                 <a:cs typeface="Trebuchet MS" pitchFamily="34" charset="-120"/>
               </a:rPr>
-              <a:t>ck</a:t>
+              <a:t>ll</a:t>
             </a:r>
             <a:endParaRPr lang="en-US" sz="900" dirty="0"/>
-          </a:p>
-        </p:txBody>
-      </p:sp>
-      <p:sp>
-        <p:nvSpPr>
-          <p:cNvPr id="47" name="Text 45"/>
-          <p:cNvSpPr/>
-          <p:nvPr/>
-        </p:nvSpPr>
-        <p:spPr>
-          <a:xfrm>
-            <a:off x="7576947" y="4572000"/>
-            <a:ext cx="685800" cy="219456"/>
-          </a:xfrm>
-          <a:prstGeom prst="rect">
-            <a:avLst/>
-          </a:prstGeom>
-          <a:noFill/>
-          <a:ln/>
-        </p:spPr>
-        <p:txBody>
-          <a:bodyPr wrap="square" lIns="0" tIns="0" rIns="0" bIns="0" rtlCol="0" anchor="t"/>
-          <a:lstStyle/>
-          <a:p>
-            <a:pPr algn="ctr" indent="0" marL="0">
-              <a:buNone/>
-            </a:pPr>
-            <a:r>
-              <a:rPr lang="en-US" sz="750" i="1" dirty="0">
-                <a:solidFill>
-                  <a:srgbClr val="94A3B8"/>
-                </a:solidFill>
-                <a:latin typeface="Calibri" pitchFamily="34" charset="0"/>
-                <a:ea typeface="Calibri" pitchFamily="34" charset="-122"/>
-                <a:cs typeface="Calibri" pitchFamily="34" charset="-120"/>
-              </a:rPr>
-              <a:t>/k/</a:t>
-            </a:r>
-            <a:endParaRPr lang="en-US" sz="750" dirty="0"/>
           </a:p>
         </p:txBody>
       </p:sp>
@@ -11363,7 +11324,7 @@
                 <a:ea typeface="Trebuchet MS" pitchFamily="34" charset="-122"/>
                 <a:cs typeface="Trebuchet MS" pitchFamily="34" charset="-120"/>
               </a:rPr>
-              <a:t>misspelled</a:t>
+              <a:t>spelling</a:t>
             </a:r>
             <a:endParaRPr lang="en-US" sz="2800" dirty="0"/>
           </a:p>
@@ -12190,7 +12151,7 @@
                 <a:ea typeface="Trebuchet MS" pitchFamily="34" charset="-122"/>
                 <a:cs typeface="Trebuchet MS" pitchFamily="34" charset="-120"/>
               </a:rPr>
-              <a:t>misspelled</a:t>
+              <a:t>spelling</a:t>
             </a:r>
             <a:endParaRPr lang="en-US" sz="2800" dirty="0"/>
           </a:p>
@@ -12270,7 +12231,7 @@
         </p:nvSpPr>
         <p:spPr>
           <a:xfrm>
-            <a:off x="2221992" y="2258568"/>
+            <a:off x="2938272" y="2258568"/>
             <a:ext cx="1828800" cy="292608"/>
           </a:xfrm>
           <a:prstGeom prst="rect">
@@ -12279,11 +12240,11 @@
             </a:avLst>
           </a:prstGeom>
           <a:solidFill>
-            <a:srgbClr val="DDD6FE"/>
+            <a:srgbClr val="CCFBF1"/>
           </a:solidFill>
           <a:ln w="19050">
             <a:solidFill>
-              <a:srgbClr val="7C3AED"/>
+              <a:srgbClr val="0D9488"/>
             </a:solidFill>
             <a:prstDash val="solid"/>
           </a:ln>
@@ -12304,7 +12265,7 @@
         </p:nvSpPr>
         <p:spPr>
           <a:xfrm>
-            <a:off x="2221992" y="2258568"/>
+            <a:off x="2938272" y="2258568"/>
             <a:ext cx="1828800" cy="292608"/>
           </a:xfrm>
           <a:prstGeom prst="rect">
@@ -12323,13 +12284,13 @@
             <a:r>
               <a:rPr lang="en-US" sz="1300" b="1" dirty="0">
                 <a:solidFill>
-                  <a:srgbClr val="4C1D95"/>
+                  <a:srgbClr val="0F766E"/>
                 </a:solidFill>
                 <a:latin typeface="Trebuchet MS" pitchFamily="34" charset="0"/>
                 <a:ea typeface="Trebuchet MS" pitchFamily="34" charset="-122"/>
                 <a:cs typeface="Trebuchet MS" pitchFamily="34" charset="-120"/>
               </a:rPr>
-              <a:t>mis</a:t>
+              <a:t>spell</a:t>
             </a:r>
             <a:endParaRPr lang="en-US" sz="1300" dirty="0"/>
           </a:p>
@@ -12343,7 +12304,7 @@
         </p:nvSpPr>
         <p:spPr>
           <a:xfrm>
-            <a:off x="2221992" y="2569464"/>
+            <a:off x="2938272" y="2569464"/>
             <a:ext cx="1828800" cy="201168"/>
           </a:xfrm>
           <a:prstGeom prst="rect">
@@ -12368,7 +12329,7 @@
                 <a:ea typeface="Calibri" pitchFamily="34" charset="-122"/>
                 <a:cs typeface="Calibri" pitchFamily="34" charset="-120"/>
               </a:rPr>
-              <a:t>wrongly or badly</a:t>
+              <a:t>to name letters in order</a:t>
             </a:r>
             <a:endParaRPr lang="en-US" sz="850" dirty="0"/>
           </a:p>
@@ -12382,7 +12343,7 @@
         </p:nvSpPr>
         <p:spPr>
           <a:xfrm>
-            <a:off x="4370832" y="2258568"/>
+            <a:off x="5803392" y="2258568"/>
             <a:ext cx="1828800" cy="292608"/>
           </a:xfrm>
           <a:prstGeom prst="rect">
@@ -12391,11 +12352,11 @@
             </a:avLst>
           </a:prstGeom>
           <a:solidFill>
-            <a:srgbClr val="CCFBF1"/>
+            <a:srgbClr val="FCE7F3"/>
           </a:solidFill>
           <a:ln w="19050">
             <a:solidFill>
-              <a:srgbClr val="0D9488"/>
+              <a:srgbClr val="DB2777"/>
             </a:solidFill>
             <a:prstDash val="solid"/>
           </a:ln>
@@ -12416,7 +12377,7 @@
         </p:nvSpPr>
         <p:spPr>
           <a:xfrm>
-            <a:off x="4370832" y="2258568"/>
+            <a:off x="5803392" y="2258568"/>
             <a:ext cx="1828800" cy="292608"/>
           </a:xfrm>
           <a:prstGeom prst="rect">
@@ -12435,13 +12396,13 @@
             <a:r>
               <a:rPr lang="en-US" sz="1300" b="1" dirty="0">
                 <a:solidFill>
-                  <a:srgbClr val="0F766E"/>
+                  <a:srgbClr val="9D174D"/>
                 </a:solidFill>
                 <a:latin typeface="Trebuchet MS" pitchFamily="34" charset="0"/>
                 <a:ea typeface="Trebuchet MS" pitchFamily="34" charset="-122"/>
                 <a:cs typeface="Trebuchet MS" pitchFamily="34" charset="-120"/>
               </a:rPr>
-              <a:t>spell</a:t>
+              <a:t>ing</a:t>
             </a:r>
             <a:endParaRPr lang="en-US" sz="1300" dirty="0"/>
           </a:p>
@@ -12455,7 +12416,7 @@
         </p:nvSpPr>
         <p:spPr>
           <a:xfrm>
-            <a:off x="4370832" y="2569464"/>
+            <a:off x="5803392" y="2569464"/>
             <a:ext cx="1828800" cy="201168"/>
           </a:xfrm>
           <a:prstGeom prst="rect">
@@ -12480,7 +12441,7 @@
                 <a:ea typeface="Calibri" pitchFamily="34" charset="-122"/>
                 <a:cs typeface="Calibri" pitchFamily="34" charset="-120"/>
               </a:rPr>
-              <a:t>to name letters in order</a:t>
+              <a:t>action in progress</a:t>
             </a:r>
             <a:endParaRPr lang="en-US" sz="850" dirty="0"/>
           </a:p>
@@ -12494,30 +12455,23 @@
         </p:nvSpPr>
         <p:spPr>
           <a:xfrm>
-            <a:off x="6519672" y="2258568"/>
-            <a:ext cx="1828800" cy="292608"/>
+            <a:off x="365760" y="3273552"/>
+            <a:ext cx="1371600" cy="658368"/>
           </a:xfrm>
           <a:prstGeom prst="rect">
             <a:avLst>
-              <a:gd name="adj" fmla="val 25000"/>
+              <a:gd name="adj" fmla="val 8333"/>
             </a:avLst>
           </a:prstGeom>
           <a:solidFill>
-            <a:srgbClr val="FCE7F3"/>
-          </a:solidFill>
-          <a:ln w="19050">
-            <a:solidFill>
-              <a:srgbClr val="DB2777"/>
-            </a:solidFill>
-            <a:prstDash val="solid"/>
-          </a:ln>
-          <a:effectLst>
-            <a:outerShdw sx="100000" sy="100000" kx="0" ky="0" algn="bl" rotWithShape="0" blurRad="101600" dist="38100" dir="8100000">
-              <a:srgbClr val="000000">
-                <a:alpha val="12000"/>
-              </a:srgbClr>
-            </a:outerShdw>
-          </a:effectLst>
+            <a:srgbClr val="E2E8F0"/>
+          </a:solidFill>
+          <a:ln w="12700">
+            <a:solidFill>
+              <a:srgbClr val="E2E8F0"/>
+            </a:solidFill>
+            <a:prstDash val="solid"/>
+          </a:ln>
         </p:spPr>
       </p:sp>
       <p:sp>
@@ -12528,8 +12482,8 @@
         </p:nvSpPr>
         <p:spPr>
           <a:xfrm>
-            <a:off x="6519672" y="2258568"/>
-            <a:ext cx="1828800" cy="292608"/>
+            <a:off x="365760" y="3273552"/>
+            <a:ext cx="1371600" cy="658368"/>
           </a:xfrm>
           <a:prstGeom prst="rect">
             <a:avLst/>
@@ -12545,73 +12499,100 @@
               <a:buNone/>
             </a:pPr>
             <a:r>
-              <a:rPr lang="en-US" sz="1300" b="1" dirty="0">
-                <a:solidFill>
-                  <a:srgbClr val="9D174D"/>
+              <a:rPr lang="en-US" sz="1100" b="1" dirty="0">
+                <a:solidFill>
+                  <a:srgbClr val="475569"/>
                 </a:solidFill>
                 <a:latin typeface="Trebuchet MS" pitchFamily="34" charset="0"/>
                 <a:ea typeface="Trebuchet MS" pitchFamily="34" charset="-122"/>
                 <a:cs typeface="Trebuchet MS" pitchFamily="34" charset="-120"/>
               </a:rPr>
-              <a:t>ed</a:t>
-            </a:r>
-            <a:endParaRPr lang="en-US" sz="1300" dirty="0"/>
-          </a:p>
-        </p:txBody>
-      </p:sp>
-      <p:sp>
-        <p:nvSpPr>
-          <p:cNvPr id="24" name="Text 22"/>
-          <p:cNvSpPr/>
-          <p:nvPr/>
-        </p:nvSpPr>
-        <p:spPr>
-          <a:xfrm>
-            <a:off x="6519672" y="2569464"/>
-            <a:ext cx="1828800" cy="201168"/>
-          </a:xfrm>
-          <a:prstGeom prst="rect">
-            <a:avLst/>
-          </a:prstGeom>
-          <a:noFill/>
-          <a:ln/>
-        </p:spPr>
-        <p:txBody>
-          <a:bodyPr wrap="square" lIns="0" tIns="0" rIns="0" bIns="0" rtlCol="0" anchor="t"/>
-          <a:lstStyle/>
-          <a:p>
-            <a:pPr algn="ctr" indent="0" marL="0">
-              <a:buNone/>
-            </a:pPr>
-            <a:r>
-              <a:rPr lang="en-US" sz="850" dirty="0">
-                <a:solidFill>
-                  <a:srgbClr val="475569"/>
+              <a:t>Syllables</a:t>
+            </a:r>
+            <a:endParaRPr lang="en-US" sz="1100" dirty="0"/>
+          </a:p>
+        </p:txBody>
+      </p:sp>
+      <p:sp>
+        <p:nvSpPr>
+          <p:cNvPr id="24" name="Shape 22"/>
+          <p:cNvSpPr/>
+          <p:nvPr/>
+        </p:nvSpPr>
+        <p:spPr>
+          <a:xfrm>
+            <a:off x="1874520" y="3273552"/>
+            <a:ext cx="6903720" cy="658368"/>
+          </a:xfrm>
+          <a:prstGeom prst="rect">
+            <a:avLst>
+              <a:gd name="adj" fmla="val 8333"/>
+            </a:avLst>
+          </a:prstGeom>
+          <a:solidFill>
+            <a:srgbClr val="F8FAFC"/>
+          </a:solidFill>
+          <a:ln w="12700">
+            <a:solidFill>
+              <a:srgbClr val="E2E8F0"/>
+            </a:solidFill>
+            <a:prstDash val="dash"/>
+          </a:ln>
+        </p:spPr>
+      </p:sp>
+      <p:sp>
+        <p:nvSpPr>
+          <p:cNvPr id="25" name="Text 23"/>
+          <p:cNvSpPr/>
+          <p:nvPr/>
+        </p:nvSpPr>
+        <p:spPr>
+          <a:xfrm>
+            <a:off x="1874520" y="3273552"/>
+            <a:ext cx="6903720" cy="658368"/>
+          </a:xfrm>
+          <a:prstGeom prst="rect">
+            <a:avLst/>
+          </a:prstGeom>
+          <a:noFill/>
+          <a:ln/>
+        </p:spPr>
+        <p:txBody>
+          <a:bodyPr wrap="square" rtlCol="0" anchor="ctr"/>
+          <a:lstStyle/>
+          <a:p>
+            <a:pPr algn="ctr" indent="0" marL="0">
+              <a:buNone/>
+            </a:pPr>
+            <a:r>
+              <a:rPr lang="en-US" sz="1100" i="1" dirty="0">
+                <a:solidFill>
+                  <a:srgbClr val="CBD5E1"/>
                 </a:solidFill>
                 <a:latin typeface="Calibri" pitchFamily="34" charset="0"/>
                 <a:ea typeface="Calibri" pitchFamily="34" charset="-122"/>
                 <a:cs typeface="Calibri" pitchFamily="34" charset="-120"/>
               </a:rPr>
-              <a:t>past tense</a:t>
-            </a:r>
-            <a:endParaRPr lang="en-US" sz="850" dirty="0"/>
-          </a:p>
-        </p:txBody>
-      </p:sp>
-      <p:sp>
-        <p:nvSpPr>
-          <p:cNvPr id="25" name="Shape 23"/>
-          <p:cNvSpPr/>
-          <p:nvPr/>
-        </p:nvSpPr>
-        <p:spPr>
-          <a:xfrm>
-            <a:off x="365760" y="3273552"/>
-            <a:ext cx="1371600" cy="658368"/>
+              <a:t>Write here...</a:t>
+            </a:r>
+            <a:endParaRPr lang="en-US" sz="1100" dirty="0"/>
+          </a:p>
+        </p:txBody>
+      </p:sp>
+      <p:sp>
+        <p:nvSpPr>
+          <p:cNvPr id="26" name="Shape 24"/>
+          <p:cNvSpPr/>
+          <p:nvPr/>
+        </p:nvSpPr>
+        <p:spPr>
+          <a:xfrm>
+            <a:off x="365760" y="4096512"/>
+            <a:ext cx="1371600" cy="804672"/>
           </a:xfrm>
           <a:prstGeom prst="rect">
             <a:avLst>
-              <a:gd name="adj" fmla="val 8333"/>
+              <a:gd name="adj" fmla="val 6818"/>
             </a:avLst>
           </a:prstGeom>
           <a:solidFill>
@@ -12627,14 +12608,14 @@
       </p:sp>
       <p:sp>
         <p:nvSpPr>
-          <p:cNvPr id="26" name="Text 24"/>
-          <p:cNvSpPr/>
-          <p:nvPr/>
-        </p:nvSpPr>
-        <p:spPr>
-          <a:xfrm>
-            <a:off x="365760" y="3273552"/>
-            <a:ext cx="1371600" cy="658368"/>
+          <p:cNvPr id="27" name="Text 25"/>
+          <p:cNvSpPr/>
+          <p:nvPr/>
+        </p:nvSpPr>
+        <p:spPr>
+          <a:xfrm>
+            <a:off x="365760" y="4096512"/>
+            <a:ext cx="1371600" cy="804672"/>
           </a:xfrm>
           <a:prstGeom prst="rect">
             <a:avLst/>
@@ -12658,7 +12639,7 @@
                 <a:ea typeface="Trebuchet MS" pitchFamily="34" charset="-122"/>
                 <a:cs typeface="Trebuchet MS" pitchFamily="34" charset="-120"/>
               </a:rPr>
-              <a:t>Syllables</a:t>
+              <a:t>Phonemes</a:t>
             </a:r>
             <a:endParaRPr lang="en-US" sz="1100" dirty="0"/>
           </a:p>
@@ -12666,80 +12647,14 @@
       </p:sp>
       <p:sp>
         <p:nvSpPr>
-          <p:cNvPr id="27" name="Shape 25"/>
-          <p:cNvSpPr/>
-          <p:nvPr/>
-        </p:nvSpPr>
-        <p:spPr>
-          <a:xfrm>
-            <a:off x="1874520" y="3273552"/>
-            <a:ext cx="6903720" cy="658368"/>
-          </a:xfrm>
-          <a:prstGeom prst="rect">
-            <a:avLst>
-              <a:gd name="adj" fmla="val 8333"/>
-            </a:avLst>
-          </a:prstGeom>
-          <a:solidFill>
-            <a:srgbClr val="F8FAFC"/>
-          </a:solidFill>
-          <a:ln w="12700">
-            <a:solidFill>
-              <a:srgbClr val="E2E8F0"/>
-            </a:solidFill>
-            <a:prstDash val="dash"/>
-          </a:ln>
-        </p:spPr>
-      </p:sp>
-      <p:sp>
-        <p:nvSpPr>
-          <p:cNvPr id="28" name="Text 26"/>
-          <p:cNvSpPr/>
-          <p:nvPr/>
-        </p:nvSpPr>
-        <p:spPr>
-          <a:xfrm>
-            <a:off x="1874520" y="3273552"/>
-            <a:ext cx="6903720" cy="658368"/>
-          </a:xfrm>
-          <a:prstGeom prst="rect">
-            <a:avLst/>
-          </a:prstGeom>
-          <a:noFill/>
-          <a:ln/>
-        </p:spPr>
-        <p:txBody>
-          <a:bodyPr wrap="square" rtlCol="0" anchor="ctr"/>
-          <a:lstStyle/>
-          <a:p>
-            <a:pPr algn="ctr" indent="0" marL="0">
-              <a:buNone/>
-            </a:pPr>
-            <a:r>
-              <a:rPr lang="en-US" sz="1100" i="1" dirty="0">
-                <a:solidFill>
-                  <a:srgbClr val="CBD5E1"/>
-                </a:solidFill>
-                <a:latin typeface="Calibri" pitchFamily="34" charset="0"/>
-                <a:ea typeface="Calibri" pitchFamily="34" charset="-122"/>
-                <a:cs typeface="Calibri" pitchFamily="34" charset="-120"/>
-              </a:rPr>
-              <a:t>Write here...</a:t>
-            </a:r>
-            <a:endParaRPr lang="en-US" sz="1100" dirty="0"/>
-          </a:p>
-        </p:txBody>
-      </p:sp>
-      <p:sp>
-        <p:nvSpPr>
-          <p:cNvPr id="29" name="Shape 27"/>
-          <p:cNvSpPr/>
-          <p:nvPr/>
-        </p:nvSpPr>
-        <p:spPr>
-          <a:xfrm>
-            <a:off x="365760" y="4096512"/>
-            <a:ext cx="1371600" cy="804672"/>
+          <p:cNvPr id="28" name="Shape 26"/>
+          <p:cNvSpPr/>
+          <p:nvPr/>
+        </p:nvSpPr>
+        <p:spPr>
+          <a:xfrm>
+            <a:off x="1874520" y="4096512"/>
+            <a:ext cx="6903720" cy="804672"/>
           </a:xfrm>
           <a:prstGeom prst="rect">
             <a:avLst>
@@ -12747,85 +12662,19 @@
             </a:avLst>
           </a:prstGeom>
           <a:solidFill>
-            <a:srgbClr val="E2E8F0"/>
+            <a:srgbClr val="F8FAFC"/>
           </a:solidFill>
           <a:ln w="12700">
             <a:solidFill>
               <a:srgbClr val="E2E8F0"/>
             </a:solidFill>
-            <a:prstDash val="solid"/>
-          </a:ln>
-        </p:spPr>
-      </p:sp>
-      <p:sp>
-        <p:nvSpPr>
-          <p:cNvPr id="30" name="Text 28"/>
-          <p:cNvSpPr/>
-          <p:nvPr/>
-        </p:nvSpPr>
-        <p:spPr>
-          <a:xfrm>
-            <a:off x="365760" y="4096512"/>
-            <a:ext cx="1371600" cy="804672"/>
-          </a:xfrm>
-          <a:prstGeom prst="rect">
-            <a:avLst/>
-          </a:prstGeom>
-          <a:noFill/>
-          <a:ln/>
-        </p:spPr>
-        <p:txBody>
-          <a:bodyPr wrap="square" lIns="0" tIns="0" rIns="0" bIns="0" rtlCol="0" anchor="ctr"/>
-          <a:lstStyle/>
-          <a:p>
-            <a:pPr algn="ctr" indent="0" marL="0">
-              <a:buNone/>
-            </a:pPr>
-            <a:r>
-              <a:rPr lang="en-US" sz="1100" b="1" dirty="0">
-                <a:solidFill>
-                  <a:srgbClr val="475569"/>
-                </a:solidFill>
-                <a:latin typeface="Trebuchet MS" pitchFamily="34" charset="0"/>
-                <a:ea typeface="Trebuchet MS" pitchFamily="34" charset="-122"/>
-                <a:cs typeface="Trebuchet MS" pitchFamily="34" charset="-120"/>
-              </a:rPr>
-              <a:t>Phonemes</a:t>
-            </a:r>
-            <a:endParaRPr lang="en-US" sz="1100" dirty="0"/>
-          </a:p>
-        </p:txBody>
-      </p:sp>
-      <p:sp>
-        <p:nvSpPr>
-          <p:cNvPr id="31" name="Shape 29"/>
-          <p:cNvSpPr/>
-          <p:nvPr/>
-        </p:nvSpPr>
-        <p:spPr>
-          <a:xfrm>
-            <a:off x="1874520" y="4096512"/>
-            <a:ext cx="6903720" cy="804672"/>
-          </a:xfrm>
-          <a:prstGeom prst="rect">
-            <a:avLst>
-              <a:gd name="adj" fmla="val 6818"/>
-            </a:avLst>
-          </a:prstGeom>
-          <a:solidFill>
-            <a:srgbClr val="F8FAFC"/>
-          </a:solidFill>
-          <a:ln w="12700">
-            <a:solidFill>
-              <a:srgbClr val="E2E8F0"/>
-            </a:solidFill>
             <a:prstDash val="dash"/>
           </a:ln>
         </p:spPr>
       </p:sp>
       <p:sp>
         <p:nvSpPr>
-          <p:cNvPr id="32" name="Text 30"/>
+          <p:cNvPr id="29" name="Text 27"/>
           <p:cNvSpPr/>
           <p:nvPr/>
         </p:nvSpPr>
@@ -13287,7 +13136,7 @@
                 <a:ea typeface="Trebuchet MS" pitchFamily="34" charset="-122"/>
                 <a:cs typeface="Trebuchet MS" pitchFamily="34" charset="-120"/>
               </a:rPr>
-              <a:t>misspelled</a:t>
+              <a:t>spelling</a:t>
             </a:r>
             <a:endParaRPr lang="en-US" sz="2800" dirty="0"/>
           </a:p>
@@ -13367,7 +13216,7 @@
         </p:nvSpPr>
         <p:spPr>
           <a:xfrm>
-            <a:off x="2221992" y="2258568"/>
+            <a:off x="2938272" y="2258568"/>
             <a:ext cx="1828800" cy="292608"/>
           </a:xfrm>
           <a:prstGeom prst="rect">
@@ -13376,11 +13225,11 @@
             </a:avLst>
           </a:prstGeom>
           <a:solidFill>
-            <a:srgbClr val="DDD6FE"/>
+            <a:srgbClr val="CCFBF1"/>
           </a:solidFill>
           <a:ln w="19050">
             <a:solidFill>
-              <a:srgbClr val="7C3AED"/>
+              <a:srgbClr val="0D9488"/>
             </a:solidFill>
             <a:prstDash val="solid"/>
           </a:ln>
@@ -13401,7 +13250,7 @@
         </p:nvSpPr>
         <p:spPr>
           <a:xfrm>
-            <a:off x="2221992" y="2258568"/>
+            <a:off x="2938272" y="2258568"/>
             <a:ext cx="1828800" cy="292608"/>
           </a:xfrm>
           <a:prstGeom prst="rect">
@@ -13420,13 +13269,13 @@
             <a:r>
               <a:rPr lang="en-US" sz="1300" b="1" dirty="0">
                 <a:solidFill>
-                  <a:srgbClr val="4C1D95"/>
+                  <a:srgbClr val="0F766E"/>
                 </a:solidFill>
                 <a:latin typeface="Trebuchet MS" pitchFamily="34" charset="0"/>
                 <a:ea typeface="Trebuchet MS" pitchFamily="34" charset="-122"/>
                 <a:cs typeface="Trebuchet MS" pitchFamily="34" charset="-120"/>
               </a:rPr>
-              <a:t>mis</a:t>
+              <a:t>spell</a:t>
             </a:r>
             <a:endParaRPr lang="en-US" sz="1300" dirty="0"/>
           </a:p>
@@ -13440,7 +13289,7 @@
         </p:nvSpPr>
         <p:spPr>
           <a:xfrm>
-            <a:off x="2221992" y="2569464"/>
+            <a:off x="2938272" y="2569464"/>
             <a:ext cx="1828800" cy="201168"/>
           </a:xfrm>
           <a:prstGeom prst="rect">
@@ -13465,7 +13314,7 @@
                 <a:ea typeface="Calibri" pitchFamily="34" charset="-122"/>
                 <a:cs typeface="Calibri" pitchFamily="34" charset="-120"/>
               </a:rPr>
-              <a:t>wrongly or badly</a:t>
+              <a:t>to name letters in order</a:t>
             </a:r>
             <a:endParaRPr lang="en-US" sz="850" dirty="0"/>
           </a:p>
@@ -13479,7 +13328,7 @@
         </p:nvSpPr>
         <p:spPr>
           <a:xfrm>
-            <a:off x="4370832" y="2258568"/>
+            <a:off x="5803392" y="2258568"/>
             <a:ext cx="1828800" cy="292608"/>
           </a:xfrm>
           <a:prstGeom prst="rect">
@@ -13488,11 +13337,11 @@
             </a:avLst>
           </a:prstGeom>
           <a:solidFill>
-            <a:srgbClr val="CCFBF1"/>
+            <a:srgbClr val="FCE7F3"/>
           </a:solidFill>
           <a:ln w="19050">
             <a:solidFill>
-              <a:srgbClr val="0D9488"/>
+              <a:srgbClr val="DB2777"/>
             </a:solidFill>
             <a:prstDash val="solid"/>
           </a:ln>
@@ -13513,7 +13362,7 @@
         </p:nvSpPr>
         <p:spPr>
           <a:xfrm>
-            <a:off x="4370832" y="2258568"/>
+            <a:off x="5803392" y="2258568"/>
             <a:ext cx="1828800" cy="292608"/>
           </a:xfrm>
           <a:prstGeom prst="rect">
@@ -13532,13 +13381,13 @@
             <a:r>
               <a:rPr lang="en-US" sz="1300" b="1" dirty="0">
                 <a:solidFill>
-                  <a:srgbClr val="0F766E"/>
+                  <a:srgbClr val="9D174D"/>
                 </a:solidFill>
                 <a:latin typeface="Trebuchet MS" pitchFamily="34" charset="0"/>
                 <a:ea typeface="Trebuchet MS" pitchFamily="34" charset="-122"/>
                 <a:cs typeface="Trebuchet MS" pitchFamily="34" charset="-120"/>
               </a:rPr>
-              <a:t>spell</a:t>
+              <a:t>ing</a:t>
             </a:r>
             <a:endParaRPr lang="en-US" sz="1300" dirty="0"/>
           </a:p>
@@ -13552,7 +13401,7 @@
         </p:nvSpPr>
         <p:spPr>
           <a:xfrm>
-            <a:off x="4370832" y="2569464"/>
+            <a:off x="5803392" y="2569464"/>
             <a:ext cx="1828800" cy="201168"/>
           </a:xfrm>
           <a:prstGeom prst="rect">
@@ -13577,7 +13426,7 @@
                 <a:ea typeface="Calibri" pitchFamily="34" charset="-122"/>
                 <a:cs typeface="Calibri" pitchFamily="34" charset="-120"/>
               </a:rPr>
-              <a:t>to name letters in order</a:t>
+              <a:t>action in progress</a:t>
             </a:r>
             <a:endParaRPr lang="en-US" sz="850" dirty="0"/>
           </a:p>
@@ -13591,30 +13440,23 @@
         </p:nvSpPr>
         <p:spPr>
           <a:xfrm>
-            <a:off x="6519672" y="2258568"/>
-            <a:ext cx="1828800" cy="292608"/>
+            <a:off x="365760" y="3273552"/>
+            <a:ext cx="1371600" cy="658368"/>
           </a:xfrm>
           <a:prstGeom prst="rect">
             <a:avLst>
-              <a:gd name="adj" fmla="val 25000"/>
+              <a:gd name="adj" fmla="val 8333"/>
             </a:avLst>
           </a:prstGeom>
           <a:solidFill>
-            <a:srgbClr val="FCE7F3"/>
-          </a:solidFill>
-          <a:ln w="19050">
-            <a:solidFill>
-              <a:srgbClr val="DB2777"/>
-            </a:solidFill>
-            <a:prstDash val="solid"/>
-          </a:ln>
-          <a:effectLst>
-            <a:outerShdw sx="100000" sy="100000" kx="0" ky="0" algn="bl" rotWithShape="0" blurRad="101600" dist="38100" dir="8100000">
-              <a:srgbClr val="000000">
-                <a:alpha val="12000"/>
-              </a:srgbClr>
-            </a:outerShdw>
-          </a:effectLst>
+            <a:srgbClr val="E2E8F0"/>
+          </a:solidFill>
+          <a:ln w="12700">
+            <a:solidFill>
+              <a:srgbClr val="E2E8F0"/>
+            </a:solidFill>
+            <a:prstDash val="solid"/>
+          </a:ln>
         </p:spPr>
       </p:sp>
       <p:sp>
@@ -13625,8 +13467,8 @@
         </p:nvSpPr>
         <p:spPr>
           <a:xfrm>
-            <a:off x="6519672" y="2258568"/>
-            <a:ext cx="1828800" cy="292608"/>
+            <a:off x="365760" y="3273552"/>
+            <a:ext cx="1371600" cy="658368"/>
           </a:xfrm>
           <a:prstGeom prst="rect">
             <a:avLst/>
@@ -13642,69 +13484,30 @@
               <a:buNone/>
             </a:pPr>
             <a:r>
-              <a:rPr lang="en-US" sz="1300" b="1" dirty="0">
-                <a:solidFill>
-                  <a:srgbClr val="9D174D"/>
+              <a:rPr lang="en-US" sz="1100" b="1" dirty="0">
+                <a:solidFill>
+                  <a:srgbClr val="475569"/>
                 </a:solidFill>
                 <a:latin typeface="Trebuchet MS" pitchFamily="34" charset="0"/>
                 <a:ea typeface="Trebuchet MS" pitchFamily="34" charset="-122"/>
                 <a:cs typeface="Trebuchet MS" pitchFamily="34" charset="-120"/>
               </a:rPr>
-              <a:t>ed</a:t>
-            </a:r>
-            <a:endParaRPr lang="en-US" sz="1300" dirty="0"/>
-          </a:p>
-        </p:txBody>
-      </p:sp>
-      <p:sp>
-        <p:nvSpPr>
-          <p:cNvPr id="24" name="Text 22"/>
-          <p:cNvSpPr/>
-          <p:nvPr/>
-        </p:nvSpPr>
-        <p:spPr>
-          <a:xfrm>
-            <a:off x="6519672" y="2569464"/>
-            <a:ext cx="1828800" cy="201168"/>
-          </a:xfrm>
-          <a:prstGeom prst="rect">
-            <a:avLst/>
-          </a:prstGeom>
-          <a:noFill/>
-          <a:ln/>
-        </p:spPr>
-        <p:txBody>
-          <a:bodyPr wrap="square" lIns="0" tIns="0" rIns="0" bIns="0" rtlCol="0" anchor="t"/>
-          <a:lstStyle/>
-          <a:p>
-            <a:pPr algn="ctr" indent="0" marL="0">
-              <a:buNone/>
-            </a:pPr>
-            <a:r>
-              <a:rPr lang="en-US" sz="850" dirty="0">
-                <a:solidFill>
-                  <a:srgbClr val="475569"/>
-                </a:solidFill>
-                <a:latin typeface="Calibri" pitchFamily="34" charset="0"/>
-                <a:ea typeface="Calibri" pitchFamily="34" charset="-122"/>
-                <a:cs typeface="Calibri" pitchFamily="34" charset="-120"/>
-              </a:rPr>
-              <a:t>past tense</a:t>
-            </a:r>
-            <a:endParaRPr lang="en-US" sz="850" dirty="0"/>
-          </a:p>
-        </p:txBody>
-      </p:sp>
-      <p:sp>
-        <p:nvSpPr>
-          <p:cNvPr id="25" name="Shape 23"/>
-          <p:cNvSpPr/>
-          <p:nvPr/>
-        </p:nvSpPr>
-        <p:spPr>
-          <a:xfrm>
-            <a:off x="365760" y="3273552"/>
-            <a:ext cx="1371600" cy="658368"/>
+              <a:t>Syllables</a:t>
+            </a:r>
+            <a:endParaRPr lang="en-US" sz="1100" dirty="0"/>
+          </a:p>
+        </p:txBody>
+      </p:sp>
+      <p:sp>
+        <p:nvSpPr>
+          <p:cNvPr id="24" name="Shape 22"/>
+          <p:cNvSpPr/>
+          <p:nvPr/>
+        </p:nvSpPr>
+        <p:spPr>
+          <a:xfrm>
+            <a:off x="1874520" y="3273552"/>
+            <a:ext cx="6903720" cy="658368"/>
           </a:xfrm>
           <a:prstGeom prst="rect">
             <a:avLst>
@@ -13712,11 +13515,38 @@
             </a:avLst>
           </a:prstGeom>
           <a:solidFill>
-            <a:srgbClr val="E2E8F0"/>
-          </a:solidFill>
-          <a:ln w="12700">
-            <a:solidFill>
-              <a:srgbClr val="E2E8F0"/>
+            <a:srgbClr val="CCFBF1"/>
+          </a:solidFill>
+          <a:ln w="12700">
+            <a:solidFill>
+              <a:srgbClr val="0D9488"/>
+            </a:solidFill>
+            <a:prstDash val="solid"/>
+          </a:ln>
+        </p:spPr>
+      </p:sp>
+      <p:sp>
+        <p:nvSpPr>
+          <p:cNvPr id="25" name="Shape 23"/>
+          <p:cNvSpPr/>
+          <p:nvPr/>
+        </p:nvSpPr>
+        <p:spPr>
+          <a:xfrm>
+            <a:off x="2999232" y="3364992"/>
+            <a:ext cx="1645920" cy="475488"/>
+          </a:xfrm>
+          <a:prstGeom prst="rect">
+            <a:avLst>
+              <a:gd name="adj" fmla="val 9615"/>
+            </a:avLst>
+          </a:prstGeom>
+          <a:solidFill>
+            <a:srgbClr val="FFFFFF"/>
+          </a:solidFill>
+          <a:ln w="12700">
+            <a:solidFill>
+              <a:srgbClr val="0D9488"/>
             </a:solidFill>
             <a:prstDash val="solid"/>
           </a:ln>
@@ -13730,8 +13560,8 @@
         </p:nvSpPr>
         <p:spPr>
           <a:xfrm>
-            <a:off x="365760" y="3273552"/>
-            <a:ext cx="1371600" cy="658368"/>
+            <a:off x="2999232" y="3364992"/>
+            <a:ext cx="1645920" cy="475488"/>
           </a:xfrm>
           <a:prstGeom prst="rect">
             <a:avLst/>
@@ -13747,46 +13577,58 @@
               <a:buNone/>
             </a:pPr>
             <a:r>
-              <a:rPr lang="en-US" sz="1100" b="1" dirty="0">
-                <a:solidFill>
-                  <a:srgbClr val="475569"/>
+              <a:rPr lang="en-US" sz="1400" b="1" dirty="0">
+                <a:solidFill>
+                  <a:srgbClr val="0D9488"/>
                 </a:solidFill>
                 <a:latin typeface="Trebuchet MS" pitchFamily="34" charset="0"/>
                 <a:ea typeface="Trebuchet MS" pitchFamily="34" charset="-122"/>
                 <a:cs typeface="Trebuchet MS" pitchFamily="34" charset="-120"/>
               </a:rPr>
-              <a:t>Syllables</a:t>
-            </a:r>
-            <a:endParaRPr lang="en-US" sz="1100" dirty="0"/>
-          </a:p>
-        </p:txBody>
-      </p:sp>
-      <p:sp>
-        <p:nvSpPr>
-          <p:cNvPr id="27" name="Shape 25"/>
-          <p:cNvSpPr/>
-          <p:nvPr/>
-        </p:nvSpPr>
-        <p:spPr>
-          <a:xfrm>
-            <a:off x="1874520" y="3273552"/>
-            <a:ext cx="6903720" cy="658368"/>
-          </a:xfrm>
-          <a:prstGeom prst="rect">
-            <a:avLst>
-              <a:gd name="adj" fmla="val 8333"/>
-            </a:avLst>
-          </a:prstGeom>
-          <a:solidFill>
-            <a:srgbClr val="CCFBF1"/>
-          </a:solidFill>
-          <a:ln w="12700">
-            <a:solidFill>
-              <a:srgbClr val="0D9488"/>
-            </a:solidFill>
-            <a:prstDash val="solid"/>
-          </a:ln>
-        </p:spPr>
+              <a:t>spell</a:t>
+            </a:r>
+            <a:endParaRPr lang="en-US" sz="1400" dirty="0"/>
+          </a:p>
+        </p:txBody>
+      </p:sp>
+      <p:sp>
+        <p:nvSpPr>
+          <p:cNvPr id="27" name="Text 25"/>
+          <p:cNvSpPr/>
+          <p:nvPr/>
+        </p:nvSpPr>
+        <p:spPr>
+          <a:xfrm>
+            <a:off x="4645152" y="3364992"/>
+            <a:ext cx="1097280" cy="475488"/>
+          </a:xfrm>
+          <a:prstGeom prst="rect">
+            <a:avLst/>
+          </a:prstGeom>
+          <a:noFill/>
+          <a:ln/>
+        </p:spPr>
+        <p:txBody>
+          <a:bodyPr wrap="square" lIns="0" tIns="0" rIns="0" bIns="0" rtlCol="0" anchor="ctr"/>
+          <a:lstStyle/>
+          <a:p>
+            <a:pPr algn="ctr" indent="0" marL="0">
+              <a:buNone/>
+            </a:pPr>
+            <a:r>
+              <a:rPr lang="en-US" sz="1600" b="1" dirty="0">
+                <a:solidFill>
+                  <a:srgbClr val="0D9488"/>
+                </a:solidFill>
+                <a:latin typeface="Trebuchet MS" pitchFamily="34" charset="0"/>
+                <a:ea typeface="Trebuchet MS" pitchFamily="34" charset="-122"/>
+                <a:cs typeface="Trebuchet MS" pitchFamily="34" charset="-120"/>
+              </a:rPr>
+              <a:t>·</a:t>
+            </a:r>
+            <a:endParaRPr lang="en-US" sz="1600" dirty="0"/>
+          </a:p>
+        </p:txBody>
       </p:sp>
       <p:sp>
         <p:nvSpPr>
@@ -13796,7 +13638,7 @@
         </p:nvSpPr>
         <p:spPr>
           <a:xfrm>
-            <a:off x="2999232" y="3364992"/>
+            <a:off x="5742432" y="3364992"/>
             <a:ext cx="1645920" cy="475488"/>
           </a:xfrm>
           <a:prstGeom prst="rect">
@@ -13823,7 +13665,7 @@
         </p:nvSpPr>
         <p:spPr>
           <a:xfrm>
-            <a:off x="2999232" y="3364992"/>
+            <a:off x="5742432" y="3364992"/>
             <a:ext cx="1645920" cy="475488"/>
           </a:xfrm>
           <a:prstGeom prst="rect">
@@ -13848,7 +13690,7 @@
                 <a:ea typeface="Trebuchet MS" pitchFamily="34" charset="-122"/>
                 <a:cs typeface="Trebuchet MS" pitchFamily="34" charset="-120"/>
               </a:rPr>
-              <a:t>mis</a:t>
+              <a:t>ing</a:t>
             </a:r>
             <a:endParaRPr lang="en-US" sz="1400" dirty="0"/>
           </a:p>
@@ -13856,14 +13698,41 @@
       </p:sp>
       <p:sp>
         <p:nvSpPr>
-          <p:cNvPr id="30" name="Text 28"/>
-          <p:cNvSpPr/>
-          <p:nvPr/>
-        </p:nvSpPr>
-        <p:spPr>
-          <a:xfrm>
-            <a:off x="4645152" y="3364992"/>
-            <a:ext cx="1097280" cy="475488"/>
+          <p:cNvPr id="30" name="Shape 28"/>
+          <p:cNvSpPr/>
+          <p:nvPr/>
+        </p:nvSpPr>
+        <p:spPr>
+          <a:xfrm>
+            <a:off x="365760" y="4096512"/>
+            <a:ext cx="1371600" cy="804672"/>
+          </a:xfrm>
+          <a:prstGeom prst="rect">
+            <a:avLst>
+              <a:gd name="adj" fmla="val 6818"/>
+            </a:avLst>
+          </a:prstGeom>
+          <a:solidFill>
+            <a:srgbClr val="E2E8F0"/>
+          </a:solidFill>
+          <a:ln w="12700">
+            <a:solidFill>
+              <a:srgbClr val="E2E8F0"/>
+            </a:solidFill>
+            <a:prstDash val="solid"/>
+          </a:ln>
+        </p:spPr>
+      </p:sp>
+      <p:sp>
+        <p:nvSpPr>
+          <p:cNvPr id="31" name="Text 29"/>
+          <p:cNvSpPr/>
+          <p:nvPr/>
+        </p:nvSpPr>
+        <p:spPr>
+          <a:xfrm>
+            <a:off x="365760" y="4096512"/>
+            <a:ext cx="1371600" cy="804672"/>
           </a:xfrm>
           <a:prstGeom prst="rect">
             <a:avLst/>
@@ -13879,96 +13748,30 @@
               <a:buNone/>
             </a:pPr>
             <a:r>
-              <a:rPr lang="en-US" sz="1600" b="1" dirty="0">
-                <a:solidFill>
-                  <a:srgbClr val="0D9488"/>
+              <a:rPr lang="en-US" sz="1100" b="1" dirty="0">
+                <a:solidFill>
+                  <a:srgbClr val="475569"/>
                 </a:solidFill>
                 <a:latin typeface="Trebuchet MS" pitchFamily="34" charset="0"/>
                 <a:ea typeface="Trebuchet MS" pitchFamily="34" charset="-122"/>
                 <a:cs typeface="Trebuchet MS" pitchFamily="34" charset="-120"/>
               </a:rPr>
-              <a:t>·</a:t>
-            </a:r>
-            <a:endParaRPr lang="en-US" sz="1600" dirty="0"/>
-          </a:p>
-        </p:txBody>
-      </p:sp>
-      <p:sp>
-        <p:nvSpPr>
-          <p:cNvPr id="31" name="Shape 29"/>
-          <p:cNvSpPr/>
-          <p:nvPr/>
-        </p:nvSpPr>
-        <p:spPr>
-          <a:xfrm>
-            <a:off x="5742432" y="3364992"/>
-            <a:ext cx="1645920" cy="475488"/>
-          </a:xfrm>
-          <a:prstGeom prst="rect">
-            <a:avLst>
-              <a:gd name="adj" fmla="val 9615"/>
-            </a:avLst>
-          </a:prstGeom>
-          <a:solidFill>
-            <a:srgbClr val="FFFFFF"/>
-          </a:solidFill>
-          <a:ln w="12700">
-            <a:solidFill>
-              <a:srgbClr val="0D9488"/>
-            </a:solidFill>
-            <a:prstDash val="solid"/>
-          </a:ln>
-        </p:spPr>
-      </p:sp>
-      <p:sp>
-        <p:nvSpPr>
-          <p:cNvPr id="32" name="Text 30"/>
-          <p:cNvSpPr/>
-          <p:nvPr/>
-        </p:nvSpPr>
-        <p:spPr>
-          <a:xfrm>
-            <a:off x="5742432" y="3364992"/>
-            <a:ext cx="1645920" cy="475488"/>
-          </a:xfrm>
-          <a:prstGeom prst="rect">
-            <a:avLst/>
-          </a:prstGeom>
-          <a:noFill/>
-          <a:ln/>
-        </p:spPr>
-        <p:txBody>
-          <a:bodyPr wrap="square" lIns="0" tIns="0" rIns="0" bIns="0" rtlCol="0" anchor="ctr"/>
-          <a:lstStyle/>
-          <a:p>
-            <a:pPr algn="ctr" indent="0" marL="0">
-              <a:buNone/>
-            </a:pPr>
-            <a:r>
-              <a:rPr lang="en-US" sz="1400" b="1" dirty="0">
-                <a:solidFill>
-                  <a:srgbClr val="0D9488"/>
-                </a:solidFill>
-                <a:latin typeface="Trebuchet MS" pitchFamily="34" charset="0"/>
-                <a:ea typeface="Trebuchet MS" pitchFamily="34" charset="-122"/>
-                <a:cs typeface="Trebuchet MS" pitchFamily="34" charset="-120"/>
-              </a:rPr>
-              <a:t>spelled</a:t>
-            </a:r>
-            <a:endParaRPr lang="en-US" sz="1400" dirty="0"/>
-          </a:p>
-        </p:txBody>
-      </p:sp>
-      <p:sp>
-        <p:nvSpPr>
-          <p:cNvPr id="33" name="Shape 31"/>
-          <p:cNvSpPr/>
-          <p:nvPr/>
-        </p:nvSpPr>
-        <p:spPr>
-          <a:xfrm>
-            <a:off x="365760" y="4096512"/>
-            <a:ext cx="1371600" cy="804672"/>
+              <a:t>Phonemes</a:t>
+            </a:r>
+            <a:endParaRPr lang="en-US" sz="1100" dirty="0"/>
+          </a:p>
+        </p:txBody>
+      </p:sp>
+      <p:sp>
+        <p:nvSpPr>
+          <p:cNvPr id="32" name="Shape 30"/>
+          <p:cNvSpPr/>
+          <p:nvPr/>
+        </p:nvSpPr>
+        <p:spPr>
+          <a:xfrm>
+            <a:off x="1874520" y="4096512"/>
+            <a:ext cx="6903720" cy="804672"/>
           </a:xfrm>
           <a:prstGeom prst="rect">
             <a:avLst>
@@ -13976,85 +13779,19 @@
             </a:avLst>
           </a:prstGeom>
           <a:solidFill>
-            <a:srgbClr val="E2E8F0"/>
+            <a:srgbClr val="F8FAFC"/>
           </a:solidFill>
           <a:ln w="12700">
             <a:solidFill>
               <a:srgbClr val="E2E8F0"/>
             </a:solidFill>
-            <a:prstDash val="solid"/>
-          </a:ln>
-        </p:spPr>
-      </p:sp>
-      <p:sp>
-        <p:nvSpPr>
-          <p:cNvPr id="34" name="Text 32"/>
-          <p:cNvSpPr/>
-          <p:nvPr/>
-        </p:nvSpPr>
-        <p:spPr>
-          <a:xfrm>
-            <a:off x="365760" y="4096512"/>
-            <a:ext cx="1371600" cy="804672"/>
-          </a:xfrm>
-          <a:prstGeom prst="rect">
-            <a:avLst/>
-          </a:prstGeom>
-          <a:noFill/>
-          <a:ln/>
-        </p:spPr>
-        <p:txBody>
-          <a:bodyPr wrap="square" lIns="0" tIns="0" rIns="0" bIns="0" rtlCol="0" anchor="ctr"/>
-          <a:lstStyle/>
-          <a:p>
-            <a:pPr algn="ctr" indent="0" marL="0">
-              <a:buNone/>
-            </a:pPr>
-            <a:r>
-              <a:rPr lang="en-US" sz="1100" b="1" dirty="0">
-                <a:solidFill>
-                  <a:srgbClr val="475569"/>
-                </a:solidFill>
-                <a:latin typeface="Trebuchet MS" pitchFamily="34" charset="0"/>
-                <a:ea typeface="Trebuchet MS" pitchFamily="34" charset="-122"/>
-                <a:cs typeface="Trebuchet MS" pitchFamily="34" charset="-120"/>
-              </a:rPr>
-              <a:t>Phonemes</a:t>
-            </a:r>
-            <a:endParaRPr lang="en-US" sz="1100" dirty="0"/>
-          </a:p>
-        </p:txBody>
-      </p:sp>
-      <p:sp>
-        <p:nvSpPr>
-          <p:cNvPr id="35" name="Shape 33"/>
-          <p:cNvSpPr/>
-          <p:nvPr/>
-        </p:nvSpPr>
-        <p:spPr>
-          <a:xfrm>
-            <a:off x="1874520" y="4096512"/>
-            <a:ext cx="6903720" cy="804672"/>
-          </a:xfrm>
-          <a:prstGeom prst="rect">
-            <a:avLst>
-              <a:gd name="adj" fmla="val 6818"/>
-            </a:avLst>
-          </a:prstGeom>
-          <a:solidFill>
-            <a:srgbClr val="F8FAFC"/>
-          </a:solidFill>
-          <a:ln w="12700">
-            <a:solidFill>
-              <a:srgbClr val="E2E8F0"/>
-            </a:solidFill>
             <a:prstDash val="dash"/>
           </a:ln>
         </p:spPr>
       </p:sp>
       <p:sp>
         <p:nvSpPr>
-          <p:cNvPr id="36" name="Text 34"/>
+          <p:cNvPr id="33" name="Text 31"/>
           <p:cNvSpPr/>
           <p:nvPr/>
         </p:nvSpPr>
@@ -14781,7 +14518,7 @@
                 <a:ea typeface="Trebuchet MS" pitchFamily="34" charset="-122"/>
                 <a:cs typeface="Trebuchet MS" pitchFamily="34" charset="-120"/>
               </a:rPr>
-              <a:t>misspelled</a:t>
+              <a:t>spelling</a:t>
             </a:r>
             <a:endParaRPr lang="en-US" sz="2800" dirty="0"/>
           </a:p>
@@ -14861,7 +14598,7 @@
         </p:nvSpPr>
         <p:spPr>
           <a:xfrm>
-            <a:off x="2221992" y="2258568"/>
+            <a:off x="2938272" y="2258568"/>
             <a:ext cx="1828800" cy="292608"/>
           </a:xfrm>
           <a:prstGeom prst="rect">
@@ -14870,11 +14607,11 @@
             </a:avLst>
           </a:prstGeom>
           <a:solidFill>
-            <a:srgbClr val="DDD6FE"/>
+            <a:srgbClr val="CCFBF1"/>
           </a:solidFill>
           <a:ln w="19050">
             <a:solidFill>
-              <a:srgbClr val="7C3AED"/>
+              <a:srgbClr val="0D9488"/>
             </a:solidFill>
             <a:prstDash val="solid"/>
           </a:ln>
@@ -14895,7 +14632,7 @@
         </p:nvSpPr>
         <p:spPr>
           <a:xfrm>
-            <a:off x="2221992" y="2258568"/>
+            <a:off x="2938272" y="2258568"/>
             <a:ext cx="1828800" cy="292608"/>
           </a:xfrm>
           <a:prstGeom prst="rect">
@@ -14914,13 +14651,13 @@
             <a:r>
               <a:rPr lang="en-US" sz="1300" b="1" dirty="0">
                 <a:solidFill>
-                  <a:srgbClr val="4C1D95"/>
+                  <a:srgbClr val="0F766E"/>
                 </a:solidFill>
                 <a:latin typeface="Trebuchet MS" pitchFamily="34" charset="0"/>
                 <a:ea typeface="Trebuchet MS" pitchFamily="34" charset="-122"/>
                 <a:cs typeface="Trebuchet MS" pitchFamily="34" charset="-120"/>
               </a:rPr>
-              <a:t>mis</a:t>
+              <a:t>spell</a:t>
             </a:r>
             <a:endParaRPr lang="en-US" sz="1300" dirty="0"/>
           </a:p>
@@ -14934,7 +14671,7 @@
         </p:nvSpPr>
         <p:spPr>
           <a:xfrm>
-            <a:off x="2221992" y="2569464"/>
+            <a:off x="2938272" y="2569464"/>
             <a:ext cx="1828800" cy="201168"/>
           </a:xfrm>
           <a:prstGeom prst="rect">
@@ -14959,7 +14696,7 @@
                 <a:ea typeface="Calibri" pitchFamily="34" charset="-122"/>
                 <a:cs typeface="Calibri" pitchFamily="34" charset="-120"/>
               </a:rPr>
-              <a:t>wrongly or badly</a:t>
+              <a:t>to name letters in order</a:t>
             </a:r>
             <a:endParaRPr lang="en-US" sz="850" dirty="0"/>
           </a:p>
@@ -14973,7 +14710,7 @@
         </p:nvSpPr>
         <p:spPr>
           <a:xfrm>
-            <a:off x="4370832" y="2258568"/>
+            <a:off x="5803392" y="2258568"/>
             <a:ext cx="1828800" cy="292608"/>
           </a:xfrm>
           <a:prstGeom prst="rect">
@@ -14982,11 +14719,11 @@
             </a:avLst>
           </a:prstGeom>
           <a:solidFill>
-            <a:srgbClr val="CCFBF1"/>
+            <a:srgbClr val="FCE7F3"/>
           </a:solidFill>
           <a:ln w="19050">
             <a:solidFill>
-              <a:srgbClr val="0D9488"/>
+              <a:srgbClr val="DB2777"/>
             </a:solidFill>
             <a:prstDash val="solid"/>
           </a:ln>
@@ -15007,7 +14744,7 @@
         </p:nvSpPr>
         <p:spPr>
           <a:xfrm>
-            <a:off x="4370832" y="2258568"/>
+            <a:off x="5803392" y="2258568"/>
             <a:ext cx="1828800" cy="292608"/>
           </a:xfrm>
           <a:prstGeom prst="rect">
@@ -15026,13 +14763,13 @@
             <a:r>
               <a:rPr lang="en-US" sz="1300" b="1" dirty="0">
                 <a:solidFill>
-                  <a:srgbClr val="0F766E"/>
+                  <a:srgbClr val="9D174D"/>
                 </a:solidFill>
                 <a:latin typeface="Trebuchet MS" pitchFamily="34" charset="0"/>
                 <a:ea typeface="Trebuchet MS" pitchFamily="34" charset="-122"/>
                 <a:cs typeface="Trebuchet MS" pitchFamily="34" charset="-120"/>
               </a:rPr>
-              <a:t>spell</a:t>
+              <a:t>ing</a:t>
             </a:r>
             <a:endParaRPr lang="en-US" sz="1300" dirty="0"/>
           </a:p>
@@ -15046,7 +14783,7 @@
         </p:nvSpPr>
         <p:spPr>
           <a:xfrm>
-            <a:off x="4370832" y="2569464"/>
+            <a:off x="5803392" y="2569464"/>
             <a:ext cx="1828800" cy="201168"/>
           </a:xfrm>
           <a:prstGeom prst="rect">
@@ -15071,7 +14808,7 @@
                 <a:ea typeface="Calibri" pitchFamily="34" charset="-122"/>
                 <a:cs typeface="Calibri" pitchFamily="34" charset="-120"/>
               </a:rPr>
-              <a:t>to name letters in order</a:t>
+              <a:t>action in progress</a:t>
             </a:r>
             <a:endParaRPr lang="en-US" sz="850" dirty="0"/>
           </a:p>
@@ -15085,30 +14822,23 @@
         </p:nvSpPr>
         <p:spPr>
           <a:xfrm>
-            <a:off x="6519672" y="2258568"/>
-            <a:ext cx="1828800" cy="292608"/>
+            <a:off x="365760" y="3273552"/>
+            <a:ext cx="1371600" cy="658368"/>
           </a:xfrm>
           <a:prstGeom prst="rect">
             <a:avLst>
-              <a:gd name="adj" fmla="val 25000"/>
+              <a:gd name="adj" fmla="val 8333"/>
             </a:avLst>
           </a:prstGeom>
           <a:solidFill>
-            <a:srgbClr val="FCE7F3"/>
-          </a:solidFill>
-          <a:ln w="19050">
-            <a:solidFill>
-              <a:srgbClr val="DB2777"/>
-            </a:solidFill>
-            <a:prstDash val="solid"/>
-          </a:ln>
-          <a:effectLst>
-            <a:outerShdw sx="100000" sy="100000" kx="0" ky="0" algn="bl" rotWithShape="0" blurRad="101600" dist="38100" dir="8100000">
-              <a:srgbClr val="000000">
-                <a:alpha val="12000"/>
-              </a:srgbClr>
-            </a:outerShdw>
-          </a:effectLst>
+            <a:srgbClr val="E2E8F0"/>
+          </a:solidFill>
+          <a:ln w="12700">
+            <a:solidFill>
+              <a:srgbClr val="E2E8F0"/>
+            </a:solidFill>
+            <a:prstDash val="solid"/>
+          </a:ln>
         </p:spPr>
       </p:sp>
       <p:sp>
@@ -15119,8 +14849,8 @@
         </p:nvSpPr>
         <p:spPr>
           <a:xfrm>
-            <a:off x="6519672" y="2258568"/>
-            <a:ext cx="1828800" cy="292608"/>
+            <a:off x="365760" y="3273552"/>
+            <a:ext cx="1371600" cy="658368"/>
           </a:xfrm>
           <a:prstGeom prst="rect">
             <a:avLst/>
@@ -15136,69 +14866,30 @@
               <a:buNone/>
             </a:pPr>
             <a:r>
-              <a:rPr lang="en-US" sz="1300" b="1" dirty="0">
-                <a:solidFill>
-                  <a:srgbClr val="9D174D"/>
+              <a:rPr lang="en-US" sz="1100" b="1" dirty="0">
+                <a:solidFill>
+                  <a:srgbClr val="475569"/>
                 </a:solidFill>
                 <a:latin typeface="Trebuchet MS" pitchFamily="34" charset="0"/>
                 <a:ea typeface="Trebuchet MS" pitchFamily="34" charset="-122"/>
                 <a:cs typeface="Trebuchet MS" pitchFamily="34" charset="-120"/>
               </a:rPr>
-              <a:t>ed</a:t>
-            </a:r>
-            <a:endParaRPr lang="en-US" sz="1300" dirty="0"/>
-          </a:p>
-        </p:txBody>
-      </p:sp>
-      <p:sp>
-        <p:nvSpPr>
-          <p:cNvPr id="24" name="Text 22"/>
-          <p:cNvSpPr/>
-          <p:nvPr/>
-        </p:nvSpPr>
-        <p:spPr>
-          <a:xfrm>
-            <a:off x="6519672" y="2569464"/>
-            <a:ext cx="1828800" cy="201168"/>
-          </a:xfrm>
-          <a:prstGeom prst="rect">
-            <a:avLst/>
-          </a:prstGeom>
-          <a:noFill/>
-          <a:ln/>
-        </p:spPr>
-        <p:txBody>
-          <a:bodyPr wrap="square" lIns="0" tIns="0" rIns="0" bIns="0" rtlCol="0" anchor="t"/>
-          <a:lstStyle/>
-          <a:p>
-            <a:pPr algn="ctr" indent="0" marL="0">
-              <a:buNone/>
-            </a:pPr>
-            <a:r>
-              <a:rPr lang="en-US" sz="850" dirty="0">
-                <a:solidFill>
-                  <a:srgbClr val="475569"/>
-                </a:solidFill>
-                <a:latin typeface="Calibri" pitchFamily="34" charset="0"/>
-                <a:ea typeface="Calibri" pitchFamily="34" charset="-122"/>
-                <a:cs typeface="Calibri" pitchFamily="34" charset="-120"/>
-              </a:rPr>
-              <a:t>past tense</a:t>
-            </a:r>
-            <a:endParaRPr lang="en-US" sz="850" dirty="0"/>
-          </a:p>
-        </p:txBody>
-      </p:sp>
-      <p:sp>
-        <p:nvSpPr>
-          <p:cNvPr id="25" name="Shape 23"/>
-          <p:cNvSpPr/>
-          <p:nvPr/>
-        </p:nvSpPr>
-        <p:spPr>
-          <a:xfrm>
-            <a:off x="365760" y="3273552"/>
-            <a:ext cx="1371600" cy="658368"/>
+              <a:t>Syllables</a:t>
+            </a:r>
+            <a:endParaRPr lang="en-US" sz="1100" dirty="0"/>
+          </a:p>
+        </p:txBody>
+      </p:sp>
+      <p:sp>
+        <p:nvSpPr>
+          <p:cNvPr id="24" name="Shape 22"/>
+          <p:cNvSpPr/>
+          <p:nvPr/>
+        </p:nvSpPr>
+        <p:spPr>
+          <a:xfrm>
+            <a:off x="1874520" y="3273552"/>
+            <a:ext cx="6903720" cy="658368"/>
           </a:xfrm>
           <a:prstGeom prst="rect">
             <a:avLst>
@@ -15206,11 +14897,38 @@
             </a:avLst>
           </a:prstGeom>
           <a:solidFill>
-            <a:srgbClr val="E2E8F0"/>
-          </a:solidFill>
-          <a:ln w="12700">
-            <a:solidFill>
-              <a:srgbClr val="E2E8F0"/>
+            <a:srgbClr val="CCFBF1"/>
+          </a:solidFill>
+          <a:ln w="12700">
+            <a:solidFill>
+              <a:srgbClr val="0D9488"/>
+            </a:solidFill>
+            <a:prstDash val="solid"/>
+          </a:ln>
+        </p:spPr>
+      </p:sp>
+      <p:sp>
+        <p:nvSpPr>
+          <p:cNvPr id="25" name="Shape 23"/>
+          <p:cNvSpPr/>
+          <p:nvPr/>
+        </p:nvSpPr>
+        <p:spPr>
+          <a:xfrm>
+            <a:off x="2999232" y="3364992"/>
+            <a:ext cx="1645920" cy="475488"/>
+          </a:xfrm>
+          <a:prstGeom prst="rect">
+            <a:avLst>
+              <a:gd name="adj" fmla="val 9615"/>
+            </a:avLst>
+          </a:prstGeom>
+          <a:solidFill>
+            <a:srgbClr val="FFFFFF"/>
+          </a:solidFill>
+          <a:ln w="12700">
+            <a:solidFill>
+              <a:srgbClr val="0D9488"/>
             </a:solidFill>
             <a:prstDash val="solid"/>
           </a:ln>
@@ -15224,8 +14942,8 @@
         </p:nvSpPr>
         <p:spPr>
           <a:xfrm>
-            <a:off x="365760" y="3273552"/>
-            <a:ext cx="1371600" cy="658368"/>
+            <a:off x="2999232" y="3364992"/>
+            <a:ext cx="1645920" cy="475488"/>
           </a:xfrm>
           <a:prstGeom prst="rect">
             <a:avLst/>
@@ -15241,15 +14959,186 @@
               <a:buNone/>
             </a:pPr>
             <a:r>
-              <a:rPr lang="en-US" sz="1100" b="1" dirty="0">
-                <a:solidFill>
-                  <a:srgbClr val="475569"/>
+              <a:rPr lang="en-US" sz="1400" b="1" dirty="0">
+                <a:solidFill>
+                  <a:srgbClr val="0D9488"/>
                 </a:solidFill>
                 <a:latin typeface="Trebuchet MS" pitchFamily="34" charset="0"/>
                 <a:ea typeface="Trebuchet MS" pitchFamily="34" charset="-122"/>
                 <a:cs typeface="Trebuchet MS" pitchFamily="34" charset="-120"/>
               </a:rPr>
-              <a:t>Syllables</a:t>
+              <a:t>spell</a:t>
+            </a:r>
+            <a:endParaRPr lang="en-US" sz="1400" dirty="0"/>
+          </a:p>
+        </p:txBody>
+      </p:sp>
+      <p:sp>
+        <p:nvSpPr>
+          <p:cNvPr id="27" name="Text 25"/>
+          <p:cNvSpPr/>
+          <p:nvPr/>
+        </p:nvSpPr>
+        <p:spPr>
+          <a:xfrm>
+            <a:off x="4645152" y="3364992"/>
+            <a:ext cx="1097280" cy="475488"/>
+          </a:xfrm>
+          <a:prstGeom prst="rect">
+            <a:avLst/>
+          </a:prstGeom>
+          <a:noFill/>
+          <a:ln/>
+        </p:spPr>
+        <p:txBody>
+          <a:bodyPr wrap="square" lIns="0" tIns="0" rIns="0" bIns="0" rtlCol="0" anchor="ctr"/>
+          <a:lstStyle/>
+          <a:p>
+            <a:pPr algn="ctr" indent="0" marL="0">
+              <a:buNone/>
+            </a:pPr>
+            <a:r>
+              <a:rPr lang="en-US" sz="1600" b="1" dirty="0">
+                <a:solidFill>
+                  <a:srgbClr val="0D9488"/>
+                </a:solidFill>
+                <a:latin typeface="Trebuchet MS" pitchFamily="34" charset="0"/>
+                <a:ea typeface="Trebuchet MS" pitchFamily="34" charset="-122"/>
+                <a:cs typeface="Trebuchet MS" pitchFamily="34" charset="-120"/>
+              </a:rPr>
+              <a:t>·</a:t>
+            </a:r>
+            <a:endParaRPr lang="en-US" sz="1600" dirty="0"/>
+          </a:p>
+        </p:txBody>
+      </p:sp>
+      <p:sp>
+        <p:nvSpPr>
+          <p:cNvPr id="28" name="Shape 26"/>
+          <p:cNvSpPr/>
+          <p:nvPr/>
+        </p:nvSpPr>
+        <p:spPr>
+          <a:xfrm>
+            <a:off x="5742432" y="3364992"/>
+            <a:ext cx="1645920" cy="475488"/>
+          </a:xfrm>
+          <a:prstGeom prst="rect">
+            <a:avLst>
+              <a:gd name="adj" fmla="val 9615"/>
+            </a:avLst>
+          </a:prstGeom>
+          <a:solidFill>
+            <a:srgbClr val="FFFFFF"/>
+          </a:solidFill>
+          <a:ln w="12700">
+            <a:solidFill>
+              <a:srgbClr val="0D9488"/>
+            </a:solidFill>
+            <a:prstDash val="solid"/>
+          </a:ln>
+        </p:spPr>
+      </p:sp>
+      <p:sp>
+        <p:nvSpPr>
+          <p:cNvPr id="29" name="Text 27"/>
+          <p:cNvSpPr/>
+          <p:nvPr/>
+        </p:nvSpPr>
+        <p:spPr>
+          <a:xfrm>
+            <a:off x="5742432" y="3364992"/>
+            <a:ext cx="1645920" cy="475488"/>
+          </a:xfrm>
+          <a:prstGeom prst="rect">
+            <a:avLst/>
+          </a:prstGeom>
+          <a:noFill/>
+          <a:ln/>
+        </p:spPr>
+        <p:txBody>
+          <a:bodyPr wrap="square" lIns="0" tIns="0" rIns="0" bIns="0" rtlCol="0" anchor="ctr"/>
+          <a:lstStyle/>
+          <a:p>
+            <a:pPr algn="ctr" indent="0" marL="0">
+              <a:buNone/>
+            </a:pPr>
+            <a:r>
+              <a:rPr lang="en-US" sz="1400" b="1" dirty="0">
+                <a:solidFill>
+                  <a:srgbClr val="0D9488"/>
+                </a:solidFill>
+                <a:latin typeface="Trebuchet MS" pitchFamily="34" charset="0"/>
+                <a:ea typeface="Trebuchet MS" pitchFamily="34" charset="-122"/>
+                <a:cs typeface="Trebuchet MS" pitchFamily="34" charset="-120"/>
+              </a:rPr>
+              <a:t>ing</a:t>
+            </a:r>
+            <a:endParaRPr lang="en-US" sz="1400" dirty="0"/>
+          </a:p>
+        </p:txBody>
+      </p:sp>
+      <p:sp>
+        <p:nvSpPr>
+          <p:cNvPr id="30" name="Shape 28"/>
+          <p:cNvSpPr/>
+          <p:nvPr/>
+        </p:nvSpPr>
+        <p:spPr>
+          <a:xfrm>
+            <a:off x="365760" y="4096512"/>
+            <a:ext cx="1371600" cy="804672"/>
+          </a:xfrm>
+          <a:prstGeom prst="rect">
+            <a:avLst>
+              <a:gd name="adj" fmla="val 6818"/>
+            </a:avLst>
+          </a:prstGeom>
+          <a:solidFill>
+            <a:srgbClr val="E2E8F0"/>
+          </a:solidFill>
+          <a:ln w="12700">
+            <a:solidFill>
+              <a:srgbClr val="E2E8F0"/>
+            </a:solidFill>
+            <a:prstDash val="solid"/>
+          </a:ln>
+        </p:spPr>
+      </p:sp>
+      <p:sp>
+        <p:nvSpPr>
+          <p:cNvPr id="31" name="Text 29"/>
+          <p:cNvSpPr/>
+          <p:nvPr/>
+        </p:nvSpPr>
+        <p:spPr>
+          <a:xfrm>
+            <a:off x="365760" y="4096512"/>
+            <a:ext cx="1371600" cy="804672"/>
+          </a:xfrm>
+          <a:prstGeom prst="rect">
+            <a:avLst/>
+          </a:prstGeom>
+          <a:noFill/>
+          <a:ln/>
+        </p:spPr>
+        <p:txBody>
+          <a:bodyPr wrap="square" lIns="0" tIns="0" rIns="0" bIns="0" rtlCol="0" anchor="ctr"/>
+          <a:lstStyle/>
+          <a:p>
+            <a:pPr algn="ctr" indent="0" marL="0">
+              <a:buNone/>
+            </a:pPr>
+            <a:r>
+              <a:rPr lang="en-US" sz="1100" b="1" dirty="0">
+                <a:solidFill>
+                  <a:srgbClr val="475569"/>
+                </a:solidFill>
+                <a:latin typeface="Trebuchet MS" pitchFamily="34" charset="0"/>
+                <a:ea typeface="Trebuchet MS" pitchFamily="34" charset="-122"/>
+                <a:cs typeface="Trebuchet MS" pitchFamily="34" charset="-120"/>
+              </a:rPr>
+              <a:t>Phonemes</a:t>
             </a:r>
             <a:endParaRPr lang="en-US" sz="1100" dirty="0"/>
           </a:p>
@@ -15257,13 +15146,13 @@
       </p:sp>
       <p:sp>
         <p:nvSpPr>
-          <p:cNvPr id="27" name="Shape 25"/>
-          <p:cNvSpPr/>
-          <p:nvPr/>
-        </p:nvSpPr>
-        <p:spPr>
-          <a:xfrm>
-            <a:off x="1874520" y="3273552"/>
+          <p:cNvPr id="32" name="Shape 30"/>
+          <p:cNvSpPr/>
+          <p:nvPr/>
+        </p:nvSpPr>
+        <p:spPr>
+          <a:xfrm>
+            <a:off x="1874520" y="4096512"/>
             <a:ext cx="6903720" cy="658368"/>
           </a:xfrm>
           <a:prstGeom prst="rect">
@@ -15272,30 +15161,30 @@
             </a:avLst>
           </a:prstGeom>
           <a:solidFill>
-            <a:srgbClr val="CCFBF1"/>
-          </a:solidFill>
-          <a:ln w="12700">
-            <a:solidFill>
-              <a:srgbClr val="0D9488"/>
-            </a:solidFill>
-            <a:prstDash val="solid"/>
-          </a:ln>
-        </p:spPr>
-      </p:sp>
-      <p:sp>
-        <p:nvSpPr>
-          <p:cNvPr id="28" name="Shape 26"/>
-          <p:cNvSpPr/>
-          <p:nvPr/>
-        </p:nvSpPr>
-        <p:spPr>
-          <a:xfrm>
-            <a:off x="2999232" y="3364992"/>
-            <a:ext cx="1645920" cy="475488"/>
+            <a:srgbClr val="FCE7F3"/>
+          </a:solidFill>
+          <a:ln w="12700">
+            <a:solidFill>
+              <a:srgbClr val="DB2777"/>
+            </a:solidFill>
+            <a:prstDash val="solid"/>
+          </a:ln>
+        </p:spPr>
+      </p:sp>
+      <p:sp>
+        <p:nvSpPr>
+          <p:cNvPr id="33" name="Shape 31"/>
+          <p:cNvSpPr/>
+          <p:nvPr/>
+        </p:nvSpPr>
+        <p:spPr>
+          <a:xfrm>
+            <a:off x="2254649" y="4169664"/>
+            <a:ext cx="685800" cy="475488"/>
           </a:xfrm>
           <a:prstGeom prst="rect">
             <a:avLst>
-              <a:gd name="adj" fmla="val 9615"/>
+              <a:gd name="adj" fmla="val 7692"/>
             </a:avLst>
           </a:prstGeom>
           <a:solidFill>
@@ -15303,22 +15192,22 @@
           </a:solidFill>
           <a:ln w="12700">
             <a:solidFill>
-              <a:srgbClr val="0D9488"/>
-            </a:solidFill>
-            <a:prstDash val="solid"/>
-          </a:ln>
-        </p:spPr>
-      </p:sp>
-      <p:sp>
-        <p:nvSpPr>
-          <p:cNvPr id="29" name="Text 27"/>
-          <p:cNvSpPr/>
-          <p:nvPr/>
-        </p:nvSpPr>
-        <p:spPr>
-          <a:xfrm>
-            <a:off x="2999232" y="3364992"/>
-            <a:ext cx="1645920" cy="475488"/>
+              <a:srgbClr val="DB2777"/>
+            </a:solidFill>
+            <a:prstDash val="solid"/>
+          </a:ln>
+        </p:spPr>
+      </p:sp>
+      <p:sp>
+        <p:nvSpPr>
+          <p:cNvPr id="34" name="Text 32"/>
+          <p:cNvSpPr/>
+          <p:nvPr/>
+        </p:nvSpPr>
+        <p:spPr>
+          <a:xfrm>
+            <a:off x="2254649" y="4169664"/>
+            <a:ext cx="685800" cy="475488"/>
           </a:xfrm>
           <a:prstGeom prst="rect">
             <a:avLst/>
@@ -15334,30 +15223,57 @@
               <a:buNone/>
             </a:pPr>
             <a:r>
-              <a:rPr lang="en-US" sz="1400" b="1" dirty="0">
-                <a:solidFill>
-                  <a:srgbClr val="0D9488"/>
+              <a:rPr lang="en-US" sz="900" b="1" dirty="0">
+                <a:solidFill>
+                  <a:srgbClr val="9D174D"/>
                 </a:solidFill>
                 <a:latin typeface="Trebuchet MS" pitchFamily="34" charset="0"/>
                 <a:ea typeface="Trebuchet MS" pitchFamily="34" charset="-122"/>
                 <a:cs typeface="Trebuchet MS" pitchFamily="34" charset="-120"/>
               </a:rPr>
-              <a:t>mis</a:t>
-            </a:r>
-            <a:endParaRPr lang="en-US" sz="1400" dirty="0"/>
-          </a:p>
-        </p:txBody>
-      </p:sp>
-      <p:sp>
-        <p:nvSpPr>
-          <p:cNvPr id="30" name="Text 28"/>
-          <p:cNvSpPr/>
-          <p:nvPr/>
-        </p:nvSpPr>
-        <p:spPr>
-          <a:xfrm>
-            <a:off x="4645152" y="3364992"/>
-            <a:ext cx="1097280" cy="475488"/>
+              <a:t>s</a:t>
+            </a:r>
+            <a:endParaRPr lang="en-US" sz="900" dirty="0"/>
+          </a:p>
+        </p:txBody>
+      </p:sp>
+      <p:sp>
+        <p:nvSpPr>
+          <p:cNvPr id="35" name="Shape 33"/>
+          <p:cNvSpPr/>
+          <p:nvPr/>
+        </p:nvSpPr>
+        <p:spPr>
+          <a:xfrm>
+            <a:off x="3293146" y="4169664"/>
+            <a:ext cx="685800" cy="475488"/>
+          </a:xfrm>
+          <a:prstGeom prst="rect">
+            <a:avLst>
+              <a:gd name="adj" fmla="val 7692"/>
+            </a:avLst>
+          </a:prstGeom>
+          <a:solidFill>
+            <a:srgbClr val="FFFFFF"/>
+          </a:solidFill>
+          <a:ln w="12700">
+            <a:solidFill>
+              <a:srgbClr val="DB2777"/>
+            </a:solidFill>
+            <a:prstDash val="solid"/>
+          </a:ln>
+        </p:spPr>
+      </p:sp>
+      <p:sp>
+        <p:nvSpPr>
+          <p:cNvPr id="36" name="Text 34"/>
+          <p:cNvSpPr/>
+          <p:nvPr/>
+        </p:nvSpPr>
+        <p:spPr>
+          <a:xfrm>
+            <a:off x="3293146" y="4169664"/>
+            <a:ext cx="685800" cy="475488"/>
           </a:xfrm>
           <a:prstGeom prst="rect">
             <a:avLst/>
@@ -15373,34 +15289,34 @@
               <a:buNone/>
             </a:pPr>
             <a:r>
-              <a:rPr lang="en-US" sz="1600" b="1" dirty="0">
-                <a:solidFill>
-                  <a:srgbClr val="0D9488"/>
+              <a:rPr lang="en-US" sz="900" b="1" dirty="0">
+                <a:solidFill>
+                  <a:srgbClr val="9D174D"/>
                 </a:solidFill>
                 <a:latin typeface="Trebuchet MS" pitchFamily="34" charset="0"/>
                 <a:ea typeface="Trebuchet MS" pitchFamily="34" charset="-122"/>
                 <a:cs typeface="Trebuchet MS" pitchFamily="34" charset="-120"/>
               </a:rPr>
-              <a:t>·</a:t>
-            </a:r>
-            <a:endParaRPr lang="en-US" sz="1600" dirty="0"/>
-          </a:p>
-        </p:txBody>
-      </p:sp>
-      <p:sp>
-        <p:nvSpPr>
-          <p:cNvPr id="31" name="Shape 29"/>
-          <p:cNvSpPr/>
-          <p:nvPr/>
-        </p:nvSpPr>
-        <p:spPr>
-          <a:xfrm>
-            <a:off x="5742432" y="3364992"/>
-            <a:ext cx="1645920" cy="475488"/>
+              <a:t>p</a:t>
+            </a:r>
+            <a:endParaRPr lang="en-US" sz="900" dirty="0"/>
+          </a:p>
+        </p:txBody>
+      </p:sp>
+      <p:sp>
+        <p:nvSpPr>
+          <p:cNvPr id="37" name="Shape 35"/>
+          <p:cNvSpPr/>
+          <p:nvPr/>
+        </p:nvSpPr>
+        <p:spPr>
+          <a:xfrm>
+            <a:off x="4331643" y="4169664"/>
+            <a:ext cx="685800" cy="475488"/>
           </a:xfrm>
           <a:prstGeom prst="rect">
             <a:avLst>
-              <a:gd name="adj" fmla="val 9615"/>
+              <a:gd name="adj" fmla="val 7692"/>
             </a:avLst>
           </a:prstGeom>
           <a:solidFill>
@@ -15408,22 +15324,22 @@
           </a:solidFill>
           <a:ln w="12700">
             <a:solidFill>
-              <a:srgbClr val="0D9488"/>
-            </a:solidFill>
-            <a:prstDash val="solid"/>
-          </a:ln>
-        </p:spPr>
-      </p:sp>
-      <p:sp>
-        <p:nvSpPr>
-          <p:cNvPr id="32" name="Text 30"/>
-          <p:cNvSpPr/>
-          <p:nvPr/>
-        </p:nvSpPr>
-        <p:spPr>
-          <a:xfrm>
-            <a:off x="5742432" y="3364992"/>
-            <a:ext cx="1645920" cy="475488"/>
+              <a:srgbClr val="DB2777"/>
+            </a:solidFill>
+            <a:prstDash val="solid"/>
+          </a:ln>
+        </p:spPr>
+      </p:sp>
+      <p:sp>
+        <p:nvSpPr>
+          <p:cNvPr id="38" name="Text 36"/>
+          <p:cNvSpPr/>
+          <p:nvPr/>
+        </p:nvSpPr>
+        <p:spPr>
+          <a:xfrm>
+            <a:off x="4331643" y="4169664"/>
+            <a:ext cx="685800" cy="475488"/>
           </a:xfrm>
           <a:prstGeom prst="rect">
             <a:avLst/>
@@ -15439,57 +15355,57 @@
               <a:buNone/>
             </a:pPr>
             <a:r>
-              <a:rPr lang="en-US" sz="1400" b="1" dirty="0">
-                <a:solidFill>
-                  <a:srgbClr val="0D9488"/>
+              <a:rPr lang="en-US" sz="900" b="1" dirty="0">
+                <a:solidFill>
+                  <a:srgbClr val="9D174D"/>
                 </a:solidFill>
                 <a:latin typeface="Trebuchet MS" pitchFamily="34" charset="0"/>
                 <a:ea typeface="Trebuchet MS" pitchFamily="34" charset="-122"/>
                 <a:cs typeface="Trebuchet MS" pitchFamily="34" charset="-120"/>
               </a:rPr>
-              <a:t>spelled</a:t>
-            </a:r>
-            <a:endParaRPr lang="en-US" sz="1400" dirty="0"/>
-          </a:p>
-        </p:txBody>
-      </p:sp>
-      <p:sp>
-        <p:nvSpPr>
-          <p:cNvPr id="33" name="Shape 31"/>
-          <p:cNvSpPr/>
-          <p:nvPr/>
-        </p:nvSpPr>
-        <p:spPr>
-          <a:xfrm>
-            <a:off x="365760" y="4096512"/>
-            <a:ext cx="1371600" cy="804672"/>
+              <a:t>e</a:t>
+            </a:r>
+            <a:endParaRPr lang="en-US" sz="900" dirty="0"/>
+          </a:p>
+        </p:txBody>
+      </p:sp>
+      <p:sp>
+        <p:nvSpPr>
+          <p:cNvPr id="39" name="Shape 37"/>
+          <p:cNvSpPr/>
+          <p:nvPr/>
+        </p:nvSpPr>
+        <p:spPr>
+          <a:xfrm>
+            <a:off x="5370141" y="4169664"/>
+            <a:ext cx="685800" cy="475488"/>
           </a:xfrm>
           <a:prstGeom prst="rect">
             <a:avLst>
-              <a:gd name="adj" fmla="val 6818"/>
+              <a:gd name="adj" fmla="val 7692"/>
             </a:avLst>
           </a:prstGeom>
           <a:solidFill>
-            <a:srgbClr val="E2E8F0"/>
-          </a:solidFill>
-          <a:ln w="12700">
-            <a:solidFill>
-              <a:srgbClr val="E2E8F0"/>
-            </a:solidFill>
-            <a:prstDash val="solid"/>
-          </a:ln>
-        </p:spPr>
-      </p:sp>
-      <p:sp>
-        <p:nvSpPr>
-          <p:cNvPr id="34" name="Text 32"/>
-          <p:cNvSpPr/>
-          <p:nvPr/>
-        </p:nvSpPr>
-        <p:spPr>
-          <a:xfrm>
-            <a:off x="365760" y="4096512"/>
-            <a:ext cx="1371600" cy="804672"/>
+            <a:srgbClr val="FFFFFF"/>
+          </a:solidFill>
+          <a:ln w="12700">
+            <a:solidFill>
+              <a:srgbClr val="DB2777"/>
+            </a:solidFill>
+            <a:prstDash val="solid"/>
+          </a:ln>
+        </p:spPr>
+      </p:sp>
+      <p:sp>
+        <p:nvSpPr>
+          <p:cNvPr id="40" name="Text 38"/>
+          <p:cNvSpPr/>
+          <p:nvPr/>
+        </p:nvSpPr>
+        <p:spPr>
+          <a:xfrm>
+            <a:off x="5370141" y="4169664"/>
+            <a:ext cx="685800" cy="475488"/>
           </a:xfrm>
           <a:prstGeom prst="rect">
             <a:avLst/>
@@ -15505,56 +15421,29 @@
               <a:buNone/>
             </a:pPr>
             <a:r>
-              <a:rPr lang="en-US" sz="1100" b="1" dirty="0">
-                <a:solidFill>
-                  <a:srgbClr val="475569"/>
+              <a:rPr lang="en-US" sz="900" b="1" dirty="0">
+                <a:solidFill>
+                  <a:srgbClr val="9D174D"/>
                 </a:solidFill>
                 <a:latin typeface="Trebuchet MS" pitchFamily="34" charset="0"/>
                 <a:ea typeface="Trebuchet MS" pitchFamily="34" charset="-122"/>
                 <a:cs typeface="Trebuchet MS" pitchFamily="34" charset="-120"/>
               </a:rPr>
-              <a:t>Phonemes</a:t>
-            </a:r>
-            <a:endParaRPr lang="en-US" sz="1100" dirty="0"/>
-          </a:p>
-        </p:txBody>
-      </p:sp>
-      <p:sp>
-        <p:nvSpPr>
-          <p:cNvPr id="35" name="Shape 33"/>
-          <p:cNvSpPr/>
-          <p:nvPr/>
-        </p:nvSpPr>
-        <p:spPr>
-          <a:xfrm>
-            <a:off x="1874520" y="4096512"/>
-            <a:ext cx="6903720" cy="658368"/>
-          </a:xfrm>
-          <a:prstGeom prst="rect">
-            <a:avLst>
-              <a:gd name="adj" fmla="val 8333"/>
-            </a:avLst>
-          </a:prstGeom>
-          <a:solidFill>
-            <a:srgbClr val="FCE7F3"/>
-          </a:solidFill>
-          <a:ln w="12700">
-            <a:solidFill>
-              <a:srgbClr val="DB2777"/>
-            </a:solidFill>
-            <a:prstDash val="solid"/>
-          </a:ln>
-        </p:spPr>
-      </p:sp>
-      <p:sp>
-        <p:nvSpPr>
-          <p:cNvPr id="36" name="Shape 34"/>
-          <p:cNvSpPr/>
-          <p:nvPr/>
-        </p:nvSpPr>
-        <p:spPr>
-          <a:xfrm>
-            <a:off x="2124837" y="4169664"/>
+              <a:t>ll</a:t>
+            </a:r>
+            <a:endParaRPr lang="en-US" sz="900" dirty="0"/>
+          </a:p>
+        </p:txBody>
+      </p:sp>
+      <p:sp>
+        <p:nvSpPr>
+          <p:cNvPr id="41" name="Shape 39"/>
+          <p:cNvSpPr/>
+          <p:nvPr/>
+        </p:nvSpPr>
+        <p:spPr>
+          <a:xfrm>
+            <a:off x="6408638" y="4169664"/>
             <a:ext cx="685800" cy="475488"/>
           </a:xfrm>
           <a:prstGeom prst="rect">
@@ -15575,13 +15464,13 @@
       </p:sp>
       <p:sp>
         <p:nvSpPr>
-          <p:cNvPr id="37" name="Text 35"/>
-          <p:cNvSpPr/>
-          <p:nvPr/>
-        </p:nvSpPr>
-        <p:spPr>
-          <a:xfrm>
-            <a:off x="2124837" y="4169664"/>
+          <p:cNvPr id="42" name="Text 40"/>
+          <p:cNvSpPr/>
+          <p:nvPr/>
+        </p:nvSpPr>
+        <p:spPr>
+          <a:xfrm>
+            <a:off x="6408638" y="4169664"/>
             <a:ext cx="685800" cy="475488"/>
           </a:xfrm>
           <a:prstGeom prst="rect">
@@ -15606,7 +15495,7 @@
                 <a:ea typeface="Trebuchet MS" pitchFamily="34" charset="-122"/>
                 <a:cs typeface="Trebuchet MS" pitchFamily="34" charset="-120"/>
               </a:rPr>
-              <a:t>m</a:t>
+              <a:t>i</a:t>
             </a:r>
             <a:endParaRPr lang="en-US" sz="900" dirty="0"/>
           </a:p>
@@ -15614,13 +15503,13 @@
       </p:sp>
       <p:sp>
         <p:nvSpPr>
-          <p:cNvPr id="38" name="Shape 36"/>
-          <p:cNvSpPr/>
-          <p:nvPr/>
-        </p:nvSpPr>
-        <p:spPr>
-          <a:xfrm>
-            <a:off x="3033522" y="4169664"/>
+          <p:cNvPr id="43" name="Shape 41"/>
+          <p:cNvSpPr/>
+          <p:nvPr/>
+        </p:nvSpPr>
+        <p:spPr>
+          <a:xfrm>
+            <a:off x="7447135" y="4169664"/>
             <a:ext cx="685800" cy="475488"/>
           </a:xfrm>
           <a:prstGeom prst="rect">
@@ -15641,13 +15530,13 @@
       </p:sp>
       <p:sp>
         <p:nvSpPr>
-          <p:cNvPr id="39" name="Text 37"/>
-          <p:cNvSpPr/>
-          <p:nvPr/>
-        </p:nvSpPr>
-        <p:spPr>
-          <a:xfrm>
-            <a:off x="3033522" y="4169664"/>
+          <p:cNvPr id="44" name="Text 42"/>
+          <p:cNvSpPr/>
+          <p:nvPr/>
+        </p:nvSpPr>
+        <p:spPr>
+          <a:xfrm>
+            <a:off x="7447135" y="4169664"/>
             <a:ext cx="685800" cy="475488"/>
           </a:xfrm>
           <a:prstGeom prst="rect">
@@ -15672,337 +15561,7 @@
                 <a:ea typeface="Trebuchet MS" pitchFamily="34" charset="-122"/>
                 <a:cs typeface="Trebuchet MS" pitchFamily="34" charset="-120"/>
               </a:rPr>
-              <a:t>i</a:t>
-            </a:r>
-            <a:endParaRPr lang="en-US" sz="900" dirty="0"/>
-          </a:p>
-        </p:txBody>
-      </p:sp>
-      <p:sp>
-        <p:nvSpPr>
-          <p:cNvPr id="40" name="Shape 38"/>
-          <p:cNvSpPr/>
-          <p:nvPr/>
-        </p:nvSpPr>
-        <p:spPr>
-          <a:xfrm>
-            <a:off x="3942207" y="4169664"/>
-            <a:ext cx="685800" cy="475488"/>
-          </a:xfrm>
-          <a:prstGeom prst="rect">
-            <a:avLst>
-              <a:gd name="adj" fmla="val 7692"/>
-            </a:avLst>
-          </a:prstGeom>
-          <a:solidFill>
-            <a:srgbClr val="FFFFFF"/>
-          </a:solidFill>
-          <a:ln w="12700">
-            <a:solidFill>
-              <a:srgbClr val="DB2777"/>
-            </a:solidFill>
-            <a:prstDash val="solid"/>
-          </a:ln>
-        </p:spPr>
-      </p:sp>
-      <p:sp>
-        <p:nvSpPr>
-          <p:cNvPr id="41" name="Text 39"/>
-          <p:cNvSpPr/>
-          <p:nvPr/>
-        </p:nvSpPr>
-        <p:spPr>
-          <a:xfrm>
-            <a:off x="3942207" y="4169664"/>
-            <a:ext cx="685800" cy="475488"/>
-          </a:xfrm>
-          <a:prstGeom prst="rect">
-            <a:avLst/>
-          </a:prstGeom>
-          <a:noFill/>
-          <a:ln/>
-        </p:spPr>
-        <p:txBody>
-          <a:bodyPr wrap="square" lIns="0" tIns="0" rIns="0" bIns="0" rtlCol="0" anchor="ctr"/>
-          <a:lstStyle/>
-          <a:p>
-            <a:pPr algn="ctr" indent="0" marL="0">
-              <a:buNone/>
-            </a:pPr>
-            <a:r>
-              <a:rPr lang="en-US" sz="900" b="1" dirty="0">
-                <a:solidFill>
-                  <a:srgbClr val="9D174D"/>
-                </a:solidFill>
-                <a:latin typeface="Trebuchet MS" pitchFamily="34" charset="0"/>
-                <a:ea typeface="Trebuchet MS" pitchFamily="34" charset="-122"/>
-                <a:cs typeface="Trebuchet MS" pitchFamily="34" charset="-120"/>
-              </a:rPr>
-              <a:t>ss</a:t>
-            </a:r>
-            <a:endParaRPr lang="en-US" sz="900" dirty="0"/>
-          </a:p>
-        </p:txBody>
-      </p:sp>
-      <p:sp>
-        <p:nvSpPr>
-          <p:cNvPr id="42" name="Shape 40"/>
-          <p:cNvSpPr/>
-          <p:nvPr/>
-        </p:nvSpPr>
-        <p:spPr>
-          <a:xfrm>
-            <a:off x="4850892" y="4169664"/>
-            <a:ext cx="685800" cy="475488"/>
-          </a:xfrm>
-          <a:prstGeom prst="rect">
-            <a:avLst>
-              <a:gd name="adj" fmla="val 7692"/>
-            </a:avLst>
-          </a:prstGeom>
-          <a:solidFill>
-            <a:srgbClr val="FFFFFF"/>
-          </a:solidFill>
-          <a:ln w="12700">
-            <a:solidFill>
-              <a:srgbClr val="DB2777"/>
-            </a:solidFill>
-            <a:prstDash val="solid"/>
-          </a:ln>
-        </p:spPr>
-      </p:sp>
-      <p:sp>
-        <p:nvSpPr>
-          <p:cNvPr id="43" name="Text 41"/>
-          <p:cNvSpPr/>
-          <p:nvPr/>
-        </p:nvSpPr>
-        <p:spPr>
-          <a:xfrm>
-            <a:off x="4850892" y="4169664"/>
-            <a:ext cx="685800" cy="475488"/>
-          </a:xfrm>
-          <a:prstGeom prst="rect">
-            <a:avLst/>
-          </a:prstGeom>
-          <a:noFill/>
-          <a:ln/>
-        </p:spPr>
-        <p:txBody>
-          <a:bodyPr wrap="square" lIns="0" tIns="0" rIns="0" bIns="0" rtlCol="0" anchor="ctr"/>
-          <a:lstStyle/>
-          <a:p>
-            <a:pPr algn="ctr" indent="0" marL="0">
-              <a:buNone/>
-            </a:pPr>
-            <a:r>
-              <a:rPr lang="en-US" sz="900" b="1" dirty="0">
-                <a:solidFill>
-                  <a:srgbClr val="9D174D"/>
-                </a:solidFill>
-                <a:latin typeface="Trebuchet MS" pitchFamily="34" charset="0"/>
-                <a:ea typeface="Trebuchet MS" pitchFamily="34" charset="-122"/>
-                <a:cs typeface="Trebuchet MS" pitchFamily="34" charset="-120"/>
-              </a:rPr>
-              <a:t>p</a:t>
-            </a:r>
-            <a:endParaRPr lang="en-US" sz="900" dirty="0"/>
-          </a:p>
-        </p:txBody>
-      </p:sp>
-      <p:sp>
-        <p:nvSpPr>
-          <p:cNvPr id="44" name="Shape 42"/>
-          <p:cNvSpPr/>
-          <p:nvPr/>
-        </p:nvSpPr>
-        <p:spPr>
-          <a:xfrm>
-            <a:off x="5759577" y="4169664"/>
-            <a:ext cx="685800" cy="475488"/>
-          </a:xfrm>
-          <a:prstGeom prst="rect">
-            <a:avLst>
-              <a:gd name="adj" fmla="val 7692"/>
-            </a:avLst>
-          </a:prstGeom>
-          <a:solidFill>
-            <a:srgbClr val="FFFFFF"/>
-          </a:solidFill>
-          <a:ln w="12700">
-            <a:solidFill>
-              <a:srgbClr val="DB2777"/>
-            </a:solidFill>
-            <a:prstDash val="solid"/>
-          </a:ln>
-        </p:spPr>
-      </p:sp>
-      <p:sp>
-        <p:nvSpPr>
-          <p:cNvPr id="45" name="Text 43"/>
-          <p:cNvSpPr/>
-          <p:nvPr/>
-        </p:nvSpPr>
-        <p:spPr>
-          <a:xfrm>
-            <a:off x="5759577" y="4169664"/>
-            <a:ext cx="685800" cy="475488"/>
-          </a:xfrm>
-          <a:prstGeom prst="rect">
-            <a:avLst/>
-          </a:prstGeom>
-          <a:noFill/>
-          <a:ln/>
-        </p:spPr>
-        <p:txBody>
-          <a:bodyPr wrap="square" lIns="0" tIns="0" rIns="0" bIns="0" rtlCol="0" anchor="ctr"/>
-          <a:lstStyle/>
-          <a:p>
-            <a:pPr algn="ctr" indent="0" marL="0">
-              <a:buNone/>
-            </a:pPr>
-            <a:r>
-              <a:rPr lang="en-US" sz="900" b="1" dirty="0">
-                <a:solidFill>
-                  <a:srgbClr val="9D174D"/>
-                </a:solidFill>
-                <a:latin typeface="Trebuchet MS" pitchFamily="34" charset="0"/>
-                <a:ea typeface="Trebuchet MS" pitchFamily="34" charset="-122"/>
-                <a:cs typeface="Trebuchet MS" pitchFamily="34" charset="-120"/>
-              </a:rPr>
-              <a:t>e</a:t>
-            </a:r>
-            <a:endParaRPr lang="en-US" sz="900" dirty="0"/>
-          </a:p>
-        </p:txBody>
-      </p:sp>
-      <p:sp>
-        <p:nvSpPr>
-          <p:cNvPr id="46" name="Shape 44"/>
-          <p:cNvSpPr/>
-          <p:nvPr/>
-        </p:nvSpPr>
-        <p:spPr>
-          <a:xfrm>
-            <a:off x="6668262" y="4169664"/>
-            <a:ext cx="685800" cy="475488"/>
-          </a:xfrm>
-          <a:prstGeom prst="rect">
-            <a:avLst>
-              <a:gd name="adj" fmla="val 7692"/>
-            </a:avLst>
-          </a:prstGeom>
-          <a:solidFill>
-            <a:srgbClr val="FFFFFF"/>
-          </a:solidFill>
-          <a:ln w="12700">
-            <a:solidFill>
-              <a:srgbClr val="DB2777"/>
-            </a:solidFill>
-            <a:prstDash val="solid"/>
-          </a:ln>
-        </p:spPr>
-      </p:sp>
-      <p:sp>
-        <p:nvSpPr>
-          <p:cNvPr id="47" name="Text 45"/>
-          <p:cNvSpPr/>
-          <p:nvPr/>
-        </p:nvSpPr>
-        <p:spPr>
-          <a:xfrm>
-            <a:off x="6668262" y="4169664"/>
-            <a:ext cx="685800" cy="475488"/>
-          </a:xfrm>
-          <a:prstGeom prst="rect">
-            <a:avLst/>
-          </a:prstGeom>
-          <a:noFill/>
-          <a:ln/>
-        </p:spPr>
-        <p:txBody>
-          <a:bodyPr wrap="square" lIns="0" tIns="0" rIns="0" bIns="0" rtlCol="0" anchor="ctr"/>
-          <a:lstStyle/>
-          <a:p>
-            <a:pPr algn="ctr" indent="0" marL="0">
-              <a:buNone/>
-            </a:pPr>
-            <a:r>
-              <a:rPr lang="en-US" sz="900" b="1" dirty="0">
-                <a:solidFill>
-                  <a:srgbClr val="9D174D"/>
-                </a:solidFill>
-                <a:latin typeface="Trebuchet MS" pitchFamily="34" charset="0"/>
-                <a:ea typeface="Trebuchet MS" pitchFamily="34" charset="-122"/>
-                <a:cs typeface="Trebuchet MS" pitchFamily="34" charset="-120"/>
-              </a:rPr>
-              <a:t>ll</a:t>
-            </a:r>
-            <a:endParaRPr lang="en-US" sz="900" dirty="0"/>
-          </a:p>
-        </p:txBody>
-      </p:sp>
-      <p:sp>
-        <p:nvSpPr>
-          <p:cNvPr id="48" name="Shape 46"/>
-          <p:cNvSpPr/>
-          <p:nvPr/>
-        </p:nvSpPr>
-        <p:spPr>
-          <a:xfrm>
-            <a:off x="7576947" y="4169664"/>
-            <a:ext cx="685800" cy="475488"/>
-          </a:xfrm>
-          <a:prstGeom prst="rect">
-            <a:avLst>
-              <a:gd name="adj" fmla="val 7692"/>
-            </a:avLst>
-          </a:prstGeom>
-          <a:solidFill>
-            <a:srgbClr val="FFFFFF"/>
-          </a:solidFill>
-          <a:ln w="12700">
-            <a:solidFill>
-              <a:srgbClr val="DB2777"/>
-            </a:solidFill>
-            <a:prstDash val="solid"/>
-          </a:ln>
-        </p:spPr>
-      </p:sp>
-      <p:sp>
-        <p:nvSpPr>
-          <p:cNvPr id="49" name="Text 47"/>
-          <p:cNvSpPr/>
-          <p:nvPr/>
-        </p:nvSpPr>
-        <p:spPr>
-          <a:xfrm>
-            <a:off x="7576947" y="4169664"/>
-            <a:ext cx="685800" cy="475488"/>
-          </a:xfrm>
-          <a:prstGeom prst="rect">
-            <a:avLst/>
-          </a:prstGeom>
-          <a:noFill/>
-          <a:ln/>
-        </p:spPr>
-        <p:txBody>
-          <a:bodyPr wrap="square" lIns="0" tIns="0" rIns="0" bIns="0" rtlCol="0" anchor="ctr"/>
-          <a:lstStyle/>
-          <a:p>
-            <a:pPr algn="ctr" indent="0" marL="0">
-              <a:buNone/>
-            </a:pPr>
-            <a:r>
-              <a:rPr lang="en-US" sz="900" b="1" dirty="0">
-                <a:solidFill>
-                  <a:srgbClr val="9D174D"/>
-                </a:solidFill>
-                <a:latin typeface="Trebuchet MS" pitchFamily="34" charset="0"/>
-                <a:ea typeface="Trebuchet MS" pitchFamily="34" charset="-122"/>
-                <a:cs typeface="Trebuchet MS" pitchFamily="34" charset="-120"/>
-              </a:rPr>
-              <a:t>ed</a:t>
+              <a:t>ng</a:t>
             </a:r>
             <a:endParaRPr lang="en-US" sz="900" dirty="0"/>
           </a:p>
@@ -16910,7 +16469,7 @@
                 <a:ea typeface="Trebuchet MS" pitchFamily="34" charset="-122"/>
                 <a:cs typeface="Trebuchet MS" pitchFamily="34" charset="-120"/>
               </a:rPr>
-              <a:t>2</a:t>
+              <a:t>1</a:t>
             </a:r>
             <a:pPr algn="ctr" indent="0" marL="0">
               <a:buNone/>
@@ -16924,7 +16483,7 @@
                 <a:ea typeface="Trebuchet MS" pitchFamily="34" charset="-122"/>
                 <a:cs typeface="Trebuchet MS" pitchFamily="34" charset="-120"/>
               </a:rPr>
-              <a:t>  punctuation marks</a:t>
+              <a:t>  punctuation mark</a:t>
             </a:r>
             <a:endParaRPr lang="en-US" sz="2800" dirty="0"/>
           </a:p>
@@ -17345,7 +16904,7 @@
                 <a:ea typeface="Calibri" pitchFamily="34" charset="-122"/>
                 <a:cs typeface="Calibri" pitchFamily="34" charset="-120"/>
               </a:rPr>
-              <a:t>spelling</a:t>
+              <a:t>spellbound</a:t>
             </a:r>
             <a:pPr algn="l" indent="0" marL="0">
               <a:buNone/>
@@ -17359,7 +16918,7 @@
                 <a:ea typeface="Calibri" pitchFamily="34" charset="-122"/>
                 <a:cs typeface="Calibri" pitchFamily="34" charset="-120"/>
               </a:rPr>
-              <a:t> champion, who never </a:t>
+              <a:t> audience watched as the </a:t>
             </a:r>
             <a:pPr algn="l" indent="0" marL="0">
               <a:buNone/>
@@ -17376,7 +16935,7 @@
                 <a:ea typeface="Calibri" pitchFamily="34" charset="-122"/>
                 <a:cs typeface="Calibri" pitchFamily="34" charset="-120"/>
               </a:rPr>
-              <a:t>misspells</a:t>
+              <a:t>speller</a:t>
             </a:r>
             <a:pPr algn="l" indent="0" marL="0">
               <a:buNone/>
@@ -17390,7 +16949,7 @@
                 <a:ea typeface="Calibri" pitchFamily="34" charset="-122"/>
                 <a:cs typeface="Calibri" pitchFamily="34" charset="-120"/>
               </a:rPr>
-              <a:t> a word, left the whole crowd </a:t>
+              <a:t> wrote each word, and the </a:t>
             </a:r>
             <a:pPr algn="l" indent="0" marL="0">
               <a:buNone/>
@@ -17407,7 +16966,7 @@
                 <a:ea typeface="Calibri" pitchFamily="34" charset="-122"/>
                 <a:cs typeface="Calibri" pitchFamily="34" charset="-120"/>
               </a:rPr>
-              <a:t>spellbound</a:t>
+              <a:t>spellcheck</a:t>
             </a:r>
             <a:pPr algn="l" indent="0" marL="0">
               <a:buNone/>
@@ -17421,7 +16980,7 @@
                 <a:ea typeface="Calibri" pitchFamily="34" charset="-122"/>
                 <a:cs typeface="Calibri" pitchFamily="34" charset="-120"/>
               </a:rPr>
-              <a:t>.</a:t>
+              <a:t> confirmed there were no mistakes.</a:t>
             </a:r>
             <a:endParaRPr lang="en-US" sz="1800" dirty="0"/>
           </a:p>
@@ -17576,7 +17135,7 @@
                 <a:ea typeface="Trebuchet MS" pitchFamily="34" charset="-122"/>
                 <a:cs typeface="Trebuchet MS" pitchFamily="34" charset="-120"/>
               </a:rPr>
-              <a:t>spelling</a:t>
+              <a:t>spellbound</a:t>
             </a:r>
             <a:endParaRPr lang="en-US" sz="1400" dirty="0"/>
           </a:p>
@@ -17704,7 +17263,7 @@
                 <a:ea typeface="Trebuchet MS" pitchFamily="34" charset="-122"/>
                 <a:cs typeface="Trebuchet MS" pitchFamily="34" charset="-120"/>
               </a:rPr>
-              <a:t>misspells</a:t>
+              <a:t>speller</a:t>
             </a:r>
             <a:endParaRPr lang="en-US" sz="1400" dirty="0"/>
           </a:p>
@@ -17832,7 +17391,7 @@
                 <a:ea typeface="Trebuchet MS" pitchFamily="34" charset="-122"/>
                 <a:cs typeface="Trebuchet MS" pitchFamily="34" charset="-120"/>
               </a:rPr>
-              <a:t>spellbound</a:t>
+              <a:t>spellcheck</a:t>
             </a:r>
             <a:endParaRPr lang="en-US" sz="1400" dirty="0"/>
           </a:p>
@@ -18302,7 +17861,7 @@
                 <a:ea typeface="Trebuchet MS" pitchFamily="34" charset="-122"/>
                 <a:cs typeface="Trebuchet MS" pitchFamily="34" charset="-120"/>
               </a:rPr>
-              <a:t>spelling</a:t>
+              <a:t>spellbound</a:t>
             </a:r>
             <a:endParaRPr lang="en-US" sz="2800" dirty="0"/>
           </a:p>
@@ -19129,7 +18688,7 @@
                 <a:ea typeface="Trebuchet MS" pitchFamily="34" charset="-122"/>
                 <a:cs typeface="Trebuchet MS" pitchFamily="34" charset="-120"/>
               </a:rPr>
-              <a:t>spelling</a:t>
+              <a:t>spellbound</a:t>
             </a:r>
             <a:endParaRPr lang="en-US" sz="2800" dirty="0"/>
           </a:p>
@@ -19380,7 +18939,7 @@
                 <a:ea typeface="Trebuchet MS" pitchFamily="34" charset="-122"/>
                 <a:cs typeface="Trebuchet MS" pitchFamily="34" charset="-120"/>
               </a:rPr>
-              <a:t>ing</a:t>
+              <a:t>bound</a:t>
             </a:r>
             <a:endParaRPr lang="en-US" sz="1300" dirty="0"/>
           </a:p>
@@ -19419,7 +18978,7 @@
                 <a:ea typeface="Calibri" pitchFamily="34" charset="-122"/>
                 <a:cs typeface="Calibri" pitchFamily="34" charset="-120"/>
               </a:rPr>
-              <a:t>action happening now</a:t>
+              <a:t>held or tied</a:t>
             </a:r>
             <a:endParaRPr lang="en-US" sz="850" dirty="0"/>
           </a:p>
@@ -20114,7 +19673,7 @@
                 <a:ea typeface="Trebuchet MS" pitchFamily="34" charset="-122"/>
                 <a:cs typeface="Trebuchet MS" pitchFamily="34" charset="-120"/>
               </a:rPr>
-              <a:t>spelling</a:t>
+              <a:t>spellbound</a:t>
             </a:r>
             <a:endParaRPr lang="en-US" sz="2800" dirty="0"/>
           </a:p>
@@ -20365,7 +19924,7 @@
                 <a:ea typeface="Trebuchet MS" pitchFamily="34" charset="-122"/>
                 <a:cs typeface="Trebuchet MS" pitchFamily="34" charset="-120"/>
               </a:rPr>
-              <a:t>ing</a:t>
+              <a:t>bound</a:t>
             </a:r>
             <a:endParaRPr lang="en-US" sz="1300" dirty="0"/>
           </a:p>
@@ -20404,7 +19963,7 @@
                 <a:ea typeface="Calibri" pitchFamily="34" charset="-122"/>
                 <a:cs typeface="Calibri" pitchFamily="34" charset="-120"/>
               </a:rPr>
-              <a:t>action happening now</a:t>
+              <a:t>held or tied</a:t>
             </a:r>
             <a:endParaRPr lang="en-US" sz="850" dirty="0"/>
           </a:p>
@@ -20668,7 +20227,7 @@
                 <a:ea typeface="Trebuchet MS" pitchFamily="34" charset="-122"/>
                 <a:cs typeface="Trebuchet MS" pitchFamily="34" charset="-120"/>
               </a:rPr>
-              <a:t>ing</a:t>
+              <a:t>bound</a:t>
             </a:r>
             <a:endParaRPr lang="en-US" sz="1400" dirty="0"/>
           </a:p>
@@ -21231,7 +20790,7 @@
                 <a:ea typeface="Trebuchet MS" pitchFamily="34" charset="-122"/>
                 <a:cs typeface="Trebuchet MS" pitchFamily="34" charset="-120"/>
               </a:rPr>
-              <a:t>spelling</a:t>
+              <a:t>spellbound</a:t>
             </a:r>
             <a:endParaRPr lang="en-US" sz="2800" dirty="0"/>
           </a:p>
@@ -21482,7 +21041,7 @@
                 <a:ea typeface="Trebuchet MS" pitchFamily="34" charset="-122"/>
                 <a:cs typeface="Trebuchet MS" pitchFamily="34" charset="-120"/>
               </a:rPr>
-              <a:t>ing</a:t>
+              <a:t>bound</a:t>
             </a:r>
             <a:endParaRPr lang="en-US" sz="1300" dirty="0"/>
           </a:p>
@@ -21521,7 +21080,7 @@
                 <a:ea typeface="Calibri" pitchFamily="34" charset="-122"/>
                 <a:cs typeface="Calibri" pitchFamily="34" charset="-120"/>
               </a:rPr>
-              <a:t>action happening now</a:t>
+              <a:t>held or tied</a:t>
             </a:r>
             <a:endParaRPr lang="en-US" sz="850" dirty="0"/>
           </a:p>
@@ -21785,7 +21344,7 @@
                 <a:ea typeface="Trebuchet MS" pitchFamily="34" charset="-122"/>
                 <a:cs typeface="Trebuchet MS" pitchFamily="34" charset="-120"/>
               </a:rPr>
-              <a:t>ing</a:t>
+              <a:t>bound</a:t>
             </a:r>
             <a:endParaRPr lang="en-US" sz="1400" dirty="0"/>
           </a:p>
@@ -21892,7 +21451,7 @@
         </p:nvSpPr>
         <p:spPr>
           <a:xfrm>
-            <a:off x="2254649" y="4169664"/>
+            <a:off x="2023872" y="4169664"/>
             <a:ext cx="685800" cy="475488"/>
           </a:xfrm>
           <a:prstGeom prst="rect">
@@ -21919,7 +21478,7 @@
         </p:nvSpPr>
         <p:spPr>
           <a:xfrm>
-            <a:off x="2254649" y="4169664"/>
+            <a:off x="2023872" y="4169664"/>
             <a:ext cx="685800" cy="475488"/>
           </a:xfrm>
           <a:prstGeom prst="rect">
@@ -21958,7 +21517,7 @@
         </p:nvSpPr>
         <p:spPr>
           <a:xfrm>
-            <a:off x="3293146" y="4169664"/>
+            <a:off x="2831592" y="4169664"/>
             <a:ext cx="685800" cy="475488"/>
           </a:xfrm>
           <a:prstGeom prst="rect">
@@ -21985,7 +21544,7 @@
         </p:nvSpPr>
         <p:spPr>
           <a:xfrm>
-            <a:off x="3293146" y="4169664"/>
+            <a:off x="2831592" y="4169664"/>
             <a:ext cx="685800" cy="475488"/>
           </a:xfrm>
           <a:prstGeom prst="rect">
@@ -22024,7 +21583,7 @@
         </p:nvSpPr>
         <p:spPr>
           <a:xfrm>
-            <a:off x="4331643" y="4169664"/>
+            <a:off x="3639312" y="4169664"/>
             <a:ext cx="685800" cy="475488"/>
           </a:xfrm>
           <a:prstGeom prst="rect">
@@ -22051,7 +21610,7 @@
         </p:nvSpPr>
         <p:spPr>
           <a:xfrm>
-            <a:off x="4331643" y="4169664"/>
+            <a:off x="3639312" y="4169664"/>
             <a:ext cx="685800" cy="475488"/>
           </a:xfrm>
           <a:prstGeom prst="rect">
@@ -22090,7 +21649,7 @@
         </p:nvSpPr>
         <p:spPr>
           <a:xfrm>
-            <a:off x="5370141" y="4169664"/>
+            <a:off x="4447032" y="4169664"/>
             <a:ext cx="685800" cy="475488"/>
           </a:xfrm>
           <a:prstGeom prst="rect">
@@ -22117,7 +21676,7 @@
         </p:nvSpPr>
         <p:spPr>
           <a:xfrm>
-            <a:off x="5370141" y="4169664"/>
+            <a:off x="4447032" y="4169664"/>
             <a:ext cx="685800" cy="475488"/>
           </a:xfrm>
           <a:prstGeom prst="rect">
@@ -22156,7 +21715,7 @@
         </p:nvSpPr>
         <p:spPr>
           <a:xfrm>
-            <a:off x="6408638" y="4169664"/>
+            <a:off x="5254752" y="4169664"/>
             <a:ext cx="685800" cy="475488"/>
           </a:xfrm>
           <a:prstGeom prst="rect">
@@ -22183,7 +21742,7 @@
         </p:nvSpPr>
         <p:spPr>
           <a:xfrm>
-            <a:off x="6408638" y="4169664"/>
+            <a:off x="5254752" y="4169664"/>
             <a:ext cx="685800" cy="475488"/>
           </a:xfrm>
           <a:prstGeom prst="rect">
@@ -22208,7 +21767,7 @@
                 <a:ea typeface="Trebuchet MS" pitchFamily="34" charset="-122"/>
                 <a:cs typeface="Trebuchet MS" pitchFamily="34" charset="-120"/>
               </a:rPr>
-              <a:t>i</a:t>
+              <a:t>b</a:t>
             </a:r>
             <a:endParaRPr lang="en-US" sz="900" dirty="0"/>
           </a:p>
@@ -22222,7 +21781,7 @@
         </p:nvSpPr>
         <p:spPr>
           <a:xfrm>
-            <a:off x="7447135" y="4169664"/>
+            <a:off x="6062472" y="4169664"/>
             <a:ext cx="685800" cy="475488"/>
           </a:xfrm>
           <a:prstGeom prst="rect">
@@ -22249,7 +21808,7 @@
         </p:nvSpPr>
         <p:spPr>
           <a:xfrm>
-            <a:off x="7447135" y="4169664"/>
+            <a:off x="6062472" y="4169664"/>
             <a:ext cx="685800" cy="475488"/>
           </a:xfrm>
           <a:prstGeom prst="rect">
@@ -22274,7 +21833,139 @@
                 <a:ea typeface="Trebuchet MS" pitchFamily="34" charset="-122"/>
                 <a:cs typeface="Trebuchet MS" pitchFamily="34" charset="-120"/>
               </a:rPr>
-              <a:t>ng</a:t>
+              <a:t>ou</a:t>
+            </a:r>
+            <a:endParaRPr lang="en-US" sz="900" dirty="0"/>
+          </a:p>
+        </p:txBody>
+      </p:sp>
+      <p:sp>
+        <p:nvSpPr>
+          <p:cNvPr id="45" name="Shape 43"/>
+          <p:cNvSpPr/>
+          <p:nvPr/>
+        </p:nvSpPr>
+        <p:spPr>
+          <a:xfrm>
+            <a:off x="6870192" y="4169664"/>
+            <a:ext cx="685800" cy="475488"/>
+          </a:xfrm>
+          <a:prstGeom prst="rect">
+            <a:avLst>
+              <a:gd name="adj" fmla="val 7692"/>
+            </a:avLst>
+          </a:prstGeom>
+          <a:solidFill>
+            <a:srgbClr val="FFFFFF"/>
+          </a:solidFill>
+          <a:ln w="12700">
+            <a:solidFill>
+              <a:srgbClr val="DB2777"/>
+            </a:solidFill>
+            <a:prstDash val="solid"/>
+          </a:ln>
+        </p:spPr>
+      </p:sp>
+      <p:sp>
+        <p:nvSpPr>
+          <p:cNvPr id="46" name="Text 44"/>
+          <p:cNvSpPr/>
+          <p:nvPr/>
+        </p:nvSpPr>
+        <p:spPr>
+          <a:xfrm>
+            <a:off x="6870192" y="4169664"/>
+            <a:ext cx="685800" cy="475488"/>
+          </a:xfrm>
+          <a:prstGeom prst="rect">
+            <a:avLst/>
+          </a:prstGeom>
+          <a:noFill/>
+          <a:ln/>
+        </p:spPr>
+        <p:txBody>
+          <a:bodyPr wrap="square" lIns="0" tIns="0" rIns="0" bIns="0" rtlCol="0" anchor="ctr"/>
+          <a:lstStyle/>
+          <a:p>
+            <a:pPr algn="ctr" indent="0" marL="0">
+              <a:buNone/>
+            </a:pPr>
+            <a:r>
+              <a:rPr lang="en-US" sz="900" b="1" dirty="0">
+                <a:solidFill>
+                  <a:srgbClr val="9D174D"/>
+                </a:solidFill>
+                <a:latin typeface="Trebuchet MS" pitchFamily="34" charset="0"/>
+                <a:ea typeface="Trebuchet MS" pitchFamily="34" charset="-122"/>
+                <a:cs typeface="Trebuchet MS" pitchFamily="34" charset="-120"/>
+              </a:rPr>
+              <a:t>n</a:t>
+            </a:r>
+            <a:endParaRPr lang="en-US" sz="900" dirty="0"/>
+          </a:p>
+        </p:txBody>
+      </p:sp>
+      <p:sp>
+        <p:nvSpPr>
+          <p:cNvPr id="47" name="Shape 45"/>
+          <p:cNvSpPr/>
+          <p:nvPr/>
+        </p:nvSpPr>
+        <p:spPr>
+          <a:xfrm>
+            <a:off x="7677912" y="4169664"/>
+            <a:ext cx="685800" cy="475488"/>
+          </a:xfrm>
+          <a:prstGeom prst="rect">
+            <a:avLst>
+              <a:gd name="adj" fmla="val 7692"/>
+            </a:avLst>
+          </a:prstGeom>
+          <a:solidFill>
+            <a:srgbClr val="FFFFFF"/>
+          </a:solidFill>
+          <a:ln w="12700">
+            <a:solidFill>
+              <a:srgbClr val="DB2777"/>
+            </a:solidFill>
+            <a:prstDash val="solid"/>
+          </a:ln>
+        </p:spPr>
+      </p:sp>
+      <p:sp>
+        <p:nvSpPr>
+          <p:cNvPr id="48" name="Text 46"/>
+          <p:cNvSpPr/>
+          <p:nvPr/>
+        </p:nvSpPr>
+        <p:spPr>
+          <a:xfrm>
+            <a:off x="7677912" y="4169664"/>
+            <a:ext cx="685800" cy="475488"/>
+          </a:xfrm>
+          <a:prstGeom prst="rect">
+            <a:avLst/>
+          </a:prstGeom>
+          <a:noFill/>
+          <a:ln/>
+        </p:spPr>
+        <p:txBody>
+          <a:bodyPr wrap="square" lIns="0" tIns="0" rIns="0" bIns="0" rtlCol="0" anchor="ctr"/>
+          <a:lstStyle/>
+          <a:p>
+            <a:pPr algn="ctr" indent="0" marL="0">
+              <a:buNone/>
+            </a:pPr>
+            <a:r>
+              <a:rPr lang="en-US" sz="900" b="1" dirty="0">
+                <a:solidFill>
+                  <a:srgbClr val="9D174D"/>
+                </a:solidFill>
+                <a:latin typeface="Trebuchet MS" pitchFamily="34" charset="0"/>
+                <a:ea typeface="Trebuchet MS" pitchFamily="34" charset="-122"/>
+                <a:cs typeface="Trebuchet MS" pitchFamily="34" charset="-120"/>
+              </a:rPr>
+              <a:t>d</a:t>
             </a:r>
             <a:endParaRPr lang="en-US" sz="900" dirty="0"/>
           </a:p>
@@ -22705,7 +22396,7 @@
                 <a:ea typeface="Trebuchet MS" pitchFamily="34" charset="-122"/>
                 <a:cs typeface="Trebuchet MS" pitchFamily="34" charset="-120"/>
               </a:rPr>
-              <a:t>misspells</a:t>
+              <a:t>speller</a:t>
             </a:r>
             <a:endParaRPr lang="en-US" sz="2800" dirty="0"/>
           </a:p>
@@ -23532,7 +23223,7 @@
                 <a:ea typeface="Trebuchet MS" pitchFamily="34" charset="-122"/>
                 <a:cs typeface="Trebuchet MS" pitchFamily="34" charset="-120"/>
               </a:rPr>
-              <a:t>misspells</a:t>
+              <a:t>speller</a:t>
             </a:r>
             <a:endParaRPr lang="en-US" sz="2800" dirty="0"/>
           </a:p>
@@ -23612,7 +23303,7 @@
         </p:nvSpPr>
         <p:spPr>
           <a:xfrm>
-            <a:off x="2221992" y="2258568"/>
+            <a:off x="2938272" y="2258568"/>
             <a:ext cx="1828800" cy="292608"/>
           </a:xfrm>
           <a:prstGeom prst="rect">
@@ -23621,11 +23312,11 @@
             </a:avLst>
           </a:prstGeom>
           <a:solidFill>
-            <a:srgbClr val="DDD6FE"/>
+            <a:srgbClr val="CCFBF1"/>
           </a:solidFill>
           <a:ln w="19050">
             <a:solidFill>
-              <a:srgbClr val="7C3AED"/>
+              <a:srgbClr val="0D9488"/>
             </a:solidFill>
             <a:prstDash val="solid"/>
           </a:ln>
@@ -23646,7 +23337,7 @@
         </p:nvSpPr>
         <p:spPr>
           <a:xfrm>
-            <a:off x="2221992" y="2258568"/>
+            <a:off x="2938272" y="2258568"/>
             <a:ext cx="1828800" cy="292608"/>
           </a:xfrm>
           <a:prstGeom prst="rect">
@@ -23665,13 +23356,13 @@
             <a:r>
               <a:rPr lang="en-US" sz="1300" b="1" dirty="0">
                 <a:solidFill>
-                  <a:srgbClr val="4C1D95"/>
+                  <a:srgbClr val="0F766E"/>
                 </a:solidFill>
                 <a:latin typeface="Trebuchet MS" pitchFamily="34" charset="0"/>
                 <a:ea typeface="Trebuchet MS" pitchFamily="34" charset="-122"/>
                 <a:cs typeface="Trebuchet MS" pitchFamily="34" charset="-120"/>
               </a:rPr>
-              <a:t>mis</a:t>
+              <a:t>spell</a:t>
             </a:r>
             <a:endParaRPr lang="en-US" sz="1300" dirty="0"/>
           </a:p>
@@ -23685,7 +23376,7 @@
         </p:nvSpPr>
         <p:spPr>
           <a:xfrm>
-            <a:off x="2221992" y="2569464"/>
+            <a:off x="2938272" y="2569464"/>
             <a:ext cx="1828800" cy="201168"/>
           </a:xfrm>
           <a:prstGeom prst="rect">
@@ -23710,7 +23401,7 @@
                 <a:ea typeface="Calibri" pitchFamily="34" charset="-122"/>
                 <a:cs typeface="Calibri" pitchFamily="34" charset="-120"/>
               </a:rPr>
-              <a:t>wrongly or badly</a:t>
+              <a:t>to name letters in order</a:t>
             </a:r>
             <a:endParaRPr lang="en-US" sz="850" dirty="0"/>
           </a:p>
@@ -23724,7 +23415,7 @@
         </p:nvSpPr>
         <p:spPr>
           <a:xfrm>
-            <a:off x="4370832" y="2258568"/>
+            <a:off x="5803392" y="2258568"/>
             <a:ext cx="1828800" cy="292608"/>
           </a:xfrm>
           <a:prstGeom prst="rect">
@@ -23733,11 +23424,11 @@
             </a:avLst>
           </a:prstGeom>
           <a:solidFill>
-            <a:srgbClr val="CCFBF1"/>
+            <a:srgbClr val="FCE7F3"/>
           </a:solidFill>
           <a:ln w="19050">
             <a:solidFill>
-              <a:srgbClr val="0D9488"/>
+              <a:srgbClr val="DB2777"/>
             </a:solidFill>
             <a:prstDash val="solid"/>
           </a:ln>
@@ -23758,7 +23449,7 @@
         </p:nvSpPr>
         <p:spPr>
           <a:xfrm>
-            <a:off x="4370832" y="2258568"/>
+            <a:off x="5803392" y="2258568"/>
             <a:ext cx="1828800" cy="292608"/>
           </a:xfrm>
           <a:prstGeom prst="rect">
@@ -23777,13 +23468,13 @@
             <a:r>
               <a:rPr lang="en-US" sz="1300" b="1" dirty="0">
                 <a:solidFill>
-                  <a:srgbClr val="0F766E"/>
+                  <a:srgbClr val="9D174D"/>
                 </a:solidFill>
                 <a:latin typeface="Trebuchet MS" pitchFamily="34" charset="0"/>
                 <a:ea typeface="Trebuchet MS" pitchFamily="34" charset="-122"/>
                 <a:cs typeface="Trebuchet MS" pitchFamily="34" charset="-120"/>
               </a:rPr>
-              <a:t>spell</a:t>
+              <a:t>er</a:t>
             </a:r>
             <a:endParaRPr lang="en-US" sz="1300" dirty="0"/>
           </a:p>
@@ -23797,7 +23488,7 @@
         </p:nvSpPr>
         <p:spPr>
           <a:xfrm>
-            <a:off x="4370832" y="2569464"/>
+            <a:off x="5803392" y="2569464"/>
             <a:ext cx="1828800" cy="201168"/>
           </a:xfrm>
           <a:prstGeom prst="rect">
@@ -23822,7 +23513,7 @@
                 <a:ea typeface="Calibri" pitchFamily="34" charset="-122"/>
                 <a:cs typeface="Calibri" pitchFamily="34" charset="-120"/>
               </a:rPr>
-              <a:t>to name letters in order</a:t>
+              <a:t>a person who does something</a:t>
             </a:r>
             <a:endParaRPr lang="en-US" sz="850" dirty="0"/>
           </a:p>
@@ -23836,30 +23527,23 @@
         </p:nvSpPr>
         <p:spPr>
           <a:xfrm>
-            <a:off x="6519672" y="2258568"/>
-            <a:ext cx="1828800" cy="292608"/>
+            <a:off x="365760" y="3273552"/>
+            <a:ext cx="1371600" cy="658368"/>
           </a:xfrm>
           <a:prstGeom prst="rect">
             <a:avLst>
-              <a:gd name="adj" fmla="val 25000"/>
+              <a:gd name="adj" fmla="val 8333"/>
             </a:avLst>
           </a:prstGeom>
           <a:solidFill>
-            <a:srgbClr val="FCE7F3"/>
-          </a:solidFill>
-          <a:ln w="19050">
-            <a:solidFill>
-              <a:srgbClr val="DB2777"/>
-            </a:solidFill>
-            <a:prstDash val="solid"/>
-          </a:ln>
-          <a:effectLst>
-            <a:outerShdw sx="100000" sy="100000" kx="0" ky="0" algn="bl" rotWithShape="0" blurRad="101600" dist="38100" dir="8100000">
-              <a:srgbClr val="000000">
-                <a:alpha val="12000"/>
-              </a:srgbClr>
-            </a:outerShdw>
-          </a:effectLst>
+            <a:srgbClr val="E2E8F0"/>
+          </a:solidFill>
+          <a:ln w="12700">
+            <a:solidFill>
+              <a:srgbClr val="E2E8F0"/>
+            </a:solidFill>
+            <a:prstDash val="solid"/>
+          </a:ln>
         </p:spPr>
       </p:sp>
       <p:sp>
@@ -23870,8 +23554,8 @@
         </p:nvSpPr>
         <p:spPr>
           <a:xfrm>
-            <a:off x="6519672" y="2258568"/>
-            <a:ext cx="1828800" cy="292608"/>
+            <a:off x="365760" y="3273552"/>
+            <a:ext cx="1371600" cy="658368"/>
           </a:xfrm>
           <a:prstGeom prst="rect">
             <a:avLst/>
@@ -23887,73 +23571,100 @@
               <a:buNone/>
             </a:pPr>
             <a:r>
-              <a:rPr lang="en-US" sz="1300" b="1" dirty="0">
-                <a:solidFill>
-                  <a:srgbClr val="9D174D"/>
+              <a:rPr lang="en-US" sz="1100" b="1" dirty="0">
+                <a:solidFill>
+                  <a:srgbClr val="475569"/>
                 </a:solidFill>
                 <a:latin typeface="Trebuchet MS" pitchFamily="34" charset="0"/>
                 <a:ea typeface="Trebuchet MS" pitchFamily="34" charset="-122"/>
                 <a:cs typeface="Trebuchet MS" pitchFamily="34" charset="-120"/>
               </a:rPr>
-              <a:t>s</a:t>
-            </a:r>
-            <a:endParaRPr lang="en-US" sz="1300" dirty="0"/>
-          </a:p>
-        </p:txBody>
-      </p:sp>
-      <p:sp>
-        <p:nvSpPr>
-          <p:cNvPr id="24" name="Text 22"/>
-          <p:cNvSpPr/>
-          <p:nvPr/>
-        </p:nvSpPr>
-        <p:spPr>
-          <a:xfrm>
-            <a:off x="6519672" y="2569464"/>
-            <a:ext cx="1828800" cy="201168"/>
-          </a:xfrm>
-          <a:prstGeom prst="rect">
-            <a:avLst/>
-          </a:prstGeom>
-          <a:noFill/>
-          <a:ln/>
-        </p:spPr>
-        <p:txBody>
-          <a:bodyPr wrap="square" lIns="0" tIns="0" rIns="0" bIns="0" rtlCol="0" anchor="t"/>
-          <a:lstStyle/>
-          <a:p>
-            <a:pPr algn="ctr" indent="0" marL="0">
-              <a:buNone/>
-            </a:pPr>
-            <a:r>
-              <a:rPr lang="en-US" sz="850" dirty="0">
-                <a:solidFill>
-                  <a:srgbClr val="475569"/>
+              <a:t>Syllables</a:t>
+            </a:r>
+            <a:endParaRPr lang="en-US" sz="1100" dirty="0"/>
+          </a:p>
+        </p:txBody>
+      </p:sp>
+      <p:sp>
+        <p:nvSpPr>
+          <p:cNvPr id="24" name="Shape 22"/>
+          <p:cNvSpPr/>
+          <p:nvPr/>
+        </p:nvSpPr>
+        <p:spPr>
+          <a:xfrm>
+            <a:off x="1874520" y="3273552"/>
+            <a:ext cx="6903720" cy="658368"/>
+          </a:xfrm>
+          <a:prstGeom prst="rect">
+            <a:avLst>
+              <a:gd name="adj" fmla="val 8333"/>
+            </a:avLst>
+          </a:prstGeom>
+          <a:solidFill>
+            <a:srgbClr val="F8FAFC"/>
+          </a:solidFill>
+          <a:ln w="12700">
+            <a:solidFill>
+              <a:srgbClr val="E2E8F0"/>
+            </a:solidFill>
+            <a:prstDash val="dash"/>
+          </a:ln>
+        </p:spPr>
+      </p:sp>
+      <p:sp>
+        <p:nvSpPr>
+          <p:cNvPr id="25" name="Text 23"/>
+          <p:cNvSpPr/>
+          <p:nvPr/>
+        </p:nvSpPr>
+        <p:spPr>
+          <a:xfrm>
+            <a:off x="1874520" y="3273552"/>
+            <a:ext cx="6903720" cy="658368"/>
+          </a:xfrm>
+          <a:prstGeom prst="rect">
+            <a:avLst/>
+          </a:prstGeom>
+          <a:noFill/>
+          <a:ln/>
+        </p:spPr>
+        <p:txBody>
+          <a:bodyPr wrap="square" rtlCol="0" anchor="ctr"/>
+          <a:lstStyle/>
+          <a:p>
+            <a:pPr algn="ctr" indent="0" marL="0">
+              <a:buNone/>
+            </a:pPr>
+            <a:r>
+              <a:rPr lang="en-US" sz="1100" i="1" dirty="0">
+                <a:solidFill>
+                  <a:srgbClr val="CBD5E1"/>
                 </a:solidFill>
                 <a:latin typeface="Calibri" pitchFamily="34" charset="0"/>
                 <a:ea typeface="Calibri" pitchFamily="34" charset="-122"/>
                 <a:cs typeface="Calibri" pitchFamily="34" charset="-120"/>
               </a:rPr>
-              <a:t>third person singular present tense</a:t>
-            </a:r>
-            <a:endParaRPr lang="en-US" sz="850" dirty="0"/>
-          </a:p>
-        </p:txBody>
-      </p:sp>
-      <p:sp>
-        <p:nvSpPr>
-          <p:cNvPr id="25" name="Shape 23"/>
-          <p:cNvSpPr/>
-          <p:nvPr/>
-        </p:nvSpPr>
-        <p:spPr>
-          <a:xfrm>
-            <a:off x="365760" y="3273552"/>
-            <a:ext cx="1371600" cy="658368"/>
+              <a:t>Write here...</a:t>
+            </a:r>
+            <a:endParaRPr lang="en-US" sz="1100" dirty="0"/>
+          </a:p>
+        </p:txBody>
+      </p:sp>
+      <p:sp>
+        <p:nvSpPr>
+          <p:cNvPr id="26" name="Shape 24"/>
+          <p:cNvSpPr/>
+          <p:nvPr/>
+        </p:nvSpPr>
+        <p:spPr>
+          <a:xfrm>
+            <a:off x="365760" y="4096512"/>
+            <a:ext cx="1371600" cy="804672"/>
           </a:xfrm>
           <a:prstGeom prst="rect">
             <a:avLst>
-              <a:gd name="adj" fmla="val 8333"/>
+              <a:gd name="adj" fmla="val 6818"/>
             </a:avLst>
           </a:prstGeom>
           <a:solidFill>
@@ -23969,14 +23680,14 @@
       </p:sp>
       <p:sp>
         <p:nvSpPr>
-          <p:cNvPr id="26" name="Text 24"/>
-          <p:cNvSpPr/>
-          <p:nvPr/>
-        </p:nvSpPr>
-        <p:spPr>
-          <a:xfrm>
-            <a:off x="365760" y="3273552"/>
-            <a:ext cx="1371600" cy="658368"/>
+          <p:cNvPr id="27" name="Text 25"/>
+          <p:cNvSpPr/>
+          <p:nvPr/>
+        </p:nvSpPr>
+        <p:spPr>
+          <a:xfrm>
+            <a:off x="365760" y="4096512"/>
+            <a:ext cx="1371600" cy="804672"/>
           </a:xfrm>
           <a:prstGeom prst="rect">
             <a:avLst/>
@@ -24000,7 +23711,7 @@
                 <a:ea typeface="Trebuchet MS" pitchFamily="34" charset="-122"/>
                 <a:cs typeface="Trebuchet MS" pitchFamily="34" charset="-120"/>
               </a:rPr>
-              <a:t>Syllables</a:t>
+              <a:t>Phonemes</a:t>
             </a:r>
             <a:endParaRPr lang="en-US" sz="1100" dirty="0"/>
           </a:p>
@@ -24008,80 +23719,14 @@
       </p:sp>
       <p:sp>
         <p:nvSpPr>
-          <p:cNvPr id="27" name="Shape 25"/>
-          <p:cNvSpPr/>
-          <p:nvPr/>
-        </p:nvSpPr>
-        <p:spPr>
-          <a:xfrm>
-            <a:off x="1874520" y="3273552"/>
-            <a:ext cx="6903720" cy="658368"/>
-          </a:xfrm>
-          <a:prstGeom prst="rect">
-            <a:avLst>
-              <a:gd name="adj" fmla="val 8333"/>
-            </a:avLst>
-          </a:prstGeom>
-          <a:solidFill>
-            <a:srgbClr val="F8FAFC"/>
-          </a:solidFill>
-          <a:ln w="12700">
-            <a:solidFill>
-              <a:srgbClr val="E2E8F0"/>
-            </a:solidFill>
-            <a:prstDash val="dash"/>
-          </a:ln>
-        </p:spPr>
-      </p:sp>
-      <p:sp>
-        <p:nvSpPr>
-          <p:cNvPr id="28" name="Text 26"/>
-          <p:cNvSpPr/>
-          <p:nvPr/>
-        </p:nvSpPr>
-        <p:spPr>
-          <a:xfrm>
-            <a:off x="1874520" y="3273552"/>
-            <a:ext cx="6903720" cy="658368"/>
-          </a:xfrm>
-          <a:prstGeom prst="rect">
-            <a:avLst/>
-          </a:prstGeom>
-          <a:noFill/>
-          <a:ln/>
-        </p:spPr>
-        <p:txBody>
-          <a:bodyPr wrap="square" rtlCol="0" anchor="ctr"/>
-          <a:lstStyle/>
-          <a:p>
-            <a:pPr algn="ctr" indent="0" marL="0">
-              <a:buNone/>
-            </a:pPr>
-            <a:r>
-              <a:rPr lang="en-US" sz="1100" i="1" dirty="0">
-                <a:solidFill>
-                  <a:srgbClr val="CBD5E1"/>
-                </a:solidFill>
-                <a:latin typeface="Calibri" pitchFamily="34" charset="0"/>
-                <a:ea typeface="Calibri" pitchFamily="34" charset="-122"/>
-                <a:cs typeface="Calibri" pitchFamily="34" charset="-120"/>
-              </a:rPr>
-              <a:t>Write here...</a:t>
-            </a:r>
-            <a:endParaRPr lang="en-US" sz="1100" dirty="0"/>
-          </a:p>
-        </p:txBody>
-      </p:sp>
-      <p:sp>
-        <p:nvSpPr>
-          <p:cNvPr id="29" name="Shape 27"/>
-          <p:cNvSpPr/>
-          <p:nvPr/>
-        </p:nvSpPr>
-        <p:spPr>
-          <a:xfrm>
-            <a:off x="365760" y="4096512"/>
-            <a:ext cx="1371600" cy="804672"/>
+          <p:cNvPr id="28" name="Shape 26"/>
+          <p:cNvSpPr/>
+          <p:nvPr/>
+        </p:nvSpPr>
+        <p:spPr>
+          <a:xfrm>
+            <a:off x="1874520" y="4096512"/>
+            <a:ext cx="6903720" cy="804672"/>
           </a:xfrm>
           <a:prstGeom prst="rect">
             <a:avLst>
@@ -24089,85 +23734,19 @@
             </a:avLst>
           </a:prstGeom>
           <a:solidFill>
-            <a:srgbClr val="E2E8F0"/>
+            <a:srgbClr val="F8FAFC"/>
           </a:solidFill>
           <a:ln w="12700">
             <a:solidFill>
               <a:srgbClr val="E2E8F0"/>
             </a:solidFill>
-            <a:prstDash val="solid"/>
-          </a:ln>
-        </p:spPr>
-      </p:sp>
-      <p:sp>
-        <p:nvSpPr>
-          <p:cNvPr id="30" name="Text 28"/>
-          <p:cNvSpPr/>
-          <p:nvPr/>
-        </p:nvSpPr>
-        <p:spPr>
-          <a:xfrm>
-            <a:off x="365760" y="4096512"/>
-            <a:ext cx="1371600" cy="804672"/>
-          </a:xfrm>
-          <a:prstGeom prst="rect">
-            <a:avLst/>
-          </a:prstGeom>
-          <a:noFill/>
-          <a:ln/>
-        </p:spPr>
-        <p:txBody>
-          <a:bodyPr wrap="square" lIns="0" tIns="0" rIns="0" bIns="0" rtlCol="0" anchor="ctr"/>
-          <a:lstStyle/>
-          <a:p>
-            <a:pPr algn="ctr" indent="0" marL="0">
-              <a:buNone/>
-            </a:pPr>
-            <a:r>
-              <a:rPr lang="en-US" sz="1100" b="1" dirty="0">
-                <a:solidFill>
-                  <a:srgbClr val="475569"/>
-                </a:solidFill>
-                <a:latin typeface="Trebuchet MS" pitchFamily="34" charset="0"/>
-                <a:ea typeface="Trebuchet MS" pitchFamily="34" charset="-122"/>
-                <a:cs typeface="Trebuchet MS" pitchFamily="34" charset="-120"/>
-              </a:rPr>
-              <a:t>Phonemes</a:t>
-            </a:r>
-            <a:endParaRPr lang="en-US" sz="1100" dirty="0"/>
-          </a:p>
-        </p:txBody>
-      </p:sp>
-      <p:sp>
-        <p:nvSpPr>
-          <p:cNvPr id="31" name="Shape 29"/>
-          <p:cNvSpPr/>
-          <p:nvPr/>
-        </p:nvSpPr>
-        <p:spPr>
-          <a:xfrm>
-            <a:off x="1874520" y="4096512"/>
-            <a:ext cx="6903720" cy="804672"/>
-          </a:xfrm>
-          <a:prstGeom prst="rect">
-            <a:avLst>
-              <a:gd name="adj" fmla="val 6818"/>
-            </a:avLst>
-          </a:prstGeom>
-          <a:solidFill>
-            <a:srgbClr val="F8FAFC"/>
-          </a:solidFill>
-          <a:ln w="12700">
-            <a:solidFill>
-              <a:srgbClr val="E2E8F0"/>
-            </a:solidFill>
             <a:prstDash val="dash"/>
           </a:ln>
         </p:spPr>
       </p:sp>
       <p:sp>
         <p:nvSpPr>
-          <p:cNvPr id="32" name="Text 30"/>
+          <p:cNvPr id="29" name="Text 27"/>
           <p:cNvSpPr/>
           <p:nvPr/>
         </p:nvSpPr>
@@ -25348,7 +24927,7 @@
                 <a:ea typeface="Trebuchet MS" pitchFamily="34" charset="-122"/>
                 <a:cs typeface="Trebuchet MS" pitchFamily="34" charset="-120"/>
               </a:rPr>
-              <a:t>misspells</a:t>
+              <a:t>speller</a:t>
             </a:r>
             <a:endParaRPr lang="en-US" sz="2800" dirty="0"/>
           </a:p>
@@ -25428,7 +25007,7 @@
         </p:nvSpPr>
         <p:spPr>
           <a:xfrm>
-            <a:off x="2221992" y="2258568"/>
+            <a:off x="2938272" y="2258568"/>
             <a:ext cx="1828800" cy="292608"/>
           </a:xfrm>
           <a:prstGeom prst="rect">
@@ -25437,11 +25016,11 @@
             </a:avLst>
           </a:prstGeom>
           <a:solidFill>
-            <a:srgbClr val="DDD6FE"/>
+            <a:srgbClr val="CCFBF1"/>
           </a:solidFill>
           <a:ln w="19050">
             <a:solidFill>
-              <a:srgbClr val="7C3AED"/>
+              <a:srgbClr val="0D9488"/>
             </a:solidFill>
             <a:prstDash val="solid"/>
           </a:ln>
@@ -25462,7 +25041,7 @@
         </p:nvSpPr>
         <p:spPr>
           <a:xfrm>
-            <a:off x="2221992" y="2258568"/>
+            <a:off x="2938272" y="2258568"/>
             <a:ext cx="1828800" cy="292608"/>
           </a:xfrm>
           <a:prstGeom prst="rect">
@@ -25481,13 +25060,13 @@
             <a:r>
               <a:rPr lang="en-US" sz="1300" b="1" dirty="0">
                 <a:solidFill>
-                  <a:srgbClr val="4C1D95"/>
+                  <a:srgbClr val="0F766E"/>
                 </a:solidFill>
                 <a:latin typeface="Trebuchet MS" pitchFamily="34" charset="0"/>
                 <a:ea typeface="Trebuchet MS" pitchFamily="34" charset="-122"/>
                 <a:cs typeface="Trebuchet MS" pitchFamily="34" charset="-120"/>
               </a:rPr>
-              <a:t>mis</a:t>
+              <a:t>spell</a:t>
             </a:r>
             <a:endParaRPr lang="en-US" sz="1300" dirty="0"/>
           </a:p>
@@ -25501,7 +25080,7 @@
         </p:nvSpPr>
         <p:spPr>
           <a:xfrm>
-            <a:off x="2221992" y="2569464"/>
+            <a:off x="2938272" y="2569464"/>
             <a:ext cx="1828800" cy="201168"/>
           </a:xfrm>
           <a:prstGeom prst="rect">
@@ -25526,7 +25105,7 @@
                 <a:ea typeface="Calibri" pitchFamily="34" charset="-122"/>
                 <a:cs typeface="Calibri" pitchFamily="34" charset="-120"/>
               </a:rPr>
-              <a:t>wrongly or badly</a:t>
+              <a:t>to name letters in order</a:t>
             </a:r>
             <a:endParaRPr lang="en-US" sz="850" dirty="0"/>
           </a:p>
@@ -25540,7 +25119,7 @@
         </p:nvSpPr>
         <p:spPr>
           <a:xfrm>
-            <a:off x="4370832" y="2258568"/>
+            <a:off x="5803392" y="2258568"/>
             <a:ext cx="1828800" cy="292608"/>
           </a:xfrm>
           <a:prstGeom prst="rect">
@@ -25549,11 +25128,11 @@
             </a:avLst>
           </a:prstGeom>
           <a:solidFill>
-            <a:srgbClr val="CCFBF1"/>
+            <a:srgbClr val="FCE7F3"/>
           </a:solidFill>
           <a:ln w="19050">
             <a:solidFill>
-              <a:srgbClr val="0D9488"/>
+              <a:srgbClr val="DB2777"/>
             </a:solidFill>
             <a:prstDash val="solid"/>
           </a:ln>
@@ -25574,7 +25153,7 @@
         </p:nvSpPr>
         <p:spPr>
           <a:xfrm>
-            <a:off x="4370832" y="2258568"/>
+            <a:off x="5803392" y="2258568"/>
             <a:ext cx="1828800" cy="292608"/>
           </a:xfrm>
           <a:prstGeom prst="rect">
@@ -25593,13 +25172,13 @@
             <a:r>
               <a:rPr lang="en-US" sz="1300" b="1" dirty="0">
                 <a:solidFill>
-                  <a:srgbClr val="0F766E"/>
+                  <a:srgbClr val="9D174D"/>
                 </a:solidFill>
                 <a:latin typeface="Trebuchet MS" pitchFamily="34" charset="0"/>
                 <a:ea typeface="Trebuchet MS" pitchFamily="34" charset="-122"/>
                 <a:cs typeface="Trebuchet MS" pitchFamily="34" charset="-120"/>
               </a:rPr>
-              <a:t>spell</a:t>
+              <a:t>er</a:t>
             </a:r>
             <a:endParaRPr lang="en-US" sz="1300" dirty="0"/>
           </a:p>
@@ -25613,7 +25192,7 @@
         </p:nvSpPr>
         <p:spPr>
           <a:xfrm>
-            <a:off x="4370832" y="2569464"/>
+            <a:off x="5803392" y="2569464"/>
             <a:ext cx="1828800" cy="201168"/>
           </a:xfrm>
           <a:prstGeom prst="rect">
@@ -25638,7 +25217,7 @@
                 <a:ea typeface="Calibri" pitchFamily="34" charset="-122"/>
                 <a:cs typeface="Calibri" pitchFamily="34" charset="-120"/>
               </a:rPr>
-              <a:t>to name letters in order</a:t>
+              <a:t>a person who does something</a:t>
             </a:r>
             <a:endParaRPr lang="en-US" sz="850" dirty="0"/>
           </a:p>
@@ -25652,30 +25231,23 @@
         </p:nvSpPr>
         <p:spPr>
           <a:xfrm>
-            <a:off x="6519672" y="2258568"/>
-            <a:ext cx="1828800" cy="292608"/>
+            <a:off x="365760" y="3273552"/>
+            <a:ext cx="1371600" cy="658368"/>
           </a:xfrm>
           <a:prstGeom prst="rect">
             <a:avLst>
-              <a:gd name="adj" fmla="val 25000"/>
+              <a:gd name="adj" fmla="val 8333"/>
             </a:avLst>
           </a:prstGeom>
           <a:solidFill>
-            <a:srgbClr val="FCE7F3"/>
-          </a:solidFill>
-          <a:ln w="19050">
-            <a:solidFill>
-              <a:srgbClr val="DB2777"/>
-            </a:solidFill>
-            <a:prstDash val="solid"/>
-          </a:ln>
-          <a:effectLst>
-            <a:outerShdw sx="100000" sy="100000" kx="0" ky="0" algn="bl" rotWithShape="0" blurRad="101600" dist="38100" dir="8100000">
-              <a:srgbClr val="000000">
-                <a:alpha val="12000"/>
-              </a:srgbClr>
-            </a:outerShdw>
-          </a:effectLst>
+            <a:srgbClr val="E2E8F0"/>
+          </a:solidFill>
+          <a:ln w="12700">
+            <a:solidFill>
+              <a:srgbClr val="E2E8F0"/>
+            </a:solidFill>
+            <a:prstDash val="solid"/>
+          </a:ln>
         </p:spPr>
       </p:sp>
       <p:sp>
@@ -25686,8 +25258,8 @@
         </p:nvSpPr>
         <p:spPr>
           <a:xfrm>
-            <a:off x="6519672" y="2258568"/>
-            <a:ext cx="1828800" cy="292608"/>
+            <a:off x="365760" y="3273552"/>
+            <a:ext cx="1371600" cy="658368"/>
           </a:xfrm>
           <a:prstGeom prst="rect">
             <a:avLst/>
@@ -25703,69 +25275,30 @@
               <a:buNone/>
             </a:pPr>
             <a:r>
-              <a:rPr lang="en-US" sz="1300" b="1" dirty="0">
-                <a:solidFill>
-                  <a:srgbClr val="9D174D"/>
+              <a:rPr lang="en-US" sz="1100" b="1" dirty="0">
+                <a:solidFill>
+                  <a:srgbClr val="475569"/>
                 </a:solidFill>
                 <a:latin typeface="Trebuchet MS" pitchFamily="34" charset="0"/>
                 <a:ea typeface="Trebuchet MS" pitchFamily="34" charset="-122"/>
                 <a:cs typeface="Trebuchet MS" pitchFamily="34" charset="-120"/>
               </a:rPr>
-              <a:t>s</a:t>
-            </a:r>
-            <a:endParaRPr lang="en-US" sz="1300" dirty="0"/>
-          </a:p>
-        </p:txBody>
-      </p:sp>
-      <p:sp>
-        <p:nvSpPr>
-          <p:cNvPr id="24" name="Text 22"/>
-          <p:cNvSpPr/>
-          <p:nvPr/>
-        </p:nvSpPr>
-        <p:spPr>
-          <a:xfrm>
-            <a:off x="6519672" y="2569464"/>
-            <a:ext cx="1828800" cy="201168"/>
-          </a:xfrm>
-          <a:prstGeom prst="rect">
-            <a:avLst/>
-          </a:prstGeom>
-          <a:noFill/>
-          <a:ln/>
-        </p:spPr>
-        <p:txBody>
-          <a:bodyPr wrap="square" lIns="0" tIns="0" rIns="0" bIns="0" rtlCol="0" anchor="t"/>
-          <a:lstStyle/>
-          <a:p>
-            <a:pPr algn="ctr" indent="0" marL="0">
-              <a:buNone/>
-            </a:pPr>
-            <a:r>
-              <a:rPr lang="en-US" sz="850" dirty="0">
-                <a:solidFill>
-                  <a:srgbClr val="475569"/>
-                </a:solidFill>
-                <a:latin typeface="Calibri" pitchFamily="34" charset="0"/>
-                <a:ea typeface="Calibri" pitchFamily="34" charset="-122"/>
-                <a:cs typeface="Calibri" pitchFamily="34" charset="-120"/>
-              </a:rPr>
-              <a:t>third person singular present tense</a:t>
-            </a:r>
-            <a:endParaRPr lang="en-US" sz="850" dirty="0"/>
-          </a:p>
-        </p:txBody>
-      </p:sp>
-      <p:sp>
-        <p:nvSpPr>
-          <p:cNvPr id="25" name="Shape 23"/>
-          <p:cNvSpPr/>
-          <p:nvPr/>
-        </p:nvSpPr>
-        <p:spPr>
-          <a:xfrm>
-            <a:off x="365760" y="3273552"/>
-            <a:ext cx="1371600" cy="658368"/>
+              <a:t>Syllables</a:t>
+            </a:r>
+            <a:endParaRPr lang="en-US" sz="1100" dirty="0"/>
+          </a:p>
+        </p:txBody>
+      </p:sp>
+      <p:sp>
+        <p:nvSpPr>
+          <p:cNvPr id="24" name="Shape 22"/>
+          <p:cNvSpPr/>
+          <p:nvPr/>
+        </p:nvSpPr>
+        <p:spPr>
+          <a:xfrm>
+            <a:off x="1874520" y="3273552"/>
+            <a:ext cx="6903720" cy="658368"/>
           </a:xfrm>
           <a:prstGeom prst="rect">
             <a:avLst>
@@ -25773,11 +25306,38 @@
             </a:avLst>
           </a:prstGeom>
           <a:solidFill>
-            <a:srgbClr val="E2E8F0"/>
-          </a:solidFill>
-          <a:ln w="12700">
-            <a:solidFill>
-              <a:srgbClr val="E2E8F0"/>
+            <a:srgbClr val="CCFBF1"/>
+          </a:solidFill>
+          <a:ln w="12700">
+            <a:solidFill>
+              <a:srgbClr val="0D9488"/>
+            </a:solidFill>
+            <a:prstDash val="solid"/>
+          </a:ln>
+        </p:spPr>
+      </p:sp>
+      <p:sp>
+        <p:nvSpPr>
+          <p:cNvPr id="25" name="Shape 23"/>
+          <p:cNvSpPr/>
+          <p:nvPr/>
+        </p:nvSpPr>
+        <p:spPr>
+          <a:xfrm>
+            <a:off x="2999232" y="3364992"/>
+            <a:ext cx="1645920" cy="475488"/>
+          </a:xfrm>
+          <a:prstGeom prst="rect">
+            <a:avLst>
+              <a:gd name="adj" fmla="val 9615"/>
+            </a:avLst>
+          </a:prstGeom>
+          <a:solidFill>
+            <a:srgbClr val="FFFFFF"/>
+          </a:solidFill>
+          <a:ln w="12700">
+            <a:solidFill>
+              <a:srgbClr val="0D9488"/>
             </a:solidFill>
             <a:prstDash val="solid"/>
           </a:ln>
@@ -25791,8 +25351,8 @@
         </p:nvSpPr>
         <p:spPr>
           <a:xfrm>
-            <a:off x="365760" y="3273552"/>
-            <a:ext cx="1371600" cy="658368"/>
+            <a:off x="2999232" y="3364992"/>
+            <a:ext cx="1645920" cy="475488"/>
           </a:xfrm>
           <a:prstGeom prst="rect">
             <a:avLst/>
@@ -25808,46 +25368,58 @@
               <a:buNone/>
             </a:pPr>
             <a:r>
-              <a:rPr lang="en-US" sz="1100" b="1" dirty="0">
-                <a:solidFill>
-                  <a:srgbClr val="475569"/>
+              <a:rPr lang="en-US" sz="1400" b="1" dirty="0">
+                <a:solidFill>
+                  <a:srgbClr val="0D9488"/>
                 </a:solidFill>
                 <a:latin typeface="Trebuchet MS" pitchFamily="34" charset="0"/>
                 <a:ea typeface="Trebuchet MS" pitchFamily="34" charset="-122"/>
                 <a:cs typeface="Trebuchet MS" pitchFamily="34" charset="-120"/>
               </a:rPr>
-              <a:t>Syllables</a:t>
-            </a:r>
-            <a:endParaRPr lang="en-US" sz="1100" dirty="0"/>
-          </a:p>
-        </p:txBody>
-      </p:sp>
-      <p:sp>
-        <p:nvSpPr>
-          <p:cNvPr id="27" name="Shape 25"/>
-          <p:cNvSpPr/>
-          <p:nvPr/>
-        </p:nvSpPr>
-        <p:spPr>
-          <a:xfrm>
-            <a:off x="1874520" y="3273552"/>
-            <a:ext cx="6903720" cy="658368"/>
-          </a:xfrm>
-          <a:prstGeom prst="rect">
-            <a:avLst>
-              <a:gd name="adj" fmla="val 8333"/>
-            </a:avLst>
-          </a:prstGeom>
-          <a:solidFill>
-            <a:srgbClr val="CCFBF1"/>
-          </a:solidFill>
-          <a:ln w="12700">
-            <a:solidFill>
-              <a:srgbClr val="0D9488"/>
-            </a:solidFill>
-            <a:prstDash val="solid"/>
-          </a:ln>
-        </p:spPr>
+              <a:t>spell</a:t>
+            </a:r>
+            <a:endParaRPr lang="en-US" sz="1400" dirty="0"/>
+          </a:p>
+        </p:txBody>
+      </p:sp>
+      <p:sp>
+        <p:nvSpPr>
+          <p:cNvPr id="27" name="Text 25"/>
+          <p:cNvSpPr/>
+          <p:nvPr/>
+        </p:nvSpPr>
+        <p:spPr>
+          <a:xfrm>
+            <a:off x="4645152" y="3364992"/>
+            <a:ext cx="1097280" cy="475488"/>
+          </a:xfrm>
+          <a:prstGeom prst="rect">
+            <a:avLst/>
+          </a:prstGeom>
+          <a:noFill/>
+          <a:ln/>
+        </p:spPr>
+        <p:txBody>
+          <a:bodyPr wrap="square" lIns="0" tIns="0" rIns="0" bIns="0" rtlCol="0" anchor="ctr"/>
+          <a:lstStyle/>
+          <a:p>
+            <a:pPr algn="ctr" indent="0" marL="0">
+              <a:buNone/>
+            </a:pPr>
+            <a:r>
+              <a:rPr lang="en-US" sz="1600" b="1" dirty="0">
+                <a:solidFill>
+                  <a:srgbClr val="0D9488"/>
+                </a:solidFill>
+                <a:latin typeface="Trebuchet MS" pitchFamily="34" charset="0"/>
+                <a:ea typeface="Trebuchet MS" pitchFamily="34" charset="-122"/>
+                <a:cs typeface="Trebuchet MS" pitchFamily="34" charset="-120"/>
+              </a:rPr>
+              <a:t>·</a:t>
+            </a:r>
+            <a:endParaRPr lang="en-US" sz="1600" dirty="0"/>
+          </a:p>
+        </p:txBody>
       </p:sp>
       <p:sp>
         <p:nvSpPr>
@@ -25857,7 +25429,7 @@
         </p:nvSpPr>
         <p:spPr>
           <a:xfrm>
-            <a:off x="2999232" y="3364992"/>
+            <a:off x="5742432" y="3364992"/>
             <a:ext cx="1645920" cy="475488"/>
           </a:xfrm>
           <a:prstGeom prst="rect">
@@ -25884,7 +25456,7 @@
         </p:nvSpPr>
         <p:spPr>
           <a:xfrm>
-            <a:off x="2999232" y="3364992"/>
+            <a:off x="5742432" y="3364992"/>
             <a:ext cx="1645920" cy="475488"/>
           </a:xfrm>
           <a:prstGeom prst="rect">
@@ -25909,7 +25481,7 @@
                 <a:ea typeface="Trebuchet MS" pitchFamily="34" charset="-122"/>
                 <a:cs typeface="Trebuchet MS" pitchFamily="34" charset="-120"/>
               </a:rPr>
-              <a:t>mis</a:t>
+              <a:t>er</a:t>
             </a:r>
             <a:endParaRPr lang="en-US" sz="1400" dirty="0"/>
           </a:p>
@@ -25917,14 +25489,41 @@
       </p:sp>
       <p:sp>
         <p:nvSpPr>
-          <p:cNvPr id="30" name="Text 28"/>
-          <p:cNvSpPr/>
-          <p:nvPr/>
-        </p:nvSpPr>
-        <p:spPr>
-          <a:xfrm>
-            <a:off x="4645152" y="3364992"/>
-            <a:ext cx="1097280" cy="475488"/>
+          <p:cNvPr id="30" name="Shape 28"/>
+          <p:cNvSpPr/>
+          <p:nvPr/>
+        </p:nvSpPr>
+        <p:spPr>
+          <a:xfrm>
+            <a:off x="365760" y="4096512"/>
+            <a:ext cx="1371600" cy="804672"/>
+          </a:xfrm>
+          <a:prstGeom prst="rect">
+            <a:avLst>
+              <a:gd name="adj" fmla="val 6818"/>
+            </a:avLst>
+          </a:prstGeom>
+          <a:solidFill>
+            <a:srgbClr val="E2E8F0"/>
+          </a:solidFill>
+          <a:ln w="12700">
+            <a:solidFill>
+              <a:srgbClr val="E2E8F0"/>
+            </a:solidFill>
+            <a:prstDash val="solid"/>
+          </a:ln>
+        </p:spPr>
+      </p:sp>
+      <p:sp>
+        <p:nvSpPr>
+          <p:cNvPr id="31" name="Text 29"/>
+          <p:cNvSpPr/>
+          <p:nvPr/>
+        </p:nvSpPr>
+        <p:spPr>
+          <a:xfrm>
+            <a:off x="365760" y="4096512"/>
+            <a:ext cx="1371600" cy="804672"/>
           </a:xfrm>
           <a:prstGeom prst="rect">
             <a:avLst/>
@@ -25940,96 +25539,30 @@
               <a:buNone/>
             </a:pPr>
             <a:r>
-              <a:rPr lang="en-US" sz="1600" b="1" dirty="0">
-                <a:solidFill>
-                  <a:srgbClr val="0D9488"/>
+              <a:rPr lang="en-US" sz="1100" b="1" dirty="0">
+                <a:solidFill>
+                  <a:srgbClr val="475569"/>
                 </a:solidFill>
                 <a:latin typeface="Trebuchet MS" pitchFamily="34" charset="0"/>
                 <a:ea typeface="Trebuchet MS" pitchFamily="34" charset="-122"/>
                 <a:cs typeface="Trebuchet MS" pitchFamily="34" charset="-120"/>
               </a:rPr>
-              <a:t>·</a:t>
-            </a:r>
-            <a:endParaRPr lang="en-US" sz="1600" dirty="0"/>
-          </a:p>
-        </p:txBody>
-      </p:sp>
-      <p:sp>
-        <p:nvSpPr>
-          <p:cNvPr id="31" name="Shape 29"/>
-          <p:cNvSpPr/>
-          <p:nvPr/>
-        </p:nvSpPr>
-        <p:spPr>
-          <a:xfrm>
-            <a:off x="5742432" y="3364992"/>
-            <a:ext cx="1645920" cy="475488"/>
-          </a:xfrm>
-          <a:prstGeom prst="rect">
-            <a:avLst>
-              <a:gd name="adj" fmla="val 9615"/>
-            </a:avLst>
-          </a:prstGeom>
-          <a:solidFill>
-            <a:srgbClr val="FFFFFF"/>
-          </a:solidFill>
-          <a:ln w="12700">
-            <a:solidFill>
-              <a:srgbClr val="0D9488"/>
-            </a:solidFill>
-            <a:prstDash val="solid"/>
-          </a:ln>
-        </p:spPr>
-      </p:sp>
-      <p:sp>
-        <p:nvSpPr>
-          <p:cNvPr id="32" name="Text 30"/>
-          <p:cNvSpPr/>
-          <p:nvPr/>
-        </p:nvSpPr>
-        <p:spPr>
-          <a:xfrm>
-            <a:off x="5742432" y="3364992"/>
-            <a:ext cx="1645920" cy="475488"/>
-          </a:xfrm>
-          <a:prstGeom prst="rect">
-            <a:avLst/>
-          </a:prstGeom>
-          <a:noFill/>
-          <a:ln/>
-        </p:spPr>
-        <p:txBody>
-          <a:bodyPr wrap="square" lIns="0" tIns="0" rIns="0" bIns="0" rtlCol="0" anchor="ctr"/>
-          <a:lstStyle/>
-          <a:p>
-            <a:pPr algn="ctr" indent="0" marL="0">
-              <a:buNone/>
-            </a:pPr>
-            <a:r>
-              <a:rPr lang="en-US" sz="1400" b="1" dirty="0">
-                <a:solidFill>
-                  <a:srgbClr val="0D9488"/>
-                </a:solidFill>
-                <a:latin typeface="Trebuchet MS" pitchFamily="34" charset="0"/>
-                <a:ea typeface="Trebuchet MS" pitchFamily="34" charset="-122"/>
-                <a:cs typeface="Trebuchet MS" pitchFamily="34" charset="-120"/>
-              </a:rPr>
-              <a:t>spells</a:t>
-            </a:r>
-            <a:endParaRPr lang="en-US" sz="1400" dirty="0"/>
-          </a:p>
-        </p:txBody>
-      </p:sp>
-      <p:sp>
-        <p:nvSpPr>
-          <p:cNvPr id="33" name="Shape 31"/>
-          <p:cNvSpPr/>
-          <p:nvPr/>
-        </p:nvSpPr>
-        <p:spPr>
-          <a:xfrm>
-            <a:off x="365760" y="4096512"/>
-            <a:ext cx="1371600" cy="804672"/>
+              <a:t>Phonemes</a:t>
+            </a:r>
+            <a:endParaRPr lang="en-US" sz="1100" dirty="0"/>
+          </a:p>
+        </p:txBody>
+      </p:sp>
+      <p:sp>
+        <p:nvSpPr>
+          <p:cNvPr id="32" name="Shape 30"/>
+          <p:cNvSpPr/>
+          <p:nvPr/>
+        </p:nvSpPr>
+        <p:spPr>
+          <a:xfrm>
+            <a:off x="1874520" y="4096512"/>
+            <a:ext cx="6903720" cy="804672"/>
           </a:xfrm>
           <a:prstGeom prst="rect">
             <a:avLst>
@@ -26037,85 +25570,19 @@
             </a:avLst>
           </a:prstGeom>
           <a:solidFill>
-            <a:srgbClr val="E2E8F0"/>
+            <a:srgbClr val="F8FAFC"/>
           </a:solidFill>
           <a:ln w="12700">
             <a:solidFill>
               <a:srgbClr val="E2E8F0"/>
             </a:solidFill>
-            <a:prstDash val="solid"/>
-          </a:ln>
-        </p:spPr>
-      </p:sp>
-      <p:sp>
-        <p:nvSpPr>
-          <p:cNvPr id="34" name="Text 32"/>
-          <p:cNvSpPr/>
-          <p:nvPr/>
-        </p:nvSpPr>
-        <p:spPr>
-          <a:xfrm>
-            <a:off x="365760" y="4096512"/>
-            <a:ext cx="1371600" cy="804672"/>
-          </a:xfrm>
-          <a:prstGeom prst="rect">
-            <a:avLst/>
-          </a:prstGeom>
-          <a:noFill/>
-          <a:ln/>
-        </p:spPr>
-        <p:txBody>
-          <a:bodyPr wrap="square" lIns="0" tIns="0" rIns="0" bIns="0" rtlCol="0" anchor="ctr"/>
-          <a:lstStyle/>
-          <a:p>
-            <a:pPr algn="ctr" indent="0" marL="0">
-              <a:buNone/>
-            </a:pPr>
-            <a:r>
-              <a:rPr lang="en-US" sz="1100" b="1" dirty="0">
-                <a:solidFill>
-                  <a:srgbClr val="475569"/>
-                </a:solidFill>
-                <a:latin typeface="Trebuchet MS" pitchFamily="34" charset="0"/>
-                <a:ea typeface="Trebuchet MS" pitchFamily="34" charset="-122"/>
-                <a:cs typeface="Trebuchet MS" pitchFamily="34" charset="-120"/>
-              </a:rPr>
-              <a:t>Phonemes</a:t>
-            </a:r>
-            <a:endParaRPr lang="en-US" sz="1100" dirty="0"/>
-          </a:p>
-        </p:txBody>
-      </p:sp>
-      <p:sp>
-        <p:nvSpPr>
-          <p:cNvPr id="35" name="Shape 33"/>
-          <p:cNvSpPr/>
-          <p:nvPr/>
-        </p:nvSpPr>
-        <p:spPr>
-          <a:xfrm>
-            <a:off x="1874520" y="4096512"/>
-            <a:ext cx="6903720" cy="804672"/>
-          </a:xfrm>
-          <a:prstGeom prst="rect">
-            <a:avLst>
-              <a:gd name="adj" fmla="val 6818"/>
-            </a:avLst>
-          </a:prstGeom>
-          <a:solidFill>
-            <a:srgbClr val="F8FAFC"/>
-          </a:solidFill>
-          <a:ln w="12700">
-            <a:solidFill>
-              <a:srgbClr val="E2E8F0"/>
-            </a:solidFill>
             <a:prstDash val="dash"/>
           </a:ln>
         </p:spPr>
       </p:sp>
       <p:sp>
         <p:nvSpPr>
-          <p:cNvPr id="36" name="Text 34"/>
+          <p:cNvPr id="33" name="Text 31"/>
           <p:cNvSpPr/>
           <p:nvPr/>
         </p:nvSpPr>
@@ -26577,7 +26044,7 @@
                 <a:ea typeface="Trebuchet MS" pitchFamily="34" charset="-122"/>
                 <a:cs typeface="Trebuchet MS" pitchFamily="34" charset="-120"/>
               </a:rPr>
-              <a:t>misspells</a:t>
+              <a:t>speller</a:t>
             </a:r>
             <a:endParaRPr lang="en-US" sz="2800" dirty="0"/>
           </a:p>
@@ -26657,7 +26124,7 @@
         </p:nvSpPr>
         <p:spPr>
           <a:xfrm>
-            <a:off x="2221992" y="2258568"/>
+            <a:off x="2938272" y="2258568"/>
             <a:ext cx="1828800" cy="292608"/>
           </a:xfrm>
           <a:prstGeom prst="rect">
@@ -26666,11 +26133,11 @@
             </a:avLst>
           </a:prstGeom>
           <a:solidFill>
-            <a:srgbClr val="DDD6FE"/>
+            <a:srgbClr val="CCFBF1"/>
           </a:solidFill>
           <a:ln w="19050">
             <a:solidFill>
-              <a:srgbClr val="7C3AED"/>
+              <a:srgbClr val="0D9488"/>
             </a:solidFill>
             <a:prstDash val="solid"/>
           </a:ln>
@@ -26691,7 +26158,7 @@
         </p:nvSpPr>
         <p:spPr>
           <a:xfrm>
-            <a:off x="2221992" y="2258568"/>
+            <a:off x="2938272" y="2258568"/>
             <a:ext cx="1828800" cy="292608"/>
           </a:xfrm>
           <a:prstGeom prst="rect">
@@ -26710,13 +26177,13 @@
             <a:r>
               <a:rPr lang="en-US" sz="1300" b="1" dirty="0">
                 <a:solidFill>
-                  <a:srgbClr val="4C1D95"/>
+                  <a:srgbClr val="0F766E"/>
                 </a:solidFill>
                 <a:latin typeface="Trebuchet MS" pitchFamily="34" charset="0"/>
                 <a:ea typeface="Trebuchet MS" pitchFamily="34" charset="-122"/>
                 <a:cs typeface="Trebuchet MS" pitchFamily="34" charset="-120"/>
               </a:rPr>
-              <a:t>mis</a:t>
+              <a:t>spell</a:t>
             </a:r>
             <a:endParaRPr lang="en-US" sz="1300" dirty="0"/>
           </a:p>
@@ -26730,7 +26197,7 @@
         </p:nvSpPr>
         <p:spPr>
           <a:xfrm>
-            <a:off x="2221992" y="2569464"/>
+            <a:off x="2938272" y="2569464"/>
             <a:ext cx="1828800" cy="201168"/>
           </a:xfrm>
           <a:prstGeom prst="rect">
@@ -26755,7 +26222,7 @@
                 <a:ea typeface="Calibri" pitchFamily="34" charset="-122"/>
                 <a:cs typeface="Calibri" pitchFamily="34" charset="-120"/>
               </a:rPr>
-              <a:t>wrongly or badly</a:t>
+              <a:t>to name letters in order</a:t>
             </a:r>
             <a:endParaRPr lang="en-US" sz="850" dirty="0"/>
           </a:p>
@@ -26769,7 +26236,7 @@
         </p:nvSpPr>
         <p:spPr>
           <a:xfrm>
-            <a:off x="4370832" y="2258568"/>
+            <a:off x="5803392" y="2258568"/>
             <a:ext cx="1828800" cy="292608"/>
           </a:xfrm>
           <a:prstGeom prst="rect">
@@ -26778,11 +26245,11 @@
             </a:avLst>
           </a:prstGeom>
           <a:solidFill>
-            <a:srgbClr val="CCFBF1"/>
+            <a:srgbClr val="FCE7F3"/>
           </a:solidFill>
           <a:ln w="19050">
             <a:solidFill>
-              <a:srgbClr val="0D9488"/>
+              <a:srgbClr val="DB2777"/>
             </a:solidFill>
             <a:prstDash val="solid"/>
           </a:ln>
@@ -26803,7 +26270,7 @@
         </p:nvSpPr>
         <p:spPr>
           <a:xfrm>
-            <a:off x="4370832" y="2258568"/>
+            <a:off x="5803392" y="2258568"/>
             <a:ext cx="1828800" cy="292608"/>
           </a:xfrm>
           <a:prstGeom prst="rect">
@@ -26822,13 +26289,13 @@
             <a:r>
               <a:rPr lang="en-US" sz="1300" b="1" dirty="0">
                 <a:solidFill>
-                  <a:srgbClr val="0F766E"/>
+                  <a:srgbClr val="9D174D"/>
                 </a:solidFill>
                 <a:latin typeface="Trebuchet MS" pitchFamily="34" charset="0"/>
                 <a:ea typeface="Trebuchet MS" pitchFamily="34" charset="-122"/>
                 <a:cs typeface="Trebuchet MS" pitchFamily="34" charset="-120"/>
               </a:rPr>
-              <a:t>spell</a:t>
+              <a:t>er</a:t>
             </a:r>
             <a:endParaRPr lang="en-US" sz="1300" dirty="0"/>
           </a:p>
@@ -26842,7 +26309,7 @@
         </p:nvSpPr>
         <p:spPr>
           <a:xfrm>
-            <a:off x="4370832" y="2569464"/>
+            <a:off x="5803392" y="2569464"/>
             <a:ext cx="1828800" cy="201168"/>
           </a:xfrm>
           <a:prstGeom prst="rect">
@@ -26867,7 +26334,7 @@
                 <a:ea typeface="Calibri" pitchFamily="34" charset="-122"/>
                 <a:cs typeface="Calibri" pitchFamily="34" charset="-120"/>
               </a:rPr>
-              <a:t>to name letters in order</a:t>
+              <a:t>a person who does something</a:t>
             </a:r>
             <a:endParaRPr lang="en-US" sz="850" dirty="0"/>
           </a:p>
@@ -26881,30 +26348,23 @@
         </p:nvSpPr>
         <p:spPr>
           <a:xfrm>
-            <a:off x="6519672" y="2258568"/>
-            <a:ext cx="1828800" cy="292608"/>
+            <a:off x="365760" y="3273552"/>
+            <a:ext cx="1371600" cy="658368"/>
           </a:xfrm>
           <a:prstGeom prst="rect">
             <a:avLst>
-              <a:gd name="adj" fmla="val 25000"/>
+              <a:gd name="adj" fmla="val 8333"/>
             </a:avLst>
           </a:prstGeom>
           <a:solidFill>
-            <a:srgbClr val="FCE7F3"/>
-          </a:solidFill>
-          <a:ln w="19050">
-            <a:solidFill>
-              <a:srgbClr val="DB2777"/>
-            </a:solidFill>
-            <a:prstDash val="solid"/>
-          </a:ln>
-          <a:effectLst>
-            <a:outerShdw sx="100000" sy="100000" kx="0" ky="0" algn="bl" rotWithShape="0" blurRad="101600" dist="38100" dir="8100000">
-              <a:srgbClr val="000000">
-                <a:alpha val="12000"/>
-              </a:srgbClr>
-            </a:outerShdw>
-          </a:effectLst>
+            <a:srgbClr val="E2E8F0"/>
+          </a:solidFill>
+          <a:ln w="12700">
+            <a:solidFill>
+              <a:srgbClr val="E2E8F0"/>
+            </a:solidFill>
+            <a:prstDash val="solid"/>
+          </a:ln>
         </p:spPr>
       </p:sp>
       <p:sp>
@@ -26915,8 +26375,8 @@
         </p:nvSpPr>
         <p:spPr>
           <a:xfrm>
-            <a:off x="6519672" y="2258568"/>
-            <a:ext cx="1828800" cy="292608"/>
+            <a:off x="365760" y="3273552"/>
+            <a:ext cx="1371600" cy="658368"/>
           </a:xfrm>
           <a:prstGeom prst="rect">
             <a:avLst/>
@@ -26932,69 +26392,30 @@
               <a:buNone/>
             </a:pPr>
             <a:r>
-              <a:rPr lang="en-US" sz="1300" b="1" dirty="0">
-                <a:solidFill>
-                  <a:srgbClr val="9D174D"/>
+              <a:rPr lang="en-US" sz="1100" b="1" dirty="0">
+                <a:solidFill>
+                  <a:srgbClr val="475569"/>
                 </a:solidFill>
                 <a:latin typeface="Trebuchet MS" pitchFamily="34" charset="0"/>
                 <a:ea typeface="Trebuchet MS" pitchFamily="34" charset="-122"/>
                 <a:cs typeface="Trebuchet MS" pitchFamily="34" charset="-120"/>
               </a:rPr>
-              <a:t>s</a:t>
-            </a:r>
-            <a:endParaRPr lang="en-US" sz="1300" dirty="0"/>
-          </a:p>
-        </p:txBody>
-      </p:sp>
-      <p:sp>
-        <p:nvSpPr>
-          <p:cNvPr id="24" name="Text 22"/>
-          <p:cNvSpPr/>
-          <p:nvPr/>
-        </p:nvSpPr>
-        <p:spPr>
-          <a:xfrm>
-            <a:off x="6519672" y="2569464"/>
-            <a:ext cx="1828800" cy="201168"/>
-          </a:xfrm>
-          <a:prstGeom prst="rect">
-            <a:avLst/>
-          </a:prstGeom>
-          <a:noFill/>
-          <a:ln/>
-        </p:spPr>
-        <p:txBody>
-          <a:bodyPr wrap="square" lIns="0" tIns="0" rIns="0" bIns="0" rtlCol="0" anchor="t"/>
-          <a:lstStyle/>
-          <a:p>
-            <a:pPr algn="ctr" indent="0" marL="0">
-              <a:buNone/>
-            </a:pPr>
-            <a:r>
-              <a:rPr lang="en-US" sz="850" dirty="0">
-                <a:solidFill>
-                  <a:srgbClr val="475569"/>
-                </a:solidFill>
-                <a:latin typeface="Calibri" pitchFamily="34" charset="0"/>
-                <a:ea typeface="Calibri" pitchFamily="34" charset="-122"/>
-                <a:cs typeface="Calibri" pitchFamily="34" charset="-120"/>
-              </a:rPr>
-              <a:t>third person singular present tense</a:t>
-            </a:r>
-            <a:endParaRPr lang="en-US" sz="850" dirty="0"/>
-          </a:p>
-        </p:txBody>
-      </p:sp>
-      <p:sp>
-        <p:nvSpPr>
-          <p:cNvPr id="25" name="Shape 23"/>
-          <p:cNvSpPr/>
-          <p:nvPr/>
-        </p:nvSpPr>
-        <p:spPr>
-          <a:xfrm>
-            <a:off x="365760" y="3273552"/>
-            <a:ext cx="1371600" cy="658368"/>
+              <a:t>Syllables</a:t>
+            </a:r>
+            <a:endParaRPr lang="en-US" sz="1100" dirty="0"/>
+          </a:p>
+        </p:txBody>
+      </p:sp>
+      <p:sp>
+        <p:nvSpPr>
+          <p:cNvPr id="24" name="Shape 22"/>
+          <p:cNvSpPr/>
+          <p:nvPr/>
+        </p:nvSpPr>
+        <p:spPr>
+          <a:xfrm>
+            <a:off x="1874520" y="3273552"/>
+            <a:ext cx="6903720" cy="658368"/>
           </a:xfrm>
           <a:prstGeom prst="rect">
             <a:avLst>
@@ -27002,11 +26423,38 @@
             </a:avLst>
           </a:prstGeom>
           <a:solidFill>
-            <a:srgbClr val="E2E8F0"/>
-          </a:solidFill>
-          <a:ln w="12700">
-            <a:solidFill>
-              <a:srgbClr val="E2E8F0"/>
+            <a:srgbClr val="CCFBF1"/>
+          </a:solidFill>
+          <a:ln w="12700">
+            <a:solidFill>
+              <a:srgbClr val="0D9488"/>
+            </a:solidFill>
+            <a:prstDash val="solid"/>
+          </a:ln>
+        </p:spPr>
+      </p:sp>
+      <p:sp>
+        <p:nvSpPr>
+          <p:cNvPr id="25" name="Shape 23"/>
+          <p:cNvSpPr/>
+          <p:nvPr/>
+        </p:nvSpPr>
+        <p:spPr>
+          <a:xfrm>
+            <a:off x="2999232" y="3364992"/>
+            <a:ext cx="1645920" cy="475488"/>
+          </a:xfrm>
+          <a:prstGeom prst="rect">
+            <a:avLst>
+              <a:gd name="adj" fmla="val 9615"/>
+            </a:avLst>
+          </a:prstGeom>
+          <a:solidFill>
+            <a:srgbClr val="FFFFFF"/>
+          </a:solidFill>
+          <a:ln w="12700">
+            <a:solidFill>
+              <a:srgbClr val="0D9488"/>
             </a:solidFill>
             <a:prstDash val="solid"/>
           </a:ln>
@@ -27020,8 +26468,8 @@
         </p:nvSpPr>
         <p:spPr>
           <a:xfrm>
-            <a:off x="365760" y="3273552"/>
-            <a:ext cx="1371600" cy="658368"/>
+            <a:off x="2999232" y="3364992"/>
+            <a:ext cx="1645920" cy="475488"/>
           </a:xfrm>
           <a:prstGeom prst="rect">
             <a:avLst/>
@@ -27037,15 +26485,186 @@
               <a:buNone/>
             </a:pPr>
             <a:r>
-              <a:rPr lang="en-US" sz="1100" b="1" dirty="0">
-                <a:solidFill>
-                  <a:srgbClr val="475569"/>
+              <a:rPr lang="en-US" sz="1400" b="1" dirty="0">
+                <a:solidFill>
+                  <a:srgbClr val="0D9488"/>
                 </a:solidFill>
                 <a:latin typeface="Trebuchet MS" pitchFamily="34" charset="0"/>
                 <a:ea typeface="Trebuchet MS" pitchFamily="34" charset="-122"/>
                 <a:cs typeface="Trebuchet MS" pitchFamily="34" charset="-120"/>
               </a:rPr>
-              <a:t>Syllables</a:t>
+              <a:t>spell</a:t>
+            </a:r>
+            <a:endParaRPr lang="en-US" sz="1400" dirty="0"/>
+          </a:p>
+        </p:txBody>
+      </p:sp>
+      <p:sp>
+        <p:nvSpPr>
+          <p:cNvPr id="27" name="Text 25"/>
+          <p:cNvSpPr/>
+          <p:nvPr/>
+        </p:nvSpPr>
+        <p:spPr>
+          <a:xfrm>
+            <a:off x="4645152" y="3364992"/>
+            <a:ext cx="1097280" cy="475488"/>
+          </a:xfrm>
+          <a:prstGeom prst="rect">
+            <a:avLst/>
+          </a:prstGeom>
+          <a:noFill/>
+          <a:ln/>
+        </p:spPr>
+        <p:txBody>
+          <a:bodyPr wrap="square" lIns="0" tIns="0" rIns="0" bIns="0" rtlCol="0" anchor="ctr"/>
+          <a:lstStyle/>
+          <a:p>
+            <a:pPr algn="ctr" indent="0" marL="0">
+              <a:buNone/>
+            </a:pPr>
+            <a:r>
+              <a:rPr lang="en-US" sz="1600" b="1" dirty="0">
+                <a:solidFill>
+                  <a:srgbClr val="0D9488"/>
+                </a:solidFill>
+                <a:latin typeface="Trebuchet MS" pitchFamily="34" charset="0"/>
+                <a:ea typeface="Trebuchet MS" pitchFamily="34" charset="-122"/>
+                <a:cs typeface="Trebuchet MS" pitchFamily="34" charset="-120"/>
+              </a:rPr>
+              <a:t>·</a:t>
+            </a:r>
+            <a:endParaRPr lang="en-US" sz="1600" dirty="0"/>
+          </a:p>
+        </p:txBody>
+      </p:sp>
+      <p:sp>
+        <p:nvSpPr>
+          <p:cNvPr id="28" name="Shape 26"/>
+          <p:cNvSpPr/>
+          <p:nvPr/>
+        </p:nvSpPr>
+        <p:spPr>
+          <a:xfrm>
+            <a:off x="5742432" y="3364992"/>
+            <a:ext cx="1645920" cy="475488"/>
+          </a:xfrm>
+          <a:prstGeom prst="rect">
+            <a:avLst>
+              <a:gd name="adj" fmla="val 9615"/>
+            </a:avLst>
+          </a:prstGeom>
+          <a:solidFill>
+            <a:srgbClr val="FFFFFF"/>
+          </a:solidFill>
+          <a:ln w="12700">
+            <a:solidFill>
+              <a:srgbClr val="0D9488"/>
+            </a:solidFill>
+            <a:prstDash val="solid"/>
+          </a:ln>
+        </p:spPr>
+      </p:sp>
+      <p:sp>
+        <p:nvSpPr>
+          <p:cNvPr id="29" name="Text 27"/>
+          <p:cNvSpPr/>
+          <p:nvPr/>
+        </p:nvSpPr>
+        <p:spPr>
+          <a:xfrm>
+            <a:off x="5742432" y="3364992"/>
+            <a:ext cx="1645920" cy="475488"/>
+          </a:xfrm>
+          <a:prstGeom prst="rect">
+            <a:avLst/>
+          </a:prstGeom>
+          <a:noFill/>
+          <a:ln/>
+        </p:spPr>
+        <p:txBody>
+          <a:bodyPr wrap="square" lIns="0" tIns="0" rIns="0" bIns="0" rtlCol="0" anchor="ctr"/>
+          <a:lstStyle/>
+          <a:p>
+            <a:pPr algn="ctr" indent="0" marL="0">
+              <a:buNone/>
+            </a:pPr>
+            <a:r>
+              <a:rPr lang="en-US" sz="1400" b="1" dirty="0">
+                <a:solidFill>
+                  <a:srgbClr val="0D9488"/>
+                </a:solidFill>
+                <a:latin typeface="Trebuchet MS" pitchFamily="34" charset="0"/>
+                <a:ea typeface="Trebuchet MS" pitchFamily="34" charset="-122"/>
+                <a:cs typeface="Trebuchet MS" pitchFamily="34" charset="-120"/>
+              </a:rPr>
+              <a:t>er</a:t>
+            </a:r>
+            <a:endParaRPr lang="en-US" sz="1400" dirty="0"/>
+          </a:p>
+        </p:txBody>
+      </p:sp>
+      <p:sp>
+        <p:nvSpPr>
+          <p:cNvPr id="30" name="Shape 28"/>
+          <p:cNvSpPr/>
+          <p:nvPr/>
+        </p:nvSpPr>
+        <p:spPr>
+          <a:xfrm>
+            <a:off x="365760" y="4096512"/>
+            <a:ext cx="1371600" cy="804672"/>
+          </a:xfrm>
+          <a:prstGeom prst="rect">
+            <a:avLst>
+              <a:gd name="adj" fmla="val 6818"/>
+            </a:avLst>
+          </a:prstGeom>
+          <a:solidFill>
+            <a:srgbClr val="E2E8F0"/>
+          </a:solidFill>
+          <a:ln w="12700">
+            <a:solidFill>
+              <a:srgbClr val="E2E8F0"/>
+            </a:solidFill>
+            <a:prstDash val="solid"/>
+          </a:ln>
+        </p:spPr>
+      </p:sp>
+      <p:sp>
+        <p:nvSpPr>
+          <p:cNvPr id="31" name="Text 29"/>
+          <p:cNvSpPr/>
+          <p:nvPr/>
+        </p:nvSpPr>
+        <p:spPr>
+          <a:xfrm>
+            <a:off x="365760" y="4096512"/>
+            <a:ext cx="1371600" cy="804672"/>
+          </a:xfrm>
+          <a:prstGeom prst="rect">
+            <a:avLst/>
+          </a:prstGeom>
+          <a:noFill/>
+          <a:ln/>
+        </p:spPr>
+        <p:txBody>
+          <a:bodyPr wrap="square" lIns="0" tIns="0" rIns="0" bIns="0" rtlCol="0" anchor="ctr"/>
+          <a:lstStyle/>
+          <a:p>
+            <a:pPr algn="ctr" indent="0" marL="0">
+              <a:buNone/>
+            </a:pPr>
+            <a:r>
+              <a:rPr lang="en-US" sz="1100" b="1" dirty="0">
+                <a:solidFill>
+                  <a:srgbClr val="475569"/>
+                </a:solidFill>
+                <a:latin typeface="Trebuchet MS" pitchFamily="34" charset="0"/>
+                <a:ea typeface="Trebuchet MS" pitchFamily="34" charset="-122"/>
+                <a:cs typeface="Trebuchet MS" pitchFamily="34" charset="-120"/>
+              </a:rPr>
+              <a:t>Phonemes</a:t>
             </a:r>
             <a:endParaRPr lang="en-US" sz="1100" dirty="0"/>
           </a:p>
@@ -27053,13 +26672,13 @@
       </p:sp>
       <p:sp>
         <p:nvSpPr>
-          <p:cNvPr id="27" name="Shape 25"/>
-          <p:cNvSpPr/>
-          <p:nvPr/>
-        </p:nvSpPr>
-        <p:spPr>
-          <a:xfrm>
-            <a:off x="1874520" y="3273552"/>
+          <p:cNvPr id="32" name="Shape 30"/>
+          <p:cNvSpPr/>
+          <p:nvPr/>
+        </p:nvSpPr>
+        <p:spPr>
+          <a:xfrm>
+            <a:off x="1874520" y="4096512"/>
             <a:ext cx="6903720" cy="658368"/>
           </a:xfrm>
           <a:prstGeom prst="rect">
@@ -27068,30 +26687,30 @@
             </a:avLst>
           </a:prstGeom>
           <a:solidFill>
-            <a:srgbClr val="CCFBF1"/>
-          </a:solidFill>
-          <a:ln w="12700">
-            <a:solidFill>
-              <a:srgbClr val="0D9488"/>
-            </a:solidFill>
-            <a:prstDash val="solid"/>
-          </a:ln>
-        </p:spPr>
-      </p:sp>
-      <p:sp>
-        <p:nvSpPr>
-          <p:cNvPr id="28" name="Shape 26"/>
-          <p:cNvSpPr/>
-          <p:nvPr/>
-        </p:nvSpPr>
-        <p:spPr>
-          <a:xfrm>
-            <a:off x="2999232" y="3364992"/>
-            <a:ext cx="1645920" cy="475488"/>
+            <a:srgbClr val="FCE7F3"/>
+          </a:solidFill>
+          <a:ln w="12700">
+            <a:solidFill>
+              <a:srgbClr val="DB2777"/>
+            </a:solidFill>
+            <a:prstDash val="solid"/>
+          </a:ln>
+        </p:spPr>
+      </p:sp>
+      <p:sp>
+        <p:nvSpPr>
+          <p:cNvPr id="33" name="Shape 31"/>
+          <p:cNvSpPr/>
+          <p:nvPr/>
+        </p:nvSpPr>
+        <p:spPr>
+          <a:xfrm>
+            <a:off x="2427732" y="4169664"/>
+            <a:ext cx="685800" cy="475488"/>
           </a:xfrm>
           <a:prstGeom prst="rect">
             <a:avLst>
-              <a:gd name="adj" fmla="val 9615"/>
+              <a:gd name="adj" fmla="val 7692"/>
             </a:avLst>
           </a:prstGeom>
           <a:solidFill>
@@ -27099,22 +26718,22 @@
           </a:solidFill>
           <a:ln w="12700">
             <a:solidFill>
-              <a:srgbClr val="0D9488"/>
-            </a:solidFill>
-            <a:prstDash val="solid"/>
-          </a:ln>
-        </p:spPr>
-      </p:sp>
-      <p:sp>
-        <p:nvSpPr>
-          <p:cNvPr id="29" name="Text 27"/>
-          <p:cNvSpPr/>
-          <p:nvPr/>
-        </p:nvSpPr>
-        <p:spPr>
-          <a:xfrm>
-            <a:off x="2999232" y="3364992"/>
-            <a:ext cx="1645920" cy="475488"/>
+              <a:srgbClr val="DB2777"/>
+            </a:solidFill>
+            <a:prstDash val="solid"/>
+          </a:ln>
+        </p:spPr>
+      </p:sp>
+      <p:sp>
+        <p:nvSpPr>
+          <p:cNvPr id="34" name="Text 32"/>
+          <p:cNvSpPr/>
+          <p:nvPr/>
+        </p:nvSpPr>
+        <p:spPr>
+          <a:xfrm>
+            <a:off x="2427732" y="4169664"/>
+            <a:ext cx="685800" cy="475488"/>
           </a:xfrm>
           <a:prstGeom prst="rect">
             <a:avLst/>
@@ -27130,30 +26749,57 @@
               <a:buNone/>
             </a:pPr>
             <a:r>
-              <a:rPr lang="en-US" sz="1400" b="1" dirty="0">
-                <a:solidFill>
-                  <a:srgbClr val="0D9488"/>
+              <a:rPr lang="en-US" sz="900" b="1" dirty="0">
+                <a:solidFill>
+                  <a:srgbClr val="9D174D"/>
                 </a:solidFill>
                 <a:latin typeface="Trebuchet MS" pitchFamily="34" charset="0"/>
                 <a:ea typeface="Trebuchet MS" pitchFamily="34" charset="-122"/>
                 <a:cs typeface="Trebuchet MS" pitchFamily="34" charset="-120"/>
               </a:rPr>
-              <a:t>mis</a:t>
-            </a:r>
-            <a:endParaRPr lang="en-US" sz="1400" dirty="0"/>
-          </a:p>
-        </p:txBody>
-      </p:sp>
-      <p:sp>
-        <p:nvSpPr>
-          <p:cNvPr id="30" name="Text 28"/>
-          <p:cNvSpPr/>
-          <p:nvPr/>
-        </p:nvSpPr>
-        <p:spPr>
-          <a:xfrm>
-            <a:off x="4645152" y="3364992"/>
-            <a:ext cx="1097280" cy="475488"/>
+              <a:t>s</a:t>
+            </a:r>
+            <a:endParaRPr lang="en-US" sz="900" dirty="0"/>
+          </a:p>
+        </p:txBody>
+      </p:sp>
+      <p:sp>
+        <p:nvSpPr>
+          <p:cNvPr id="35" name="Shape 33"/>
+          <p:cNvSpPr/>
+          <p:nvPr/>
+        </p:nvSpPr>
+        <p:spPr>
+          <a:xfrm>
+            <a:off x="3639312" y="4169664"/>
+            <a:ext cx="685800" cy="475488"/>
+          </a:xfrm>
+          <a:prstGeom prst="rect">
+            <a:avLst>
+              <a:gd name="adj" fmla="val 7692"/>
+            </a:avLst>
+          </a:prstGeom>
+          <a:solidFill>
+            <a:srgbClr val="FFFFFF"/>
+          </a:solidFill>
+          <a:ln w="12700">
+            <a:solidFill>
+              <a:srgbClr val="DB2777"/>
+            </a:solidFill>
+            <a:prstDash val="solid"/>
+          </a:ln>
+        </p:spPr>
+      </p:sp>
+      <p:sp>
+        <p:nvSpPr>
+          <p:cNvPr id="36" name="Text 34"/>
+          <p:cNvSpPr/>
+          <p:nvPr/>
+        </p:nvSpPr>
+        <p:spPr>
+          <a:xfrm>
+            <a:off x="3639312" y="4169664"/>
+            <a:ext cx="685800" cy="475488"/>
           </a:xfrm>
           <a:prstGeom prst="rect">
             <a:avLst/>
@@ -27169,34 +26815,34 @@
               <a:buNone/>
             </a:pPr>
             <a:r>
-              <a:rPr lang="en-US" sz="1600" b="1" dirty="0">
-                <a:solidFill>
-                  <a:srgbClr val="0D9488"/>
+              <a:rPr lang="en-US" sz="900" b="1" dirty="0">
+                <a:solidFill>
+                  <a:srgbClr val="9D174D"/>
                 </a:solidFill>
                 <a:latin typeface="Trebuchet MS" pitchFamily="34" charset="0"/>
                 <a:ea typeface="Trebuchet MS" pitchFamily="34" charset="-122"/>
                 <a:cs typeface="Trebuchet MS" pitchFamily="34" charset="-120"/>
               </a:rPr>
-              <a:t>·</a:t>
-            </a:r>
-            <a:endParaRPr lang="en-US" sz="1600" dirty="0"/>
-          </a:p>
-        </p:txBody>
-      </p:sp>
-      <p:sp>
-        <p:nvSpPr>
-          <p:cNvPr id="31" name="Shape 29"/>
-          <p:cNvSpPr/>
-          <p:nvPr/>
-        </p:nvSpPr>
-        <p:spPr>
-          <a:xfrm>
-            <a:off x="5742432" y="3364992"/>
-            <a:ext cx="1645920" cy="475488"/>
+              <a:t>p</a:t>
+            </a:r>
+            <a:endParaRPr lang="en-US" sz="900" dirty="0"/>
+          </a:p>
+        </p:txBody>
+      </p:sp>
+      <p:sp>
+        <p:nvSpPr>
+          <p:cNvPr id="37" name="Shape 35"/>
+          <p:cNvSpPr/>
+          <p:nvPr/>
+        </p:nvSpPr>
+        <p:spPr>
+          <a:xfrm>
+            <a:off x="4850892" y="4169664"/>
+            <a:ext cx="685800" cy="475488"/>
           </a:xfrm>
           <a:prstGeom prst="rect">
             <a:avLst>
-              <a:gd name="adj" fmla="val 9615"/>
+              <a:gd name="adj" fmla="val 7692"/>
             </a:avLst>
           </a:prstGeom>
           <a:solidFill>
@@ -27204,22 +26850,22 @@
           </a:solidFill>
           <a:ln w="12700">
             <a:solidFill>
-              <a:srgbClr val="0D9488"/>
-            </a:solidFill>
-            <a:prstDash val="solid"/>
-          </a:ln>
-        </p:spPr>
-      </p:sp>
-      <p:sp>
-        <p:nvSpPr>
-          <p:cNvPr id="32" name="Text 30"/>
-          <p:cNvSpPr/>
-          <p:nvPr/>
-        </p:nvSpPr>
-        <p:spPr>
-          <a:xfrm>
-            <a:off x="5742432" y="3364992"/>
-            <a:ext cx="1645920" cy="475488"/>
+              <a:srgbClr val="DB2777"/>
+            </a:solidFill>
+            <a:prstDash val="solid"/>
+          </a:ln>
+        </p:spPr>
+      </p:sp>
+      <p:sp>
+        <p:nvSpPr>
+          <p:cNvPr id="38" name="Text 36"/>
+          <p:cNvSpPr/>
+          <p:nvPr/>
+        </p:nvSpPr>
+        <p:spPr>
+          <a:xfrm>
+            <a:off x="4850892" y="4169664"/>
+            <a:ext cx="685800" cy="475488"/>
           </a:xfrm>
           <a:prstGeom prst="rect">
             <a:avLst/>
@@ -27235,57 +26881,57 @@
               <a:buNone/>
             </a:pPr>
             <a:r>
-              <a:rPr lang="en-US" sz="1400" b="1" dirty="0">
-                <a:solidFill>
-                  <a:srgbClr val="0D9488"/>
+              <a:rPr lang="en-US" sz="900" b="1" dirty="0">
+                <a:solidFill>
+                  <a:srgbClr val="9D174D"/>
                 </a:solidFill>
                 <a:latin typeface="Trebuchet MS" pitchFamily="34" charset="0"/>
                 <a:ea typeface="Trebuchet MS" pitchFamily="34" charset="-122"/>
                 <a:cs typeface="Trebuchet MS" pitchFamily="34" charset="-120"/>
               </a:rPr>
-              <a:t>spells</a:t>
-            </a:r>
-            <a:endParaRPr lang="en-US" sz="1400" dirty="0"/>
-          </a:p>
-        </p:txBody>
-      </p:sp>
-      <p:sp>
-        <p:nvSpPr>
-          <p:cNvPr id="33" name="Shape 31"/>
-          <p:cNvSpPr/>
-          <p:nvPr/>
-        </p:nvSpPr>
-        <p:spPr>
-          <a:xfrm>
-            <a:off x="365760" y="4096512"/>
-            <a:ext cx="1371600" cy="804672"/>
+              <a:t>e</a:t>
+            </a:r>
+            <a:endParaRPr lang="en-US" sz="900" dirty="0"/>
+          </a:p>
+        </p:txBody>
+      </p:sp>
+      <p:sp>
+        <p:nvSpPr>
+          <p:cNvPr id="39" name="Shape 37"/>
+          <p:cNvSpPr/>
+          <p:nvPr/>
+        </p:nvSpPr>
+        <p:spPr>
+          <a:xfrm>
+            <a:off x="6062472" y="4169664"/>
+            <a:ext cx="685800" cy="475488"/>
           </a:xfrm>
           <a:prstGeom prst="rect">
             <a:avLst>
-              <a:gd name="adj" fmla="val 6818"/>
+              <a:gd name="adj" fmla="val 7692"/>
             </a:avLst>
           </a:prstGeom>
           <a:solidFill>
-            <a:srgbClr val="E2E8F0"/>
-          </a:solidFill>
-          <a:ln w="12700">
-            <a:solidFill>
-              <a:srgbClr val="E2E8F0"/>
-            </a:solidFill>
-            <a:prstDash val="solid"/>
-          </a:ln>
-        </p:spPr>
-      </p:sp>
-      <p:sp>
-        <p:nvSpPr>
-          <p:cNvPr id="34" name="Text 32"/>
-          <p:cNvSpPr/>
-          <p:nvPr/>
-        </p:nvSpPr>
-        <p:spPr>
-          <a:xfrm>
-            <a:off x="365760" y="4096512"/>
-            <a:ext cx="1371600" cy="804672"/>
+            <a:srgbClr val="FFFFFF"/>
+          </a:solidFill>
+          <a:ln w="12700">
+            <a:solidFill>
+              <a:srgbClr val="DB2777"/>
+            </a:solidFill>
+            <a:prstDash val="solid"/>
+          </a:ln>
+        </p:spPr>
+      </p:sp>
+      <p:sp>
+        <p:nvSpPr>
+          <p:cNvPr id="40" name="Text 38"/>
+          <p:cNvSpPr/>
+          <p:nvPr/>
+        </p:nvSpPr>
+        <p:spPr>
+          <a:xfrm>
+            <a:off x="6062472" y="4169664"/>
+            <a:ext cx="685800" cy="475488"/>
           </a:xfrm>
           <a:prstGeom prst="rect">
             <a:avLst/>
@@ -27301,56 +26947,29 @@
               <a:buNone/>
             </a:pPr>
             <a:r>
-              <a:rPr lang="en-US" sz="1100" b="1" dirty="0">
-                <a:solidFill>
-                  <a:srgbClr val="475569"/>
+              <a:rPr lang="en-US" sz="900" b="1" dirty="0">
+                <a:solidFill>
+                  <a:srgbClr val="9D174D"/>
                 </a:solidFill>
                 <a:latin typeface="Trebuchet MS" pitchFamily="34" charset="0"/>
                 <a:ea typeface="Trebuchet MS" pitchFamily="34" charset="-122"/>
                 <a:cs typeface="Trebuchet MS" pitchFamily="34" charset="-120"/>
               </a:rPr>
-              <a:t>Phonemes</a:t>
-            </a:r>
-            <a:endParaRPr lang="en-US" sz="1100" dirty="0"/>
-          </a:p>
-        </p:txBody>
-      </p:sp>
-      <p:sp>
-        <p:nvSpPr>
-          <p:cNvPr id="35" name="Shape 33"/>
-          <p:cNvSpPr/>
-          <p:nvPr/>
-        </p:nvSpPr>
-        <p:spPr>
-          <a:xfrm>
-            <a:off x="1874520" y="4096512"/>
-            <a:ext cx="6903720" cy="658368"/>
-          </a:xfrm>
-          <a:prstGeom prst="rect">
-            <a:avLst>
-              <a:gd name="adj" fmla="val 8333"/>
-            </a:avLst>
-          </a:prstGeom>
-          <a:solidFill>
-            <a:srgbClr val="FCE7F3"/>
-          </a:solidFill>
-          <a:ln w="12700">
-            <a:solidFill>
-              <a:srgbClr val="DB2777"/>
-            </a:solidFill>
-            <a:prstDash val="solid"/>
-          </a:ln>
-        </p:spPr>
-      </p:sp>
-      <p:sp>
-        <p:nvSpPr>
-          <p:cNvPr id="36" name="Shape 34"/>
-          <p:cNvSpPr/>
-          <p:nvPr/>
-        </p:nvSpPr>
-        <p:spPr>
-          <a:xfrm>
-            <a:off x="2124837" y="4169664"/>
+              <a:t>ll</a:t>
+            </a:r>
+            <a:endParaRPr lang="en-US" sz="900" dirty="0"/>
+          </a:p>
+        </p:txBody>
+      </p:sp>
+      <p:sp>
+        <p:nvSpPr>
+          <p:cNvPr id="41" name="Shape 39"/>
+          <p:cNvSpPr/>
+          <p:nvPr/>
+        </p:nvSpPr>
+        <p:spPr>
+          <a:xfrm>
+            <a:off x="7274052" y="4169664"/>
             <a:ext cx="685800" cy="475488"/>
           </a:xfrm>
           <a:prstGeom prst="rect">
@@ -27371,13 +26990,13 @@
       </p:sp>
       <p:sp>
         <p:nvSpPr>
-          <p:cNvPr id="37" name="Text 35"/>
-          <p:cNvSpPr/>
-          <p:nvPr/>
-        </p:nvSpPr>
-        <p:spPr>
-          <a:xfrm>
-            <a:off x="2124837" y="4169664"/>
+          <p:cNvPr id="42" name="Text 40"/>
+          <p:cNvSpPr/>
+          <p:nvPr/>
+        </p:nvSpPr>
+        <p:spPr>
+          <a:xfrm>
+            <a:off x="7274052" y="4169664"/>
             <a:ext cx="685800" cy="475488"/>
           </a:xfrm>
           <a:prstGeom prst="rect">
@@ -27402,403 +27021,7 @@
                 <a:ea typeface="Trebuchet MS" pitchFamily="34" charset="-122"/>
                 <a:cs typeface="Trebuchet MS" pitchFamily="34" charset="-120"/>
               </a:rPr>
-              <a:t>m</a:t>
-            </a:r>
-            <a:endParaRPr lang="en-US" sz="900" dirty="0"/>
-          </a:p>
-        </p:txBody>
-      </p:sp>
-      <p:sp>
-        <p:nvSpPr>
-          <p:cNvPr id="38" name="Shape 36"/>
-          <p:cNvSpPr/>
-          <p:nvPr/>
-        </p:nvSpPr>
-        <p:spPr>
-          <a:xfrm>
-            <a:off x="3033522" y="4169664"/>
-            <a:ext cx="685800" cy="475488"/>
-          </a:xfrm>
-          <a:prstGeom prst="rect">
-            <a:avLst>
-              <a:gd name="adj" fmla="val 7692"/>
-            </a:avLst>
-          </a:prstGeom>
-          <a:solidFill>
-            <a:srgbClr val="FFFFFF"/>
-          </a:solidFill>
-          <a:ln w="12700">
-            <a:solidFill>
-              <a:srgbClr val="DB2777"/>
-            </a:solidFill>
-            <a:prstDash val="solid"/>
-          </a:ln>
-        </p:spPr>
-      </p:sp>
-      <p:sp>
-        <p:nvSpPr>
-          <p:cNvPr id="39" name="Text 37"/>
-          <p:cNvSpPr/>
-          <p:nvPr/>
-        </p:nvSpPr>
-        <p:spPr>
-          <a:xfrm>
-            <a:off x="3033522" y="4169664"/>
-            <a:ext cx="685800" cy="475488"/>
-          </a:xfrm>
-          <a:prstGeom prst="rect">
-            <a:avLst/>
-          </a:prstGeom>
-          <a:noFill/>
-          <a:ln/>
-        </p:spPr>
-        <p:txBody>
-          <a:bodyPr wrap="square" lIns="0" tIns="0" rIns="0" bIns="0" rtlCol="0" anchor="ctr"/>
-          <a:lstStyle/>
-          <a:p>
-            <a:pPr algn="ctr" indent="0" marL="0">
-              <a:buNone/>
-            </a:pPr>
-            <a:r>
-              <a:rPr lang="en-US" sz="900" b="1" dirty="0">
-                <a:solidFill>
-                  <a:srgbClr val="9D174D"/>
-                </a:solidFill>
-                <a:latin typeface="Trebuchet MS" pitchFamily="34" charset="0"/>
-                <a:ea typeface="Trebuchet MS" pitchFamily="34" charset="-122"/>
-                <a:cs typeface="Trebuchet MS" pitchFamily="34" charset="-120"/>
-              </a:rPr>
-              <a:t>i</a:t>
-            </a:r>
-            <a:endParaRPr lang="en-US" sz="900" dirty="0"/>
-          </a:p>
-        </p:txBody>
-      </p:sp>
-      <p:sp>
-        <p:nvSpPr>
-          <p:cNvPr id="40" name="Shape 38"/>
-          <p:cNvSpPr/>
-          <p:nvPr/>
-        </p:nvSpPr>
-        <p:spPr>
-          <a:xfrm>
-            <a:off x="3942207" y="4169664"/>
-            <a:ext cx="685800" cy="475488"/>
-          </a:xfrm>
-          <a:prstGeom prst="rect">
-            <a:avLst>
-              <a:gd name="adj" fmla="val 7692"/>
-            </a:avLst>
-          </a:prstGeom>
-          <a:solidFill>
-            <a:srgbClr val="FFFFFF"/>
-          </a:solidFill>
-          <a:ln w="12700">
-            <a:solidFill>
-              <a:srgbClr val="DB2777"/>
-            </a:solidFill>
-            <a:prstDash val="solid"/>
-          </a:ln>
-        </p:spPr>
-      </p:sp>
-      <p:sp>
-        <p:nvSpPr>
-          <p:cNvPr id="41" name="Text 39"/>
-          <p:cNvSpPr/>
-          <p:nvPr/>
-        </p:nvSpPr>
-        <p:spPr>
-          <a:xfrm>
-            <a:off x="3942207" y="4169664"/>
-            <a:ext cx="685800" cy="475488"/>
-          </a:xfrm>
-          <a:prstGeom prst="rect">
-            <a:avLst/>
-          </a:prstGeom>
-          <a:noFill/>
-          <a:ln/>
-        </p:spPr>
-        <p:txBody>
-          <a:bodyPr wrap="square" lIns="0" tIns="0" rIns="0" bIns="0" rtlCol="0" anchor="ctr"/>
-          <a:lstStyle/>
-          <a:p>
-            <a:pPr algn="ctr" indent="0" marL="0">
-              <a:buNone/>
-            </a:pPr>
-            <a:r>
-              <a:rPr lang="en-US" sz="900" b="1" dirty="0">
-                <a:solidFill>
-                  <a:srgbClr val="9D174D"/>
-                </a:solidFill>
-                <a:latin typeface="Trebuchet MS" pitchFamily="34" charset="0"/>
-                <a:ea typeface="Trebuchet MS" pitchFamily="34" charset="-122"/>
-                <a:cs typeface="Trebuchet MS" pitchFamily="34" charset="-120"/>
-              </a:rPr>
-              <a:t>ss</a:t>
-            </a:r>
-            <a:endParaRPr lang="en-US" sz="900" dirty="0"/>
-          </a:p>
-        </p:txBody>
-      </p:sp>
-      <p:sp>
-        <p:nvSpPr>
-          <p:cNvPr id="42" name="Shape 40"/>
-          <p:cNvSpPr/>
-          <p:nvPr/>
-        </p:nvSpPr>
-        <p:spPr>
-          <a:xfrm>
-            <a:off x="4850892" y="4169664"/>
-            <a:ext cx="685800" cy="475488"/>
-          </a:xfrm>
-          <a:prstGeom prst="rect">
-            <a:avLst>
-              <a:gd name="adj" fmla="val 7692"/>
-            </a:avLst>
-          </a:prstGeom>
-          <a:solidFill>
-            <a:srgbClr val="FFFFFF"/>
-          </a:solidFill>
-          <a:ln w="12700">
-            <a:solidFill>
-              <a:srgbClr val="DB2777"/>
-            </a:solidFill>
-            <a:prstDash val="solid"/>
-          </a:ln>
-        </p:spPr>
-      </p:sp>
-      <p:sp>
-        <p:nvSpPr>
-          <p:cNvPr id="43" name="Text 41"/>
-          <p:cNvSpPr/>
-          <p:nvPr/>
-        </p:nvSpPr>
-        <p:spPr>
-          <a:xfrm>
-            <a:off x="4850892" y="4169664"/>
-            <a:ext cx="685800" cy="475488"/>
-          </a:xfrm>
-          <a:prstGeom prst="rect">
-            <a:avLst/>
-          </a:prstGeom>
-          <a:noFill/>
-          <a:ln/>
-        </p:spPr>
-        <p:txBody>
-          <a:bodyPr wrap="square" lIns="0" tIns="0" rIns="0" bIns="0" rtlCol="0" anchor="ctr"/>
-          <a:lstStyle/>
-          <a:p>
-            <a:pPr algn="ctr" indent="0" marL="0">
-              <a:buNone/>
-            </a:pPr>
-            <a:r>
-              <a:rPr lang="en-US" sz="900" b="1" dirty="0">
-                <a:solidFill>
-                  <a:srgbClr val="9D174D"/>
-                </a:solidFill>
-                <a:latin typeface="Trebuchet MS" pitchFamily="34" charset="0"/>
-                <a:ea typeface="Trebuchet MS" pitchFamily="34" charset="-122"/>
-                <a:cs typeface="Trebuchet MS" pitchFamily="34" charset="-120"/>
-              </a:rPr>
-              <a:t>p</a:t>
-            </a:r>
-            <a:endParaRPr lang="en-US" sz="900" dirty="0"/>
-          </a:p>
-        </p:txBody>
-      </p:sp>
-      <p:sp>
-        <p:nvSpPr>
-          <p:cNvPr id="44" name="Shape 42"/>
-          <p:cNvSpPr/>
-          <p:nvPr/>
-        </p:nvSpPr>
-        <p:spPr>
-          <a:xfrm>
-            <a:off x="5759577" y="4169664"/>
-            <a:ext cx="685800" cy="475488"/>
-          </a:xfrm>
-          <a:prstGeom prst="rect">
-            <a:avLst>
-              <a:gd name="adj" fmla="val 7692"/>
-            </a:avLst>
-          </a:prstGeom>
-          <a:solidFill>
-            <a:srgbClr val="FFFFFF"/>
-          </a:solidFill>
-          <a:ln w="12700">
-            <a:solidFill>
-              <a:srgbClr val="DB2777"/>
-            </a:solidFill>
-            <a:prstDash val="solid"/>
-          </a:ln>
-        </p:spPr>
-      </p:sp>
-      <p:sp>
-        <p:nvSpPr>
-          <p:cNvPr id="45" name="Text 43"/>
-          <p:cNvSpPr/>
-          <p:nvPr/>
-        </p:nvSpPr>
-        <p:spPr>
-          <a:xfrm>
-            <a:off x="5759577" y="4169664"/>
-            <a:ext cx="685800" cy="475488"/>
-          </a:xfrm>
-          <a:prstGeom prst="rect">
-            <a:avLst/>
-          </a:prstGeom>
-          <a:noFill/>
-          <a:ln/>
-        </p:spPr>
-        <p:txBody>
-          <a:bodyPr wrap="square" lIns="0" tIns="0" rIns="0" bIns="0" rtlCol="0" anchor="ctr"/>
-          <a:lstStyle/>
-          <a:p>
-            <a:pPr algn="ctr" indent="0" marL="0">
-              <a:buNone/>
-            </a:pPr>
-            <a:r>
-              <a:rPr lang="en-US" sz="900" b="1" dirty="0">
-                <a:solidFill>
-                  <a:srgbClr val="9D174D"/>
-                </a:solidFill>
-                <a:latin typeface="Trebuchet MS" pitchFamily="34" charset="0"/>
-                <a:ea typeface="Trebuchet MS" pitchFamily="34" charset="-122"/>
-                <a:cs typeface="Trebuchet MS" pitchFamily="34" charset="-120"/>
-              </a:rPr>
-              <a:t>e</a:t>
-            </a:r>
-            <a:endParaRPr lang="en-US" sz="900" dirty="0"/>
-          </a:p>
-        </p:txBody>
-      </p:sp>
-      <p:sp>
-        <p:nvSpPr>
-          <p:cNvPr id="46" name="Shape 44"/>
-          <p:cNvSpPr/>
-          <p:nvPr/>
-        </p:nvSpPr>
-        <p:spPr>
-          <a:xfrm>
-            <a:off x="6668262" y="4169664"/>
-            <a:ext cx="685800" cy="475488"/>
-          </a:xfrm>
-          <a:prstGeom prst="rect">
-            <a:avLst>
-              <a:gd name="adj" fmla="val 7692"/>
-            </a:avLst>
-          </a:prstGeom>
-          <a:solidFill>
-            <a:srgbClr val="FFFFFF"/>
-          </a:solidFill>
-          <a:ln w="12700">
-            <a:solidFill>
-              <a:srgbClr val="DB2777"/>
-            </a:solidFill>
-            <a:prstDash val="solid"/>
-          </a:ln>
-        </p:spPr>
-      </p:sp>
-      <p:sp>
-        <p:nvSpPr>
-          <p:cNvPr id="47" name="Text 45"/>
-          <p:cNvSpPr/>
-          <p:nvPr/>
-        </p:nvSpPr>
-        <p:spPr>
-          <a:xfrm>
-            <a:off x="6668262" y="4169664"/>
-            <a:ext cx="685800" cy="475488"/>
-          </a:xfrm>
-          <a:prstGeom prst="rect">
-            <a:avLst/>
-          </a:prstGeom>
-          <a:noFill/>
-          <a:ln/>
-        </p:spPr>
-        <p:txBody>
-          <a:bodyPr wrap="square" lIns="0" tIns="0" rIns="0" bIns="0" rtlCol="0" anchor="ctr"/>
-          <a:lstStyle/>
-          <a:p>
-            <a:pPr algn="ctr" indent="0" marL="0">
-              <a:buNone/>
-            </a:pPr>
-            <a:r>
-              <a:rPr lang="en-US" sz="900" b="1" dirty="0">
-                <a:solidFill>
-                  <a:srgbClr val="9D174D"/>
-                </a:solidFill>
-                <a:latin typeface="Trebuchet MS" pitchFamily="34" charset="0"/>
-                <a:ea typeface="Trebuchet MS" pitchFamily="34" charset="-122"/>
-                <a:cs typeface="Trebuchet MS" pitchFamily="34" charset="-120"/>
-              </a:rPr>
-              <a:t>ll</a:t>
-            </a:r>
-            <a:endParaRPr lang="en-US" sz="900" dirty="0"/>
-          </a:p>
-        </p:txBody>
-      </p:sp>
-      <p:sp>
-        <p:nvSpPr>
-          <p:cNvPr id="48" name="Shape 46"/>
-          <p:cNvSpPr/>
-          <p:nvPr/>
-        </p:nvSpPr>
-        <p:spPr>
-          <a:xfrm>
-            <a:off x="7576947" y="4169664"/>
-            <a:ext cx="685800" cy="475488"/>
-          </a:xfrm>
-          <a:prstGeom prst="rect">
-            <a:avLst>
-              <a:gd name="adj" fmla="val 7692"/>
-            </a:avLst>
-          </a:prstGeom>
-          <a:solidFill>
-            <a:srgbClr val="FFFFFF"/>
-          </a:solidFill>
-          <a:ln w="12700">
-            <a:solidFill>
-              <a:srgbClr val="DB2777"/>
-            </a:solidFill>
-            <a:prstDash val="solid"/>
-          </a:ln>
-        </p:spPr>
-      </p:sp>
-      <p:sp>
-        <p:nvSpPr>
-          <p:cNvPr id="49" name="Text 47"/>
-          <p:cNvSpPr/>
-          <p:nvPr/>
-        </p:nvSpPr>
-        <p:spPr>
-          <a:xfrm>
-            <a:off x="7576947" y="4169664"/>
-            <a:ext cx="685800" cy="475488"/>
-          </a:xfrm>
-          <a:prstGeom prst="rect">
-            <a:avLst/>
-          </a:prstGeom>
-          <a:noFill/>
-          <a:ln/>
-        </p:spPr>
-        <p:txBody>
-          <a:bodyPr wrap="square" lIns="0" tIns="0" rIns="0" bIns="0" rtlCol="0" anchor="ctr"/>
-          <a:lstStyle/>
-          <a:p>
-            <a:pPr algn="ctr" indent="0" marL="0">
-              <a:buNone/>
-            </a:pPr>
-            <a:r>
-              <a:rPr lang="en-US" sz="900" b="1" dirty="0">
-                <a:solidFill>
-                  <a:srgbClr val="9D174D"/>
-                </a:solidFill>
-                <a:latin typeface="Trebuchet MS" pitchFamily="34" charset="0"/>
-                <a:ea typeface="Trebuchet MS" pitchFamily="34" charset="-122"/>
-                <a:cs typeface="Trebuchet MS" pitchFamily="34" charset="-120"/>
-              </a:rPr>
-              <a:t>s</a:t>
+              <a:t>er</a:t>
             </a:r>
             <a:endParaRPr lang="en-US" sz="900" dirty="0"/>
           </a:p>
@@ -28229,7 +27452,7 @@
                 <a:ea typeface="Trebuchet MS" pitchFamily="34" charset="-122"/>
                 <a:cs typeface="Trebuchet MS" pitchFamily="34" charset="-120"/>
               </a:rPr>
-              <a:t>spellbound</a:t>
+              <a:t>spellcheck</a:t>
             </a:r>
             <a:endParaRPr lang="en-US" sz="2800" dirty="0"/>
           </a:p>
@@ -29056,7 +28279,7 @@
                 <a:ea typeface="Trebuchet MS" pitchFamily="34" charset="-122"/>
                 <a:cs typeface="Trebuchet MS" pitchFamily="34" charset="-120"/>
               </a:rPr>
-              <a:t>spellbound</a:t>
+              <a:t>spellcheck</a:t>
             </a:r>
             <a:endParaRPr lang="en-US" sz="2800" dirty="0"/>
           </a:p>
@@ -29307,7 +28530,7 @@
                 <a:ea typeface="Trebuchet MS" pitchFamily="34" charset="-122"/>
                 <a:cs typeface="Trebuchet MS" pitchFamily="34" charset="-120"/>
               </a:rPr>
-              <a:t>bound</a:t>
+              <a:t>check</a:t>
             </a:r>
             <a:endParaRPr lang="en-US" sz="1300" dirty="0"/>
           </a:p>
@@ -29346,7 +28569,7 @@
                 <a:ea typeface="Calibri" pitchFamily="34" charset="-122"/>
                 <a:cs typeface="Calibri" pitchFamily="34" charset="-120"/>
               </a:rPr>
-              <a:t>held or tied fast</a:t>
+              <a:t>to look over and verify</a:t>
             </a:r>
             <a:endParaRPr lang="en-US" sz="850" dirty="0"/>
           </a:p>
@@ -30041,7 +29264,7 @@
                 <a:ea typeface="Trebuchet MS" pitchFamily="34" charset="-122"/>
                 <a:cs typeface="Trebuchet MS" pitchFamily="34" charset="-120"/>
               </a:rPr>
-              <a:t>spellbound</a:t>
+              <a:t>spellcheck</a:t>
             </a:r>
             <a:endParaRPr lang="en-US" sz="2800" dirty="0"/>
           </a:p>
@@ -30292,7 +29515,7 @@
                 <a:ea typeface="Trebuchet MS" pitchFamily="34" charset="-122"/>
                 <a:cs typeface="Trebuchet MS" pitchFamily="34" charset="-120"/>
               </a:rPr>
-              <a:t>bound</a:t>
+              <a:t>check</a:t>
             </a:r>
             <a:endParaRPr lang="en-US" sz="1300" dirty="0"/>
           </a:p>
@@ -30331,7 +29554,7 @@
                 <a:ea typeface="Calibri" pitchFamily="34" charset="-122"/>
                 <a:cs typeface="Calibri" pitchFamily="34" charset="-120"/>
               </a:rPr>
-              <a:t>held or tied fast</a:t>
+              <a:t>to look over and verify</a:t>
             </a:r>
             <a:endParaRPr lang="en-US" sz="850" dirty="0"/>
           </a:p>
@@ -30595,7 +29818,7 @@
                 <a:ea typeface="Trebuchet MS" pitchFamily="34" charset="-122"/>
                 <a:cs typeface="Trebuchet MS" pitchFamily="34" charset="-120"/>
               </a:rPr>
-              <a:t>bound</a:t>
+              <a:t>check</a:t>
             </a:r>
             <a:endParaRPr lang="en-US" sz="1400" dirty="0"/>
           </a:p>
@@ -31158,7 +30381,7 @@
                 <a:ea typeface="Trebuchet MS" pitchFamily="34" charset="-122"/>
                 <a:cs typeface="Trebuchet MS" pitchFamily="34" charset="-120"/>
               </a:rPr>
-              <a:t>spellbound</a:t>
+              <a:t>spellcheck</a:t>
             </a:r>
             <a:endParaRPr lang="en-US" sz="2800" dirty="0"/>
           </a:p>
@@ -31409,7 +30632,7 @@
                 <a:ea typeface="Trebuchet MS" pitchFamily="34" charset="-122"/>
                 <a:cs typeface="Trebuchet MS" pitchFamily="34" charset="-120"/>
               </a:rPr>
-              <a:t>bound</a:t>
+              <a:t>check</a:t>
             </a:r>
             <a:endParaRPr lang="en-US" sz="1300" dirty="0"/>
           </a:p>
@@ -31448,7 +30671,7 @@
                 <a:ea typeface="Calibri" pitchFamily="34" charset="-122"/>
                 <a:cs typeface="Calibri" pitchFamily="34" charset="-120"/>
               </a:rPr>
-              <a:t>held or tied fast</a:t>
+              <a:t>to look over and verify</a:t>
             </a:r>
             <a:endParaRPr lang="en-US" sz="850" dirty="0"/>
           </a:p>
@@ -31712,7 +30935,7 @@
                 <a:ea typeface="Trebuchet MS" pitchFamily="34" charset="-122"/>
                 <a:cs typeface="Trebuchet MS" pitchFamily="34" charset="-120"/>
               </a:rPr>
-              <a:t>bound</a:t>
+              <a:t>check</a:t>
             </a:r>
             <a:endParaRPr lang="en-US" sz="1400" dirty="0"/>
           </a:p>
@@ -31793,11 +31016,11 @@
         <p:spPr>
           <a:xfrm>
             <a:off x="1874520" y="4096512"/>
-            <a:ext cx="6903720" cy="658368"/>
+            <a:ext cx="6903720" cy="804672"/>
           </a:xfrm>
           <a:prstGeom prst="rect">
             <a:avLst>
-              <a:gd name="adj" fmla="val 8333"/>
+              <a:gd name="adj" fmla="val 6818"/>
             </a:avLst>
           </a:prstGeom>
           <a:solidFill>
@@ -31820,11 +31043,11 @@
         <p:spPr>
           <a:xfrm>
             <a:off x="2124837" y="4169664"/>
-            <a:ext cx="685800" cy="475488"/>
+            <a:ext cx="685800" cy="384048"/>
           </a:xfrm>
           <a:prstGeom prst="rect">
             <a:avLst>
-              <a:gd name="adj" fmla="val 7692"/>
+              <a:gd name="adj" fmla="val 9524"/>
             </a:avLst>
           </a:prstGeom>
           <a:solidFill>
@@ -31847,7 +31070,7 @@
         <p:spPr>
           <a:xfrm>
             <a:off x="2124837" y="4169664"/>
-            <a:ext cx="685800" cy="475488"/>
+            <a:ext cx="685800" cy="384048"/>
           </a:xfrm>
           <a:prstGeom prst="rect">
             <a:avLst/>
@@ -31886,11 +31109,11 @@
         <p:spPr>
           <a:xfrm>
             <a:off x="3033522" y="4169664"/>
-            <a:ext cx="685800" cy="475488"/>
+            <a:ext cx="685800" cy="384048"/>
           </a:xfrm>
           <a:prstGeom prst="rect">
             <a:avLst>
-              <a:gd name="adj" fmla="val 7692"/>
+              <a:gd name="adj" fmla="val 9524"/>
             </a:avLst>
           </a:prstGeom>
           <a:solidFill>
@@ -31913,7 +31136,7 @@
         <p:spPr>
           <a:xfrm>
             <a:off x="3033522" y="4169664"/>
-            <a:ext cx="685800" cy="475488"/>
+            <a:ext cx="685800" cy="384048"/>
           </a:xfrm>
           <a:prstGeom prst="rect">
             <a:avLst/>
@@ -31952,11 +31175,11 @@
         <p:spPr>
           <a:xfrm>
             <a:off x="3942207" y="4169664"/>
-            <a:ext cx="685800" cy="475488"/>
+            <a:ext cx="685800" cy="384048"/>
           </a:xfrm>
           <a:prstGeom prst="rect">
             <a:avLst>
-              <a:gd name="adj" fmla="val 7692"/>
+              <a:gd name="adj" fmla="val 9524"/>
             </a:avLst>
           </a:prstGeom>
           <a:solidFill>
@@ -31979,7 +31202,7 @@
         <p:spPr>
           <a:xfrm>
             <a:off x="3942207" y="4169664"/>
-            <a:ext cx="685800" cy="475488"/>
+            <a:ext cx="685800" cy="384048"/>
           </a:xfrm>
           <a:prstGeom prst="rect">
             <a:avLst/>
@@ -32018,11 +31241,11 @@
         <p:spPr>
           <a:xfrm>
             <a:off x="4850892" y="4169664"/>
-            <a:ext cx="685800" cy="475488"/>
+            <a:ext cx="685800" cy="384048"/>
           </a:xfrm>
           <a:prstGeom prst="rect">
             <a:avLst>
-              <a:gd name="adj" fmla="val 7692"/>
+              <a:gd name="adj" fmla="val 9524"/>
             </a:avLst>
           </a:prstGeom>
           <a:solidFill>
@@ -32045,7 +31268,7 @@
         <p:spPr>
           <a:xfrm>
             <a:off x="4850892" y="4169664"/>
-            <a:ext cx="685800" cy="475488"/>
+            <a:ext cx="685800" cy="384048"/>
           </a:xfrm>
           <a:prstGeom prst="rect">
             <a:avLst/>
@@ -32084,11 +31307,11 @@
         <p:spPr>
           <a:xfrm>
             <a:off x="5759577" y="4169664"/>
-            <a:ext cx="685800" cy="475488"/>
+            <a:ext cx="685800" cy="384048"/>
           </a:xfrm>
           <a:prstGeom prst="rect">
             <a:avLst>
-              <a:gd name="adj" fmla="val 7692"/>
+              <a:gd name="adj" fmla="val 9524"/>
             </a:avLst>
           </a:prstGeom>
           <a:solidFill>
@@ -32111,7 +31334,7 @@
         <p:spPr>
           <a:xfrm>
             <a:off x="5759577" y="4169664"/>
-            <a:ext cx="685800" cy="475488"/>
+            <a:ext cx="685800" cy="384048"/>
           </a:xfrm>
           <a:prstGeom prst="rect">
             <a:avLst/>
@@ -32135,7 +31358,7 @@
                 <a:ea typeface="Trebuchet MS" pitchFamily="34" charset="-122"/>
                 <a:cs typeface="Trebuchet MS" pitchFamily="34" charset="-120"/>
               </a:rPr>
-              <a:t>b</a:t>
+              <a:t>ch</a:t>
             </a:r>
             <a:endParaRPr lang="en-US" sz="900" dirty="0"/>
           </a:p>
@@ -32150,11 +31373,11 @@
         <p:spPr>
           <a:xfrm>
             <a:off x="6668262" y="4169664"/>
-            <a:ext cx="685800" cy="475488"/>
+            <a:ext cx="685800" cy="384048"/>
           </a:xfrm>
           <a:prstGeom prst="rect">
             <a:avLst>
-              <a:gd name="adj" fmla="val 7692"/>
+              <a:gd name="adj" fmla="val 9524"/>
             </a:avLst>
           </a:prstGeom>
           <a:solidFill>
@@ -32177,7 +31400,7 @@
         <p:spPr>
           <a:xfrm>
             <a:off x="6668262" y="4169664"/>
-            <a:ext cx="685800" cy="475488"/>
+            <a:ext cx="685800" cy="384048"/>
           </a:xfrm>
           <a:prstGeom prst="rect">
             <a:avLst/>
@@ -32201,7 +31424,7 @@
                 <a:ea typeface="Trebuchet MS" pitchFamily="34" charset="-122"/>
                 <a:cs typeface="Trebuchet MS" pitchFamily="34" charset="-120"/>
               </a:rPr>
-              <a:t>ou</a:t>
+              <a:t>e</a:t>
             </a:r>
             <a:endParaRPr lang="en-US" sz="900" dirty="0"/>
           </a:p>
@@ -32216,11 +31439,11 @@
         <p:spPr>
           <a:xfrm>
             <a:off x="7576947" y="4169664"/>
-            <a:ext cx="685800" cy="475488"/>
+            <a:ext cx="685800" cy="384048"/>
           </a:xfrm>
           <a:prstGeom prst="rect">
             <a:avLst>
-              <a:gd name="adj" fmla="val 7692"/>
+              <a:gd name="adj" fmla="val 9524"/>
             </a:avLst>
           </a:prstGeom>
           <a:solidFill>
@@ -32243,7 +31466,7 @@
         <p:spPr>
           <a:xfrm>
             <a:off x="7576947" y="4169664"/>
-            <a:ext cx="685800" cy="475488"/>
+            <a:ext cx="685800" cy="384048"/>
           </a:xfrm>
           <a:prstGeom prst="rect">
             <a:avLst/>
@@ -32267,9 +31490,48 @@
                 <a:ea typeface="Trebuchet MS" pitchFamily="34" charset="-122"/>
                 <a:cs typeface="Trebuchet MS" pitchFamily="34" charset="-120"/>
               </a:rPr>
-              <a:t>nd</a:t>
+              <a:t>ck</a:t>
             </a:r>
             <a:endParaRPr lang="en-US" sz="900" dirty="0"/>
+          </a:p>
+        </p:txBody>
+      </p:sp>
+      <p:sp>
+        <p:nvSpPr>
+          <p:cNvPr id="47" name="Text 45"/>
+          <p:cNvSpPr/>
+          <p:nvPr/>
+        </p:nvSpPr>
+        <p:spPr>
+          <a:xfrm>
+            <a:off x="7576947" y="4572000"/>
+            <a:ext cx="685800" cy="219456"/>
+          </a:xfrm>
+          <a:prstGeom prst="rect">
+            <a:avLst/>
+          </a:prstGeom>
+          <a:noFill/>
+          <a:ln/>
+        </p:spPr>
+        <p:txBody>
+          <a:bodyPr wrap="square" lIns="0" tIns="0" rIns="0" bIns="0" rtlCol="0" anchor="t"/>
+          <a:lstStyle/>
+          <a:p>
+            <a:pPr algn="ctr" indent="0" marL="0">
+              <a:buNone/>
+            </a:pPr>
+            <a:r>
+              <a:rPr lang="en-US" sz="750" i="1" dirty="0">
+                <a:solidFill>
+                  <a:srgbClr val="94A3B8"/>
+                </a:solidFill>
+                <a:latin typeface="Calibri" pitchFamily="34" charset="0"/>
+                <a:ea typeface="Calibri" pitchFamily="34" charset="-122"/>
+                <a:cs typeface="Calibri" pitchFamily="34" charset="-120"/>
+              </a:rPr>
+              <a:t>/k/</a:t>
+            </a:r>
+            <a:endParaRPr lang="en-US" sz="750" dirty="0"/>
           </a:p>
         </p:txBody>
       </p:sp>
@@ -34527,7 +33789,7 @@
                 <a:ea typeface="Trebuchet MS" pitchFamily="34" charset="-122"/>
                 <a:cs typeface="Trebuchet MS" pitchFamily="34" charset="-120"/>
               </a:rPr>
-              <a:t>out-</a:t>
+              <a:t>over-</a:t>
             </a:r>
             <a:endParaRPr lang="en-US" sz="1300" dirty="0"/>
           </a:p>
@@ -35006,7 +34268,7 @@
                 <a:ea typeface="Trebuchet MS" pitchFamily="34" charset="-122"/>
                 <a:cs typeface="Trebuchet MS" pitchFamily="34" charset="-120"/>
               </a:rPr>
-              <a:t>spellbound</a:t>
+              <a:t>speller</a:t>
             </a:r>
             <a:endParaRPr lang="en-US" sz="1200" dirty="0"/>
           </a:p>
@@ -35072,7 +34334,7 @@
                 <a:ea typeface="Trebuchet MS" pitchFamily="34" charset="-122"/>
                 <a:cs typeface="Trebuchet MS" pitchFamily="34" charset="-120"/>
               </a:rPr>
-              <a:t>speller</a:t>
+              <a:t>misspelled</a:t>
             </a:r>
             <a:endParaRPr lang="en-US" sz="1200" dirty="0"/>
           </a:p>
@@ -35138,7 +34400,7 @@
                 <a:ea typeface="Trebuchet MS" pitchFamily="34" charset="-122"/>
                 <a:cs typeface="Trebuchet MS" pitchFamily="34" charset="-120"/>
               </a:rPr>
-              <a:t>misspelled</a:t>
+              <a:t>spellbound</a:t>
             </a:r>
             <a:endParaRPr lang="en-US" sz="1200" dirty="0"/>
           </a:p>
@@ -35204,7 +34466,7 @@
                 <a:ea typeface="Trebuchet MS" pitchFamily="34" charset="-122"/>
                 <a:cs typeface="Trebuchet MS" pitchFamily="34" charset="-120"/>
               </a:rPr>
-              <a:t>spellcheck</a:t>
+              <a:t>respell</a:t>
             </a:r>
             <a:endParaRPr lang="en-US" sz="1200" dirty="0"/>
           </a:p>
@@ -35270,7 +34532,7 @@
                 <a:ea typeface="Trebuchet MS" pitchFamily="34" charset="-122"/>
                 <a:cs typeface="Trebuchet MS" pitchFamily="34" charset="-120"/>
               </a:rPr>
-              <a:t>unspelled</a:t>
+              <a:t>spellcheck</a:t>
             </a:r>
             <a:endParaRPr lang="en-US" sz="1200" dirty="0"/>
           </a:p>
@@ -35336,7 +34598,7 @@
                 <a:ea typeface="Trebuchet MS" pitchFamily="34" charset="-122"/>
                 <a:cs typeface="Trebuchet MS" pitchFamily="34" charset="-120"/>
               </a:rPr>
-              <a:t>respell</a:t>
+              <a:t>misspelling</a:t>
             </a:r>
             <a:endParaRPr lang="en-US" sz="1200" dirty="0"/>
           </a:p>
@@ -36524,7 +35786,7 @@
                 <a:ea typeface="Calibri" pitchFamily="34" charset="-122"/>
                 <a:cs typeface="Calibri" pitchFamily="34" charset="-120"/>
               </a:rPr>
-              <a:t>1.  The word 'misspell' contains the prefix 'mis-' meaning wrong or bad.</a:t>
+              <a:t>1.  The word 'spellbound' is made up of two parts: 'spell' and 'bound'.</a:t>
             </a:r>
             <a:endParaRPr lang="en-US" sz="1300" dirty="0"/>
           </a:p>
@@ -36663,7 +35925,7 @@
                 <a:ea typeface="Calibri" pitchFamily="34" charset="-122"/>
                 <a:cs typeface="Calibri" pitchFamily="34" charset="-120"/>
               </a:rPr>
-              <a:t>2.  The root 'spell' comes from an ancient Greek word.</a:t>
+              <a:t>2.  A spellcheck tool on a computer helps find spelling mistakes in your writing.</a:t>
             </a:r>
             <a:endParaRPr lang="en-US" sz="1300" dirty="0"/>
           </a:p>
@@ -36686,11 +35948,11 @@
             </a:avLst>
           </a:prstGeom>
           <a:solidFill>
-            <a:srgbClr val="FEE2E2"/>
-          </a:solidFill>
-          <a:ln w="12700">
-            <a:solidFill>
-              <a:srgbClr val="DC2626"/>
+            <a:srgbClr val="DCFCE7"/>
+          </a:solidFill>
+          <a:ln w="12700">
+            <a:solidFill>
+              <a:srgbClr val="16A34A"/>
             </a:solidFill>
             <a:prstDash val="solid"/>
           </a:ln>
@@ -36723,13 +35985,13 @@
             <a:r>
               <a:rPr lang="en-US" sz="1100" b="1" dirty="0">
                 <a:solidFill>
-                  <a:srgbClr val="DC2626"/>
+                  <a:srgbClr val="16A34A"/>
                 </a:solidFill>
                 <a:latin typeface="Trebuchet MS" pitchFamily="34" charset="0"/>
                 <a:ea typeface="Trebuchet MS" pitchFamily="34" charset="-122"/>
                 <a:cs typeface="Trebuchet MS" pitchFamily="34" charset="-120"/>
               </a:rPr>
-              <a:t>FALSE</a:t>
+              <a:t>TRUE</a:t>
             </a:r>
             <a:endParaRPr lang="en-US" sz="1100" dirty="0"/>
           </a:p>
@@ -36802,7 +36064,7 @@
                 <a:ea typeface="Calibri" pitchFamily="34" charset="-122"/>
                 <a:cs typeface="Calibri" pitchFamily="34" charset="-120"/>
               </a:rPr>
-              <a:t>3.  The word 'spellbound' means to be completely captured by something amazing.</a:t>
+              <a:t>3.  The root 'spell' comes from an ancient Greek word meaning to write with pictures.</a:t>
             </a:r>
             <a:endParaRPr lang="en-US" sz="1300" dirty="0"/>
           </a:p>
@@ -36825,11 +36087,11 @@
             </a:avLst>
           </a:prstGeom>
           <a:solidFill>
-            <a:srgbClr val="DCFCE7"/>
-          </a:solidFill>
-          <a:ln w="12700">
-            <a:solidFill>
-              <a:srgbClr val="16A34A"/>
+            <a:srgbClr val="FEE2E2"/>
+          </a:solidFill>
+          <a:ln w="12700">
+            <a:solidFill>
+              <a:srgbClr val="DC2626"/>
             </a:solidFill>
             <a:prstDash val="solid"/>
           </a:ln>
@@ -36862,13 +36124,13 @@
             <a:r>
               <a:rPr lang="en-US" sz="1100" b="1" dirty="0">
                 <a:solidFill>
-                  <a:srgbClr val="16A34A"/>
+                  <a:srgbClr val="DC2626"/>
                 </a:solidFill>
                 <a:latin typeface="Trebuchet MS" pitchFamily="34" charset="0"/>
                 <a:ea typeface="Trebuchet MS" pitchFamily="34" charset="-122"/>
                 <a:cs typeface="Trebuchet MS" pitchFamily="34" charset="-120"/>
               </a:rPr>
-              <a:t>TRUE</a:t>
+              <a:t>FALSE</a:t>
             </a:r>
             <a:endParaRPr lang="en-US" sz="1100" dirty="0"/>
           </a:p>
@@ -36941,7 +36203,7 @@
                 <a:ea typeface="Calibri" pitchFamily="34" charset="-122"/>
                 <a:cs typeface="Calibri" pitchFamily="34" charset="-120"/>
               </a:rPr>
-              <a:t>4.  You can add the suffix '-ing' to 'spell' to make the word 'spelling'.</a:t>
+              <a:t>4.  The word 'misspell' contains the prefix 'mis', which means wrongly or badly.</a:t>
             </a:r>
             <a:endParaRPr lang="en-US" sz="1300" dirty="0"/>
           </a:p>
@@ -37080,7 +36342,7 @@
                 <a:ea typeface="Calibri" pitchFamily="34" charset="-122"/>
                 <a:cs typeface="Calibri" pitchFamily="34" charset="-120"/>
               </a:rPr>
-              <a:t>5.  The prefix 're-' in 'respell' means to do something before.</a:t>
+              <a:t>5.  Adding the prefix 're' to 'spell' means to spell something for the very first time.</a:t>
             </a:r>
             <a:endParaRPr lang="en-US" sz="1300" dirty="0"/>
           </a:p>
@@ -37851,7 +37113,7 @@
                 <a:ea typeface="Trebuchet MS" pitchFamily="34" charset="-122"/>
                 <a:cs typeface="Trebuchet MS" pitchFamily="34" charset="-120"/>
               </a:rPr>
-              <a:t>spellbound</a:t>
+              <a:t>speller</a:t>
             </a:r>
             <a:endParaRPr lang="en-US" sz="1300" dirty="0"/>
           </a:p>
@@ -37917,7 +37179,7 @@
                 <a:ea typeface="Trebuchet MS" pitchFamily="34" charset="-122"/>
                 <a:cs typeface="Trebuchet MS" pitchFamily="34" charset="-120"/>
               </a:rPr>
-              <a:t>speller</a:t>
+              <a:t>misspelled</a:t>
             </a:r>
             <a:endParaRPr lang="en-US" sz="1300" dirty="0"/>
           </a:p>
@@ -37983,7 +37245,7 @@
                 <a:ea typeface="Trebuchet MS" pitchFamily="34" charset="-122"/>
                 <a:cs typeface="Trebuchet MS" pitchFamily="34" charset="-120"/>
               </a:rPr>
-              <a:t>misspelled</a:t>
+              <a:t>spellbound</a:t>
             </a:r>
             <a:endParaRPr lang="en-US" sz="1300" dirty="0"/>
           </a:p>
@@ -38049,7 +37311,7 @@
                 <a:ea typeface="Trebuchet MS" pitchFamily="34" charset="-122"/>
                 <a:cs typeface="Trebuchet MS" pitchFamily="34" charset="-120"/>
               </a:rPr>
-              <a:t>spellcheck</a:t>
+              <a:t>respell</a:t>
             </a:r>
             <a:endParaRPr lang="en-US" sz="1300" dirty="0"/>
           </a:p>
@@ -38115,7 +37377,7 @@
                 <a:ea typeface="Trebuchet MS" pitchFamily="34" charset="-122"/>
                 <a:cs typeface="Trebuchet MS" pitchFamily="34" charset="-120"/>
               </a:rPr>
-              <a:t>unspelled</a:t>
+              <a:t>spellcheck</a:t>
             </a:r>
             <a:endParaRPr lang="en-US" sz="1300" dirty="0"/>
           </a:p>
@@ -39206,7 +38468,7 @@
                 <a:ea typeface="Trebuchet MS" pitchFamily="34" charset="-122"/>
                 <a:cs typeface="Trebuchet MS" pitchFamily="34" charset="-120"/>
               </a:rPr>
-              <a:t>out-</a:t>
+              <a:t>over-</a:t>
             </a:r>
             <a:endParaRPr lang="en-US" sz="1300" dirty="0"/>
           </a:p>
@@ -40359,7 +39621,7 @@
                 <a:ea typeface="Calibri" pitchFamily="34" charset="-122"/>
                 <a:cs typeface="Calibri" pitchFamily="34" charset="-120"/>
               </a:rPr>
-              <a:t>Something that has not been spelled out or explained clearly.</a:t>
+              <a:t>A computer tool that finds and fixes spelling mistakes in your writing.</a:t>
             </a:r>
             <a:endParaRPr lang="en-US" sz="1200" dirty="0"/>
           </a:p>
@@ -40498,7 +39760,7 @@
                 <a:ea typeface="Calibri" pitchFamily="34" charset="-122"/>
                 <a:cs typeface="Calibri" pitchFamily="34" charset="-120"/>
               </a:rPr>
-              <a:t>A word that was written with the wrong letters or in the wrong order.</a:t>
+              <a:t>So interested or amazed by something that you cannot look away.</a:t>
             </a:r>
             <a:endParaRPr lang="en-US" sz="1200" dirty="0"/>
           </a:p>
@@ -40571,7 +39833,7 @@
                 <a:ea typeface="Trebuchet MS" pitchFamily="34" charset="-122"/>
                 <a:cs typeface="Trebuchet MS" pitchFamily="34" charset="-120"/>
               </a:rPr>
-              <a:t>spellbound</a:t>
+              <a:t>speller</a:t>
             </a:r>
             <a:endParaRPr lang="en-US" sz="1200" dirty="0"/>
           </a:p>
@@ -40637,7 +39899,7 @@
                 <a:ea typeface="Calibri" pitchFamily="34" charset="-122"/>
                 <a:cs typeface="Calibri" pitchFamily="34" charset="-120"/>
               </a:rPr>
-              <a:t>A person who spells words, or a book used to practise spelling.</a:t>
+              <a:t>Having written or said the letters of a word in the wrong order.</a:t>
             </a:r>
             <a:endParaRPr lang="en-US" sz="1200" dirty="0"/>
           </a:p>
@@ -40710,7 +39972,7 @@
                 <a:ea typeface="Trebuchet MS" pitchFamily="34" charset="-122"/>
                 <a:cs typeface="Trebuchet MS" pitchFamily="34" charset="-120"/>
               </a:rPr>
-              <a:t>speller</a:t>
+              <a:t>misspelled</a:t>
             </a:r>
             <a:endParaRPr lang="en-US" sz="1200" dirty="0"/>
           </a:p>
@@ -40776,7 +40038,7 @@
                 <a:ea typeface="Calibri" pitchFamily="34" charset="-122"/>
                 <a:cs typeface="Calibri" pitchFamily="34" charset="-120"/>
               </a:rPr>
-              <a:t>A computer tool that finds and fixes spelling mistakes in your writing.</a:t>
+              <a:t>To spell a word again, often in a different or clearer way.</a:t>
             </a:r>
             <a:endParaRPr lang="en-US" sz="1200" dirty="0"/>
           </a:p>
@@ -40849,7 +40111,7 @@
                 <a:ea typeface="Trebuchet MS" pitchFamily="34" charset="-122"/>
                 <a:cs typeface="Trebuchet MS" pitchFamily="34" charset="-120"/>
               </a:rPr>
-              <a:t>misspelled</a:t>
+              <a:t>spellbound</a:t>
             </a:r>
             <a:endParaRPr lang="en-US" sz="1200" dirty="0"/>
           </a:p>
@@ -40915,7 +40177,7 @@
                 <a:ea typeface="Calibri" pitchFamily="34" charset="-122"/>
                 <a:cs typeface="Calibri" pitchFamily="34" charset="-120"/>
               </a:rPr>
-              <a:t>So interested or amazed by something that you cannot look away.</a:t>
+              <a:t>A person who spells words, or a book used to practise spelling.</a:t>
             </a:r>
             <a:endParaRPr lang="en-US" sz="1200" dirty="0"/>
           </a:p>
@@ -40988,7 +40250,7 @@
                 <a:ea typeface="Trebuchet MS" pitchFamily="34" charset="-122"/>
                 <a:cs typeface="Trebuchet MS" pitchFamily="34" charset="-120"/>
               </a:rPr>
-              <a:t>spellcheck</a:t>
+              <a:t>respell</a:t>
             </a:r>
             <a:endParaRPr lang="en-US" sz="1200" dirty="0"/>
           </a:p>
@@ -41054,7 +40316,7 @@
                 <a:ea typeface="Calibri" pitchFamily="34" charset="-122"/>
                 <a:cs typeface="Calibri" pitchFamily="34" charset="-120"/>
               </a:rPr>
-              <a:t>The act of writing or saying the letters of a word in the correct order.</a:t>
+              <a:t>Writing or saying the letters of a word in the correct order.</a:t>
             </a:r>
             <a:endParaRPr lang="en-US" sz="1200" dirty="0"/>
           </a:p>
@@ -41127,7 +40389,7 @@
                 <a:ea typeface="Trebuchet MS" pitchFamily="34" charset="-122"/>
                 <a:cs typeface="Trebuchet MS" pitchFamily="34" charset="-120"/>
               </a:rPr>
-              <a:t>unspelled</a:t>
+              <a:t>spellcheck</a:t>
             </a:r>
             <a:endParaRPr lang="en-US" sz="1200" dirty="0"/>
           </a:p>
@@ -41688,7 +40950,7 @@
                 <a:ea typeface="Calibri" pitchFamily="34" charset="-122"/>
                 <a:cs typeface="Calibri" pitchFamily="34" charset="-120"/>
               </a:rPr>
-              <a:t>The teacher asked the class to check their spelling before handing in their stories.</a:t>
+              <a:t>The teacher asked the class to practise their spelling words every night before bed.</a:t>
             </a:r>
             <a:endParaRPr lang="en-US" sz="1500" dirty="0"/>
           </a:p>
@@ -41852,7 +41114,7 @@
                 <a:ea typeface="Calibri" pitchFamily="34" charset="-122"/>
                 <a:cs typeface="Calibri" pitchFamily="34" charset="-120"/>
               </a:rPr>
-              <a:t>Jake was so spellbound by the magic show that he forgot to eat his popcorn.</a:t>
+              <a:t>Jake was spellbound by the magician's tricks at the school assembly.</a:t>
             </a:r>
             <a:endParaRPr lang="en-US" sz="1500" dirty="0"/>
           </a:p>
@@ -42016,7 +41278,7 @@
                 <a:ea typeface="Calibri" pitchFamily="34" charset="-122"/>
                 <a:cs typeface="Calibri" pitchFamily="34" charset="-120"/>
               </a:rPr>
-              <a:t>It is easy to misspell tricky words like 'necessary' and 'beautiful' if you rush.</a:t>
+              <a:t>Always use spellcheck before you hand in your writing to make sure you have not misspelled any words.</a:t>
             </a:r>
             <a:endParaRPr lang="en-US" sz="1500" dirty="0"/>
           </a:p>

--- a/output/wordlabs-spell-3day.pptx
+++ b/output/wordlabs-spell-3day.pptx
@@ -4240,7 +4240,7 @@
                 <a:ea typeface="Calibri" pitchFamily="34" charset="-122"/>
                 <a:cs typeface="Calibri" pitchFamily="34" charset="-120"/>
               </a:rPr>
-              <a:t>"to name letters in order"</a:t>
+              <a:t>"to write or say letters in order"</a:t>
             </a:r>
             <a:endParaRPr lang="en-US" sz="2200" dirty="0"/>
           </a:p>
@@ -4279,7 +4279,7 @@
                 <a:ea typeface="Calibri" pitchFamily="34" charset="-122"/>
                 <a:cs typeface="Calibri" pitchFamily="34" charset="-120"/>
               </a:rPr>
-              <a:t>Origin: Latin: spellan</a:t>
+              <a:t>Origin: Anglo-Saxon (Old English) root</a:t>
             </a:r>
             <a:endParaRPr lang="en-US" sz="1300" dirty="0"/>
           </a:p>
@@ -5288,7 +5288,7 @@
                 <a:ea typeface="Calibri" pitchFamily="34" charset="-122"/>
                 <a:cs typeface="Calibri" pitchFamily="34" charset="-120"/>
               </a:rPr>
-              <a:t>Word Labs  •  wordlabs.app  •  Root: 'spell' = to name letters in order</a:t>
+              <a:t>Word Labs  •  wordlabs.app  •  Root: 'spell' = to write or say letters in order</a:t>
             </a:r>
             <a:endParaRPr lang="en-US" sz="800" dirty="0"/>
           </a:p>
@@ -5928,7 +5928,7 @@
                 <a:ea typeface="Calibri" pitchFamily="34" charset="-122"/>
                 <a:cs typeface="Calibri" pitchFamily="34" charset="-120"/>
               </a:rPr>
-              <a:t>Word Labs  •  wordlabs.app  •  Root: 'spell' = to name letters in order</a:t>
+              <a:t>Word Labs  •  wordlabs.app  •  Root: 'spell' = to write or say letters in order</a:t>
             </a:r>
             <a:endParaRPr lang="en-US" sz="800" dirty="0"/>
           </a:p>
@@ -6040,7 +6040,7 @@
                 <a:ea typeface="Calibri" pitchFamily="34" charset="-122"/>
                 <a:cs typeface="Calibri" pitchFamily="34" charset="-120"/>
               </a:rPr>
-              <a:t>Sam was careful not to </a:t>
+              <a:t>My little sister is a brilliant </a:t>
             </a:r>
             <a:pPr algn="l" indent="0" marL="0">
               <a:buNone/>
@@ -6057,7 +6057,7 @@
                 <a:ea typeface="Calibri" pitchFamily="34" charset="-122"/>
                 <a:cs typeface="Calibri" pitchFamily="34" charset="-120"/>
               </a:rPr>
-              <a:t>misspell</a:t>
+              <a:t>speller</a:t>
             </a:r>
             <a:pPr algn="l" indent="0" marL="0">
               <a:buNone/>
@@ -6071,7 +6071,7 @@
                 <a:ea typeface="Calibri" pitchFamily="34" charset="-122"/>
                 <a:cs typeface="Calibri" pitchFamily="34" charset="-120"/>
               </a:rPr>
-              <a:t> any words during the </a:t>
+              <a:t> for her age. It's easy to </a:t>
             </a:r>
             <a:pPr algn="l" indent="0" marL="0">
               <a:buNone/>
@@ -6088,7 +6088,7 @@
                 <a:ea typeface="Calibri" pitchFamily="34" charset="-122"/>
                 <a:cs typeface="Calibri" pitchFamily="34" charset="-120"/>
               </a:rPr>
-              <a:t>spelling</a:t>
+              <a:t>misspell</a:t>
             </a:r>
             <a:pPr algn="l" indent="0" marL="0">
               <a:buNone/>
@@ -6102,7 +6102,7 @@
                 <a:ea typeface="Calibri" pitchFamily="34" charset="-122"/>
                 <a:cs typeface="Calibri" pitchFamily="34" charset="-120"/>
               </a:rPr>
-              <a:t> test.</a:t>
+              <a:t> the word 'necessary'.</a:t>
             </a:r>
             <a:endParaRPr lang="en-US" sz="1800" dirty="0"/>
           </a:p>
@@ -6257,7 +6257,7 @@
                 <a:ea typeface="Trebuchet MS" pitchFamily="34" charset="-122"/>
                 <a:cs typeface="Trebuchet MS" pitchFamily="34" charset="-120"/>
               </a:rPr>
-              <a:t>misspell</a:t>
+              <a:t>speller</a:t>
             </a:r>
             <a:endParaRPr lang="en-US" sz="1400" dirty="0"/>
           </a:p>
@@ -6385,7 +6385,7 @@
                 <a:ea typeface="Trebuchet MS" pitchFamily="34" charset="-122"/>
                 <a:cs typeface="Trebuchet MS" pitchFamily="34" charset="-120"/>
               </a:rPr>
-              <a:t>spelling</a:t>
+              <a:t>misspell</a:t>
             </a:r>
             <a:endParaRPr lang="en-US" sz="1400" dirty="0"/>
           </a:p>
@@ -6716,7 +6716,7 @@
                 <a:ea typeface="Calibri" pitchFamily="34" charset="-122"/>
                 <a:cs typeface="Calibri" pitchFamily="34" charset="-120"/>
               </a:rPr>
-              <a:t>Word Labs  •  wordlabs.app  •  Root: 'spell' = to name letters in order</a:t>
+              <a:t>Word Labs  •  wordlabs.app  •  Root: 'spell' = to write or say letters in order</a:t>
             </a:r>
             <a:endParaRPr lang="en-US" sz="800" dirty="0"/>
           </a:p>
@@ -6855,7 +6855,7 @@
                 <a:ea typeface="Trebuchet MS" pitchFamily="34" charset="-122"/>
                 <a:cs typeface="Trebuchet MS" pitchFamily="34" charset="-120"/>
               </a:rPr>
-              <a:t>misspell</a:t>
+              <a:t>speller</a:t>
             </a:r>
             <a:endParaRPr lang="en-US" sz="2800" dirty="0"/>
           </a:p>
@@ -7543,7 +7543,7 @@
                 <a:ea typeface="Calibri" pitchFamily="34" charset="-122"/>
                 <a:cs typeface="Calibri" pitchFamily="34" charset="-120"/>
               </a:rPr>
-              <a:t>Word Labs  •  wordlabs.app  •  Root: 'spell' = to name letters in order</a:t>
+              <a:t>Word Labs  •  wordlabs.app  •  Root: 'spell' = to write or say letters in order</a:t>
             </a:r>
             <a:endParaRPr lang="en-US" sz="800" dirty="0"/>
           </a:p>
@@ -7682,7 +7682,7 @@
                 <a:ea typeface="Trebuchet MS" pitchFamily="34" charset="-122"/>
                 <a:cs typeface="Trebuchet MS" pitchFamily="34" charset="-120"/>
               </a:rPr>
-              <a:t>misspell</a:t>
+              <a:t>speller</a:t>
             </a:r>
             <a:endParaRPr lang="en-US" sz="2800" dirty="0"/>
           </a:p>
@@ -7771,11 +7771,11 @@
             </a:avLst>
           </a:prstGeom>
           <a:solidFill>
-            <a:srgbClr val="DDD6FE"/>
+            <a:srgbClr val="CCFBF1"/>
           </a:solidFill>
           <a:ln w="19050">
             <a:solidFill>
-              <a:srgbClr val="7C3AED"/>
+              <a:srgbClr val="0D9488"/>
             </a:solidFill>
             <a:prstDash val="solid"/>
           </a:ln>
@@ -7815,13 +7815,13 @@
             <a:r>
               <a:rPr lang="en-US" sz="1300" b="1" dirty="0">
                 <a:solidFill>
-                  <a:srgbClr val="4C1D95"/>
+                  <a:srgbClr val="0F766E"/>
                 </a:solidFill>
                 <a:latin typeface="Trebuchet MS" pitchFamily="34" charset="0"/>
                 <a:ea typeface="Trebuchet MS" pitchFamily="34" charset="-122"/>
                 <a:cs typeface="Trebuchet MS" pitchFamily="34" charset="-120"/>
               </a:rPr>
-              <a:t>mis</a:t>
+              <a:t>spell</a:t>
             </a:r>
             <a:endParaRPr lang="en-US" sz="1300" dirty="0"/>
           </a:p>
@@ -7860,7 +7860,7 @@
                 <a:ea typeface="Calibri" pitchFamily="34" charset="-122"/>
                 <a:cs typeface="Calibri" pitchFamily="34" charset="-120"/>
               </a:rPr>
-              <a:t>wrongly, badly</a:t>
+              <a:t>to write or say letters in order</a:t>
             </a:r>
             <a:endParaRPr lang="en-US" sz="850" dirty="0"/>
           </a:p>
@@ -7883,11 +7883,11 @@
             </a:avLst>
           </a:prstGeom>
           <a:solidFill>
-            <a:srgbClr val="CCFBF1"/>
+            <a:srgbClr val="FCE7F3"/>
           </a:solidFill>
           <a:ln w="19050">
             <a:solidFill>
-              <a:srgbClr val="0D9488"/>
+              <a:srgbClr val="DB2777"/>
             </a:solidFill>
             <a:prstDash val="solid"/>
           </a:ln>
@@ -7927,13 +7927,13 @@
             <a:r>
               <a:rPr lang="en-US" sz="1300" b="1" dirty="0">
                 <a:solidFill>
-                  <a:srgbClr val="0F766E"/>
+                  <a:srgbClr val="9D174D"/>
                 </a:solidFill>
                 <a:latin typeface="Trebuchet MS" pitchFamily="34" charset="0"/>
                 <a:ea typeface="Trebuchet MS" pitchFamily="34" charset="-122"/>
                 <a:cs typeface="Trebuchet MS" pitchFamily="34" charset="-120"/>
               </a:rPr>
-              <a:t>spell</a:t>
+              <a:t>er</a:t>
             </a:r>
             <a:endParaRPr lang="en-US" sz="1300" dirty="0"/>
           </a:p>
@@ -7972,7 +7972,7 @@
                 <a:ea typeface="Calibri" pitchFamily="34" charset="-122"/>
                 <a:cs typeface="Calibri" pitchFamily="34" charset="-120"/>
               </a:rPr>
-              <a:t>to name letters in order</a:t>
+              <a:t>person who; more</a:t>
             </a:r>
             <a:endParaRPr lang="en-US" sz="850" dirty="0"/>
           </a:p>
@@ -8528,7 +8528,7 @@
                 <a:ea typeface="Calibri" pitchFamily="34" charset="-122"/>
                 <a:cs typeface="Calibri" pitchFamily="34" charset="-120"/>
               </a:rPr>
-              <a:t>Word Labs  •  wordlabs.app  •  Root: 'spell' = to name letters in order</a:t>
+              <a:t>Word Labs  •  wordlabs.app  •  Root: 'spell' = to write or say letters in order</a:t>
             </a:r>
             <a:endParaRPr lang="en-US" sz="800" dirty="0"/>
           </a:p>
@@ -8667,7 +8667,7 @@
                 <a:ea typeface="Trebuchet MS" pitchFamily="34" charset="-122"/>
                 <a:cs typeface="Trebuchet MS" pitchFamily="34" charset="-120"/>
               </a:rPr>
-              <a:t>misspell</a:t>
+              <a:t>speller</a:t>
             </a:r>
             <a:endParaRPr lang="en-US" sz="2800" dirty="0"/>
           </a:p>
@@ -8756,11 +8756,11 @@
             </a:avLst>
           </a:prstGeom>
           <a:solidFill>
-            <a:srgbClr val="DDD6FE"/>
+            <a:srgbClr val="CCFBF1"/>
           </a:solidFill>
           <a:ln w="19050">
             <a:solidFill>
-              <a:srgbClr val="7C3AED"/>
+              <a:srgbClr val="0D9488"/>
             </a:solidFill>
             <a:prstDash val="solid"/>
           </a:ln>
@@ -8800,13 +8800,13 @@
             <a:r>
               <a:rPr lang="en-US" sz="1300" b="1" dirty="0">
                 <a:solidFill>
-                  <a:srgbClr val="4C1D95"/>
+                  <a:srgbClr val="0F766E"/>
                 </a:solidFill>
                 <a:latin typeface="Trebuchet MS" pitchFamily="34" charset="0"/>
                 <a:ea typeface="Trebuchet MS" pitchFamily="34" charset="-122"/>
                 <a:cs typeface="Trebuchet MS" pitchFamily="34" charset="-120"/>
               </a:rPr>
-              <a:t>mis</a:t>
+              <a:t>spell</a:t>
             </a:r>
             <a:endParaRPr lang="en-US" sz="1300" dirty="0"/>
           </a:p>
@@ -8845,7 +8845,7 @@
                 <a:ea typeface="Calibri" pitchFamily="34" charset="-122"/>
                 <a:cs typeface="Calibri" pitchFamily="34" charset="-120"/>
               </a:rPr>
-              <a:t>wrongly, badly</a:t>
+              <a:t>to write or say letters in order</a:t>
             </a:r>
             <a:endParaRPr lang="en-US" sz="850" dirty="0"/>
           </a:p>
@@ -8868,11 +8868,11 @@
             </a:avLst>
           </a:prstGeom>
           <a:solidFill>
-            <a:srgbClr val="CCFBF1"/>
+            <a:srgbClr val="FCE7F3"/>
           </a:solidFill>
           <a:ln w="19050">
             <a:solidFill>
-              <a:srgbClr val="0D9488"/>
+              <a:srgbClr val="DB2777"/>
             </a:solidFill>
             <a:prstDash val="solid"/>
           </a:ln>
@@ -8912,13 +8912,13 @@
             <a:r>
               <a:rPr lang="en-US" sz="1300" b="1" dirty="0">
                 <a:solidFill>
-                  <a:srgbClr val="0F766E"/>
+                  <a:srgbClr val="9D174D"/>
                 </a:solidFill>
                 <a:latin typeface="Trebuchet MS" pitchFamily="34" charset="0"/>
                 <a:ea typeface="Trebuchet MS" pitchFamily="34" charset="-122"/>
                 <a:cs typeface="Trebuchet MS" pitchFamily="34" charset="-120"/>
               </a:rPr>
-              <a:t>spell</a:t>
+              <a:t>er</a:t>
             </a:r>
             <a:endParaRPr lang="en-US" sz="1300" dirty="0"/>
           </a:p>
@@ -8957,7 +8957,7 @@
                 <a:ea typeface="Calibri" pitchFamily="34" charset="-122"/>
                 <a:cs typeface="Calibri" pitchFamily="34" charset="-120"/>
               </a:rPr>
-              <a:t>to name letters in order</a:t>
+              <a:t>person who; more</a:t>
             </a:r>
             <a:endParaRPr lang="en-US" sz="850" dirty="0"/>
           </a:p>
@@ -9116,7 +9116,7 @@
                 <a:ea typeface="Trebuchet MS" pitchFamily="34" charset="-122"/>
                 <a:cs typeface="Trebuchet MS" pitchFamily="34" charset="-120"/>
               </a:rPr>
-              <a:t>mis</a:t>
+              <a:t>spell</a:t>
             </a:r>
             <a:endParaRPr lang="en-US" sz="1400" dirty="0"/>
           </a:p>
@@ -9221,7 +9221,7 @@
                 <a:ea typeface="Trebuchet MS" pitchFamily="34" charset="-122"/>
                 <a:cs typeface="Trebuchet MS" pitchFamily="34" charset="-120"/>
               </a:rPr>
-              <a:t>spell</a:t>
+              <a:t>er</a:t>
             </a:r>
             <a:endParaRPr lang="en-US" sz="1400" dirty="0"/>
           </a:p>
@@ -9645,7 +9645,7 @@
                 <a:ea typeface="Calibri" pitchFamily="34" charset="-122"/>
                 <a:cs typeface="Calibri" pitchFamily="34" charset="-120"/>
               </a:rPr>
-              <a:t>Word Labs  •  wordlabs.app  •  Root: 'spell' = to name letters in order</a:t>
+              <a:t>Word Labs  •  wordlabs.app  •  Root: 'spell' = to write or say letters in order</a:t>
             </a:r>
             <a:endParaRPr lang="en-US" sz="800" dirty="0"/>
           </a:p>
@@ -9784,7 +9784,7 @@
                 <a:ea typeface="Trebuchet MS" pitchFamily="34" charset="-122"/>
                 <a:cs typeface="Trebuchet MS" pitchFamily="34" charset="-120"/>
               </a:rPr>
-              <a:t>misspell</a:t>
+              <a:t>speller</a:t>
             </a:r>
             <a:endParaRPr lang="en-US" sz="2800" dirty="0"/>
           </a:p>
@@ -9873,11 +9873,11 @@
             </a:avLst>
           </a:prstGeom>
           <a:solidFill>
-            <a:srgbClr val="DDD6FE"/>
+            <a:srgbClr val="CCFBF1"/>
           </a:solidFill>
           <a:ln w="19050">
             <a:solidFill>
-              <a:srgbClr val="7C3AED"/>
+              <a:srgbClr val="0D9488"/>
             </a:solidFill>
             <a:prstDash val="solid"/>
           </a:ln>
@@ -9917,13 +9917,13 @@
             <a:r>
               <a:rPr lang="en-US" sz="1300" b="1" dirty="0">
                 <a:solidFill>
-                  <a:srgbClr val="4C1D95"/>
+                  <a:srgbClr val="0F766E"/>
                 </a:solidFill>
                 <a:latin typeface="Trebuchet MS" pitchFamily="34" charset="0"/>
                 <a:ea typeface="Trebuchet MS" pitchFamily="34" charset="-122"/>
                 <a:cs typeface="Trebuchet MS" pitchFamily="34" charset="-120"/>
               </a:rPr>
-              <a:t>mis</a:t>
+              <a:t>spell</a:t>
             </a:r>
             <a:endParaRPr lang="en-US" sz="1300" dirty="0"/>
           </a:p>
@@ -9962,7 +9962,7 @@
                 <a:ea typeface="Calibri" pitchFamily="34" charset="-122"/>
                 <a:cs typeface="Calibri" pitchFamily="34" charset="-120"/>
               </a:rPr>
-              <a:t>wrongly, badly</a:t>
+              <a:t>to write or say letters in order</a:t>
             </a:r>
             <a:endParaRPr lang="en-US" sz="850" dirty="0"/>
           </a:p>
@@ -9985,11 +9985,11 @@
             </a:avLst>
           </a:prstGeom>
           <a:solidFill>
-            <a:srgbClr val="CCFBF1"/>
+            <a:srgbClr val="FCE7F3"/>
           </a:solidFill>
           <a:ln w="19050">
             <a:solidFill>
-              <a:srgbClr val="0D9488"/>
+              <a:srgbClr val="DB2777"/>
             </a:solidFill>
             <a:prstDash val="solid"/>
           </a:ln>
@@ -10029,13 +10029,13 @@
             <a:r>
               <a:rPr lang="en-US" sz="1300" b="1" dirty="0">
                 <a:solidFill>
-                  <a:srgbClr val="0F766E"/>
+                  <a:srgbClr val="9D174D"/>
                 </a:solidFill>
                 <a:latin typeface="Trebuchet MS" pitchFamily="34" charset="0"/>
                 <a:ea typeface="Trebuchet MS" pitchFamily="34" charset="-122"/>
                 <a:cs typeface="Trebuchet MS" pitchFamily="34" charset="-120"/>
               </a:rPr>
-              <a:t>spell</a:t>
+              <a:t>er</a:t>
             </a:r>
             <a:endParaRPr lang="en-US" sz="1300" dirty="0"/>
           </a:p>
@@ -10074,7 +10074,7 @@
                 <a:ea typeface="Calibri" pitchFamily="34" charset="-122"/>
                 <a:cs typeface="Calibri" pitchFamily="34" charset="-120"/>
               </a:rPr>
-              <a:t>to name letters in order</a:t>
+              <a:t>person who; more</a:t>
             </a:r>
             <a:endParaRPr lang="en-US" sz="850" dirty="0"/>
           </a:p>
@@ -10233,7 +10233,7 @@
                 <a:ea typeface="Trebuchet MS" pitchFamily="34" charset="-122"/>
                 <a:cs typeface="Trebuchet MS" pitchFamily="34" charset="-120"/>
               </a:rPr>
-              <a:t>mis</a:t>
+              <a:t>spell</a:t>
             </a:r>
             <a:endParaRPr lang="en-US" sz="1400" dirty="0"/>
           </a:p>
@@ -10338,7 +10338,7 @@
                 <a:ea typeface="Trebuchet MS" pitchFamily="34" charset="-122"/>
                 <a:cs typeface="Trebuchet MS" pitchFamily="34" charset="-120"/>
               </a:rPr>
-              <a:t>spell</a:t>
+              <a:t>er</a:t>
             </a:r>
             <a:endParaRPr lang="en-US" sz="1400" dirty="0"/>
           </a:p>
@@ -10445,7 +10445,7 @@
         </p:nvSpPr>
         <p:spPr>
           <a:xfrm>
-            <a:off x="2124837" y="4169664"/>
+            <a:off x="2427732" y="4169664"/>
             <a:ext cx="685800" cy="475488"/>
           </a:xfrm>
           <a:prstGeom prst="rect">
@@ -10472,7 +10472,7 @@
         </p:nvSpPr>
         <p:spPr>
           <a:xfrm>
-            <a:off x="2124837" y="4169664"/>
+            <a:off x="2427732" y="4169664"/>
             <a:ext cx="685800" cy="475488"/>
           </a:xfrm>
           <a:prstGeom prst="rect">
@@ -10497,7 +10497,7 @@
                 <a:ea typeface="Trebuchet MS" pitchFamily="34" charset="-122"/>
                 <a:cs typeface="Trebuchet MS" pitchFamily="34" charset="-120"/>
               </a:rPr>
-              <a:t>m</a:t>
+              <a:t>s</a:t>
             </a:r>
             <a:endParaRPr lang="en-US" sz="900" dirty="0"/>
           </a:p>
@@ -10511,7 +10511,7 @@
         </p:nvSpPr>
         <p:spPr>
           <a:xfrm>
-            <a:off x="3033522" y="4169664"/>
+            <a:off x="3639312" y="4169664"/>
             <a:ext cx="685800" cy="475488"/>
           </a:xfrm>
           <a:prstGeom prst="rect">
@@ -10538,7 +10538,7 @@
         </p:nvSpPr>
         <p:spPr>
           <a:xfrm>
-            <a:off x="3033522" y="4169664"/>
+            <a:off x="3639312" y="4169664"/>
             <a:ext cx="685800" cy="475488"/>
           </a:xfrm>
           <a:prstGeom prst="rect">
@@ -10563,7 +10563,7 @@
                 <a:ea typeface="Trebuchet MS" pitchFamily="34" charset="-122"/>
                 <a:cs typeface="Trebuchet MS" pitchFamily="34" charset="-120"/>
               </a:rPr>
-              <a:t>i</a:t>
+              <a:t>p</a:t>
             </a:r>
             <a:endParaRPr lang="en-US" sz="900" dirty="0"/>
           </a:p>
@@ -10577,7 +10577,7 @@
         </p:nvSpPr>
         <p:spPr>
           <a:xfrm>
-            <a:off x="3942207" y="4169664"/>
+            <a:off x="4850892" y="4169664"/>
             <a:ext cx="685800" cy="475488"/>
           </a:xfrm>
           <a:prstGeom prst="rect">
@@ -10604,7 +10604,7 @@
         </p:nvSpPr>
         <p:spPr>
           <a:xfrm>
-            <a:off x="3942207" y="4169664"/>
+            <a:off x="4850892" y="4169664"/>
             <a:ext cx="685800" cy="475488"/>
           </a:xfrm>
           <a:prstGeom prst="rect">
@@ -10629,7 +10629,7 @@
                 <a:ea typeface="Trebuchet MS" pitchFamily="34" charset="-122"/>
                 <a:cs typeface="Trebuchet MS" pitchFamily="34" charset="-120"/>
               </a:rPr>
-              <a:t>s</a:t>
+              <a:t>e</a:t>
             </a:r>
             <a:endParaRPr lang="en-US" sz="900" dirty="0"/>
           </a:p>
@@ -10643,7 +10643,7 @@
         </p:nvSpPr>
         <p:spPr>
           <a:xfrm>
-            <a:off x="4850892" y="4169664"/>
+            <a:off x="6062472" y="4169664"/>
             <a:ext cx="685800" cy="475488"/>
           </a:xfrm>
           <a:prstGeom prst="rect">
@@ -10670,7 +10670,7 @@
         </p:nvSpPr>
         <p:spPr>
           <a:xfrm>
-            <a:off x="4850892" y="4169664"/>
+            <a:off x="6062472" y="4169664"/>
             <a:ext cx="685800" cy="475488"/>
           </a:xfrm>
           <a:prstGeom prst="rect">
@@ -10695,7 +10695,7 @@
                 <a:ea typeface="Trebuchet MS" pitchFamily="34" charset="-122"/>
                 <a:cs typeface="Trebuchet MS" pitchFamily="34" charset="-120"/>
               </a:rPr>
-              <a:t>s</a:t>
+              <a:t>ll</a:t>
             </a:r>
             <a:endParaRPr lang="en-US" sz="900" dirty="0"/>
           </a:p>
@@ -10709,7 +10709,7 @@
         </p:nvSpPr>
         <p:spPr>
           <a:xfrm>
-            <a:off x="5759577" y="4169664"/>
+            <a:off x="7274052" y="4169664"/>
             <a:ext cx="685800" cy="475488"/>
           </a:xfrm>
           <a:prstGeom prst="rect">
@@ -10736,7 +10736,7 @@
         </p:nvSpPr>
         <p:spPr>
           <a:xfrm>
-            <a:off x="5759577" y="4169664"/>
+            <a:off x="7274052" y="4169664"/>
             <a:ext cx="685800" cy="475488"/>
           </a:xfrm>
           <a:prstGeom prst="rect">
@@ -10761,139 +10761,7 @@
                 <a:ea typeface="Trebuchet MS" pitchFamily="34" charset="-122"/>
                 <a:cs typeface="Trebuchet MS" pitchFamily="34" charset="-120"/>
               </a:rPr>
-              <a:t>p</a:t>
-            </a:r>
-            <a:endParaRPr lang="en-US" sz="900" dirty="0"/>
-          </a:p>
-        </p:txBody>
-      </p:sp>
-      <p:sp>
-        <p:nvSpPr>
-          <p:cNvPr id="43" name="Shape 41"/>
-          <p:cNvSpPr/>
-          <p:nvPr/>
-        </p:nvSpPr>
-        <p:spPr>
-          <a:xfrm>
-            <a:off x="6668262" y="4169664"/>
-            <a:ext cx="685800" cy="475488"/>
-          </a:xfrm>
-          <a:prstGeom prst="rect">
-            <a:avLst>
-              <a:gd name="adj" fmla="val 7692"/>
-            </a:avLst>
-          </a:prstGeom>
-          <a:solidFill>
-            <a:srgbClr val="FFFFFF"/>
-          </a:solidFill>
-          <a:ln w="12700">
-            <a:solidFill>
-              <a:srgbClr val="DB2777"/>
-            </a:solidFill>
-            <a:prstDash val="solid"/>
-          </a:ln>
-        </p:spPr>
-      </p:sp>
-      <p:sp>
-        <p:nvSpPr>
-          <p:cNvPr id="44" name="Text 42"/>
-          <p:cNvSpPr/>
-          <p:nvPr/>
-        </p:nvSpPr>
-        <p:spPr>
-          <a:xfrm>
-            <a:off x="6668262" y="4169664"/>
-            <a:ext cx="685800" cy="475488"/>
-          </a:xfrm>
-          <a:prstGeom prst="rect">
-            <a:avLst/>
-          </a:prstGeom>
-          <a:noFill/>
-          <a:ln/>
-        </p:spPr>
-        <p:txBody>
-          <a:bodyPr wrap="square" lIns="0" tIns="0" rIns="0" bIns="0" rtlCol="0" anchor="ctr"/>
-          <a:lstStyle/>
-          <a:p>
-            <a:pPr algn="ctr" indent="0" marL="0">
-              <a:buNone/>
-            </a:pPr>
-            <a:r>
-              <a:rPr lang="en-US" sz="900" b="1" dirty="0">
-                <a:solidFill>
-                  <a:srgbClr val="9D174D"/>
-                </a:solidFill>
-                <a:latin typeface="Trebuchet MS" pitchFamily="34" charset="0"/>
-                <a:ea typeface="Trebuchet MS" pitchFamily="34" charset="-122"/>
-                <a:cs typeface="Trebuchet MS" pitchFamily="34" charset="-120"/>
-              </a:rPr>
-              <a:t>e</a:t>
-            </a:r>
-            <a:endParaRPr lang="en-US" sz="900" dirty="0"/>
-          </a:p>
-        </p:txBody>
-      </p:sp>
-      <p:sp>
-        <p:nvSpPr>
-          <p:cNvPr id="45" name="Shape 43"/>
-          <p:cNvSpPr/>
-          <p:nvPr/>
-        </p:nvSpPr>
-        <p:spPr>
-          <a:xfrm>
-            <a:off x="7576947" y="4169664"/>
-            <a:ext cx="685800" cy="475488"/>
-          </a:xfrm>
-          <a:prstGeom prst="rect">
-            <a:avLst>
-              <a:gd name="adj" fmla="val 7692"/>
-            </a:avLst>
-          </a:prstGeom>
-          <a:solidFill>
-            <a:srgbClr val="FFFFFF"/>
-          </a:solidFill>
-          <a:ln w="12700">
-            <a:solidFill>
-              <a:srgbClr val="DB2777"/>
-            </a:solidFill>
-            <a:prstDash val="solid"/>
-          </a:ln>
-        </p:spPr>
-      </p:sp>
-      <p:sp>
-        <p:nvSpPr>
-          <p:cNvPr id="46" name="Text 44"/>
-          <p:cNvSpPr/>
-          <p:nvPr/>
-        </p:nvSpPr>
-        <p:spPr>
-          <a:xfrm>
-            <a:off x="7576947" y="4169664"/>
-            <a:ext cx="685800" cy="475488"/>
-          </a:xfrm>
-          <a:prstGeom prst="rect">
-            <a:avLst/>
-          </a:prstGeom>
-          <a:noFill/>
-          <a:ln/>
-        </p:spPr>
-        <p:txBody>
-          <a:bodyPr wrap="square" lIns="0" tIns="0" rIns="0" bIns="0" rtlCol="0" anchor="ctr"/>
-          <a:lstStyle/>
-          <a:p>
-            <a:pPr algn="ctr" indent="0" marL="0">
-              <a:buNone/>
-            </a:pPr>
-            <a:r>
-              <a:rPr lang="en-US" sz="900" b="1" dirty="0">
-                <a:solidFill>
-                  <a:srgbClr val="9D174D"/>
-                </a:solidFill>
-                <a:latin typeface="Trebuchet MS" pitchFamily="34" charset="0"/>
-                <a:ea typeface="Trebuchet MS" pitchFamily="34" charset="-122"/>
-                <a:cs typeface="Trebuchet MS" pitchFamily="34" charset="-120"/>
-              </a:rPr>
-              <a:t>ll</a:t>
+              <a:t>er</a:t>
             </a:r>
             <a:endParaRPr lang="en-US" sz="900" dirty="0"/>
           </a:p>
@@ -11185,7 +11053,7 @@
                 <a:ea typeface="Calibri" pitchFamily="34" charset="-122"/>
                 <a:cs typeface="Calibri" pitchFamily="34" charset="-120"/>
               </a:rPr>
-              <a:t>Word Labs  •  wordlabs.app  •  Root: 'spell' = to name letters in order</a:t>
+              <a:t>Word Labs  •  wordlabs.app  •  Root: 'spell' = to write or say letters in order</a:t>
             </a:r>
             <a:endParaRPr lang="en-US" sz="800" dirty="0"/>
           </a:p>
@@ -11324,7 +11192,7 @@
                 <a:ea typeface="Trebuchet MS" pitchFamily="34" charset="-122"/>
                 <a:cs typeface="Trebuchet MS" pitchFamily="34" charset="-120"/>
               </a:rPr>
-              <a:t>spelling</a:t>
+              <a:t>misspell</a:t>
             </a:r>
             <a:endParaRPr lang="en-US" sz="2800" dirty="0"/>
           </a:p>
@@ -12012,7 +11880,7 @@
                 <a:ea typeface="Calibri" pitchFamily="34" charset="-122"/>
                 <a:cs typeface="Calibri" pitchFamily="34" charset="-120"/>
               </a:rPr>
-              <a:t>Word Labs  •  wordlabs.app  •  Root: 'spell' = to name letters in order</a:t>
+              <a:t>Word Labs  •  wordlabs.app  •  Root: 'spell' = to write or say letters in order</a:t>
             </a:r>
             <a:endParaRPr lang="en-US" sz="800" dirty="0"/>
           </a:p>
@@ -12151,7 +12019,7 @@
                 <a:ea typeface="Trebuchet MS" pitchFamily="34" charset="-122"/>
                 <a:cs typeface="Trebuchet MS" pitchFamily="34" charset="-120"/>
               </a:rPr>
-              <a:t>spelling</a:t>
+              <a:t>misspell</a:t>
             </a:r>
             <a:endParaRPr lang="en-US" sz="2800" dirty="0"/>
           </a:p>
@@ -12240,11 +12108,11 @@
             </a:avLst>
           </a:prstGeom>
           <a:solidFill>
-            <a:srgbClr val="CCFBF1"/>
+            <a:srgbClr val="DDD6FE"/>
           </a:solidFill>
           <a:ln w="19050">
             <a:solidFill>
-              <a:srgbClr val="0D9488"/>
+              <a:srgbClr val="7C3AED"/>
             </a:solidFill>
             <a:prstDash val="solid"/>
           </a:ln>
@@ -12284,13 +12152,13 @@
             <a:r>
               <a:rPr lang="en-US" sz="1300" b="1" dirty="0">
                 <a:solidFill>
-                  <a:srgbClr val="0F766E"/>
+                  <a:srgbClr val="4C1D95"/>
                 </a:solidFill>
                 <a:latin typeface="Trebuchet MS" pitchFamily="34" charset="0"/>
                 <a:ea typeface="Trebuchet MS" pitchFamily="34" charset="-122"/>
                 <a:cs typeface="Trebuchet MS" pitchFamily="34" charset="-120"/>
               </a:rPr>
-              <a:t>spell</a:t>
+              <a:t>mis</a:t>
             </a:r>
             <a:endParaRPr lang="en-US" sz="1300" dirty="0"/>
           </a:p>
@@ -12329,7 +12197,7 @@
                 <a:ea typeface="Calibri" pitchFamily="34" charset="-122"/>
                 <a:cs typeface="Calibri" pitchFamily="34" charset="-120"/>
               </a:rPr>
-              <a:t>to name letters in order</a:t>
+              <a:t>wrong</a:t>
             </a:r>
             <a:endParaRPr lang="en-US" sz="850" dirty="0"/>
           </a:p>
@@ -12352,11 +12220,11 @@
             </a:avLst>
           </a:prstGeom>
           <a:solidFill>
-            <a:srgbClr val="FCE7F3"/>
+            <a:srgbClr val="CCFBF1"/>
           </a:solidFill>
           <a:ln w="19050">
             <a:solidFill>
-              <a:srgbClr val="DB2777"/>
+              <a:srgbClr val="0D9488"/>
             </a:solidFill>
             <a:prstDash val="solid"/>
           </a:ln>
@@ -12396,13 +12264,13 @@
             <a:r>
               <a:rPr lang="en-US" sz="1300" b="1" dirty="0">
                 <a:solidFill>
-                  <a:srgbClr val="9D174D"/>
+                  <a:srgbClr val="0F766E"/>
                 </a:solidFill>
                 <a:latin typeface="Trebuchet MS" pitchFamily="34" charset="0"/>
                 <a:ea typeface="Trebuchet MS" pitchFamily="34" charset="-122"/>
                 <a:cs typeface="Trebuchet MS" pitchFamily="34" charset="-120"/>
               </a:rPr>
-              <a:t>ing</a:t>
+              <a:t>spell</a:t>
             </a:r>
             <a:endParaRPr lang="en-US" sz="1300" dirty="0"/>
           </a:p>
@@ -12441,7 +12309,7 @@
                 <a:ea typeface="Calibri" pitchFamily="34" charset="-122"/>
                 <a:cs typeface="Calibri" pitchFamily="34" charset="-120"/>
               </a:rPr>
-              <a:t>action in progress</a:t>
+              <a:t>to write or say letters in order</a:t>
             </a:r>
             <a:endParaRPr lang="en-US" sz="850" dirty="0"/>
           </a:p>
@@ -12997,7 +12865,7 @@
                 <a:ea typeface="Calibri" pitchFamily="34" charset="-122"/>
                 <a:cs typeface="Calibri" pitchFamily="34" charset="-120"/>
               </a:rPr>
-              <a:t>Word Labs  •  wordlabs.app  •  Root: 'spell' = to name letters in order</a:t>
+              <a:t>Word Labs  •  wordlabs.app  •  Root: 'spell' = to write or say letters in order</a:t>
             </a:r>
             <a:endParaRPr lang="en-US" sz="800" dirty="0"/>
           </a:p>
@@ -13136,7 +13004,7 @@
                 <a:ea typeface="Trebuchet MS" pitchFamily="34" charset="-122"/>
                 <a:cs typeface="Trebuchet MS" pitchFamily="34" charset="-120"/>
               </a:rPr>
-              <a:t>spelling</a:t>
+              <a:t>misspell</a:t>
             </a:r>
             <a:endParaRPr lang="en-US" sz="2800" dirty="0"/>
           </a:p>
@@ -13225,11 +13093,11 @@
             </a:avLst>
           </a:prstGeom>
           <a:solidFill>
-            <a:srgbClr val="CCFBF1"/>
+            <a:srgbClr val="DDD6FE"/>
           </a:solidFill>
           <a:ln w="19050">
             <a:solidFill>
-              <a:srgbClr val="0D9488"/>
+              <a:srgbClr val="7C3AED"/>
             </a:solidFill>
             <a:prstDash val="solid"/>
           </a:ln>
@@ -13269,13 +13137,13 @@
             <a:r>
               <a:rPr lang="en-US" sz="1300" b="1" dirty="0">
                 <a:solidFill>
-                  <a:srgbClr val="0F766E"/>
+                  <a:srgbClr val="4C1D95"/>
                 </a:solidFill>
                 <a:latin typeface="Trebuchet MS" pitchFamily="34" charset="0"/>
                 <a:ea typeface="Trebuchet MS" pitchFamily="34" charset="-122"/>
                 <a:cs typeface="Trebuchet MS" pitchFamily="34" charset="-120"/>
               </a:rPr>
-              <a:t>spell</a:t>
+              <a:t>mis</a:t>
             </a:r>
             <a:endParaRPr lang="en-US" sz="1300" dirty="0"/>
           </a:p>
@@ -13314,7 +13182,7 @@
                 <a:ea typeface="Calibri" pitchFamily="34" charset="-122"/>
                 <a:cs typeface="Calibri" pitchFamily="34" charset="-120"/>
               </a:rPr>
-              <a:t>to name letters in order</a:t>
+              <a:t>wrong</a:t>
             </a:r>
             <a:endParaRPr lang="en-US" sz="850" dirty="0"/>
           </a:p>
@@ -13337,11 +13205,11 @@
             </a:avLst>
           </a:prstGeom>
           <a:solidFill>
-            <a:srgbClr val="FCE7F3"/>
+            <a:srgbClr val="CCFBF1"/>
           </a:solidFill>
           <a:ln w="19050">
             <a:solidFill>
-              <a:srgbClr val="DB2777"/>
+              <a:srgbClr val="0D9488"/>
             </a:solidFill>
             <a:prstDash val="solid"/>
           </a:ln>
@@ -13381,13 +13249,13 @@
             <a:r>
               <a:rPr lang="en-US" sz="1300" b="1" dirty="0">
                 <a:solidFill>
-                  <a:srgbClr val="9D174D"/>
+                  <a:srgbClr val="0F766E"/>
                 </a:solidFill>
                 <a:latin typeface="Trebuchet MS" pitchFamily="34" charset="0"/>
                 <a:ea typeface="Trebuchet MS" pitchFamily="34" charset="-122"/>
                 <a:cs typeface="Trebuchet MS" pitchFamily="34" charset="-120"/>
               </a:rPr>
-              <a:t>ing</a:t>
+              <a:t>spell</a:t>
             </a:r>
             <a:endParaRPr lang="en-US" sz="1300" dirty="0"/>
           </a:p>
@@ -13426,7 +13294,7 @@
                 <a:ea typeface="Calibri" pitchFamily="34" charset="-122"/>
                 <a:cs typeface="Calibri" pitchFamily="34" charset="-120"/>
               </a:rPr>
-              <a:t>action in progress</a:t>
+              <a:t>to write or say letters in order</a:t>
             </a:r>
             <a:endParaRPr lang="en-US" sz="850" dirty="0"/>
           </a:p>
@@ -13585,7 +13453,7 @@
                 <a:ea typeface="Trebuchet MS" pitchFamily="34" charset="-122"/>
                 <a:cs typeface="Trebuchet MS" pitchFamily="34" charset="-120"/>
               </a:rPr>
-              <a:t>spell</a:t>
+              <a:t>mis</a:t>
             </a:r>
             <a:endParaRPr lang="en-US" sz="1400" dirty="0"/>
           </a:p>
@@ -13690,7 +13558,7 @@
                 <a:ea typeface="Trebuchet MS" pitchFamily="34" charset="-122"/>
                 <a:cs typeface="Trebuchet MS" pitchFamily="34" charset="-120"/>
               </a:rPr>
-              <a:t>ing</a:t>
+              <a:t>spell</a:t>
             </a:r>
             <a:endParaRPr lang="en-US" sz="1400" dirty="0"/>
           </a:p>
@@ -14023,7 +13891,7 @@
                 <a:ea typeface="Calibri" pitchFamily="34" charset="-122"/>
                 <a:cs typeface="Calibri" pitchFamily="34" charset="-120"/>
               </a:rPr>
-              <a:t>Root 'spell' — to name letters in order</a:t>
+              <a:t>Root 'spell' — to write or say letters in order</a:t>
             </a:r>
             <a:endParaRPr lang="en-US" sz="1600" dirty="0"/>
           </a:p>
@@ -14379,7 +14247,7 @@
                 <a:ea typeface="Calibri" pitchFamily="34" charset="-122"/>
                 <a:cs typeface="Calibri" pitchFamily="34" charset="-120"/>
               </a:rPr>
-              <a:t>Word Labs  •  wordlabs.app  •  Root: 'spell' = to name letters in order</a:t>
+              <a:t>Word Labs  •  wordlabs.app  •  Root: 'spell' = to write or say letters in order</a:t>
             </a:r>
             <a:endParaRPr lang="en-US" sz="800" dirty="0"/>
           </a:p>
@@ -14518,7 +14386,7 @@
                 <a:ea typeface="Trebuchet MS" pitchFamily="34" charset="-122"/>
                 <a:cs typeface="Trebuchet MS" pitchFamily="34" charset="-120"/>
               </a:rPr>
-              <a:t>spelling</a:t>
+              <a:t>misspell</a:t>
             </a:r>
             <a:endParaRPr lang="en-US" sz="2800" dirty="0"/>
           </a:p>
@@ -14607,11 +14475,11 @@
             </a:avLst>
           </a:prstGeom>
           <a:solidFill>
-            <a:srgbClr val="CCFBF1"/>
+            <a:srgbClr val="DDD6FE"/>
           </a:solidFill>
           <a:ln w="19050">
             <a:solidFill>
-              <a:srgbClr val="0D9488"/>
+              <a:srgbClr val="7C3AED"/>
             </a:solidFill>
             <a:prstDash val="solid"/>
           </a:ln>
@@ -14651,13 +14519,13 @@
             <a:r>
               <a:rPr lang="en-US" sz="1300" b="1" dirty="0">
                 <a:solidFill>
-                  <a:srgbClr val="0F766E"/>
+                  <a:srgbClr val="4C1D95"/>
                 </a:solidFill>
                 <a:latin typeface="Trebuchet MS" pitchFamily="34" charset="0"/>
                 <a:ea typeface="Trebuchet MS" pitchFamily="34" charset="-122"/>
                 <a:cs typeface="Trebuchet MS" pitchFamily="34" charset="-120"/>
               </a:rPr>
-              <a:t>spell</a:t>
+              <a:t>mis</a:t>
             </a:r>
             <a:endParaRPr lang="en-US" sz="1300" dirty="0"/>
           </a:p>
@@ -14696,7 +14564,7 @@
                 <a:ea typeface="Calibri" pitchFamily="34" charset="-122"/>
                 <a:cs typeface="Calibri" pitchFamily="34" charset="-120"/>
               </a:rPr>
-              <a:t>to name letters in order</a:t>
+              <a:t>wrong</a:t>
             </a:r>
             <a:endParaRPr lang="en-US" sz="850" dirty="0"/>
           </a:p>
@@ -14719,11 +14587,11 @@
             </a:avLst>
           </a:prstGeom>
           <a:solidFill>
-            <a:srgbClr val="FCE7F3"/>
+            <a:srgbClr val="CCFBF1"/>
           </a:solidFill>
           <a:ln w="19050">
             <a:solidFill>
-              <a:srgbClr val="DB2777"/>
+              <a:srgbClr val="0D9488"/>
             </a:solidFill>
             <a:prstDash val="solid"/>
           </a:ln>
@@ -14763,13 +14631,13 @@
             <a:r>
               <a:rPr lang="en-US" sz="1300" b="1" dirty="0">
                 <a:solidFill>
-                  <a:srgbClr val="9D174D"/>
+                  <a:srgbClr val="0F766E"/>
                 </a:solidFill>
                 <a:latin typeface="Trebuchet MS" pitchFamily="34" charset="0"/>
                 <a:ea typeface="Trebuchet MS" pitchFamily="34" charset="-122"/>
                 <a:cs typeface="Trebuchet MS" pitchFamily="34" charset="-120"/>
               </a:rPr>
-              <a:t>ing</a:t>
+              <a:t>spell</a:t>
             </a:r>
             <a:endParaRPr lang="en-US" sz="1300" dirty="0"/>
           </a:p>
@@ -14808,7 +14676,7 @@
                 <a:ea typeface="Calibri" pitchFamily="34" charset="-122"/>
                 <a:cs typeface="Calibri" pitchFamily="34" charset="-120"/>
               </a:rPr>
-              <a:t>action in progress</a:t>
+              <a:t>to write or say letters in order</a:t>
             </a:r>
             <a:endParaRPr lang="en-US" sz="850" dirty="0"/>
           </a:p>
@@ -14967,7 +14835,7 @@
                 <a:ea typeface="Trebuchet MS" pitchFamily="34" charset="-122"/>
                 <a:cs typeface="Trebuchet MS" pitchFamily="34" charset="-120"/>
               </a:rPr>
-              <a:t>spell</a:t>
+              <a:t>mis</a:t>
             </a:r>
             <a:endParaRPr lang="en-US" sz="1400" dirty="0"/>
           </a:p>
@@ -15072,7 +14940,7 @@
                 <a:ea typeface="Trebuchet MS" pitchFamily="34" charset="-122"/>
                 <a:cs typeface="Trebuchet MS" pitchFamily="34" charset="-120"/>
               </a:rPr>
-              <a:t>ing</a:t>
+              <a:t>spell</a:t>
             </a:r>
             <a:endParaRPr lang="en-US" sz="1400" dirty="0"/>
           </a:p>
@@ -15179,7 +15047,7 @@
         </p:nvSpPr>
         <p:spPr>
           <a:xfrm>
-            <a:off x="2254649" y="4169664"/>
+            <a:off x="2124837" y="4169664"/>
             <a:ext cx="685800" cy="475488"/>
           </a:xfrm>
           <a:prstGeom prst="rect">
@@ -15206,7 +15074,7 @@
         </p:nvSpPr>
         <p:spPr>
           <a:xfrm>
-            <a:off x="2254649" y="4169664"/>
+            <a:off x="2124837" y="4169664"/>
             <a:ext cx="685800" cy="475488"/>
           </a:xfrm>
           <a:prstGeom prst="rect">
@@ -15231,7 +15099,7 @@
                 <a:ea typeface="Trebuchet MS" pitchFamily="34" charset="-122"/>
                 <a:cs typeface="Trebuchet MS" pitchFamily="34" charset="-120"/>
               </a:rPr>
-              <a:t>s</a:t>
+              <a:t>m</a:t>
             </a:r>
             <a:endParaRPr lang="en-US" sz="900" dirty="0"/>
           </a:p>
@@ -15245,7 +15113,7 @@
         </p:nvSpPr>
         <p:spPr>
           <a:xfrm>
-            <a:off x="3293146" y="4169664"/>
+            <a:off x="3033522" y="4169664"/>
             <a:ext cx="685800" cy="475488"/>
           </a:xfrm>
           <a:prstGeom prst="rect">
@@ -15272,7 +15140,7 @@
         </p:nvSpPr>
         <p:spPr>
           <a:xfrm>
-            <a:off x="3293146" y="4169664"/>
+            <a:off x="3033522" y="4169664"/>
             <a:ext cx="685800" cy="475488"/>
           </a:xfrm>
           <a:prstGeom prst="rect">
@@ -15297,7 +15165,7 @@
                 <a:ea typeface="Trebuchet MS" pitchFamily="34" charset="-122"/>
                 <a:cs typeface="Trebuchet MS" pitchFamily="34" charset="-120"/>
               </a:rPr>
-              <a:t>p</a:t>
+              <a:t>i</a:t>
             </a:r>
             <a:endParaRPr lang="en-US" sz="900" dirty="0"/>
           </a:p>
@@ -15311,7 +15179,7 @@
         </p:nvSpPr>
         <p:spPr>
           <a:xfrm>
-            <a:off x="4331643" y="4169664"/>
+            <a:off x="3942207" y="4169664"/>
             <a:ext cx="685800" cy="475488"/>
           </a:xfrm>
           <a:prstGeom prst="rect">
@@ -15338,7 +15206,7 @@
         </p:nvSpPr>
         <p:spPr>
           <a:xfrm>
-            <a:off x="4331643" y="4169664"/>
+            <a:off x="3942207" y="4169664"/>
             <a:ext cx="685800" cy="475488"/>
           </a:xfrm>
           <a:prstGeom prst="rect">
@@ -15363,7 +15231,7 @@
                 <a:ea typeface="Trebuchet MS" pitchFamily="34" charset="-122"/>
                 <a:cs typeface="Trebuchet MS" pitchFamily="34" charset="-120"/>
               </a:rPr>
-              <a:t>e</a:t>
+              <a:t>s</a:t>
             </a:r>
             <a:endParaRPr lang="en-US" sz="900" dirty="0"/>
           </a:p>
@@ -15377,7 +15245,7 @@
         </p:nvSpPr>
         <p:spPr>
           <a:xfrm>
-            <a:off x="5370141" y="4169664"/>
+            <a:off x="4850892" y="4169664"/>
             <a:ext cx="685800" cy="475488"/>
           </a:xfrm>
           <a:prstGeom prst="rect">
@@ -15404,7 +15272,7 @@
         </p:nvSpPr>
         <p:spPr>
           <a:xfrm>
-            <a:off x="5370141" y="4169664"/>
+            <a:off x="4850892" y="4169664"/>
             <a:ext cx="685800" cy="475488"/>
           </a:xfrm>
           <a:prstGeom prst="rect">
@@ -15429,7 +15297,7 @@
                 <a:ea typeface="Trebuchet MS" pitchFamily="34" charset="-122"/>
                 <a:cs typeface="Trebuchet MS" pitchFamily="34" charset="-120"/>
               </a:rPr>
-              <a:t>ll</a:t>
+              <a:t>s</a:t>
             </a:r>
             <a:endParaRPr lang="en-US" sz="900" dirty="0"/>
           </a:p>
@@ -15443,7 +15311,7 @@
         </p:nvSpPr>
         <p:spPr>
           <a:xfrm>
-            <a:off x="6408638" y="4169664"/>
+            <a:off x="5759577" y="4169664"/>
             <a:ext cx="685800" cy="475488"/>
           </a:xfrm>
           <a:prstGeom prst="rect">
@@ -15470,7 +15338,7 @@
         </p:nvSpPr>
         <p:spPr>
           <a:xfrm>
-            <a:off x="6408638" y="4169664"/>
+            <a:off x="5759577" y="4169664"/>
             <a:ext cx="685800" cy="475488"/>
           </a:xfrm>
           <a:prstGeom prst="rect">
@@ -15495,7 +15363,7 @@
                 <a:ea typeface="Trebuchet MS" pitchFamily="34" charset="-122"/>
                 <a:cs typeface="Trebuchet MS" pitchFamily="34" charset="-120"/>
               </a:rPr>
-              <a:t>i</a:t>
+              <a:t>p</a:t>
             </a:r>
             <a:endParaRPr lang="en-US" sz="900" dirty="0"/>
           </a:p>
@@ -15509,7 +15377,7 @@
         </p:nvSpPr>
         <p:spPr>
           <a:xfrm>
-            <a:off x="7447135" y="4169664"/>
+            <a:off x="6668262" y="4169664"/>
             <a:ext cx="685800" cy="475488"/>
           </a:xfrm>
           <a:prstGeom prst="rect">
@@ -15536,7 +15404,7 @@
         </p:nvSpPr>
         <p:spPr>
           <a:xfrm>
-            <a:off x="7447135" y="4169664"/>
+            <a:off x="6668262" y="4169664"/>
             <a:ext cx="685800" cy="475488"/>
           </a:xfrm>
           <a:prstGeom prst="rect">
@@ -15561,7 +15429,73 @@
                 <a:ea typeface="Trebuchet MS" pitchFamily="34" charset="-122"/>
                 <a:cs typeface="Trebuchet MS" pitchFamily="34" charset="-120"/>
               </a:rPr>
-              <a:t>ng</a:t>
+              <a:t>e</a:t>
+            </a:r>
+            <a:endParaRPr lang="en-US" sz="900" dirty="0"/>
+          </a:p>
+        </p:txBody>
+      </p:sp>
+      <p:sp>
+        <p:nvSpPr>
+          <p:cNvPr id="45" name="Shape 43"/>
+          <p:cNvSpPr/>
+          <p:nvPr/>
+        </p:nvSpPr>
+        <p:spPr>
+          <a:xfrm>
+            <a:off x="7576947" y="4169664"/>
+            <a:ext cx="685800" cy="475488"/>
+          </a:xfrm>
+          <a:prstGeom prst="rect">
+            <a:avLst>
+              <a:gd name="adj" fmla="val 7692"/>
+            </a:avLst>
+          </a:prstGeom>
+          <a:solidFill>
+            <a:srgbClr val="FFFFFF"/>
+          </a:solidFill>
+          <a:ln w="12700">
+            <a:solidFill>
+              <a:srgbClr val="DB2777"/>
+            </a:solidFill>
+            <a:prstDash val="solid"/>
+          </a:ln>
+        </p:spPr>
+      </p:sp>
+      <p:sp>
+        <p:nvSpPr>
+          <p:cNvPr id="46" name="Text 44"/>
+          <p:cNvSpPr/>
+          <p:nvPr/>
+        </p:nvSpPr>
+        <p:spPr>
+          <a:xfrm>
+            <a:off x="7576947" y="4169664"/>
+            <a:ext cx="685800" cy="475488"/>
+          </a:xfrm>
+          <a:prstGeom prst="rect">
+            <a:avLst/>
+          </a:prstGeom>
+          <a:noFill/>
+          <a:ln/>
+        </p:spPr>
+        <p:txBody>
+          <a:bodyPr wrap="square" lIns="0" tIns="0" rIns="0" bIns="0" rtlCol="0" anchor="ctr"/>
+          <a:lstStyle/>
+          <a:p>
+            <a:pPr algn="ctr" indent="0" marL="0">
+              <a:buNone/>
+            </a:pPr>
+            <a:r>
+              <a:rPr lang="en-US" sz="900" b="1" dirty="0">
+                <a:solidFill>
+                  <a:srgbClr val="9D174D"/>
+                </a:solidFill>
+                <a:latin typeface="Trebuchet MS" pitchFamily="34" charset="0"/>
+                <a:ea typeface="Trebuchet MS" pitchFamily="34" charset="-122"/>
+                <a:cs typeface="Trebuchet MS" pitchFamily="34" charset="-120"/>
+              </a:rPr>
+              <a:t>ll</a:t>
             </a:r>
             <a:endParaRPr lang="en-US" sz="900" dirty="0"/>
           </a:p>
@@ -16135,7 +16069,7 @@
                 <a:ea typeface="Calibri" pitchFamily="34" charset="-122"/>
                 <a:cs typeface="Calibri" pitchFamily="34" charset="-120"/>
               </a:rPr>
-              <a:t>Word Labs  •  wordlabs.app  •  Root: 'spell' = to name letters in order</a:t>
+              <a:t>Word Labs  •  wordlabs.app  •  Root: 'spell' = to write or say letters in order</a:t>
             </a:r>
             <a:endParaRPr lang="en-US" sz="800" dirty="0"/>
           </a:p>
@@ -16469,7 +16403,7 @@
                 <a:ea typeface="Trebuchet MS" pitchFamily="34" charset="-122"/>
                 <a:cs typeface="Trebuchet MS" pitchFamily="34" charset="-120"/>
               </a:rPr>
-              <a:t>1</a:t>
+              <a:t>0</a:t>
             </a:r>
             <a:pPr algn="ctr" indent="0" marL="0">
               <a:buNone/>
@@ -16775,7 +16709,7 @@
                 <a:ea typeface="Calibri" pitchFamily="34" charset="-122"/>
                 <a:cs typeface="Calibri" pitchFamily="34" charset="-120"/>
               </a:rPr>
-              <a:t>Word Labs  •  wordlabs.app  •  Root: 'spell' = to name letters in order</a:t>
+              <a:t>Word Labs  •  wordlabs.app  •  Root: 'spell' = to write or say letters in order</a:t>
             </a:r>
             <a:endParaRPr lang="en-US" sz="800" dirty="0"/>
           </a:p>
@@ -16887,7 +16821,7 @@
                 <a:ea typeface="Calibri" pitchFamily="34" charset="-122"/>
                 <a:cs typeface="Calibri" pitchFamily="34" charset="-120"/>
               </a:rPr>
-              <a:t>The </a:t>
+              <a:t>All the </a:t>
             </a:r>
             <a:pPr algn="l" indent="0" marL="0">
               <a:buNone/>
@@ -16904,7 +16838,7 @@
                 <a:ea typeface="Calibri" pitchFamily="34" charset="-122"/>
                 <a:cs typeface="Calibri" pitchFamily="34" charset="-120"/>
               </a:rPr>
-              <a:t>spellbound</a:t>
+              <a:t>spellers</a:t>
             </a:r>
             <a:pPr algn="l" indent="0" marL="0">
               <a:buNone/>
@@ -16918,7 +16852,7 @@
                 <a:ea typeface="Calibri" pitchFamily="34" charset="-122"/>
                 <a:cs typeface="Calibri" pitchFamily="34" charset="-120"/>
               </a:rPr>
-              <a:t> audience watched as the </a:t>
+              <a:t> lined up on stage for the competition. Her </a:t>
             </a:r>
             <a:pPr algn="l" indent="0" marL="0">
               <a:buNone/>
@@ -16935,7 +16869,7 @@
                 <a:ea typeface="Calibri" pitchFamily="34" charset="-122"/>
                 <a:cs typeface="Calibri" pitchFamily="34" charset="-120"/>
               </a:rPr>
-              <a:t>speller</a:t>
+              <a:t>spelling</a:t>
             </a:r>
             <a:pPr algn="l" indent="0" marL="0">
               <a:buNone/>
@@ -16949,7 +16883,7 @@
                 <a:ea typeface="Calibri" pitchFamily="34" charset="-122"/>
                 <a:cs typeface="Calibri" pitchFamily="34" charset="-120"/>
               </a:rPr>
-              <a:t> wrote each word, and the </a:t>
+              <a:t> has improved a lot this term. The teacher circled the </a:t>
             </a:r>
             <a:pPr algn="l" indent="0" marL="0">
               <a:buNone/>
@@ -16966,7 +16900,7 @@
                 <a:ea typeface="Calibri" pitchFamily="34" charset="-122"/>
                 <a:cs typeface="Calibri" pitchFamily="34" charset="-120"/>
               </a:rPr>
-              <a:t>spellcheck</a:t>
+              <a:t>misspelling</a:t>
             </a:r>
             <a:pPr algn="l" indent="0" marL="0">
               <a:buNone/>
@@ -16980,7 +16914,7 @@
                 <a:ea typeface="Calibri" pitchFamily="34" charset="-122"/>
                 <a:cs typeface="Calibri" pitchFamily="34" charset="-120"/>
               </a:rPr>
-              <a:t> confirmed there were no mistakes.</a:t>
+              <a:t> in red pen.</a:t>
             </a:r>
             <a:endParaRPr lang="en-US" sz="1800" dirty="0"/>
           </a:p>
@@ -17135,7 +17069,7 @@
                 <a:ea typeface="Trebuchet MS" pitchFamily="34" charset="-122"/>
                 <a:cs typeface="Trebuchet MS" pitchFamily="34" charset="-120"/>
               </a:rPr>
-              <a:t>spellbound</a:t>
+              <a:t>spellers</a:t>
             </a:r>
             <a:endParaRPr lang="en-US" sz="1400" dirty="0"/>
           </a:p>
@@ -17263,7 +17197,7 @@
                 <a:ea typeface="Trebuchet MS" pitchFamily="34" charset="-122"/>
                 <a:cs typeface="Trebuchet MS" pitchFamily="34" charset="-120"/>
               </a:rPr>
-              <a:t>speller</a:t>
+              <a:t>spelling</a:t>
             </a:r>
             <a:endParaRPr lang="en-US" sz="1400" dirty="0"/>
           </a:p>
@@ -17391,7 +17325,7 @@
                 <a:ea typeface="Trebuchet MS" pitchFamily="34" charset="-122"/>
                 <a:cs typeface="Trebuchet MS" pitchFamily="34" charset="-120"/>
               </a:rPr>
-              <a:t>spellcheck</a:t>
+              <a:t>misspelling</a:t>
             </a:r>
             <a:endParaRPr lang="en-US" sz="1400" dirty="0"/>
           </a:p>
@@ -17722,7 +17656,7 @@
                 <a:ea typeface="Calibri" pitchFamily="34" charset="-122"/>
                 <a:cs typeface="Calibri" pitchFamily="34" charset="-120"/>
               </a:rPr>
-              <a:t>Word Labs  •  wordlabs.app  •  Root: 'spell' = to name letters in order</a:t>
+              <a:t>Word Labs  •  wordlabs.app  •  Root: 'spell' = to write or say letters in order</a:t>
             </a:r>
             <a:endParaRPr lang="en-US" sz="800" dirty="0"/>
           </a:p>
@@ -17861,7 +17795,7 @@
                 <a:ea typeface="Trebuchet MS" pitchFamily="34" charset="-122"/>
                 <a:cs typeface="Trebuchet MS" pitchFamily="34" charset="-120"/>
               </a:rPr>
-              <a:t>spellbound</a:t>
+              <a:t>spellers</a:t>
             </a:r>
             <a:endParaRPr lang="en-US" sz="2800" dirty="0"/>
           </a:p>
@@ -18549,7 +18483,7 @@
                 <a:ea typeface="Calibri" pitchFamily="34" charset="-122"/>
                 <a:cs typeface="Calibri" pitchFamily="34" charset="-120"/>
               </a:rPr>
-              <a:t>Word Labs  •  wordlabs.app  •  Root: 'spell' = to name letters in order</a:t>
+              <a:t>Word Labs  •  wordlabs.app  •  Root: 'spell' = to write or say letters in order</a:t>
             </a:r>
             <a:endParaRPr lang="en-US" sz="800" dirty="0"/>
           </a:p>
@@ -18688,7 +18622,7 @@
                 <a:ea typeface="Trebuchet MS" pitchFamily="34" charset="-122"/>
                 <a:cs typeface="Trebuchet MS" pitchFamily="34" charset="-120"/>
               </a:rPr>
-              <a:t>spellbound</a:t>
+              <a:t>spellers</a:t>
             </a:r>
             <a:endParaRPr lang="en-US" sz="2800" dirty="0"/>
           </a:p>
@@ -18768,7 +18702,7 @@
         </p:nvSpPr>
         <p:spPr>
           <a:xfrm>
-            <a:off x="2938272" y="2258568"/>
+            <a:off x="2221992" y="2258568"/>
             <a:ext cx="1828800" cy="292608"/>
           </a:xfrm>
           <a:prstGeom prst="rect">
@@ -18802,7 +18736,7 @@
         </p:nvSpPr>
         <p:spPr>
           <a:xfrm>
-            <a:off x="2938272" y="2258568"/>
+            <a:off x="2221992" y="2258568"/>
             <a:ext cx="1828800" cy="292608"/>
           </a:xfrm>
           <a:prstGeom prst="rect">
@@ -18841,7 +18775,7 @@
         </p:nvSpPr>
         <p:spPr>
           <a:xfrm>
-            <a:off x="2938272" y="2569464"/>
+            <a:off x="2221992" y="2569464"/>
             <a:ext cx="1828800" cy="201168"/>
           </a:xfrm>
           <a:prstGeom prst="rect">
@@ -18866,7 +18800,7 @@
                 <a:ea typeface="Calibri" pitchFamily="34" charset="-122"/>
                 <a:cs typeface="Calibri" pitchFamily="34" charset="-120"/>
               </a:rPr>
-              <a:t>to name letters in order</a:t>
+              <a:t>to write or say letters in order</a:t>
             </a:r>
             <a:endParaRPr lang="en-US" sz="850" dirty="0"/>
           </a:p>
@@ -18880,7 +18814,7 @@
         </p:nvSpPr>
         <p:spPr>
           <a:xfrm>
-            <a:off x="5803392" y="2258568"/>
+            <a:off x="4370832" y="2258568"/>
             <a:ext cx="1828800" cy="292608"/>
           </a:xfrm>
           <a:prstGeom prst="rect">
@@ -18914,7 +18848,7 @@
         </p:nvSpPr>
         <p:spPr>
           <a:xfrm>
-            <a:off x="5803392" y="2258568"/>
+            <a:off x="4370832" y="2258568"/>
             <a:ext cx="1828800" cy="292608"/>
           </a:xfrm>
           <a:prstGeom prst="rect">
@@ -18939,7 +18873,7 @@
                 <a:ea typeface="Trebuchet MS" pitchFamily="34" charset="-122"/>
                 <a:cs typeface="Trebuchet MS" pitchFamily="34" charset="-120"/>
               </a:rPr>
-              <a:t>bound</a:t>
+              <a:t>er</a:t>
             </a:r>
             <a:endParaRPr lang="en-US" sz="1300" dirty="0"/>
           </a:p>
@@ -18953,7 +18887,7 @@
         </p:nvSpPr>
         <p:spPr>
           <a:xfrm>
-            <a:off x="5803392" y="2569464"/>
+            <a:off x="4370832" y="2569464"/>
             <a:ext cx="1828800" cy="201168"/>
           </a:xfrm>
           <a:prstGeom prst="rect">
@@ -18978,7 +18912,7 @@
                 <a:ea typeface="Calibri" pitchFamily="34" charset="-122"/>
                 <a:cs typeface="Calibri" pitchFamily="34" charset="-120"/>
               </a:rPr>
-              <a:t>held or tied</a:t>
+              <a:t>person who; more</a:t>
             </a:r>
             <a:endParaRPr lang="en-US" sz="850" dirty="0"/>
           </a:p>
@@ -18987,6 +18921,118 @@
       <p:sp>
         <p:nvSpPr>
           <p:cNvPr id="22" name="Shape 20"/>
+          <p:cNvSpPr/>
+          <p:nvPr/>
+        </p:nvSpPr>
+        <p:spPr>
+          <a:xfrm>
+            <a:off x="6519672" y="2258568"/>
+            <a:ext cx="1828800" cy="292608"/>
+          </a:xfrm>
+          <a:prstGeom prst="rect">
+            <a:avLst>
+              <a:gd name="adj" fmla="val 25000"/>
+            </a:avLst>
+          </a:prstGeom>
+          <a:solidFill>
+            <a:srgbClr val="FCE7F3"/>
+          </a:solidFill>
+          <a:ln w="19050">
+            <a:solidFill>
+              <a:srgbClr val="DB2777"/>
+            </a:solidFill>
+            <a:prstDash val="solid"/>
+          </a:ln>
+          <a:effectLst>
+            <a:outerShdw sx="100000" sy="100000" kx="0" ky="0" algn="bl" rotWithShape="0" blurRad="101600" dist="38100" dir="8100000">
+              <a:srgbClr val="000000">
+                <a:alpha val="12000"/>
+              </a:srgbClr>
+            </a:outerShdw>
+          </a:effectLst>
+        </p:spPr>
+      </p:sp>
+      <p:sp>
+        <p:nvSpPr>
+          <p:cNvPr id="23" name="Text 21"/>
+          <p:cNvSpPr/>
+          <p:nvPr/>
+        </p:nvSpPr>
+        <p:spPr>
+          <a:xfrm>
+            <a:off x="6519672" y="2258568"/>
+            <a:ext cx="1828800" cy="292608"/>
+          </a:xfrm>
+          <a:prstGeom prst="rect">
+            <a:avLst/>
+          </a:prstGeom>
+          <a:noFill/>
+          <a:ln/>
+        </p:spPr>
+        <p:txBody>
+          <a:bodyPr wrap="square" lIns="0" tIns="0" rIns="0" bIns="0" rtlCol="0" anchor="ctr"/>
+          <a:lstStyle/>
+          <a:p>
+            <a:pPr algn="ctr" indent="0" marL="0">
+              <a:buNone/>
+            </a:pPr>
+            <a:r>
+              <a:rPr lang="en-US" sz="1300" b="1" dirty="0">
+                <a:solidFill>
+                  <a:srgbClr val="9D174D"/>
+                </a:solidFill>
+                <a:latin typeface="Trebuchet MS" pitchFamily="34" charset="0"/>
+                <a:ea typeface="Trebuchet MS" pitchFamily="34" charset="-122"/>
+                <a:cs typeface="Trebuchet MS" pitchFamily="34" charset="-120"/>
+              </a:rPr>
+              <a:t>s</a:t>
+            </a:r>
+            <a:endParaRPr lang="en-US" sz="1300" dirty="0"/>
+          </a:p>
+        </p:txBody>
+      </p:sp>
+      <p:sp>
+        <p:nvSpPr>
+          <p:cNvPr id="24" name="Text 22"/>
+          <p:cNvSpPr/>
+          <p:nvPr/>
+        </p:nvSpPr>
+        <p:spPr>
+          <a:xfrm>
+            <a:off x="6519672" y="2569464"/>
+            <a:ext cx="1828800" cy="201168"/>
+          </a:xfrm>
+          <a:prstGeom prst="rect">
+            <a:avLst/>
+          </a:prstGeom>
+          <a:noFill/>
+          <a:ln/>
+        </p:spPr>
+        <p:txBody>
+          <a:bodyPr wrap="square" lIns="0" tIns="0" rIns="0" bIns="0" rtlCol="0" anchor="t"/>
+          <a:lstStyle/>
+          <a:p>
+            <a:pPr algn="ctr" indent="0" marL="0">
+              <a:buNone/>
+            </a:pPr>
+            <a:r>
+              <a:rPr lang="en-US" sz="850" dirty="0">
+                <a:solidFill>
+                  <a:srgbClr val="475569"/>
+                </a:solidFill>
+                <a:latin typeface="Calibri" pitchFamily="34" charset="0"/>
+                <a:ea typeface="Calibri" pitchFamily="34" charset="-122"/>
+                <a:cs typeface="Calibri" pitchFamily="34" charset="-120"/>
+              </a:rPr>
+              <a:t>plural or present tense</a:t>
+            </a:r>
+            <a:endParaRPr lang="en-US" sz="850" dirty="0"/>
+          </a:p>
+        </p:txBody>
+      </p:sp>
+      <p:sp>
+        <p:nvSpPr>
+          <p:cNvPr id="25" name="Shape 23"/>
           <p:cNvSpPr/>
           <p:nvPr/>
         </p:nvSpPr>
@@ -19013,7 +19059,7 @@
       </p:sp>
       <p:sp>
         <p:nvSpPr>
-          <p:cNvPr id="23" name="Text 21"/>
+          <p:cNvPr id="26" name="Text 24"/>
           <p:cNvSpPr/>
           <p:nvPr/>
         </p:nvSpPr>
@@ -19052,7 +19098,7 @@
       </p:sp>
       <p:sp>
         <p:nvSpPr>
-          <p:cNvPr id="24" name="Shape 22"/>
+          <p:cNvPr id="27" name="Shape 25"/>
           <p:cNvSpPr/>
           <p:nvPr/>
         </p:nvSpPr>
@@ -19079,7 +19125,7 @@
       </p:sp>
       <p:sp>
         <p:nvSpPr>
-          <p:cNvPr id="25" name="Text 23"/>
+          <p:cNvPr id="28" name="Text 26"/>
           <p:cNvSpPr/>
           <p:nvPr/>
         </p:nvSpPr>
@@ -19118,7 +19164,7 @@
       </p:sp>
       <p:sp>
         <p:nvSpPr>
-          <p:cNvPr id="26" name="Shape 24"/>
+          <p:cNvPr id="29" name="Shape 27"/>
           <p:cNvSpPr/>
           <p:nvPr/>
         </p:nvSpPr>
@@ -19145,7 +19191,7 @@
       </p:sp>
       <p:sp>
         <p:nvSpPr>
-          <p:cNvPr id="27" name="Text 25"/>
+          <p:cNvPr id="30" name="Text 28"/>
           <p:cNvSpPr/>
           <p:nvPr/>
         </p:nvSpPr>
@@ -19184,7 +19230,7 @@
       </p:sp>
       <p:sp>
         <p:nvSpPr>
-          <p:cNvPr id="28" name="Shape 26"/>
+          <p:cNvPr id="31" name="Shape 29"/>
           <p:cNvSpPr/>
           <p:nvPr/>
         </p:nvSpPr>
@@ -19211,7 +19257,7 @@
       </p:sp>
       <p:sp>
         <p:nvSpPr>
-          <p:cNvPr id="29" name="Text 27"/>
+          <p:cNvPr id="32" name="Text 30"/>
           <p:cNvSpPr/>
           <p:nvPr/>
         </p:nvSpPr>
@@ -19534,7 +19580,7 @@
                 <a:ea typeface="Calibri" pitchFamily="34" charset="-122"/>
                 <a:cs typeface="Calibri" pitchFamily="34" charset="-120"/>
               </a:rPr>
-              <a:t>Word Labs  •  wordlabs.app  •  Root: 'spell' = to name letters in order</a:t>
+              <a:t>Word Labs  •  wordlabs.app  •  Root: 'spell' = to write or say letters in order</a:t>
             </a:r>
             <a:endParaRPr lang="en-US" sz="800" dirty="0"/>
           </a:p>
@@ -19673,7 +19719,7 @@
                 <a:ea typeface="Trebuchet MS" pitchFamily="34" charset="-122"/>
                 <a:cs typeface="Trebuchet MS" pitchFamily="34" charset="-120"/>
               </a:rPr>
-              <a:t>spellbound</a:t>
+              <a:t>spellers</a:t>
             </a:r>
             <a:endParaRPr lang="en-US" sz="2800" dirty="0"/>
           </a:p>
@@ -19753,7 +19799,7 @@
         </p:nvSpPr>
         <p:spPr>
           <a:xfrm>
-            <a:off x="2938272" y="2258568"/>
+            <a:off x="2221992" y="2258568"/>
             <a:ext cx="1828800" cy="292608"/>
           </a:xfrm>
           <a:prstGeom prst="rect">
@@ -19787,7 +19833,7 @@
         </p:nvSpPr>
         <p:spPr>
           <a:xfrm>
-            <a:off x="2938272" y="2258568"/>
+            <a:off x="2221992" y="2258568"/>
             <a:ext cx="1828800" cy="292608"/>
           </a:xfrm>
           <a:prstGeom prst="rect">
@@ -19826,7 +19872,7 @@
         </p:nvSpPr>
         <p:spPr>
           <a:xfrm>
-            <a:off x="2938272" y="2569464"/>
+            <a:off x="2221992" y="2569464"/>
             <a:ext cx="1828800" cy="201168"/>
           </a:xfrm>
           <a:prstGeom prst="rect">
@@ -19851,7 +19897,7 @@
                 <a:ea typeface="Calibri" pitchFamily="34" charset="-122"/>
                 <a:cs typeface="Calibri" pitchFamily="34" charset="-120"/>
               </a:rPr>
-              <a:t>to name letters in order</a:t>
+              <a:t>to write or say letters in order</a:t>
             </a:r>
             <a:endParaRPr lang="en-US" sz="850" dirty="0"/>
           </a:p>
@@ -19865,7 +19911,7 @@
         </p:nvSpPr>
         <p:spPr>
           <a:xfrm>
-            <a:off x="5803392" y="2258568"/>
+            <a:off x="4370832" y="2258568"/>
             <a:ext cx="1828800" cy="292608"/>
           </a:xfrm>
           <a:prstGeom prst="rect">
@@ -19899,7 +19945,7 @@
         </p:nvSpPr>
         <p:spPr>
           <a:xfrm>
-            <a:off x="5803392" y="2258568"/>
+            <a:off x="4370832" y="2258568"/>
             <a:ext cx="1828800" cy="292608"/>
           </a:xfrm>
           <a:prstGeom prst="rect">
@@ -19924,7 +19970,7 @@
                 <a:ea typeface="Trebuchet MS" pitchFamily="34" charset="-122"/>
                 <a:cs typeface="Trebuchet MS" pitchFamily="34" charset="-120"/>
               </a:rPr>
-              <a:t>bound</a:t>
+              <a:t>er</a:t>
             </a:r>
             <a:endParaRPr lang="en-US" sz="1300" dirty="0"/>
           </a:p>
@@ -19938,7 +19984,7 @@
         </p:nvSpPr>
         <p:spPr>
           <a:xfrm>
-            <a:off x="5803392" y="2569464"/>
+            <a:off x="4370832" y="2569464"/>
             <a:ext cx="1828800" cy="201168"/>
           </a:xfrm>
           <a:prstGeom prst="rect">
@@ -19963,7 +20009,7 @@
                 <a:ea typeface="Calibri" pitchFamily="34" charset="-122"/>
                 <a:cs typeface="Calibri" pitchFamily="34" charset="-120"/>
               </a:rPr>
-              <a:t>held or tied</a:t>
+              <a:t>person who; more</a:t>
             </a:r>
             <a:endParaRPr lang="en-US" sz="850" dirty="0"/>
           </a:p>
@@ -19972,6 +20018,118 @@
       <p:sp>
         <p:nvSpPr>
           <p:cNvPr id="22" name="Shape 20"/>
+          <p:cNvSpPr/>
+          <p:nvPr/>
+        </p:nvSpPr>
+        <p:spPr>
+          <a:xfrm>
+            <a:off x="6519672" y="2258568"/>
+            <a:ext cx="1828800" cy="292608"/>
+          </a:xfrm>
+          <a:prstGeom prst="rect">
+            <a:avLst>
+              <a:gd name="adj" fmla="val 25000"/>
+            </a:avLst>
+          </a:prstGeom>
+          <a:solidFill>
+            <a:srgbClr val="FCE7F3"/>
+          </a:solidFill>
+          <a:ln w="19050">
+            <a:solidFill>
+              <a:srgbClr val="DB2777"/>
+            </a:solidFill>
+            <a:prstDash val="solid"/>
+          </a:ln>
+          <a:effectLst>
+            <a:outerShdw sx="100000" sy="100000" kx="0" ky="0" algn="bl" rotWithShape="0" blurRad="101600" dist="38100" dir="8100000">
+              <a:srgbClr val="000000">
+                <a:alpha val="12000"/>
+              </a:srgbClr>
+            </a:outerShdw>
+          </a:effectLst>
+        </p:spPr>
+      </p:sp>
+      <p:sp>
+        <p:nvSpPr>
+          <p:cNvPr id="23" name="Text 21"/>
+          <p:cNvSpPr/>
+          <p:nvPr/>
+        </p:nvSpPr>
+        <p:spPr>
+          <a:xfrm>
+            <a:off x="6519672" y="2258568"/>
+            <a:ext cx="1828800" cy="292608"/>
+          </a:xfrm>
+          <a:prstGeom prst="rect">
+            <a:avLst/>
+          </a:prstGeom>
+          <a:noFill/>
+          <a:ln/>
+        </p:spPr>
+        <p:txBody>
+          <a:bodyPr wrap="square" lIns="0" tIns="0" rIns="0" bIns="0" rtlCol="0" anchor="ctr"/>
+          <a:lstStyle/>
+          <a:p>
+            <a:pPr algn="ctr" indent="0" marL="0">
+              <a:buNone/>
+            </a:pPr>
+            <a:r>
+              <a:rPr lang="en-US" sz="1300" b="1" dirty="0">
+                <a:solidFill>
+                  <a:srgbClr val="9D174D"/>
+                </a:solidFill>
+                <a:latin typeface="Trebuchet MS" pitchFamily="34" charset="0"/>
+                <a:ea typeface="Trebuchet MS" pitchFamily="34" charset="-122"/>
+                <a:cs typeface="Trebuchet MS" pitchFamily="34" charset="-120"/>
+              </a:rPr>
+              <a:t>s</a:t>
+            </a:r>
+            <a:endParaRPr lang="en-US" sz="1300" dirty="0"/>
+          </a:p>
+        </p:txBody>
+      </p:sp>
+      <p:sp>
+        <p:nvSpPr>
+          <p:cNvPr id="24" name="Text 22"/>
+          <p:cNvSpPr/>
+          <p:nvPr/>
+        </p:nvSpPr>
+        <p:spPr>
+          <a:xfrm>
+            <a:off x="6519672" y="2569464"/>
+            <a:ext cx="1828800" cy="201168"/>
+          </a:xfrm>
+          <a:prstGeom prst="rect">
+            <a:avLst/>
+          </a:prstGeom>
+          <a:noFill/>
+          <a:ln/>
+        </p:spPr>
+        <p:txBody>
+          <a:bodyPr wrap="square" lIns="0" tIns="0" rIns="0" bIns="0" rtlCol="0" anchor="t"/>
+          <a:lstStyle/>
+          <a:p>
+            <a:pPr algn="ctr" indent="0" marL="0">
+              <a:buNone/>
+            </a:pPr>
+            <a:r>
+              <a:rPr lang="en-US" sz="850" dirty="0">
+                <a:solidFill>
+                  <a:srgbClr val="475569"/>
+                </a:solidFill>
+                <a:latin typeface="Calibri" pitchFamily="34" charset="0"/>
+                <a:ea typeface="Calibri" pitchFamily="34" charset="-122"/>
+                <a:cs typeface="Calibri" pitchFamily="34" charset="-120"/>
+              </a:rPr>
+              <a:t>plural or present tense</a:t>
+            </a:r>
+            <a:endParaRPr lang="en-US" sz="850" dirty="0"/>
+          </a:p>
+        </p:txBody>
+      </p:sp>
+      <p:sp>
+        <p:nvSpPr>
+          <p:cNvPr id="25" name="Shape 23"/>
           <p:cNvSpPr/>
           <p:nvPr/>
         </p:nvSpPr>
@@ -19998,7 +20156,7 @@
       </p:sp>
       <p:sp>
         <p:nvSpPr>
-          <p:cNvPr id="23" name="Text 21"/>
+          <p:cNvPr id="26" name="Text 24"/>
           <p:cNvSpPr/>
           <p:nvPr/>
         </p:nvSpPr>
@@ -20037,7 +20195,7 @@
       </p:sp>
       <p:sp>
         <p:nvSpPr>
-          <p:cNvPr id="24" name="Shape 22"/>
+          <p:cNvPr id="27" name="Shape 25"/>
           <p:cNvSpPr/>
           <p:nvPr/>
         </p:nvSpPr>
@@ -20064,7 +20222,7 @@
       </p:sp>
       <p:sp>
         <p:nvSpPr>
-          <p:cNvPr id="25" name="Shape 23"/>
+          <p:cNvPr id="28" name="Shape 26"/>
           <p:cNvSpPr/>
           <p:nvPr/>
         </p:nvSpPr>
@@ -20091,7 +20249,7 @@
       </p:sp>
       <p:sp>
         <p:nvSpPr>
-          <p:cNvPr id="26" name="Text 24"/>
+          <p:cNvPr id="29" name="Text 27"/>
           <p:cNvSpPr/>
           <p:nvPr/>
         </p:nvSpPr>
@@ -20130,7 +20288,7 @@
       </p:sp>
       <p:sp>
         <p:nvSpPr>
-          <p:cNvPr id="27" name="Text 25"/>
+          <p:cNvPr id="30" name="Text 28"/>
           <p:cNvSpPr/>
           <p:nvPr/>
         </p:nvSpPr>
@@ -20169,7 +20327,7 @@
       </p:sp>
       <p:sp>
         <p:nvSpPr>
-          <p:cNvPr id="28" name="Shape 26"/>
+          <p:cNvPr id="31" name="Shape 29"/>
           <p:cNvSpPr/>
           <p:nvPr/>
         </p:nvSpPr>
@@ -20196,7 +20354,7 @@
       </p:sp>
       <p:sp>
         <p:nvSpPr>
-          <p:cNvPr id="29" name="Text 27"/>
+          <p:cNvPr id="32" name="Text 30"/>
           <p:cNvSpPr/>
           <p:nvPr/>
         </p:nvSpPr>
@@ -20227,7 +20385,7 @@
                 <a:ea typeface="Trebuchet MS" pitchFamily="34" charset="-122"/>
                 <a:cs typeface="Trebuchet MS" pitchFamily="34" charset="-120"/>
               </a:rPr>
-              <a:t>bound</a:t>
+              <a:t>ers</a:t>
             </a:r>
             <a:endParaRPr lang="en-US" sz="1400" dirty="0"/>
           </a:p>
@@ -20235,7 +20393,7 @@
       </p:sp>
       <p:sp>
         <p:nvSpPr>
-          <p:cNvPr id="30" name="Shape 28"/>
+          <p:cNvPr id="33" name="Shape 31"/>
           <p:cNvSpPr/>
           <p:nvPr/>
         </p:nvSpPr>
@@ -20262,7 +20420,7 @@
       </p:sp>
       <p:sp>
         <p:nvSpPr>
-          <p:cNvPr id="31" name="Text 29"/>
+          <p:cNvPr id="34" name="Text 32"/>
           <p:cNvSpPr/>
           <p:nvPr/>
         </p:nvSpPr>
@@ -20301,7 +20459,7 @@
       </p:sp>
       <p:sp>
         <p:nvSpPr>
-          <p:cNvPr id="32" name="Shape 30"/>
+          <p:cNvPr id="35" name="Shape 33"/>
           <p:cNvSpPr/>
           <p:nvPr/>
         </p:nvSpPr>
@@ -20328,7 +20486,7 @@
       </p:sp>
       <p:sp>
         <p:nvSpPr>
-          <p:cNvPr id="33" name="Text 31"/>
+          <p:cNvPr id="36" name="Text 34"/>
           <p:cNvSpPr/>
           <p:nvPr/>
         </p:nvSpPr>
@@ -20651,7 +20809,7 @@
                 <a:ea typeface="Calibri" pitchFamily="34" charset="-122"/>
                 <a:cs typeface="Calibri" pitchFamily="34" charset="-120"/>
               </a:rPr>
-              <a:t>Word Labs  •  wordlabs.app  •  Root: 'spell' = to name letters in order</a:t>
+              <a:t>Word Labs  •  wordlabs.app  •  Root: 'spell' = to write or say letters in order</a:t>
             </a:r>
             <a:endParaRPr lang="en-US" sz="800" dirty="0"/>
           </a:p>
@@ -20790,7 +20948,7 @@
                 <a:ea typeface="Trebuchet MS" pitchFamily="34" charset="-122"/>
                 <a:cs typeface="Trebuchet MS" pitchFamily="34" charset="-120"/>
               </a:rPr>
-              <a:t>spellbound</a:t>
+              <a:t>spellers</a:t>
             </a:r>
             <a:endParaRPr lang="en-US" sz="2800" dirty="0"/>
           </a:p>
@@ -20870,7 +21028,7 @@
         </p:nvSpPr>
         <p:spPr>
           <a:xfrm>
-            <a:off x="2938272" y="2258568"/>
+            <a:off x="2221992" y="2258568"/>
             <a:ext cx="1828800" cy="292608"/>
           </a:xfrm>
           <a:prstGeom prst="rect">
@@ -20904,7 +21062,7 @@
         </p:nvSpPr>
         <p:spPr>
           <a:xfrm>
-            <a:off x="2938272" y="2258568"/>
+            <a:off x="2221992" y="2258568"/>
             <a:ext cx="1828800" cy="292608"/>
           </a:xfrm>
           <a:prstGeom prst="rect">
@@ -20943,7 +21101,7 @@
         </p:nvSpPr>
         <p:spPr>
           <a:xfrm>
-            <a:off x="2938272" y="2569464"/>
+            <a:off x="2221992" y="2569464"/>
             <a:ext cx="1828800" cy="201168"/>
           </a:xfrm>
           <a:prstGeom prst="rect">
@@ -20968,7 +21126,7 @@
                 <a:ea typeface="Calibri" pitchFamily="34" charset="-122"/>
                 <a:cs typeface="Calibri" pitchFamily="34" charset="-120"/>
               </a:rPr>
-              <a:t>to name letters in order</a:t>
+              <a:t>to write or say letters in order</a:t>
             </a:r>
             <a:endParaRPr lang="en-US" sz="850" dirty="0"/>
           </a:p>
@@ -20982,7 +21140,7 @@
         </p:nvSpPr>
         <p:spPr>
           <a:xfrm>
-            <a:off x="5803392" y="2258568"/>
+            <a:off x="4370832" y="2258568"/>
             <a:ext cx="1828800" cy="292608"/>
           </a:xfrm>
           <a:prstGeom prst="rect">
@@ -21016,7 +21174,7 @@
         </p:nvSpPr>
         <p:spPr>
           <a:xfrm>
-            <a:off x="5803392" y="2258568"/>
+            <a:off x="4370832" y="2258568"/>
             <a:ext cx="1828800" cy="292608"/>
           </a:xfrm>
           <a:prstGeom prst="rect">
@@ -21041,7 +21199,7 @@
                 <a:ea typeface="Trebuchet MS" pitchFamily="34" charset="-122"/>
                 <a:cs typeface="Trebuchet MS" pitchFamily="34" charset="-120"/>
               </a:rPr>
-              <a:t>bound</a:t>
+              <a:t>er</a:t>
             </a:r>
             <a:endParaRPr lang="en-US" sz="1300" dirty="0"/>
           </a:p>
@@ -21055,7 +21213,7 @@
         </p:nvSpPr>
         <p:spPr>
           <a:xfrm>
-            <a:off x="5803392" y="2569464"/>
+            <a:off x="4370832" y="2569464"/>
             <a:ext cx="1828800" cy="201168"/>
           </a:xfrm>
           <a:prstGeom prst="rect">
@@ -21080,7 +21238,7 @@
                 <a:ea typeface="Calibri" pitchFamily="34" charset="-122"/>
                 <a:cs typeface="Calibri" pitchFamily="34" charset="-120"/>
               </a:rPr>
-              <a:t>held or tied</a:t>
+              <a:t>person who; more</a:t>
             </a:r>
             <a:endParaRPr lang="en-US" sz="850" dirty="0"/>
           </a:p>
@@ -21089,6 +21247,118 @@
       <p:sp>
         <p:nvSpPr>
           <p:cNvPr id="22" name="Shape 20"/>
+          <p:cNvSpPr/>
+          <p:nvPr/>
+        </p:nvSpPr>
+        <p:spPr>
+          <a:xfrm>
+            <a:off x="6519672" y="2258568"/>
+            <a:ext cx="1828800" cy="292608"/>
+          </a:xfrm>
+          <a:prstGeom prst="rect">
+            <a:avLst>
+              <a:gd name="adj" fmla="val 25000"/>
+            </a:avLst>
+          </a:prstGeom>
+          <a:solidFill>
+            <a:srgbClr val="FCE7F3"/>
+          </a:solidFill>
+          <a:ln w="19050">
+            <a:solidFill>
+              <a:srgbClr val="DB2777"/>
+            </a:solidFill>
+            <a:prstDash val="solid"/>
+          </a:ln>
+          <a:effectLst>
+            <a:outerShdw sx="100000" sy="100000" kx="0" ky="0" algn="bl" rotWithShape="0" blurRad="101600" dist="38100" dir="8100000">
+              <a:srgbClr val="000000">
+                <a:alpha val="12000"/>
+              </a:srgbClr>
+            </a:outerShdw>
+          </a:effectLst>
+        </p:spPr>
+      </p:sp>
+      <p:sp>
+        <p:nvSpPr>
+          <p:cNvPr id="23" name="Text 21"/>
+          <p:cNvSpPr/>
+          <p:nvPr/>
+        </p:nvSpPr>
+        <p:spPr>
+          <a:xfrm>
+            <a:off x="6519672" y="2258568"/>
+            <a:ext cx="1828800" cy="292608"/>
+          </a:xfrm>
+          <a:prstGeom prst="rect">
+            <a:avLst/>
+          </a:prstGeom>
+          <a:noFill/>
+          <a:ln/>
+        </p:spPr>
+        <p:txBody>
+          <a:bodyPr wrap="square" lIns="0" tIns="0" rIns="0" bIns="0" rtlCol="0" anchor="ctr"/>
+          <a:lstStyle/>
+          <a:p>
+            <a:pPr algn="ctr" indent="0" marL="0">
+              <a:buNone/>
+            </a:pPr>
+            <a:r>
+              <a:rPr lang="en-US" sz="1300" b="1" dirty="0">
+                <a:solidFill>
+                  <a:srgbClr val="9D174D"/>
+                </a:solidFill>
+                <a:latin typeface="Trebuchet MS" pitchFamily="34" charset="0"/>
+                <a:ea typeface="Trebuchet MS" pitchFamily="34" charset="-122"/>
+                <a:cs typeface="Trebuchet MS" pitchFamily="34" charset="-120"/>
+              </a:rPr>
+              <a:t>s</a:t>
+            </a:r>
+            <a:endParaRPr lang="en-US" sz="1300" dirty="0"/>
+          </a:p>
+        </p:txBody>
+      </p:sp>
+      <p:sp>
+        <p:nvSpPr>
+          <p:cNvPr id="24" name="Text 22"/>
+          <p:cNvSpPr/>
+          <p:nvPr/>
+        </p:nvSpPr>
+        <p:spPr>
+          <a:xfrm>
+            <a:off x="6519672" y="2569464"/>
+            <a:ext cx="1828800" cy="201168"/>
+          </a:xfrm>
+          <a:prstGeom prst="rect">
+            <a:avLst/>
+          </a:prstGeom>
+          <a:noFill/>
+          <a:ln/>
+        </p:spPr>
+        <p:txBody>
+          <a:bodyPr wrap="square" lIns="0" tIns="0" rIns="0" bIns="0" rtlCol="0" anchor="t"/>
+          <a:lstStyle/>
+          <a:p>
+            <a:pPr algn="ctr" indent="0" marL="0">
+              <a:buNone/>
+            </a:pPr>
+            <a:r>
+              <a:rPr lang="en-US" sz="850" dirty="0">
+                <a:solidFill>
+                  <a:srgbClr val="475569"/>
+                </a:solidFill>
+                <a:latin typeface="Calibri" pitchFamily="34" charset="0"/>
+                <a:ea typeface="Calibri" pitchFamily="34" charset="-122"/>
+                <a:cs typeface="Calibri" pitchFamily="34" charset="-120"/>
+              </a:rPr>
+              <a:t>plural or present tense</a:t>
+            </a:r>
+            <a:endParaRPr lang="en-US" sz="850" dirty="0"/>
+          </a:p>
+        </p:txBody>
+      </p:sp>
+      <p:sp>
+        <p:nvSpPr>
+          <p:cNvPr id="25" name="Shape 23"/>
           <p:cNvSpPr/>
           <p:nvPr/>
         </p:nvSpPr>
@@ -21115,7 +21385,7 @@
       </p:sp>
       <p:sp>
         <p:nvSpPr>
-          <p:cNvPr id="23" name="Text 21"/>
+          <p:cNvPr id="26" name="Text 24"/>
           <p:cNvSpPr/>
           <p:nvPr/>
         </p:nvSpPr>
@@ -21154,7 +21424,7 @@
       </p:sp>
       <p:sp>
         <p:nvSpPr>
-          <p:cNvPr id="24" name="Shape 22"/>
+          <p:cNvPr id="27" name="Shape 25"/>
           <p:cNvSpPr/>
           <p:nvPr/>
         </p:nvSpPr>
@@ -21181,7 +21451,7 @@
       </p:sp>
       <p:sp>
         <p:nvSpPr>
-          <p:cNvPr id="25" name="Shape 23"/>
+          <p:cNvPr id="28" name="Shape 26"/>
           <p:cNvSpPr/>
           <p:nvPr/>
         </p:nvSpPr>
@@ -21208,7 +21478,7 @@
       </p:sp>
       <p:sp>
         <p:nvSpPr>
-          <p:cNvPr id="26" name="Text 24"/>
+          <p:cNvPr id="29" name="Text 27"/>
           <p:cNvSpPr/>
           <p:nvPr/>
         </p:nvSpPr>
@@ -21247,7 +21517,7 @@
       </p:sp>
       <p:sp>
         <p:nvSpPr>
-          <p:cNvPr id="27" name="Text 25"/>
+          <p:cNvPr id="30" name="Text 28"/>
           <p:cNvSpPr/>
           <p:nvPr/>
         </p:nvSpPr>
@@ -21286,7 +21556,7 @@
       </p:sp>
       <p:sp>
         <p:nvSpPr>
-          <p:cNvPr id="28" name="Shape 26"/>
+          <p:cNvPr id="31" name="Shape 29"/>
           <p:cNvSpPr/>
           <p:nvPr/>
         </p:nvSpPr>
@@ -21313,7 +21583,7 @@
       </p:sp>
       <p:sp>
         <p:nvSpPr>
-          <p:cNvPr id="29" name="Text 27"/>
+          <p:cNvPr id="32" name="Text 30"/>
           <p:cNvSpPr/>
           <p:nvPr/>
         </p:nvSpPr>
@@ -21344,7 +21614,7 @@
                 <a:ea typeface="Trebuchet MS" pitchFamily="34" charset="-122"/>
                 <a:cs typeface="Trebuchet MS" pitchFamily="34" charset="-120"/>
               </a:rPr>
-              <a:t>bound</a:t>
+              <a:t>ers</a:t>
             </a:r>
             <a:endParaRPr lang="en-US" sz="1400" dirty="0"/>
           </a:p>
@@ -21352,7 +21622,7 @@
       </p:sp>
       <p:sp>
         <p:nvSpPr>
-          <p:cNvPr id="30" name="Shape 28"/>
+          <p:cNvPr id="33" name="Shape 31"/>
           <p:cNvSpPr/>
           <p:nvPr/>
         </p:nvSpPr>
@@ -21379,7 +21649,7 @@
       </p:sp>
       <p:sp>
         <p:nvSpPr>
-          <p:cNvPr id="31" name="Text 29"/>
+          <p:cNvPr id="34" name="Text 32"/>
           <p:cNvSpPr/>
           <p:nvPr/>
         </p:nvSpPr>
@@ -21418,7 +21688,7 @@
       </p:sp>
       <p:sp>
         <p:nvSpPr>
-          <p:cNvPr id="32" name="Shape 30"/>
+          <p:cNvPr id="35" name="Shape 33"/>
           <p:cNvSpPr/>
           <p:nvPr/>
         </p:nvSpPr>
@@ -21445,13 +21715,13 @@
       </p:sp>
       <p:sp>
         <p:nvSpPr>
-          <p:cNvPr id="33" name="Shape 31"/>
-          <p:cNvSpPr/>
-          <p:nvPr/>
-        </p:nvSpPr>
-        <p:spPr>
-          <a:xfrm>
-            <a:off x="2023872" y="4169664"/>
+          <p:cNvPr id="36" name="Shape 34"/>
+          <p:cNvSpPr/>
+          <p:nvPr/>
+        </p:nvSpPr>
+        <p:spPr>
+          <a:xfrm>
+            <a:off x="2254649" y="4169664"/>
             <a:ext cx="685800" cy="475488"/>
           </a:xfrm>
           <a:prstGeom prst="rect">
@@ -21472,13 +21742,13 @@
       </p:sp>
       <p:sp>
         <p:nvSpPr>
-          <p:cNvPr id="34" name="Text 32"/>
-          <p:cNvSpPr/>
-          <p:nvPr/>
-        </p:nvSpPr>
-        <p:spPr>
-          <a:xfrm>
-            <a:off x="2023872" y="4169664"/>
+          <p:cNvPr id="37" name="Text 35"/>
+          <p:cNvSpPr/>
+          <p:nvPr/>
+        </p:nvSpPr>
+        <p:spPr>
+          <a:xfrm>
+            <a:off x="2254649" y="4169664"/>
             <a:ext cx="685800" cy="475488"/>
           </a:xfrm>
           <a:prstGeom prst="rect">
@@ -21511,13 +21781,13 @@
       </p:sp>
       <p:sp>
         <p:nvSpPr>
-          <p:cNvPr id="35" name="Shape 33"/>
-          <p:cNvSpPr/>
-          <p:nvPr/>
-        </p:nvSpPr>
-        <p:spPr>
-          <a:xfrm>
-            <a:off x="2831592" y="4169664"/>
+          <p:cNvPr id="38" name="Shape 36"/>
+          <p:cNvSpPr/>
+          <p:nvPr/>
+        </p:nvSpPr>
+        <p:spPr>
+          <a:xfrm>
+            <a:off x="3293146" y="4169664"/>
             <a:ext cx="685800" cy="475488"/>
           </a:xfrm>
           <a:prstGeom prst="rect">
@@ -21538,13 +21808,13 @@
       </p:sp>
       <p:sp>
         <p:nvSpPr>
-          <p:cNvPr id="36" name="Text 34"/>
-          <p:cNvSpPr/>
-          <p:nvPr/>
-        </p:nvSpPr>
-        <p:spPr>
-          <a:xfrm>
-            <a:off x="2831592" y="4169664"/>
+          <p:cNvPr id="39" name="Text 37"/>
+          <p:cNvSpPr/>
+          <p:nvPr/>
+        </p:nvSpPr>
+        <p:spPr>
+          <a:xfrm>
+            <a:off x="3293146" y="4169664"/>
             <a:ext cx="685800" cy="475488"/>
           </a:xfrm>
           <a:prstGeom prst="rect">
@@ -21577,13 +21847,13 @@
       </p:sp>
       <p:sp>
         <p:nvSpPr>
-          <p:cNvPr id="37" name="Shape 35"/>
-          <p:cNvSpPr/>
-          <p:nvPr/>
-        </p:nvSpPr>
-        <p:spPr>
-          <a:xfrm>
-            <a:off x="3639312" y="4169664"/>
+          <p:cNvPr id="40" name="Shape 38"/>
+          <p:cNvSpPr/>
+          <p:nvPr/>
+        </p:nvSpPr>
+        <p:spPr>
+          <a:xfrm>
+            <a:off x="4331643" y="4169664"/>
             <a:ext cx="685800" cy="475488"/>
           </a:xfrm>
           <a:prstGeom prst="rect">
@@ -21604,13 +21874,13 @@
       </p:sp>
       <p:sp>
         <p:nvSpPr>
-          <p:cNvPr id="38" name="Text 36"/>
-          <p:cNvSpPr/>
-          <p:nvPr/>
-        </p:nvSpPr>
-        <p:spPr>
-          <a:xfrm>
-            <a:off x="3639312" y="4169664"/>
+          <p:cNvPr id="41" name="Text 39"/>
+          <p:cNvSpPr/>
+          <p:nvPr/>
+        </p:nvSpPr>
+        <p:spPr>
+          <a:xfrm>
+            <a:off x="4331643" y="4169664"/>
             <a:ext cx="685800" cy="475488"/>
           </a:xfrm>
           <a:prstGeom prst="rect">
@@ -21643,13 +21913,13 @@
       </p:sp>
       <p:sp>
         <p:nvSpPr>
-          <p:cNvPr id="39" name="Shape 37"/>
-          <p:cNvSpPr/>
-          <p:nvPr/>
-        </p:nvSpPr>
-        <p:spPr>
-          <a:xfrm>
-            <a:off x="4447032" y="4169664"/>
+          <p:cNvPr id="42" name="Shape 40"/>
+          <p:cNvSpPr/>
+          <p:nvPr/>
+        </p:nvSpPr>
+        <p:spPr>
+          <a:xfrm>
+            <a:off x="5370141" y="4169664"/>
             <a:ext cx="685800" cy="475488"/>
           </a:xfrm>
           <a:prstGeom prst="rect">
@@ -21670,13 +21940,13 @@
       </p:sp>
       <p:sp>
         <p:nvSpPr>
-          <p:cNvPr id="40" name="Text 38"/>
-          <p:cNvSpPr/>
-          <p:nvPr/>
-        </p:nvSpPr>
-        <p:spPr>
-          <a:xfrm>
-            <a:off x="4447032" y="4169664"/>
+          <p:cNvPr id="43" name="Text 41"/>
+          <p:cNvSpPr/>
+          <p:nvPr/>
+        </p:nvSpPr>
+        <p:spPr>
+          <a:xfrm>
+            <a:off x="5370141" y="4169664"/>
             <a:ext cx="685800" cy="475488"/>
           </a:xfrm>
           <a:prstGeom prst="rect">
@@ -21709,13 +21979,13 @@
       </p:sp>
       <p:sp>
         <p:nvSpPr>
-          <p:cNvPr id="41" name="Shape 39"/>
-          <p:cNvSpPr/>
-          <p:nvPr/>
-        </p:nvSpPr>
-        <p:spPr>
-          <a:xfrm>
-            <a:off x="5254752" y="4169664"/>
+          <p:cNvPr id="44" name="Shape 42"/>
+          <p:cNvSpPr/>
+          <p:nvPr/>
+        </p:nvSpPr>
+        <p:spPr>
+          <a:xfrm>
+            <a:off x="6408638" y="4169664"/>
             <a:ext cx="685800" cy="475488"/>
           </a:xfrm>
           <a:prstGeom prst="rect">
@@ -21736,13 +22006,13 @@
       </p:sp>
       <p:sp>
         <p:nvSpPr>
-          <p:cNvPr id="42" name="Text 40"/>
-          <p:cNvSpPr/>
-          <p:nvPr/>
-        </p:nvSpPr>
-        <p:spPr>
-          <a:xfrm>
-            <a:off x="5254752" y="4169664"/>
+          <p:cNvPr id="45" name="Text 43"/>
+          <p:cNvSpPr/>
+          <p:nvPr/>
+        </p:nvSpPr>
+        <p:spPr>
+          <a:xfrm>
+            <a:off x="6408638" y="4169664"/>
             <a:ext cx="685800" cy="475488"/>
           </a:xfrm>
           <a:prstGeom prst="rect">
@@ -21767,7 +22037,7 @@
                 <a:ea typeface="Trebuchet MS" pitchFamily="34" charset="-122"/>
                 <a:cs typeface="Trebuchet MS" pitchFamily="34" charset="-120"/>
               </a:rPr>
-              <a:t>b</a:t>
+              <a:t>er</a:t>
             </a:r>
             <a:endParaRPr lang="en-US" sz="900" dirty="0"/>
           </a:p>
@@ -21775,13 +22045,13 @@
       </p:sp>
       <p:sp>
         <p:nvSpPr>
-          <p:cNvPr id="43" name="Shape 41"/>
-          <p:cNvSpPr/>
-          <p:nvPr/>
-        </p:nvSpPr>
-        <p:spPr>
-          <a:xfrm>
-            <a:off x="6062472" y="4169664"/>
+          <p:cNvPr id="46" name="Shape 44"/>
+          <p:cNvSpPr/>
+          <p:nvPr/>
+        </p:nvSpPr>
+        <p:spPr>
+          <a:xfrm>
+            <a:off x="7447135" y="4169664"/>
             <a:ext cx="685800" cy="475488"/>
           </a:xfrm>
           <a:prstGeom prst="rect">
@@ -21802,13 +22072,13 @@
       </p:sp>
       <p:sp>
         <p:nvSpPr>
-          <p:cNvPr id="44" name="Text 42"/>
-          <p:cNvSpPr/>
-          <p:nvPr/>
-        </p:nvSpPr>
-        <p:spPr>
-          <a:xfrm>
-            <a:off x="6062472" y="4169664"/>
+          <p:cNvPr id="47" name="Text 45"/>
+          <p:cNvSpPr/>
+          <p:nvPr/>
+        </p:nvSpPr>
+        <p:spPr>
+          <a:xfrm>
+            <a:off x="7447135" y="4169664"/>
             <a:ext cx="685800" cy="475488"/>
           </a:xfrm>
           <a:prstGeom prst="rect">
@@ -21833,139 +22103,7 @@
                 <a:ea typeface="Trebuchet MS" pitchFamily="34" charset="-122"/>
                 <a:cs typeface="Trebuchet MS" pitchFamily="34" charset="-120"/>
               </a:rPr>
-              <a:t>ou</a:t>
-            </a:r>
-            <a:endParaRPr lang="en-US" sz="900" dirty="0"/>
-          </a:p>
-        </p:txBody>
-      </p:sp>
-      <p:sp>
-        <p:nvSpPr>
-          <p:cNvPr id="45" name="Shape 43"/>
-          <p:cNvSpPr/>
-          <p:nvPr/>
-        </p:nvSpPr>
-        <p:spPr>
-          <a:xfrm>
-            <a:off x="6870192" y="4169664"/>
-            <a:ext cx="685800" cy="475488"/>
-          </a:xfrm>
-          <a:prstGeom prst="rect">
-            <a:avLst>
-              <a:gd name="adj" fmla="val 7692"/>
-            </a:avLst>
-          </a:prstGeom>
-          <a:solidFill>
-            <a:srgbClr val="FFFFFF"/>
-          </a:solidFill>
-          <a:ln w="12700">
-            <a:solidFill>
-              <a:srgbClr val="DB2777"/>
-            </a:solidFill>
-            <a:prstDash val="solid"/>
-          </a:ln>
-        </p:spPr>
-      </p:sp>
-      <p:sp>
-        <p:nvSpPr>
-          <p:cNvPr id="46" name="Text 44"/>
-          <p:cNvSpPr/>
-          <p:nvPr/>
-        </p:nvSpPr>
-        <p:spPr>
-          <a:xfrm>
-            <a:off x="6870192" y="4169664"/>
-            <a:ext cx="685800" cy="475488"/>
-          </a:xfrm>
-          <a:prstGeom prst="rect">
-            <a:avLst/>
-          </a:prstGeom>
-          <a:noFill/>
-          <a:ln/>
-        </p:spPr>
-        <p:txBody>
-          <a:bodyPr wrap="square" lIns="0" tIns="0" rIns="0" bIns="0" rtlCol="0" anchor="ctr"/>
-          <a:lstStyle/>
-          <a:p>
-            <a:pPr algn="ctr" indent="0" marL="0">
-              <a:buNone/>
-            </a:pPr>
-            <a:r>
-              <a:rPr lang="en-US" sz="900" b="1" dirty="0">
-                <a:solidFill>
-                  <a:srgbClr val="9D174D"/>
-                </a:solidFill>
-                <a:latin typeface="Trebuchet MS" pitchFamily="34" charset="0"/>
-                <a:ea typeface="Trebuchet MS" pitchFamily="34" charset="-122"/>
-                <a:cs typeface="Trebuchet MS" pitchFamily="34" charset="-120"/>
-              </a:rPr>
-              <a:t>n</a:t>
-            </a:r>
-            <a:endParaRPr lang="en-US" sz="900" dirty="0"/>
-          </a:p>
-        </p:txBody>
-      </p:sp>
-      <p:sp>
-        <p:nvSpPr>
-          <p:cNvPr id="47" name="Shape 45"/>
-          <p:cNvSpPr/>
-          <p:nvPr/>
-        </p:nvSpPr>
-        <p:spPr>
-          <a:xfrm>
-            <a:off x="7677912" y="4169664"/>
-            <a:ext cx="685800" cy="475488"/>
-          </a:xfrm>
-          <a:prstGeom prst="rect">
-            <a:avLst>
-              <a:gd name="adj" fmla="val 7692"/>
-            </a:avLst>
-          </a:prstGeom>
-          <a:solidFill>
-            <a:srgbClr val="FFFFFF"/>
-          </a:solidFill>
-          <a:ln w="12700">
-            <a:solidFill>
-              <a:srgbClr val="DB2777"/>
-            </a:solidFill>
-            <a:prstDash val="solid"/>
-          </a:ln>
-        </p:spPr>
-      </p:sp>
-      <p:sp>
-        <p:nvSpPr>
-          <p:cNvPr id="48" name="Text 46"/>
-          <p:cNvSpPr/>
-          <p:nvPr/>
-        </p:nvSpPr>
-        <p:spPr>
-          <a:xfrm>
-            <a:off x="7677912" y="4169664"/>
-            <a:ext cx="685800" cy="475488"/>
-          </a:xfrm>
-          <a:prstGeom prst="rect">
-            <a:avLst/>
-          </a:prstGeom>
-          <a:noFill/>
-          <a:ln/>
-        </p:spPr>
-        <p:txBody>
-          <a:bodyPr wrap="square" lIns="0" tIns="0" rIns="0" bIns="0" rtlCol="0" anchor="ctr"/>
-          <a:lstStyle/>
-          <a:p>
-            <a:pPr algn="ctr" indent="0" marL="0">
-              <a:buNone/>
-            </a:pPr>
-            <a:r>
-              <a:rPr lang="en-US" sz="900" b="1" dirty="0">
-                <a:solidFill>
-                  <a:srgbClr val="9D174D"/>
-                </a:solidFill>
-                <a:latin typeface="Trebuchet MS" pitchFamily="34" charset="0"/>
-                <a:ea typeface="Trebuchet MS" pitchFamily="34" charset="-122"/>
-                <a:cs typeface="Trebuchet MS" pitchFamily="34" charset="-120"/>
-              </a:rPr>
-              <a:t>d</a:t>
+              <a:t>s</a:t>
             </a:r>
             <a:endParaRPr lang="en-US" sz="900" dirty="0"/>
           </a:p>
@@ -22257,7 +22395,7 @@
                 <a:ea typeface="Calibri" pitchFamily="34" charset="-122"/>
                 <a:cs typeface="Calibri" pitchFamily="34" charset="-120"/>
               </a:rPr>
-              <a:t>Word Labs  •  wordlabs.app  •  Root: 'spell' = to name letters in order</a:t>
+              <a:t>Word Labs  •  wordlabs.app  •  Root: 'spell' = to write or say letters in order</a:t>
             </a:r>
             <a:endParaRPr lang="en-US" sz="800" dirty="0"/>
           </a:p>
@@ -22396,7 +22534,7 @@
                 <a:ea typeface="Trebuchet MS" pitchFamily="34" charset="-122"/>
                 <a:cs typeface="Trebuchet MS" pitchFamily="34" charset="-120"/>
               </a:rPr>
-              <a:t>speller</a:t>
+              <a:t>spelling</a:t>
             </a:r>
             <a:endParaRPr lang="en-US" sz="2800" dirty="0"/>
           </a:p>
@@ -23084,7 +23222,7 @@
                 <a:ea typeface="Calibri" pitchFamily="34" charset="-122"/>
                 <a:cs typeface="Calibri" pitchFamily="34" charset="-120"/>
               </a:rPr>
-              <a:t>Word Labs  •  wordlabs.app  •  Root: 'spell' = to name letters in order</a:t>
+              <a:t>Word Labs  •  wordlabs.app  •  Root: 'spell' = to write or say letters in order</a:t>
             </a:r>
             <a:endParaRPr lang="en-US" sz="800" dirty="0"/>
           </a:p>
@@ -23223,7 +23361,7 @@
                 <a:ea typeface="Trebuchet MS" pitchFamily="34" charset="-122"/>
                 <a:cs typeface="Trebuchet MS" pitchFamily="34" charset="-120"/>
               </a:rPr>
-              <a:t>speller</a:t>
+              <a:t>spelling</a:t>
             </a:r>
             <a:endParaRPr lang="en-US" sz="2800" dirty="0"/>
           </a:p>
@@ -23401,7 +23539,7 @@
                 <a:ea typeface="Calibri" pitchFamily="34" charset="-122"/>
                 <a:cs typeface="Calibri" pitchFamily="34" charset="-120"/>
               </a:rPr>
-              <a:t>to name letters in order</a:t>
+              <a:t>to write or say letters in order</a:t>
             </a:r>
             <a:endParaRPr lang="en-US" sz="850" dirty="0"/>
           </a:p>
@@ -23474,7 +23612,7 @@
                 <a:ea typeface="Trebuchet MS" pitchFamily="34" charset="-122"/>
                 <a:cs typeface="Trebuchet MS" pitchFamily="34" charset="-120"/>
               </a:rPr>
-              <a:t>er</a:t>
+              <a:t>ing</a:t>
             </a:r>
             <a:endParaRPr lang="en-US" sz="1300" dirty="0"/>
           </a:p>
@@ -23513,7 +23651,7 @@
                 <a:ea typeface="Calibri" pitchFamily="34" charset="-122"/>
                 <a:cs typeface="Calibri" pitchFamily="34" charset="-120"/>
               </a:rPr>
-              <a:t>a person who does something</a:t>
+              <a:t>happening now</a:t>
             </a:r>
             <a:endParaRPr lang="en-US" sz="850" dirty="0"/>
           </a:p>
@@ -24069,7 +24207,7 @@
                 <a:ea typeface="Calibri" pitchFamily="34" charset="-122"/>
                 <a:cs typeface="Calibri" pitchFamily="34" charset="-120"/>
               </a:rPr>
-              <a:t>Word Labs  •  wordlabs.app  •  Root: 'spell' = to name letters in order</a:t>
+              <a:t>Word Labs  •  wordlabs.app  •  Root: 'spell' = to write or say letters in order</a:t>
             </a:r>
             <a:endParaRPr lang="en-US" sz="800" dirty="0"/>
           </a:p>
@@ -24142,7 +24280,7 @@
                 <a:ea typeface="Trebuchet MS" pitchFamily="34" charset="-122"/>
                 <a:cs typeface="Trebuchet MS" pitchFamily="34" charset="-120"/>
               </a:rPr>
-              <a:t>We are learning that the root 'spell' means 'to name letters in order'.</a:t>
+              <a:t>We are learning that the root 'spell' means 'to write or say letters in order'.</a:t>
             </a:r>
             <a:endParaRPr lang="en-US" sz="2000" dirty="0"/>
           </a:p>
@@ -24788,7 +24926,7 @@
                 <a:ea typeface="Calibri" pitchFamily="34" charset="-122"/>
                 <a:cs typeface="Calibri" pitchFamily="34" charset="-120"/>
               </a:rPr>
-              <a:t>Word Labs  •  wordlabs.app  •  Root: 'spell' = to name letters in order</a:t>
+              <a:t>Word Labs  •  wordlabs.app  •  Root: 'spell' = to write or say letters in order</a:t>
             </a:r>
             <a:endParaRPr lang="en-US" sz="800" dirty="0"/>
           </a:p>
@@ -24927,7 +25065,7 @@
                 <a:ea typeface="Trebuchet MS" pitchFamily="34" charset="-122"/>
                 <a:cs typeface="Trebuchet MS" pitchFamily="34" charset="-120"/>
               </a:rPr>
-              <a:t>speller</a:t>
+              <a:t>spelling</a:t>
             </a:r>
             <a:endParaRPr lang="en-US" sz="2800" dirty="0"/>
           </a:p>
@@ -25105,7 +25243,7 @@
                 <a:ea typeface="Calibri" pitchFamily="34" charset="-122"/>
                 <a:cs typeface="Calibri" pitchFamily="34" charset="-120"/>
               </a:rPr>
-              <a:t>to name letters in order</a:t>
+              <a:t>to write or say letters in order</a:t>
             </a:r>
             <a:endParaRPr lang="en-US" sz="850" dirty="0"/>
           </a:p>
@@ -25178,7 +25316,7 @@
                 <a:ea typeface="Trebuchet MS" pitchFamily="34" charset="-122"/>
                 <a:cs typeface="Trebuchet MS" pitchFamily="34" charset="-120"/>
               </a:rPr>
-              <a:t>er</a:t>
+              <a:t>ing</a:t>
             </a:r>
             <a:endParaRPr lang="en-US" sz="1300" dirty="0"/>
           </a:p>
@@ -25217,7 +25355,7 @@
                 <a:ea typeface="Calibri" pitchFamily="34" charset="-122"/>
                 <a:cs typeface="Calibri" pitchFamily="34" charset="-120"/>
               </a:rPr>
-              <a:t>a person who does something</a:t>
+              <a:t>happening now</a:t>
             </a:r>
             <a:endParaRPr lang="en-US" sz="850" dirty="0"/>
           </a:p>
@@ -25481,7 +25619,7 @@
                 <a:ea typeface="Trebuchet MS" pitchFamily="34" charset="-122"/>
                 <a:cs typeface="Trebuchet MS" pitchFamily="34" charset="-120"/>
               </a:rPr>
-              <a:t>er</a:t>
+              <a:t>ing</a:t>
             </a:r>
             <a:endParaRPr lang="en-US" sz="1400" dirty="0"/>
           </a:p>
@@ -25905,7 +26043,7 @@
                 <a:ea typeface="Calibri" pitchFamily="34" charset="-122"/>
                 <a:cs typeface="Calibri" pitchFamily="34" charset="-120"/>
               </a:rPr>
-              <a:t>Word Labs  •  wordlabs.app  •  Root: 'spell' = to name letters in order</a:t>
+              <a:t>Word Labs  •  wordlabs.app  •  Root: 'spell' = to write or say letters in order</a:t>
             </a:r>
             <a:endParaRPr lang="en-US" sz="800" dirty="0"/>
           </a:p>
@@ -26044,7 +26182,7 @@
                 <a:ea typeface="Trebuchet MS" pitchFamily="34" charset="-122"/>
                 <a:cs typeface="Trebuchet MS" pitchFamily="34" charset="-120"/>
               </a:rPr>
-              <a:t>speller</a:t>
+              <a:t>spelling</a:t>
             </a:r>
             <a:endParaRPr lang="en-US" sz="2800" dirty="0"/>
           </a:p>
@@ -26222,7 +26360,7 @@
                 <a:ea typeface="Calibri" pitchFamily="34" charset="-122"/>
                 <a:cs typeface="Calibri" pitchFamily="34" charset="-120"/>
               </a:rPr>
-              <a:t>to name letters in order</a:t>
+              <a:t>to write or say letters in order</a:t>
             </a:r>
             <a:endParaRPr lang="en-US" sz="850" dirty="0"/>
           </a:p>
@@ -26295,7 +26433,7 @@
                 <a:ea typeface="Trebuchet MS" pitchFamily="34" charset="-122"/>
                 <a:cs typeface="Trebuchet MS" pitchFamily="34" charset="-120"/>
               </a:rPr>
-              <a:t>er</a:t>
+              <a:t>ing</a:t>
             </a:r>
             <a:endParaRPr lang="en-US" sz="1300" dirty="0"/>
           </a:p>
@@ -26334,7 +26472,7 @@
                 <a:ea typeface="Calibri" pitchFamily="34" charset="-122"/>
                 <a:cs typeface="Calibri" pitchFamily="34" charset="-120"/>
               </a:rPr>
-              <a:t>a person who does something</a:t>
+              <a:t>happening now</a:t>
             </a:r>
             <a:endParaRPr lang="en-US" sz="850" dirty="0"/>
           </a:p>
@@ -26598,7 +26736,7 @@
                 <a:ea typeface="Trebuchet MS" pitchFamily="34" charset="-122"/>
                 <a:cs typeface="Trebuchet MS" pitchFamily="34" charset="-120"/>
               </a:rPr>
-              <a:t>er</a:t>
+              <a:t>ing</a:t>
             </a:r>
             <a:endParaRPr lang="en-US" sz="1400" dirty="0"/>
           </a:p>
@@ -26705,7 +26843,7 @@
         </p:nvSpPr>
         <p:spPr>
           <a:xfrm>
-            <a:off x="2427732" y="4169664"/>
+            <a:off x="2254649" y="4169664"/>
             <a:ext cx="685800" cy="475488"/>
           </a:xfrm>
           <a:prstGeom prst="rect">
@@ -26732,7 +26870,7 @@
         </p:nvSpPr>
         <p:spPr>
           <a:xfrm>
-            <a:off x="2427732" y="4169664"/>
+            <a:off x="2254649" y="4169664"/>
             <a:ext cx="685800" cy="475488"/>
           </a:xfrm>
           <a:prstGeom prst="rect">
@@ -26771,7 +26909,7 @@
         </p:nvSpPr>
         <p:spPr>
           <a:xfrm>
-            <a:off x="3639312" y="4169664"/>
+            <a:off x="3293146" y="4169664"/>
             <a:ext cx="685800" cy="475488"/>
           </a:xfrm>
           <a:prstGeom prst="rect">
@@ -26798,7 +26936,7 @@
         </p:nvSpPr>
         <p:spPr>
           <a:xfrm>
-            <a:off x="3639312" y="4169664"/>
+            <a:off x="3293146" y="4169664"/>
             <a:ext cx="685800" cy="475488"/>
           </a:xfrm>
           <a:prstGeom prst="rect">
@@ -26837,7 +26975,7 @@
         </p:nvSpPr>
         <p:spPr>
           <a:xfrm>
-            <a:off x="4850892" y="4169664"/>
+            <a:off x="4331643" y="4169664"/>
             <a:ext cx="685800" cy="475488"/>
           </a:xfrm>
           <a:prstGeom prst="rect">
@@ -26864,7 +27002,7 @@
         </p:nvSpPr>
         <p:spPr>
           <a:xfrm>
-            <a:off x="4850892" y="4169664"/>
+            <a:off x="4331643" y="4169664"/>
             <a:ext cx="685800" cy="475488"/>
           </a:xfrm>
           <a:prstGeom prst="rect">
@@ -26903,7 +27041,7 @@
         </p:nvSpPr>
         <p:spPr>
           <a:xfrm>
-            <a:off x="6062472" y="4169664"/>
+            <a:off x="5370141" y="4169664"/>
             <a:ext cx="685800" cy="475488"/>
           </a:xfrm>
           <a:prstGeom prst="rect">
@@ -26930,7 +27068,7 @@
         </p:nvSpPr>
         <p:spPr>
           <a:xfrm>
-            <a:off x="6062472" y="4169664"/>
+            <a:off x="5370141" y="4169664"/>
             <a:ext cx="685800" cy="475488"/>
           </a:xfrm>
           <a:prstGeom prst="rect">
@@ -26969,7 +27107,7 @@
         </p:nvSpPr>
         <p:spPr>
           <a:xfrm>
-            <a:off x="7274052" y="4169664"/>
+            <a:off x="6408638" y="4169664"/>
             <a:ext cx="685800" cy="475488"/>
           </a:xfrm>
           <a:prstGeom prst="rect">
@@ -26996,7 +27134,7 @@
         </p:nvSpPr>
         <p:spPr>
           <a:xfrm>
-            <a:off x="7274052" y="4169664"/>
+            <a:off x="6408638" y="4169664"/>
             <a:ext cx="685800" cy="475488"/>
           </a:xfrm>
           <a:prstGeom prst="rect">
@@ -27021,7 +27159,73 @@
                 <a:ea typeface="Trebuchet MS" pitchFamily="34" charset="-122"/>
                 <a:cs typeface="Trebuchet MS" pitchFamily="34" charset="-120"/>
               </a:rPr>
-              <a:t>er</a:t>
+              <a:t>i</a:t>
+            </a:r>
+            <a:endParaRPr lang="en-US" sz="900" dirty="0"/>
+          </a:p>
+        </p:txBody>
+      </p:sp>
+      <p:sp>
+        <p:nvSpPr>
+          <p:cNvPr id="43" name="Shape 41"/>
+          <p:cNvSpPr/>
+          <p:nvPr/>
+        </p:nvSpPr>
+        <p:spPr>
+          <a:xfrm>
+            <a:off x="7447135" y="4169664"/>
+            <a:ext cx="685800" cy="475488"/>
+          </a:xfrm>
+          <a:prstGeom prst="rect">
+            <a:avLst>
+              <a:gd name="adj" fmla="val 7692"/>
+            </a:avLst>
+          </a:prstGeom>
+          <a:solidFill>
+            <a:srgbClr val="FFFFFF"/>
+          </a:solidFill>
+          <a:ln w="12700">
+            <a:solidFill>
+              <a:srgbClr val="DB2777"/>
+            </a:solidFill>
+            <a:prstDash val="solid"/>
+          </a:ln>
+        </p:spPr>
+      </p:sp>
+      <p:sp>
+        <p:nvSpPr>
+          <p:cNvPr id="44" name="Text 42"/>
+          <p:cNvSpPr/>
+          <p:nvPr/>
+        </p:nvSpPr>
+        <p:spPr>
+          <a:xfrm>
+            <a:off x="7447135" y="4169664"/>
+            <a:ext cx="685800" cy="475488"/>
+          </a:xfrm>
+          <a:prstGeom prst="rect">
+            <a:avLst/>
+          </a:prstGeom>
+          <a:noFill/>
+          <a:ln/>
+        </p:spPr>
+        <p:txBody>
+          <a:bodyPr wrap="square" lIns="0" tIns="0" rIns="0" bIns="0" rtlCol="0" anchor="ctr"/>
+          <a:lstStyle/>
+          <a:p>
+            <a:pPr algn="ctr" indent="0" marL="0">
+              <a:buNone/>
+            </a:pPr>
+            <a:r>
+              <a:rPr lang="en-US" sz="900" b="1" dirty="0">
+                <a:solidFill>
+                  <a:srgbClr val="9D174D"/>
+                </a:solidFill>
+                <a:latin typeface="Trebuchet MS" pitchFamily="34" charset="0"/>
+                <a:ea typeface="Trebuchet MS" pitchFamily="34" charset="-122"/>
+                <a:cs typeface="Trebuchet MS" pitchFamily="34" charset="-120"/>
+              </a:rPr>
+              <a:t>ng</a:t>
             </a:r>
             <a:endParaRPr lang="en-US" sz="900" dirty="0"/>
           </a:p>
@@ -27313,7 +27517,7 @@
                 <a:ea typeface="Calibri" pitchFamily="34" charset="-122"/>
                 <a:cs typeface="Calibri" pitchFamily="34" charset="-120"/>
               </a:rPr>
-              <a:t>Word Labs  •  wordlabs.app  •  Root: 'spell' = to name letters in order</a:t>
+              <a:t>Word Labs  •  wordlabs.app  •  Root: 'spell' = to write or say letters in order</a:t>
             </a:r>
             <a:endParaRPr lang="en-US" sz="800" dirty="0"/>
           </a:p>
@@ -27452,7 +27656,7 @@
                 <a:ea typeface="Trebuchet MS" pitchFamily="34" charset="-122"/>
                 <a:cs typeface="Trebuchet MS" pitchFamily="34" charset="-120"/>
               </a:rPr>
-              <a:t>spellcheck</a:t>
+              <a:t>misspelling</a:t>
             </a:r>
             <a:endParaRPr lang="en-US" sz="2800" dirty="0"/>
           </a:p>
@@ -28140,7 +28344,7 @@
                 <a:ea typeface="Calibri" pitchFamily="34" charset="-122"/>
                 <a:cs typeface="Calibri" pitchFamily="34" charset="-120"/>
               </a:rPr>
-              <a:t>Word Labs  •  wordlabs.app  •  Root: 'spell' = to name letters in order</a:t>
+              <a:t>Word Labs  •  wordlabs.app  •  Root: 'spell' = to write or say letters in order</a:t>
             </a:r>
             <a:endParaRPr lang="en-US" sz="800" dirty="0"/>
           </a:p>
@@ -28279,7 +28483,7 @@
                 <a:ea typeface="Trebuchet MS" pitchFamily="34" charset="-122"/>
                 <a:cs typeface="Trebuchet MS" pitchFamily="34" charset="-120"/>
               </a:rPr>
-              <a:t>spellcheck</a:t>
+              <a:t>misspelling</a:t>
             </a:r>
             <a:endParaRPr lang="en-US" sz="2800" dirty="0"/>
           </a:p>
@@ -28359,7 +28563,7 @@
         </p:nvSpPr>
         <p:spPr>
           <a:xfrm>
-            <a:off x="2938272" y="2258568"/>
+            <a:off x="2221992" y="2258568"/>
             <a:ext cx="1828800" cy="292608"/>
           </a:xfrm>
           <a:prstGeom prst="rect">
@@ -28368,11 +28572,11 @@
             </a:avLst>
           </a:prstGeom>
           <a:solidFill>
-            <a:srgbClr val="CCFBF1"/>
+            <a:srgbClr val="DDD6FE"/>
           </a:solidFill>
           <a:ln w="19050">
             <a:solidFill>
-              <a:srgbClr val="0D9488"/>
+              <a:srgbClr val="7C3AED"/>
             </a:solidFill>
             <a:prstDash val="solid"/>
           </a:ln>
@@ -28393,7 +28597,7 @@
         </p:nvSpPr>
         <p:spPr>
           <a:xfrm>
-            <a:off x="2938272" y="2258568"/>
+            <a:off x="2221992" y="2258568"/>
             <a:ext cx="1828800" cy="292608"/>
           </a:xfrm>
           <a:prstGeom prst="rect">
@@ -28412,13 +28616,13 @@
             <a:r>
               <a:rPr lang="en-US" sz="1300" b="1" dirty="0">
                 <a:solidFill>
-                  <a:srgbClr val="0F766E"/>
+                  <a:srgbClr val="4C1D95"/>
                 </a:solidFill>
                 <a:latin typeface="Trebuchet MS" pitchFamily="34" charset="0"/>
                 <a:ea typeface="Trebuchet MS" pitchFamily="34" charset="-122"/>
                 <a:cs typeface="Trebuchet MS" pitchFamily="34" charset="-120"/>
               </a:rPr>
-              <a:t>spell</a:t>
+              <a:t>mis</a:t>
             </a:r>
             <a:endParaRPr lang="en-US" sz="1300" dirty="0"/>
           </a:p>
@@ -28432,7 +28636,7 @@
         </p:nvSpPr>
         <p:spPr>
           <a:xfrm>
-            <a:off x="2938272" y="2569464"/>
+            <a:off x="2221992" y="2569464"/>
             <a:ext cx="1828800" cy="201168"/>
           </a:xfrm>
           <a:prstGeom prst="rect">
@@ -28457,7 +28661,7 @@
                 <a:ea typeface="Calibri" pitchFamily="34" charset="-122"/>
                 <a:cs typeface="Calibri" pitchFamily="34" charset="-120"/>
               </a:rPr>
-              <a:t>to name letters in order</a:t>
+              <a:t>wrong</a:t>
             </a:r>
             <a:endParaRPr lang="en-US" sz="850" dirty="0"/>
           </a:p>
@@ -28471,7 +28675,7 @@
         </p:nvSpPr>
         <p:spPr>
           <a:xfrm>
-            <a:off x="5803392" y="2258568"/>
+            <a:off x="4370832" y="2258568"/>
             <a:ext cx="1828800" cy="292608"/>
           </a:xfrm>
           <a:prstGeom prst="rect">
@@ -28480,11 +28684,11 @@
             </a:avLst>
           </a:prstGeom>
           <a:solidFill>
-            <a:srgbClr val="FCE7F3"/>
+            <a:srgbClr val="CCFBF1"/>
           </a:solidFill>
           <a:ln w="19050">
             <a:solidFill>
-              <a:srgbClr val="DB2777"/>
+              <a:srgbClr val="0D9488"/>
             </a:solidFill>
             <a:prstDash val="solid"/>
           </a:ln>
@@ -28505,7 +28709,7 @@
         </p:nvSpPr>
         <p:spPr>
           <a:xfrm>
-            <a:off x="5803392" y="2258568"/>
+            <a:off x="4370832" y="2258568"/>
             <a:ext cx="1828800" cy="292608"/>
           </a:xfrm>
           <a:prstGeom prst="rect">
@@ -28524,13 +28728,13 @@
             <a:r>
               <a:rPr lang="en-US" sz="1300" b="1" dirty="0">
                 <a:solidFill>
-                  <a:srgbClr val="9D174D"/>
+                  <a:srgbClr val="0F766E"/>
                 </a:solidFill>
                 <a:latin typeface="Trebuchet MS" pitchFamily="34" charset="0"/>
                 <a:ea typeface="Trebuchet MS" pitchFamily="34" charset="-122"/>
                 <a:cs typeface="Trebuchet MS" pitchFamily="34" charset="-120"/>
               </a:rPr>
-              <a:t>check</a:t>
+              <a:t>spell</a:t>
             </a:r>
             <a:endParaRPr lang="en-US" sz="1300" dirty="0"/>
           </a:p>
@@ -28544,7 +28748,7 @@
         </p:nvSpPr>
         <p:spPr>
           <a:xfrm>
-            <a:off x="5803392" y="2569464"/>
+            <a:off x="4370832" y="2569464"/>
             <a:ext cx="1828800" cy="201168"/>
           </a:xfrm>
           <a:prstGeom prst="rect">
@@ -28569,7 +28773,7 @@
                 <a:ea typeface="Calibri" pitchFamily="34" charset="-122"/>
                 <a:cs typeface="Calibri" pitchFamily="34" charset="-120"/>
               </a:rPr>
-              <a:t>to look over and verify</a:t>
+              <a:t>to write or say letters in order</a:t>
             </a:r>
             <a:endParaRPr lang="en-US" sz="850" dirty="0"/>
           </a:p>
@@ -28578,6 +28782,118 @@
       <p:sp>
         <p:nvSpPr>
           <p:cNvPr id="22" name="Shape 20"/>
+          <p:cNvSpPr/>
+          <p:nvPr/>
+        </p:nvSpPr>
+        <p:spPr>
+          <a:xfrm>
+            <a:off x="6519672" y="2258568"/>
+            <a:ext cx="1828800" cy="292608"/>
+          </a:xfrm>
+          <a:prstGeom prst="rect">
+            <a:avLst>
+              <a:gd name="adj" fmla="val 25000"/>
+            </a:avLst>
+          </a:prstGeom>
+          <a:solidFill>
+            <a:srgbClr val="FCE7F3"/>
+          </a:solidFill>
+          <a:ln w="19050">
+            <a:solidFill>
+              <a:srgbClr val="DB2777"/>
+            </a:solidFill>
+            <a:prstDash val="solid"/>
+          </a:ln>
+          <a:effectLst>
+            <a:outerShdw sx="100000" sy="100000" kx="0" ky="0" algn="bl" rotWithShape="0" blurRad="101600" dist="38100" dir="8100000">
+              <a:srgbClr val="000000">
+                <a:alpha val="12000"/>
+              </a:srgbClr>
+            </a:outerShdw>
+          </a:effectLst>
+        </p:spPr>
+      </p:sp>
+      <p:sp>
+        <p:nvSpPr>
+          <p:cNvPr id="23" name="Text 21"/>
+          <p:cNvSpPr/>
+          <p:nvPr/>
+        </p:nvSpPr>
+        <p:spPr>
+          <a:xfrm>
+            <a:off x="6519672" y="2258568"/>
+            <a:ext cx="1828800" cy="292608"/>
+          </a:xfrm>
+          <a:prstGeom prst="rect">
+            <a:avLst/>
+          </a:prstGeom>
+          <a:noFill/>
+          <a:ln/>
+        </p:spPr>
+        <p:txBody>
+          <a:bodyPr wrap="square" lIns="0" tIns="0" rIns="0" bIns="0" rtlCol="0" anchor="ctr"/>
+          <a:lstStyle/>
+          <a:p>
+            <a:pPr algn="ctr" indent="0" marL="0">
+              <a:buNone/>
+            </a:pPr>
+            <a:r>
+              <a:rPr lang="en-US" sz="1300" b="1" dirty="0">
+                <a:solidFill>
+                  <a:srgbClr val="9D174D"/>
+                </a:solidFill>
+                <a:latin typeface="Trebuchet MS" pitchFamily="34" charset="0"/>
+                <a:ea typeface="Trebuchet MS" pitchFamily="34" charset="-122"/>
+                <a:cs typeface="Trebuchet MS" pitchFamily="34" charset="-120"/>
+              </a:rPr>
+              <a:t>ing</a:t>
+            </a:r>
+            <a:endParaRPr lang="en-US" sz="1300" dirty="0"/>
+          </a:p>
+        </p:txBody>
+      </p:sp>
+      <p:sp>
+        <p:nvSpPr>
+          <p:cNvPr id="24" name="Text 22"/>
+          <p:cNvSpPr/>
+          <p:nvPr/>
+        </p:nvSpPr>
+        <p:spPr>
+          <a:xfrm>
+            <a:off x="6519672" y="2569464"/>
+            <a:ext cx="1828800" cy="201168"/>
+          </a:xfrm>
+          <a:prstGeom prst="rect">
+            <a:avLst/>
+          </a:prstGeom>
+          <a:noFill/>
+          <a:ln/>
+        </p:spPr>
+        <p:txBody>
+          <a:bodyPr wrap="square" lIns="0" tIns="0" rIns="0" bIns="0" rtlCol="0" anchor="t"/>
+          <a:lstStyle/>
+          <a:p>
+            <a:pPr algn="ctr" indent="0" marL="0">
+              <a:buNone/>
+            </a:pPr>
+            <a:r>
+              <a:rPr lang="en-US" sz="850" dirty="0">
+                <a:solidFill>
+                  <a:srgbClr val="475569"/>
+                </a:solidFill>
+                <a:latin typeface="Calibri" pitchFamily="34" charset="0"/>
+                <a:ea typeface="Calibri" pitchFamily="34" charset="-122"/>
+                <a:cs typeface="Calibri" pitchFamily="34" charset="-120"/>
+              </a:rPr>
+              <a:t>happening now</a:t>
+            </a:r>
+            <a:endParaRPr lang="en-US" sz="850" dirty="0"/>
+          </a:p>
+        </p:txBody>
+      </p:sp>
+      <p:sp>
+        <p:nvSpPr>
+          <p:cNvPr id="25" name="Shape 23"/>
           <p:cNvSpPr/>
           <p:nvPr/>
         </p:nvSpPr>
@@ -28604,7 +28920,7 @@
       </p:sp>
       <p:sp>
         <p:nvSpPr>
-          <p:cNvPr id="23" name="Text 21"/>
+          <p:cNvPr id="26" name="Text 24"/>
           <p:cNvSpPr/>
           <p:nvPr/>
         </p:nvSpPr>
@@ -28643,7 +28959,7 @@
       </p:sp>
       <p:sp>
         <p:nvSpPr>
-          <p:cNvPr id="24" name="Shape 22"/>
+          <p:cNvPr id="27" name="Shape 25"/>
           <p:cNvSpPr/>
           <p:nvPr/>
         </p:nvSpPr>
@@ -28670,7 +28986,7 @@
       </p:sp>
       <p:sp>
         <p:nvSpPr>
-          <p:cNvPr id="25" name="Text 23"/>
+          <p:cNvPr id="28" name="Text 26"/>
           <p:cNvSpPr/>
           <p:nvPr/>
         </p:nvSpPr>
@@ -28709,7 +29025,7 @@
       </p:sp>
       <p:sp>
         <p:nvSpPr>
-          <p:cNvPr id="26" name="Shape 24"/>
+          <p:cNvPr id="29" name="Shape 27"/>
           <p:cNvSpPr/>
           <p:nvPr/>
         </p:nvSpPr>
@@ -28736,7 +29052,7 @@
       </p:sp>
       <p:sp>
         <p:nvSpPr>
-          <p:cNvPr id="27" name="Text 25"/>
+          <p:cNvPr id="30" name="Text 28"/>
           <p:cNvSpPr/>
           <p:nvPr/>
         </p:nvSpPr>
@@ -28775,7 +29091,7 @@
       </p:sp>
       <p:sp>
         <p:nvSpPr>
-          <p:cNvPr id="28" name="Shape 26"/>
+          <p:cNvPr id="31" name="Shape 29"/>
           <p:cNvSpPr/>
           <p:nvPr/>
         </p:nvSpPr>
@@ -28802,7 +29118,7 @@
       </p:sp>
       <p:sp>
         <p:nvSpPr>
-          <p:cNvPr id="29" name="Text 27"/>
+          <p:cNvPr id="32" name="Text 30"/>
           <p:cNvSpPr/>
           <p:nvPr/>
         </p:nvSpPr>
@@ -29125,7 +29441,7 @@
                 <a:ea typeface="Calibri" pitchFamily="34" charset="-122"/>
                 <a:cs typeface="Calibri" pitchFamily="34" charset="-120"/>
               </a:rPr>
-              <a:t>Word Labs  •  wordlabs.app  •  Root: 'spell' = to name letters in order</a:t>
+              <a:t>Word Labs  •  wordlabs.app  •  Root: 'spell' = to write or say letters in order</a:t>
             </a:r>
             <a:endParaRPr lang="en-US" sz="800" dirty="0"/>
           </a:p>
@@ -29264,7 +29580,7 @@
                 <a:ea typeface="Trebuchet MS" pitchFamily="34" charset="-122"/>
                 <a:cs typeface="Trebuchet MS" pitchFamily="34" charset="-120"/>
               </a:rPr>
-              <a:t>spellcheck</a:t>
+              <a:t>misspelling</a:t>
             </a:r>
             <a:endParaRPr lang="en-US" sz="2800" dirty="0"/>
           </a:p>
@@ -29344,7 +29660,7 @@
         </p:nvSpPr>
         <p:spPr>
           <a:xfrm>
-            <a:off x="2938272" y="2258568"/>
+            <a:off x="2221992" y="2258568"/>
             <a:ext cx="1828800" cy="292608"/>
           </a:xfrm>
           <a:prstGeom prst="rect">
@@ -29353,11 +29669,11 @@
             </a:avLst>
           </a:prstGeom>
           <a:solidFill>
-            <a:srgbClr val="CCFBF1"/>
+            <a:srgbClr val="DDD6FE"/>
           </a:solidFill>
           <a:ln w="19050">
             <a:solidFill>
-              <a:srgbClr val="0D9488"/>
+              <a:srgbClr val="7C3AED"/>
             </a:solidFill>
             <a:prstDash val="solid"/>
           </a:ln>
@@ -29378,7 +29694,7 @@
         </p:nvSpPr>
         <p:spPr>
           <a:xfrm>
-            <a:off x="2938272" y="2258568"/>
+            <a:off x="2221992" y="2258568"/>
             <a:ext cx="1828800" cy="292608"/>
           </a:xfrm>
           <a:prstGeom prst="rect">
@@ -29397,13 +29713,13 @@
             <a:r>
               <a:rPr lang="en-US" sz="1300" b="1" dirty="0">
                 <a:solidFill>
-                  <a:srgbClr val="0F766E"/>
+                  <a:srgbClr val="4C1D95"/>
                 </a:solidFill>
                 <a:latin typeface="Trebuchet MS" pitchFamily="34" charset="0"/>
                 <a:ea typeface="Trebuchet MS" pitchFamily="34" charset="-122"/>
                 <a:cs typeface="Trebuchet MS" pitchFamily="34" charset="-120"/>
               </a:rPr>
-              <a:t>spell</a:t>
+              <a:t>mis</a:t>
             </a:r>
             <a:endParaRPr lang="en-US" sz="1300" dirty="0"/>
           </a:p>
@@ -29417,7 +29733,7 @@
         </p:nvSpPr>
         <p:spPr>
           <a:xfrm>
-            <a:off x="2938272" y="2569464"/>
+            <a:off x="2221992" y="2569464"/>
             <a:ext cx="1828800" cy="201168"/>
           </a:xfrm>
           <a:prstGeom prst="rect">
@@ -29442,7 +29758,7 @@
                 <a:ea typeface="Calibri" pitchFamily="34" charset="-122"/>
                 <a:cs typeface="Calibri" pitchFamily="34" charset="-120"/>
               </a:rPr>
-              <a:t>to name letters in order</a:t>
+              <a:t>wrong</a:t>
             </a:r>
             <a:endParaRPr lang="en-US" sz="850" dirty="0"/>
           </a:p>
@@ -29456,7 +29772,7 @@
         </p:nvSpPr>
         <p:spPr>
           <a:xfrm>
-            <a:off x="5803392" y="2258568"/>
+            <a:off x="4370832" y="2258568"/>
             <a:ext cx="1828800" cy="292608"/>
           </a:xfrm>
           <a:prstGeom prst="rect">
@@ -29465,11 +29781,11 @@
             </a:avLst>
           </a:prstGeom>
           <a:solidFill>
-            <a:srgbClr val="FCE7F3"/>
+            <a:srgbClr val="CCFBF1"/>
           </a:solidFill>
           <a:ln w="19050">
             <a:solidFill>
-              <a:srgbClr val="DB2777"/>
+              <a:srgbClr val="0D9488"/>
             </a:solidFill>
             <a:prstDash val="solid"/>
           </a:ln>
@@ -29490,7 +29806,7 @@
         </p:nvSpPr>
         <p:spPr>
           <a:xfrm>
-            <a:off x="5803392" y="2258568"/>
+            <a:off x="4370832" y="2258568"/>
             <a:ext cx="1828800" cy="292608"/>
           </a:xfrm>
           <a:prstGeom prst="rect">
@@ -29509,13 +29825,13 @@
             <a:r>
               <a:rPr lang="en-US" sz="1300" b="1" dirty="0">
                 <a:solidFill>
-                  <a:srgbClr val="9D174D"/>
+                  <a:srgbClr val="0F766E"/>
                 </a:solidFill>
                 <a:latin typeface="Trebuchet MS" pitchFamily="34" charset="0"/>
                 <a:ea typeface="Trebuchet MS" pitchFamily="34" charset="-122"/>
                 <a:cs typeface="Trebuchet MS" pitchFamily="34" charset="-120"/>
               </a:rPr>
-              <a:t>check</a:t>
+              <a:t>spell</a:t>
             </a:r>
             <a:endParaRPr lang="en-US" sz="1300" dirty="0"/>
           </a:p>
@@ -29529,7 +29845,7 @@
         </p:nvSpPr>
         <p:spPr>
           <a:xfrm>
-            <a:off x="5803392" y="2569464"/>
+            <a:off x="4370832" y="2569464"/>
             <a:ext cx="1828800" cy="201168"/>
           </a:xfrm>
           <a:prstGeom prst="rect">
@@ -29554,7 +29870,7 @@
                 <a:ea typeface="Calibri" pitchFamily="34" charset="-122"/>
                 <a:cs typeface="Calibri" pitchFamily="34" charset="-120"/>
               </a:rPr>
-              <a:t>to look over and verify</a:t>
+              <a:t>to write or say letters in order</a:t>
             </a:r>
             <a:endParaRPr lang="en-US" sz="850" dirty="0"/>
           </a:p>
@@ -29563,6 +29879,118 @@
       <p:sp>
         <p:nvSpPr>
           <p:cNvPr id="22" name="Shape 20"/>
+          <p:cNvSpPr/>
+          <p:nvPr/>
+        </p:nvSpPr>
+        <p:spPr>
+          <a:xfrm>
+            <a:off x="6519672" y="2258568"/>
+            <a:ext cx="1828800" cy="292608"/>
+          </a:xfrm>
+          <a:prstGeom prst="rect">
+            <a:avLst>
+              <a:gd name="adj" fmla="val 25000"/>
+            </a:avLst>
+          </a:prstGeom>
+          <a:solidFill>
+            <a:srgbClr val="FCE7F3"/>
+          </a:solidFill>
+          <a:ln w="19050">
+            <a:solidFill>
+              <a:srgbClr val="DB2777"/>
+            </a:solidFill>
+            <a:prstDash val="solid"/>
+          </a:ln>
+          <a:effectLst>
+            <a:outerShdw sx="100000" sy="100000" kx="0" ky="0" algn="bl" rotWithShape="0" blurRad="101600" dist="38100" dir="8100000">
+              <a:srgbClr val="000000">
+                <a:alpha val="12000"/>
+              </a:srgbClr>
+            </a:outerShdw>
+          </a:effectLst>
+        </p:spPr>
+      </p:sp>
+      <p:sp>
+        <p:nvSpPr>
+          <p:cNvPr id="23" name="Text 21"/>
+          <p:cNvSpPr/>
+          <p:nvPr/>
+        </p:nvSpPr>
+        <p:spPr>
+          <a:xfrm>
+            <a:off x="6519672" y="2258568"/>
+            <a:ext cx="1828800" cy="292608"/>
+          </a:xfrm>
+          <a:prstGeom prst="rect">
+            <a:avLst/>
+          </a:prstGeom>
+          <a:noFill/>
+          <a:ln/>
+        </p:spPr>
+        <p:txBody>
+          <a:bodyPr wrap="square" lIns="0" tIns="0" rIns="0" bIns="0" rtlCol="0" anchor="ctr"/>
+          <a:lstStyle/>
+          <a:p>
+            <a:pPr algn="ctr" indent="0" marL="0">
+              <a:buNone/>
+            </a:pPr>
+            <a:r>
+              <a:rPr lang="en-US" sz="1300" b="1" dirty="0">
+                <a:solidFill>
+                  <a:srgbClr val="9D174D"/>
+                </a:solidFill>
+                <a:latin typeface="Trebuchet MS" pitchFamily="34" charset="0"/>
+                <a:ea typeface="Trebuchet MS" pitchFamily="34" charset="-122"/>
+                <a:cs typeface="Trebuchet MS" pitchFamily="34" charset="-120"/>
+              </a:rPr>
+              <a:t>ing</a:t>
+            </a:r>
+            <a:endParaRPr lang="en-US" sz="1300" dirty="0"/>
+          </a:p>
+        </p:txBody>
+      </p:sp>
+      <p:sp>
+        <p:nvSpPr>
+          <p:cNvPr id="24" name="Text 22"/>
+          <p:cNvSpPr/>
+          <p:nvPr/>
+        </p:nvSpPr>
+        <p:spPr>
+          <a:xfrm>
+            <a:off x="6519672" y="2569464"/>
+            <a:ext cx="1828800" cy="201168"/>
+          </a:xfrm>
+          <a:prstGeom prst="rect">
+            <a:avLst/>
+          </a:prstGeom>
+          <a:noFill/>
+          <a:ln/>
+        </p:spPr>
+        <p:txBody>
+          <a:bodyPr wrap="square" lIns="0" tIns="0" rIns="0" bIns="0" rtlCol="0" anchor="t"/>
+          <a:lstStyle/>
+          <a:p>
+            <a:pPr algn="ctr" indent="0" marL="0">
+              <a:buNone/>
+            </a:pPr>
+            <a:r>
+              <a:rPr lang="en-US" sz="850" dirty="0">
+                <a:solidFill>
+                  <a:srgbClr val="475569"/>
+                </a:solidFill>
+                <a:latin typeface="Calibri" pitchFamily="34" charset="0"/>
+                <a:ea typeface="Calibri" pitchFamily="34" charset="-122"/>
+                <a:cs typeface="Calibri" pitchFamily="34" charset="-120"/>
+              </a:rPr>
+              <a:t>happening now</a:t>
+            </a:r>
+            <a:endParaRPr lang="en-US" sz="850" dirty="0"/>
+          </a:p>
+        </p:txBody>
+      </p:sp>
+      <p:sp>
+        <p:nvSpPr>
+          <p:cNvPr id="25" name="Shape 23"/>
           <p:cNvSpPr/>
           <p:nvPr/>
         </p:nvSpPr>
@@ -29589,7 +30017,7 @@
       </p:sp>
       <p:sp>
         <p:nvSpPr>
-          <p:cNvPr id="23" name="Text 21"/>
+          <p:cNvPr id="26" name="Text 24"/>
           <p:cNvSpPr/>
           <p:nvPr/>
         </p:nvSpPr>
@@ -29628,7 +30056,7 @@
       </p:sp>
       <p:sp>
         <p:nvSpPr>
-          <p:cNvPr id="24" name="Shape 22"/>
+          <p:cNvPr id="27" name="Shape 25"/>
           <p:cNvSpPr/>
           <p:nvPr/>
         </p:nvSpPr>
@@ -29655,13 +30083,13 @@
       </p:sp>
       <p:sp>
         <p:nvSpPr>
-          <p:cNvPr id="25" name="Shape 23"/>
-          <p:cNvSpPr/>
-          <p:nvPr/>
-        </p:nvSpPr>
-        <p:spPr>
-          <a:xfrm>
-            <a:off x="2999232" y="3364992"/>
+          <p:cNvPr id="28" name="Shape 26"/>
+          <p:cNvSpPr/>
+          <p:nvPr/>
+        </p:nvSpPr>
+        <p:spPr>
+          <a:xfrm>
+            <a:off x="2313432" y="3364992"/>
             <a:ext cx="1645920" cy="475488"/>
           </a:xfrm>
           <a:prstGeom prst="rect">
@@ -29682,13 +30110,13 @@
       </p:sp>
       <p:sp>
         <p:nvSpPr>
-          <p:cNvPr id="26" name="Text 24"/>
-          <p:cNvSpPr/>
-          <p:nvPr/>
-        </p:nvSpPr>
-        <p:spPr>
-          <a:xfrm>
-            <a:off x="2999232" y="3364992"/>
+          <p:cNvPr id="29" name="Text 27"/>
+          <p:cNvSpPr/>
+          <p:nvPr/>
+        </p:nvSpPr>
+        <p:spPr>
+          <a:xfrm>
+            <a:off x="2313432" y="3364992"/>
             <a:ext cx="1645920" cy="475488"/>
           </a:xfrm>
           <a:prstGeom prst="rect">
@@ -29713,7 +30141,7 @@
                 <a:ea typeface="Trebuchet MS" pitchFamily="34" charset="-122"/>
                 <a:cs typeface="Trebuchet MS" pitchFamily="34" charset="-120"/>
               </a:rPr>
-              <a:t>spell</a:t>
+              <a:t>mis</a:t>
             </a:r>
             <a:endParaRPr lang="en-US" sz="1400" dirty="0"/>
           </a:p>
@@ -29721,14 +30149,14 @@
       </p:sp>
       <p:sp>
         <p:nvSpPr>
-          <p:cNvPr id="27" name="Text 25"/>
-          <p:cNvSpPr/>
-          <p:nvPr/>
-        </p:nvSpPr>
-        <p:spPr>
-          <a:xfrm>
-            <a:off x="4645152" y="3364992"/>
-            <a:ext cx="1097280" cy="475488"/>
+          <p:cNvPr id="30" name="Text 28"/>
+          <p:cNvSpPr/>
+          <p:nvPr/>
+        </p:nvSpPr>
+        <p:spPr>
+          <a:xfrm>
+            <a:off x="3959352" y="3364992"/>
+            <a:ext cx="411480" cy="475488"/>
           </a:xfrm>
           <a:prstGeom prst="rect">
             <a:avLst/>
@@ -29760,13 +30188,13 @@
       </p:sp>
       <p:sp>
         <p:nvSpPr>
-          <p:cNvPr id="28" name="Shape 26"/>
-          <p:cNvSpPr/>
-          <p:nvPr/>
-        </p:nvSpPr>
-        <p:spPr>
-          <a:xfrm>
-            <a:off x="5742432" y="3364992"/>
+          <p:cNvPr id="31" name="Shape 29"/>
+          <p:cNvSpPr/>
+          <p:nvPr/>
+        </p:nvSpPr>
+        <p:spPr>
+          <a:xfrm>
+            <a:off x="4370832" y="3364992"/>
             <a:ext cx="1645920" cy="475488"/>
           </a:xfrm>
           <a:prstGeom prst="rect">
@@ -29787,13 +30215,13 @@
       </p:sp>
       <p:sp>
         <p:nvSpPr>
-          <p:cNvPr id="29" name="Text 27"/>
-          <p:cNvSpPr/>
-          <p:nvPr/>
-        </p:nvSpPr>
-        <p:spPr>
-          <a:xfrm>
-            <a:off x="5742432" y="3364992"/>
+          <p:cNvPr id="32" name="Text 30"/>
+          <p:cNvSpPr/>
+          <p:nvPr/>
+        </p:nvSpPr>
+        <p:spPr>
+          <a:xfrm>
+            <a:off x="4370832" y="3364992"/>
             <a:ext cx="1645920" cy="475488"/>
           </a:xfrm>
           <a:prstGeom prst="rect">
@@ -29818,7 +30246,7 @@
                 <a:ea typeface="Trebuchet MS" pitchFamily="34" charset="-122"/>
                 <a:cs typeface="Trebuchet MS" pitchFamily="34" charset="-120"/>
               </a:rPr>
-              <a:t>check</a:t>
+              <a:t>spell</a:t>
             </a:r>
             <a:endParaRPr lang="en-US" sz="1400" dirty="0"/>
           </a:p>
@@ -29826,7 +30254,112 @@
       </p:sp>
       <p:sp>
         <p:nvSpPr>
-          <p:cNvPr id="30" name="Shape 28"/>
+          <p:cNvPr id="33" name="Text 31"/>
+          <p:cNvSpPr/>
+          <p:nvPr/>
+        </p:nvSpPr>
+        <p:spPr>
+          <a:xfrm>
+            <a:off x="6016752" y="3364992"/>
+            <a:ext cx="411480" cy="475488"/>
+          </a:xfrm>
+          <a:prstGeom prst="rect">
+            <a:avLst/>
+          </a:prstGeom>
+          <a:noFill/>
+          <a:ln/>
+        </p:spPr>
+        <p:txBody>
+          <a:bodyPr wrap="square" lIns="0" tIns="0" rIns="0" bIns="0" rtlCol="0" anchor="ctr"/>
+          <a:lstStyle/>
+          <a:p>
+            <a:pPr algn="ctr" indent="0" marL="0">
+              <a:buNone/>
+            </a:pPr>
+            <a:r>
+              <a:rPr lang="en-US" sz="1600" b="1" dirty="0">
+                <a:solidFill>
+                  <a:srgbClr val="0D9488"/>
+                </a:solidFill>
+                <a:latin typeface="Trebuchet MS" pitchFamily="34" charset="0"/>
+                <a:ea typeface="Trebuchet MS" pitchFamily="34" charset="-122"/>
+                <a:cs typeface="Trebuchet MS" pitchFamily="34" charset="-120"/>
+              </a:rPr>
+              <a:t>·</a:t>
+            </a:r>
+            <a:endParaRPr lang="en-US" sz="1600" dirty="0"/>
+          </a:p>
+        </p:txBody>
+      </p:sp>
+      <p:sp>
+        <p:nvSpPr>
+          <p:cNvPr id="34" name="Shape 32"/>
+          <p:cNvSpPr/>
+          <p:nvPr/>
+        </p:nvSpPr>
+        <p:spPr>
+          <a:xfrm>
+            <a:off x="6428232" y="3364992"/>
+            <a:ext cx="1645920" cy="475488"/>
+          </a:xfrm>
+          <a:prstGeom prst="rect">
+            <a:avLst>
+              <a:gd name="adj" fmla="val 9615"/>
+            </a:avLst>
+          </a:prstGeom>
+          <a:solidFill>
+            <a:srgbClr val="FFFFFF"/>
+          </a:solidFill>
+          <a:ln w="12700">
+            <a:solidFill>
+              <a:srgbClr val="0D9488"/>
+            </a:solidFill>
+            <a:prstDash val="solid"/>
+          </a:ln>
+        </p:spPr>
+      </p:sp>
+      <p:sp>
+        <p:nvSpPr>
+          <p:cNvPr id="35" name="Text 33"/>
+          <p:cNvSpPr/>
+          <p:nvPr/>
+        </p:nvSpPr>
+        <p:spPr>
+          <a:xfrm>
+            <a:off x="6428232" y="3364992"/>
+            <a:ext cx="1645920" cy="475488"/>
+          </a:xfrm>
+          <a:prstGeom prst="rect">
+            <a:avLst/>
+          </a:prstGeom>
+          <a:noFill/>
+          <a:ln/>
+        </p:spPr>
+        <p:txBody>
+          <a:bodyPr wrap="square" lIns="0" tIns="0" rIns="0" bIns="0" rtlCol="0" anchor="ctr"/>
+          <a:lstStyle/>
+          <a:p>
+            <a:pPr algn="ctr" indent="0" marL="0">
+              <a:buNone/>
+            </a:pPr>
+            <a:r>
+              <a:rPr lang="en-US" sz="1400" b="1" dirty="0">
+                <a:solidFill>
+                  <a:srgbClr val="0D9488"/>
+                </a:solidFill>
+                <a:latin typeface="Trebuchet MS" pitchFamily="34" charset="0"/>
+                <a:ea typeface="Trebuchet MS" pitchFamily="34" charset="-122"/>
+                <a:cs typeface="Trebuchet MS" pitchFamily="34" charset="-120"/>
+              </a:rPr>
+              <a:t>ing</a:t>
+            </a:r>
+            <a:endParaRPr lang="en-US" sz="1400" dirty="0"/>
+          </a:p>
+        </p:txBody>
+      </p:sp>
+      <p:sp>
+        <p:nvSpPr>
+          <p:cNvPr id="36" name="Shape 34"/>
           <p:cNvSpPr/>
           <p:nvPr/>
         </p:nvSpPr>
@@ -29853,7 +30386,7 @@
       </p:sp>
       <p:sp>
         <p:nvSpPr>
-          <p:cNvPr id="31" name="Text 29"/>
+          <p:cNvPr id="37" name="Text 35"/>
           <p:cNvSpPr/>
           <p:nvPr/>
         </p:nvSpPr>
@@ -29892,7 +30425,7 @@
       </p:sp>
       <p:sp>
         <p:nvSpPr>
-          <p:cNvPr id="32" name="Shape 30"/>
+          <p:cNvPr id="38" name="Shape 36"/>
           <p:cNvSpPr/>
           <p:nvPr/>
         </p:nvSpPr>
@@ -29919,7 +30452,7 @@
       </p:sp>
       <p:sp>
         <p:nvSpPr>
-          <p:cNvPr id="33" name="Text 31"/>
+          <p:cNvPr id="39" name="Text 37"/>
           <p:cNvSpPr/>
           <p:nvPr/>
         </p:nvSpPr>
@@ -30242,7 +30775,7 @@
                 <a:ea typeface="Calibri" pitchFamily="34" charset="-122"/>
                 <a:cs typeface="Calibri" pitchFamily="34" charset="-120"/>
               </a:rPr>
-              <a:t>Word Labs  •  wordlabs.app  •  Root: 'spell' = to name letters in order</a:t>
+              <a:t>Word Labs  •  wordlabs.app  •  Root: 'spell' = to write or say letters in order</a:t>
             </a:r>
             <a:endParaRPr lang="en-US" sz="800" dirty="0"/>
           </a:p>
@@ -30381,7 +30914,7 @@
                 <a:ea typeface="Trebuchet MS" pitchFamily="34" charset="-122"/>
                 <a:cs typeface="Trebuchet MS" pitchFamily="34" charset="-120"/>
               </a:rPr>
-              <a:t>spellcheck</a:t>
+              <a:t>misspelling</a:t>
             </a:r>
             <a:endParaRPr lang="en-US" sz="2800" dirty="0"/>
           </a:p>
@@ -30461,7 +30994,7 @@
         </p:nvSpPr>
         <p:spPr>
           <a:xfrm>
-            <a:off x="2938272" y="2258568"/>
+            <a:off x="2221992" y="2258568"/>
             <a:ext cx="1828800" cy="292608"/>
           </a:xfrm>
           <a:prstGeom prst="rect">
@@ -30470,11 +31003,11 @@
             </a:avLst>
           </a:prstGeom>
           <a:solidFill>
-            <a:srgbClr val="CCFBF1"/>
+            <a:srgbClr val="DDD6FE"/>
           </a:solidFill>
           <a:ln w="19050">
             <a:solidFill>
-              <a:srgbClr val="0D9488"/>
+              <a:srgbClr val="7C3AED"/>
             </a:solidFill>
             <a:prstDash val="solid"/>
           </a:ln>
@@ -30495,7 +31028,7 @@
         </p:nvSpPr>
         <p:spPr>
           <a:xfrm>
-            <a:off x="2938272" y="2258568"/>
+            <a:off x="2221992" y="2258568"/>
             <a:ext cx="1828800" cy="292608"/>
           </a:xfrm>
           <a:prstGeom prst="rect">
@@ -30514,13 +31047,13 @@
             <a:r>
               <a:rPr lang="en-US" sz="1300" b="1" dirty="0">
                 <a:solidFill>
-                  <a:srgbClr val="0F766E"/>
+                  <a:srgbClr val="4C1D95"/>
                 </a:solidFill>
                 <a:latin typeface="Trebuchet MS" pitchFamily="34" charset="0"/>
                 <a:ea typeface="Trebuchet MS" pitchFamily="34" charset="-122"/>
                 <a:cs typeface="Trebuchet MS" pitchFamily="34" charset="-120"/>
               </a:rPr>
-              <a:t>spell</a:t>
+              <a:t>mis</a:t>
             </a:r>
             <a:endParaRPr lang="en-US" sz="1300" dirty="0"/>
           </a:p>
@@ -30534,7 +31067,7 @@
         </p:nvSpPr>
         <p:spPr>
           <a:xfrm>
-            <a:off x="2938272" y="2569464"/>
+            <a:off x="2221992" y="2569464"/>
             <a:ext cx="1828800" cy="201168"/>
           </a:xfrm>
           <a:prstGeom prst="rect">
@@ -30559,7 +31092,7 @@
                 <a:ea typeface="Calibri" pitchFamily="34" charset="-122"/>
                 <a:cs typeface="Calibri" pitchFamily="34" charset="-120"/>
               </a:rPr>
-              <a:t>to name letters in order</a:t>
+              <a:t>wrong</a:t>
             </a:r>
             <a:endParaRPr lang="en-US" sz="850" dirty="0"/>
           </a:p>
@@ -30573,7 +31106,7 @@
         </p:nvSpPr>
         <p:spPr>
           <a:xfrm>
-            <a:off x="5803392" y="2258568"/>
+            <a:off x="4370832" y="2258568"/>
             <a:ext cx="1828800" cy="292608"/>
           </a:xfrm>
           <a:prstGeom prst="rect">
@@ -30582,11 +31115,11 @@
             </a:avLst>
           </a:prstGeom>
           <a:solidFill>
-            <a:srgbClr val="FCE7F3"/>
+            <a:srgbClr val="CCFBF1"/>
           </a:solidFill>
           <a:ln w="19050">
             <a:solidFill>
-              <a:srgbClr val="DB2777"/>
+              <a:srgbClr val="0D9488"/>
             </a:solidFill>
             <a:prstDash val="solid"/>
           </a:ln>
@@ -30607,7 +31140,7 @@
         </p:nvSpPr>
         <p:spPr>
           <a:xfrm>
-            <a:off x="5803392" y="2258568"/>
+            <a:off x="4370832" y="2258568"/>
             <a:ext cx="1828800" cy="292608"/>
           </a:xfrm>
           <a:prstGeom prst="rect">
@@ -30626,13 +31159,13 @@
             <a:r>
               <a:rPr lang="en-US" sz="1300" b="1" dirty="0">
                 <a:solidFill>
-                  <a:srgbClr val="9D174D"/>
+                  <a:srgbClr val="0F766E"/>
                 </a:solidFill>
                 <a:latin typeface="Trebuchet MS" pitchFamily="34" charset="0"/>
                 <a:ea typeface="Trebuchet MS" pitchFamily="34" charset="-122"/>
                 <a:cs typeface="Trebuchet MS" pitchFamily="34" charset="-120"/>
               </a:rPr>
-              <a:t>check</a:t>
+              <a:t>spell</a:t>
             </a:r>
             <a:endParaRPr lang="en-US" sz="1300" dirty="0"/>
           </a:p>
@@ -30646,7 +31179,7 @@
         </p:nvSpPr>
         <p:spPr>
           <a:xfrm>
-            <a:off x="5803392" y="2569464"/>
+            <a:off x="4370832" y="2569464"/>
             <a:ext cx="1828800" cy="201168"/>
           </a:xfrm>
           <a:prstGeom prst="rect">
@@ -30671,7 +31204,7 @@
                 <a:ea typeface="Calibri" pitchFamily="34" charset="-122"/>
                 <a:cs typeface="Calibri" pitchFamily="34" charset="-120"/>
               </a:rPr>
-              <a:t>to look over and verify</a:t>
+              <a:t>to write or say letters in order</a:t>
             </a:r>
             <a:endParaRPr lang="en-US" sz="850" dirty="0"/>
           </a:p>
@@ -30680,6 +31213,118 @@
       <p:sp>
         <p:nvSpPr>
           <p:cNvPr id="22" name="Shape 20"/>
+          <p:cNvSpPr/>
+          <p:nvPr/>
+        </p:nvSpPr>
+        <p:spPr>
+          <a:xfrm>
+            <a:off x="6519672" y="2258568"/>
+            <a:ext cx="1828800" cy="292608"/>
+          </a:xfrm>
+          <a:prstGeom prst="rect">
+            <a:avLst>
+              <a:gd name="adj" fmla="val 25000"/>
+            </a:avLst>
+          </a:prstGeom>
+          <a:solidFill>
+            <a:srgbClr val="FCE7F3"/>
+          </a:solidFill>
+          <a:ln w="19050">
+            <a:solidFill>
+              <a:srgbClr val="DB2777"/>
+            </a:solidFill>
+            <a:prstDash val="solid"/>
+          </a:ln>
+          <a:effectLst>
+            <a:outerShdw sx="100000" sy="100000" kx="0" ky="0" algn="bl" rotWithShape="0" blurRad="101600" dist="38100" dir="8100000">
+              <a:srgbClr val="000000">
+                <a:alpha val="12000"/>
+              </a:srgbClr>
+            </a:outerShdw>
+          </a:effectLst>
+        </p:spPr>
+      </p:sp>
+      <p:sp>
+        <p:nvSpPr>
+          <p:cNvPr id="23" name="Text 21"/>
+          <p:cNvSpPr/>
+          <p:nvPr/>
+        </p:nvSpPr>
+        <p:spPr>
+          <a:xfrm>
+            <a:off x="6519672" y="2258568"/>
+            <a:ext cx="1828800" cy="292608"/>
+          </a:xfrm>
+          <a:prstGeom prst="rect">
+            <a:avLst/>
+          </a:prstGeom>
+          <a:noFill/>
+          <a:ln/>
+        </p:spPr>
+        <p:txBody>
+          <a:bodyPr wrap="square" lIns="0" tIns="0" rIns="0" bIns="0" rtlCol="0" anchor="ctr"/>
+          <a:lstStyle/>
+          <a:p>
+            <a:pPr algn="ctr" indent="0" marL="0">
+              <a:buNone/>
+            </a:pPr>
+            <a:r>
+              <a:rPr lang="en-US" sz="1300" b="1" dirty="0">
+                <a:solidFill>
+                  <a:srgbClr val="9D174D"/>
+                </a:solidFill>
+                <a:latin typeface="Trebuchet MS" pitchFamily="34" charset="0"/>
+                <a:ea typeface="Trebuchet MS" pitchFamily="34" charset="-122"/>
+                <a:cs typeface="Trebuchet MS" pitchFamily="34" charset="-120"/>
+              </a:rPr>
+              <a:t>ing</a:t>
+            </a:r>
+            <a:endParaRPr lang="en-US" sz="1300" dirty="0"/>
+          </a:p>
+        </p:txBody>
+      </p:sp>
+      <p:sp>
+        <p:nvSpPr>
+          <p:cNvPr id="24" name="Text 22"/>
+          <p:cNvSpPr/>
+          <p:nvPr/>
+        </p:nvSpPr>
+        <p:spPr>
+          <a:xfrm>
+            <a:off x="6519672" y="2569464"/>
+            <a:ext cx="1828800" cy="201168"/>
+          </a:xfrm>
+          <a:prstGeom prst="rect">
+            <a:avLst/>
+          </a:prstGeom>
+          <a:noFill/>
+          <a:ln/>
+        </p:spPr>
+        <p:txBody>
+          <a:bodyPr wrap="square" lIns="0" tIns="0" rIns="0" bIns="0" rtlCol="0" anchor="t"/>
+          <a:lstStyle/>
+          <a:p>
+            <a:pPr algn="ctr" indent="0" marL="0">
+              <a:buNone/>
+            </a:pPr>
+            <a:r>
+              <a:rPr lang="en-US" sz="850" dirty="0">
+                <a:solidFill>
+                  <a:srgbClr val="475569"/>
+                </a:solidFill>
+                <a:latin typeface="Calibri" pitchFamily="34" charset="0"/>
+                <a:ea typeface="Calibri" pitchFamily="34" charset="-122"/>
+                <a:cs typeface="Calibri" pitchFamily="34" charset="-120"/>
+              </a:rPr>
+              <a:t>happening now</a:t>
+            </a:r>
+            <a:endParaRPr lang="en-US" sz="850" dirty="0"/>
+          </a:p>
+        </p:txBody>
+      </p:sp>
+      <p:sp>
+        <p:nvSpPr>
+          <p:cNvPr id="25" name="Shape 23"/>
           <p:cNvSpPr/>
           <p:nvPr/>
         </p:nvSpPr>
@@ -30706,7 +31351,7 @@
       </p:sp>
       <p:sp>
         <p:nvSpPr>
-          <p:cNvPr id="23" name="Text 21"/>
+          <p:cNvPr id="26" name="Text 24"/>
           <p:cNvSpPr/>
           <p:nvPr/>
         </p:nvSpPr>
@@ -30745,7 +31390,7 @@
       </p:sp>
       <p:sp>
         <p:nvSpPr>
-          <p:cNvPr id="24" name="Shape 22"/>
+          <p:cNvPr id="27" name="Shape 25"/>
           <p:cNvSpPr/>
           <p:nvPr/>
         </p:nvSpPr>
@@ -30772,13 +31417,13 @@
       </p:sp>
       <p:sp>
         <p:nvSpPr>
-          <p:cNvPr id="25" name="Shape 23"/>
-          <p:cNvSpPr/>
-          <p:nvPr/>
-        </p:nvSpPr>
-        <p:spPr>
-          <a:xfrm>
-            <a:off x="2999232" y="3364992"/>
+          <p:cNvPr id="28" name="Shape 26"/>
+          <p:cNvSpPr/>
+          <p:nvPr/>
+        </p:nvSpPr>
+        <p:spPr>
+          <a:xfrm>
+            <a:off x="2313432" y="3364992"/>
             <a:ext cx="1645920" cy="475488"/>
           </a:xfrm>
           <a:prstGeom prst="rect">
@@ -30799,13 +31444,13 @@
       </p:sp>
       <p:sp>
         <p:nvSpPr>
-          <p:cNvPr id="26" name="Text 24"/>
-          <p:cNvSpPr/>
-          <p:nvPr/>
-        </p:nvSpPr>
-        <p:spPr>
-          <a:xfrm>
-            <a:off x="2999232" y="3364992"/>
+          <p:cNvPr id="29" name="Text 27"/>
+          <p:cNvSpPr/>
+          <p:nvPr/>
+        </p:nvSpPr>
+        <p:spPr>
+          <a:xfrm>
+            <a:off x="2313432" y="3364992"/>
             <a:ext cx="1645920" cy="475488"/>
           </a:xfrm>
           <a:prstGeom prst="rect">
@@ -30830,7 +31475,7 @@
                 <a:ea typeface="Trebuchet MS" pitchFamily="34" charset="-122"/>
                 <a:cs typeface="Trebuchet MS" pitchFamily="34" charset="-120"/>
               </a:rPr>
-              <a:t>spell</a:t>
+              <a:t>mis</a:t>
             </a:r>
             <a:endParaRPr lang="en-US" sz="1400" dirty="0"/>
           </a:p>
@@ -30838,14 +31483,14 @@
       </p:sp>
       <p:sp>
         <p:nvSpPr>
-          <p:cNvPr id="27" name="Text 25"/>
-          <p:cNvSpPr/>
-          <p:nvPr/>
-        </p:nvSpPr>
-        <p:spPr>
-          <a:xfrm>
-            <a:off x="4645152" y="3364992"/>
-            <a:ext cx="1097280" cy="475488"/>
+          <p:cNvPr id="30" name="Text 28"/>
+          <p:cNvSpPr/>
+          <p:nvPr/>
+        </p:nvSpPr>
+        <p:spPr>
+          <a:xfrm>
+            <a:off x="3959352" y="3364992"/>
+            <a:ext cx="411480" cy="475488"/>
           </a:xfrm>
           <a:prstGeom prst="rect">
             <a:avLst/>
@@ -30877,13 +31522,13 @@
       </p:sp>
       <p:sp>
         <p:nvSpPr>
-          <p:cNvPr id="28" name="Shape 26"/>
-          <p:cNvSpPr/>
-          <p:nvPr/>
-        </p:nvSpPr>
-        <p:spPr>
-          <a:xfrm>
-            <a:off x="5742432" y="3364992"/>
+          <p:cNvPr id="31" name="Shape 29"/>
+          <p:cNvSpPr/>
+          <p:nvPr/>
+        </p:nvSpPr>
+        <p:spPr>
+          <a:xfrm>
+            <a:off x="4370832" y="3364992"/>
             <a:ext cx="1645920" cy="475488"/>
           </a:xfrm>
           <a:prstGeom prst="rect">
@@ -30904,13 +31549,13 @@
       </p:sp>
       <p:sp>
         <p:nvSpPr>
-          <p:cNvPr id="29" name="Text 27"/>
-          <p:cNvSpPr/>
-          <p:nvPr/>
-        </p:nvSpPr>
-        <p:spPr>
-          <a:xfrm>
-            <a:off x="5742432" y="3364992"/>
+          <p:cNvPr id="32" name="Text 30"/>
+          <p:cNvSpPr/>
+          <p:nvPr/>
+        </p:nvSpPr>
+        <p:spPr>
+          <a:xfrm>
+            <a:off x="4370832" y="3364992"/>
             <a:ext cx="1645920" cy="475488"/>
           </a:xfrm>
           <a:prstGeom prst="rect">
@@ -30935,7 +31580,7 @@
                 <a:ea typeface="Trebuchet MS" pitchFamily="34" charset="-122"/>
                 <a:cs typeface="Trebuchet MS" pitchFamily="34" charset="-120"/>
               </a:rPr>
-              <a:t>check</a:t>
+              <a:t>spell</a:t>
             </a:r>
             <a:endParaRPr lang="en-US" sz="1400" dirty="0"/>
           </a:p>
@@ -30943,7 +31588,112 @@
       </p:sp>
       <p:sp>
         <p:nvSpPr>
-          <p:cNvPr id="30" name="Shape 28"/>
+          <p:cNvPr id="33" name="Text 31"/>
+          <p:cNvSpPr/>
+          <p:nvPr/>
+        </p:nvSpPr>
+        <p:spPr>
+          <a:xfrm>
+            <a:off x="6016752" y="3364992"/>
+            <a:ext cx="411480" cy="475488"/>
+          </a:xfrm>
+          <a:prstGeom prst="rect">
+            <a:avLst/>
+          </a:prstGeom>
+          <a:noFill/>
+          <a:ln/>
+        </p:spPr>
+        <p:txBody>
+          <a:bodyPr wrap="square" lIns="0" tIns="0" rIns="0" bIns="0" rtlCol="0" anchor="ctr"/>
+          <a:lstStyle/>
+          <a:p>
+            <a:pPr algn="ctr" indent="0" marL="0">
+              <a:buNone/>
+            </a:pPr>
+            <a:r>
+              <a:rPr lang="en-US" sz="1600" b="1" dirty="0">
+                <a:solidFill>
+                  <a:srgbClr val="0D9488"/>
+                </a:solidFill>
+                <a:latin typeface="Trebuchet MS" pitchFamily="34" charset="0"/>
+                <a:ea typeface="Trebuchet MS" pitchFamily="34" charset="-122"/>
+                <a:cs typeface="Trebuchet MS" pitchFamily="34" charset="-120"/>
+              </a:rPr>
+              <a:t>·</a:t>
+            </a:r>
+            <a:endParaRPr lang="en-US" sz="1600" dirty="0"/>
+          </a:p>
+        </p:txBody>
+      </p:sp>
+      <p:sp>
+        <p:nvSpPr>
+          <p:cNvPr id="34" name="Shape 32"/>
+          <p:cNvSpPr/>
+          <p:nvPr/>
+        </p:nvSpPr>
+        <p:spPr>
+          <a:xfrm>
+            <a:off x="6428232" y="3364992"/>
+            <a:ext cx="1645920" cy="475488"/>
+          </a:xfrm>
+          <a:prstGeom prst="rect">
+            <a:avLst>
+              <a:gd name="adj" fmla="val 9615"/>
+            </a:avLst>
+          </a:prstGeom>
+          <a:solidFill>
+            <a:srgbClr val="FFFFFF"/>
+          </a:solidFill>
+          <a:ln w="12700">
+            <a:solidFill>
+              <a:srgbClr val="0D9488"/>
+            </a:solidFill>
+            <a:prstDash val="solid"/>
+          </a:ln>
+        </p:spPr>
+      </p:sp>
+      <p:sp>
+        <p:nvSpPr>
+          <p:cNvPr id="35" name="Text 33"/>
+          <p:cNvSpPr/>
+          <p:nvPr/>
+        </p:nvSpPr>
+        <p:spPr>
+          <a:xfrm>
+            <a:off x="6428232" y="3364992"/>
+            <a:ext cx="1645920" cy="475488"/>
+          </a:xfrm>
+          <a:prstGeom prst="rect">
+            <a:avLst/>
+          </a:prstGeom>
+          <a:noFill/>
+          <a:ln/>
+        </p:spPr>
+        <p:txBody>
+          <a:bodyPr wrap="square" lIns="0" tIns="0" rIns="0" bIns="0" rtlCol="0" anchor="ctr"/>
+          <a:lstStyle/>
+          <a:p>
+            <a:pPr algn="ctr" indent="0" marL="0">
+              <a:buNone/>
+            </a:pPr>
+            <a:r>
+              <a:rPr lang="en-US" sz="1400" b="1" dirty="0">
+                <a:solidFill>
+                  <a:srgbClr val="0D9488"/>
+                </a:solidFill>
+                <a:latin typeface="Trebuchet MS" pitchFamily="34" charset="0"/>
+                <a:ea typeface="Trebuchet MS" pitchFamily="34" charset="-122"/>
+                <a:cs typeface="Trebuchet MS" pitchFamily="34" charset="-120"/>
+              </a:rPr>
+              <a:t>ing</a:t>
+            </a:r>
+            <a:endParaRPr lang="en-US" sz="1400" dirty="0"/>
+          </a:p>
+        </p:txBody>
+      </p:sp>
+      <p:sp>
+        <p:nvSpPr>
+          <p:cNvPr id="36" name="Shape 34"/>
           <p:cNvSpPr/>
           <p:nvPr/>
         </p:nvSpPr>
@@ -30970,7 +31720,7 @@
       </p:sp>
       <p:sp>
         <p:nvSpPr>
-          <p:cNvPr id="31" name="Text 29"/>
+          <p:cNvPr id="37" name="Text 35"/>
           <p:cNvSpPr/>
           <p:nvPr/>
         </p:nvSpPr>
@@ -31009,18 +31759,18 @@
       </p:sp>
       <p:sp>
         <p:nvSpPr>
-          <p:cNvPr id="32" name="Shape 30"/>
+          <p:cNvPr id="38" name="Shape 36"/>
           <p:cNvSpPr/>
           <p:nvPr/>
         </p:nvSpPr>
         <p:spPr>
           <a:xfrm>
             <a:off x="1874520" y="4096512"/>
-            <a:ext cx="6903720" cy="804672"/>
+            <a:ext cx="6903720" cy="658368"/>
           </a:xfrm>
           <a:prstGeom prst="rect">
             <a:avLst>
-              <a:gd name="adj" fmla="val 6818"/>
+              <a:gd name="adj" fmla="val 8333"/>
             </a:avLst>
           </a:prstGeom>
           <a:solidFill>
@@ -31036,18 +31786,18 @@
       </p:sp>
       <p:sp>
         <p:nvSpPr>
-          <p:cNvPr id="33" name="Shape 31"/>
-          <p:cNvSpPr/>
-          <p:nvPr/>
-        </p:nvSpPr>
-        <p:spPr>
-          <a:xfrm>
-            <a:off x="2124837" y="4169664"/>
-            <a:ext cx="685800" cy="384048"/>
+          <p:cNvPr id="39" name="Shape 37"/>
+          <p:cNvSpPr/>
+          <p:nvPr/>
+        </p:nvSpPr>
+        <p:spPr>
+          <a:xfrm>
+            <a:off x="1951330" y="4169664"/>
+            <a:ext cx="676656" cy="475488"/>
           </a:xfrm>
           <a:prstGeom prst="rect">
             <a:avLst>
-              <a:gd name="adj" fmla="val 9524"/>
+              <a:gd name="adj" fmla="val 7692"/>
             </a:avLst>
           </a:prstGeom>
           <a:solidFill>
@@ -31063,14 +31813,14 @@
       </p:sp>
       <p:sp>
         <p:nvSpPr>
-          <p:cNvPr id="34" name="Text 32"/>
-          <p:cNvSpPr/>
-          <p:nvPr/>
-        </p:nvSpPr>
-        <p:spPr>
-          <a:xfrm>
-            <a:off x="2124837" y="4169664"/>
-            <a:ext cx="685800" cy="384048"/>
+          <p:cNvPr id="40" name="Text 38"/>
+          <p:cNvSpPr/>
+          <p:nvPr/>
+        </p:nvSpPr>
+        <p:spPr>
+          <a:xfrm>
+            <a:off x="1951330" y="4169664"/>
+            <a:ext cx="676656" cy="475488"/>
           </a:xfrm>
           <a:prstGeom prst="rect">
             <a:avLst/>
@@ -31094,7 +31844,7 @@
                 <a:ea typeface="Trebuchet MS" pitchFamily="34" charset="-122"/>
                 <a:cs typeface="Trebuchet MS" pitchFamily="34" charset="-120"/>
               </a:rPr>
-              <a:t>s</a:t>
+              <a:t>m</a:t>
             </a:r>
             <a:endParaRPr lang="en-US" sz="900" dirty="0"/>
           </a:p>
@@ -31102,18 +31852,18 @@
       </p:sp>
       <p:sp>
         <p:nvSpPr>
-          <p:cNvPr id="35" name="Shape 33"/>
-          <p:cNvSpPr/>
-          <p:nvPr/>
-        </p:nvSpPr>
-        <p:spPr>
-          <a:xfrm>
-            <a:off x="3033522" y="4169664"/>
-            <a:ext cx="685800" cy="384048"/>
+          <p:cNvPr id="41" name="Shape 39"/>
+          <p:cNvSpPr/>
+          <p:nvPr/>
+        </p:nvSpPr>
+        <p:spPr>
+          <a:xfrm>
+            <a:off x="2677363" y="4169664"/>
+            <a:ext cx="676656" cy="475488"/>
           </a:xfrm>
           <a:prstGeom prst="rect">
             <a:avLst>
-              <a:gd name="adj" fmla="val 9524"/>
+              <a:gd name="adj" fmla="val 7692"/>
             </a:avLst>
           </a:prstGeom>
           <a:solidFill>
@@ -31129,14 +31879,14 @@
       </p:sp>
       <p:sp>
         <p:nvSpPr>
-          <p:cNvPr id="36" name="Text 34"/>
-          <p:cNvSpPr/>
-          <p:nvPr/>
-        </p:nvSpPr>
-        <p:spPr>
-          <a:xfrm>
-            <a:off x="3033522" y="4169664"/>
-            <a:ext cx="685800" cy="384048"/>
+          <p:cNvPr id="42" name="Text 40"/>
+          <p:cNvSpPr/>
+          <p:nvPr/>
+        </p:nvSpPr>
+        <p:spPr>
+          <a:xfrm>
+            <a:off x="2677363" y="4169664"/>
+            <a:ext cx="676656" cy="475488"/>
           </a:xfrm>
           <a:prstGeom prst="rect">
             <a:avLst/>
@@ -31160,7 +31910,7 @@
                 <a:ea typeface="Trebuchet MS" pitchFamily="34" charset="-122"/>
                 <a:cs typeface="Trebuchet MS" pitchFamily="34" charset="-120"/>
               </a:rPr>
-              <a:t>p</a:t>
+              <a:t>i</a:t>
             </a:r>
             <a:endParaRPr lang="en-US" sz="900" dirty="0"/>
           </a:p>
@@ -31168,18 +31918,18 @@
       </p:sp>
       <p:sp>
         <p:nvSpPr>
-          <p:cNvPr id="37" name="Shape 35"/>
-          <p:cNvSpPr/>
-          <p:nvPr/>
-        </p:nvSpPr>
-        <p:spPr>
-          <a:xfrm>
-            <a:off x="3942207" y="4169664"/>
-            <a:ext cx="685800" cy="384048"/>
+          <p:cNvPr id="43" name="Shape 41"/>
+          <p:cNvSpPr/>
+          <p:nvPr/>
+        </p:nvSpPr>
+        <p:spPr>
+          <a:xfrm>
+            <a:off x="3403397" y="4169664"/>
+            <a:ext cx="676656" cy="475488"/>
           </a:xfrm>
           <a:prstGeom prst="rect">
             <a:avLst>
-              <a:gd name="adj" fmla="val 9524"/>
+              <a:gd name="adj" fmla="val 7692"/>
             </a:avLst>
           </a:prstGeom>
           <a:solidFill>
@@ -31195,14 +31945,14 @@
       </p:sp>
       <p:sp>
         <p:nvSpPr>
-          <p:cNvPr id="38" name="Text 36"/>
-          <p:cNvSpPr/>
-          <p:nvPr/>
-        </p:nvSpPr>
-        <p:spPr>
-          <a:xfrm>
-            <a:off x="3942207" y="4169664"/>
-            <a:ext cx="685800" cy="384048"/>
+          <p:cNvPr id="44" name="Text 42"/>
+          <p:cNvSpPr/>
+          <p:nvPr/>
+        </p:nvSpPr>
+        <p:spPr>
+          <a:xfrm>
+            <a:off x="3403397" y="4169664"/>
+            <a:ext cx="676656" cy="475488"/>
           </a:xfrm>
           <a:prstGeom prst="rect">
             <a:avLst/>
@@ -31226,7 +31976,7 @@
                 <a:ea typeface="Trebuchet MS" pitchFamily="34" charset="-122"/>
                 <a:cs typeface="Trebuchet MS" pitchFamily="34" charset="-120"/>
               </a:rPr>
-              <a:t>e</a:t>
+              <a:t>s</a:t>
             </a:r>
             <a:endParaRPr lang="en-US" sz="900" dirty="0"/>
           </a:p>
@@ -31234,18 +31984,18 @@
       </p:sp>
       <p:sp>
         <p:nvSpPr>
-          <p:cNvPr id="39" name="Shape 37"/>
-          <p:cNvSpPr/>
-          <p:nvPr/>
-        </p:nvSpPr>
-        <p:spPr>
-          <a:xfrm>
-            <a:off x="4850892" y="4169664"/>
-            <a:ext cx="685800" cy="384048"/>
+          <p:cNvPr id="45" name="Shape 43"/>
+          <p:cNvSpPr/>
+          <p:nvPr/>
+        </p:nvSpPr>
+        <p:spPr>
+          <a:xfrm>
+            <a:off x="4129430" y="4169664"/>
+            <a:ext cx="676656" cy="475488"/>
           </a:xfrm>
           <a:prstGeom prst="rect">
             <a:avLst>
-              <a:gd name="adj" fmla="val 9524"/>
+              <a:gd name="adj" fmla="val 7692"/>
             </a:avLst>
           </a:prstGeom>
           <a:solidFill>
@@ -31261,14 +32011,14 @@
       </p:sp>
       <p:sp>
         <p:nvSpPr>
-          <p:cNvPr id="40" name="Text 38"/>
-          <p:cNvSpPr/>
-          <p:nvPr/>
-        </p:nvSpPr>
-        <p:spPr>
-          <a:xfrm>
-            <a:off x="4850892" y="4169664"/>
-            <a:ext cx="685800" cy="384048"/>
+          <p:cNvPr id="46" name="Text 44"/>
+          <p:cNvSpPr/>
+          <p:nvPr/>
+        </p:nvSpPr>
+        <p:spPr>
+          <a:xfrm>
+            <a:off x="4129430" y="4169664"/>
+            <a:ext cx="676656" cy="475488"/>
           </a:xfrm>
           <a:prstGeom prst="rect">
             <a:avLst/>
@@ -31292,7 +32042,7 @@
                 <a:ea typeface="Trebuchet MS" pitchFamily="34" charset="-122"/>
                 <a:cs typeface="Trebuchet MS" pitchFamily="34" charset="-120"/>
               </a:rPr>
-              <a:t>ll</a:t>
+              <a:t>s</a:t>
             </a:r>
             <a:endParaRPr lang="en-US" sz="900" dirty="0"/>
           </a:p>
@@ -31300,18 +32050,18 @@
       </p:sp>
       <p:sp>
         <p:nvSpPr>
-          <p:cNvPr id="41" name="Shape 39"/>
-          <p:cNvSpPr/>
-          <p:nvPr/>
-        </p:nvSpPr>
-        <p:spPr>
-          <a:xfrm>
-            <a:off x="5759577" y="4169664"/>
-            <a:ext cx="685800" cy="384048"/>
+          <p:cNvPr id="47" name="Shape 45"/>
+          <p:cNvSpPr/>
+          <p:nvPr/>
+        </p:nvSpPr>
+        <p:spPr>
+          <a:xfrm>
+            <a:off x="4855464" y="4169664"/>
+            <a:ext cx="676656" cy="475488"/>
           </a:xfrm>
           <a:prstGeom prst="rect">
             <a:avLst>
-              <a:gd name="adj" fmla="val 9524"/>
+              <a:gd name="adj" fmla="val 7692"/>
             </a:avLst>
           </a:prstGeom>
           <a:solidFill>
@@ -31327,14 +32077,14 @@
       </p:sp>
       <p:sp>
         <p:nvSpPr>
-          <p:cNvPr id="42" name="Text 40"/>
-          <p:cNvSpPr/>
-          <p:nvPr/>
-        </p:nvSpPr>
-        <p:spPr>
-          <a:xfrm>
-            <a:off x="5759577" y="4169664"/>
-            <a:ext cx="685800" cy="384048"/>
+          <p:cNvPr id="48" name="Text 46"/>
+          <p:cNvSpPr/>
+          <p:nvPr/>
+        </p:nvSpPr>
+        <p:spPr>
+          <a:xfrm>
+            <a:off x="4855464" y="4169664"/>
+            <a:ext cx="676656" cy="475488"/>
           </a:xfrm>
           <a:prstGeom prst="rect">
             <a:avLst/>
@@ -31358,7 +32108,7 @@
                 <a:ea typeface="Trebuchet MS" pitchFamily="34" charset="-122"/>
                 <a:cs typeface="Trebuchet MS" pitchFamily="34" charset="-120"/>
               </a:rPr>
-              <a:t>ch</a:t>
+              <a:t>p</a:t>
             </a:r>
             <a:endParaRPr lang="en-US" sz="900" dirty="0"/>
           </a:p>
@@ -31366,18 +32116,18 @@
       </p:sp>
       <p:sp>
         <p:nvSpPr>
-          <p:cNvPr id="43" name="Shape 41"/>
-          <p:cNvSpPr/>
-          <p:nvPr/>
-        </p:nvSpPr>
-        <p:spPr>
-          <a:xfrm>
-            <a:off x="6668262" y="4169664"/>
-            <a:ext cx="685800" cy="384048"/>
+          <p:cNvPr id="49" name="Shape 47"/>
+          <p:cNvSpPr/>
+          <p:nvPr/>
+        </p:nvSpPr>
+        <p:spPr>
+          <a:xfrm>
+            <a:off x="5581498" y="4169664"/>
+            <a:ext cx="676656" cy="475488"/>
           </a:xfrm>
           <a:prstGeom prst="rect">
             <a:avLst>
-              <a:gd name="adj" fmla="val 9524"/>
+              <a:gd name="adj" fmla="val 7692"/>
             </a:avLst>
           </a:prstGeom>
           <a:solidFill>
@@ -31393,14 +32143,14 @@
       </p:sp>
       <p:sp>
         <p:nvSpPr>
-          <p:cNvPr id="44" name="Text 42"/>
-          <p:cNvSpPr/>
-          <p:nvPr/>
-        </p:nvSpPr>
-        <p:spPr>
-          <a:xfrm>
-            <a:off x="6668262" y="4169664"/>
-            <a:ext cx="685800" cy="384048"/>
+          <p:cNvPr id="50" name="Text 48"/>
+          <p:cNvSpPr/>
+          <p:nvPr/>
+        </p:nvSpPr>
+        <p:spPr>
+          <a:xfrm>
+            <a:off x="5581498" y="4169664"/>
+            <a:ext cx="676656" cy="475488"/>
           </a:xfrm>
           <a:prstGeom prst="rect">
             <a:avLst/>
@@ -31432,18 +32182,18 @@
       </p:sp>
       <p:sp>
         <p:nvSpPr>
-          <p:cNvPr id="45" name="Shape 43"/>
-          <p:cNvSpPr/>
-          <p:nvPr/>
-        </p:nvSpPr>
-        <p:spPr>
-          <a:xfrm>
-            <a:off x="7576947" y="4169664"/>
-            <a:ext cx="685800" cy="384048"/>
+          <p:cNvPr id="51" name="Shape 49"/>
+          <p:cNvSpPr/>
+          <p:nvPr/>
+        </p:nvSpPr>
+        <p:spPr>
+          <a:xfrm>
+            <a:off x="6307531" y="4169664"/>
+            <a:ext cx="676656" cy="475488"/>
           </a:xfrm>
           <a:prstGeom prst="rect">
             <a:avLst>
-              <a:gd name="adj" fmla="val 9524"/>
+              <a:gd name="adj" fmla="val 7692"/>
             </a:avLst>
           </a:prstGeom>
           <a:solidFill>
@@ -31459,14 +32209,14 @@
       </p:sp>
       <p:sp>
         <p:nvSpPr>
-          <p:cNvPr id="46" name="Text 44"/>
-          <p:cNvSpPr/>
-          <p:nvPr/>
-        </p:nvSpPr>
-        <p:spPr>
-          <a:xfrm>
-            <a:off x="7576947" y="4169664"/>
-            <a:ext cx="685800" cy="384048"/>
+          <p:cNvPr id="52" name="Text 50"/>
+          <p:cNvSpPr/>
+          <p:nvPr/>
+        </p:nvSpPr>
+        <p:spPr>
+          <a:xfrm>
+            <a:off x="6307531" y="4169664"/>
+            <a:ext cx="676656" cy="475488"/>
           </a:xfrm>
           <a:prstGeom prst="rect">
             <a:avLst/>
@@ -31490,7 +32240,7 @@
                 <a:ea typeface="Trebuchet MS" pitchFamily="34" charset="-122"/>
                 <a:cs typeface="Trebuchet MS" pitchFamily="34" charset="-120"/>
               </a:rPr>
-              <a:t>ck</a:t>
+              <a:t>ll</a:t>
             </a:r>
             <a:endParaRPr lang="en-US" sz="900" dirty="0"/>
           </a:p>
@@ -31498,40 +32248,133 @@
       </p:sp>
       <p:sp>
         <p:nvSpPr>
-          <p:cNvPr id="47" name="Text 45"/>
-          <p:cNvSpPr/>
-          <p:nvPr/>
-        </p:nvSpPr>
-        <p:spPr>
-          <a:xfrm>
-            <a:off x="7576947" y="4572000"/>
-            <a:ext cx="685800" cy="219456"/>
-          </a:xfrm>
-          <a:prstGeom prst="rect">
-            <a:avLst/>
-          </a:prstGeom>
-          <a:noFill/>
-          <a:ln/>
-        </p:spPr>
-        <p:txBody>
-          <a:bodyPr wrap="square" lIns="0" tIns="0" rIns="0" bIns="0" rtlCol="0" anchor="t"/>
-          <a:lstStyle/>
-          <a:p>
-            <a:pPr algn="ctr" indent="0" marL="0">
-              <a:buNone/>
-            </a:pPr>
-            <a:r>
-              <a:rPr lang="en-US" sz="750" i="1" dirty="0">
-                <a:solidFill>
-                  <a:srgbClr val="94A3B8"/>
-                </a:solidFill>
-                <a:latin typeface="Calibri" pitchFamily="34" charset="0"/>
-                <a:ea typeface="Calibri" pitchFamily="34" charset="-122"/>
-                <a:cs typeface="Calibri" pitchFamily="34" charset="-120"/>
-              </a:rPr>
-              <a:t>/k/</a:t>
-            </a:r>
-            <a:endParaRPr lang="en-US" sz="750" dirty="0"/>
+          <p:cNvPr id="53" name="Shape 51"/>
+          <p:cNvSpPr/>
+          <p:nvPr/>
+        </p:nvSpPr>
+        <p:spPr>
+          <a:xfrm>
+            <a:off x="7033565" y="4169664"/>
+            <a:ext cx="676656" cy="475488"/>
+          </a:xfrm>
+          <a:prstGeom prst="rect">
+            <a:avLst>
+              <a:gd name="adj" fmla="val 7692"/>
+            </a:avLst>
+          </a:prstGeom>
+          <a:solidFill>
+            <a:srgbClr val="FFFFFF"/>
+          </a:solidFill>
+          <a:ln w="12700">
+            <a:solidFill>
+              <a:srgbClr val="DB2777"/>
+            </a:solidFill>
+            <a:prstDash val="solid"/>
+          </a:ln>
+        </p:spPr>
+      </p:sp>
+      <p:sp>
+        <p:nvSpPr>
+          <p:cNvPr id="54" name="Text 52"/>
+          <p:cNvSpPr/>
+          <p:nvPr/>
+        </p:nvSpPr>
+        <p:spPr>
+          <a:xfrm>
+            <a:off x="7033565" y="4169664"/>
+            <a:ext cx="676656" cy="475488"/>
+          </a:xfrm>
+          <a:prstGeom prst="rect">
+            <a:avLst/>
+          </a:prstGeom>
+          <a:noFill/>
+          <a:ln/>
+        </p:spPr>
+        <p:txBody>
+          <a:bodyPr wrap="square" lIns="0" tIns="0" rIns="0" bIns="0" rtlCol="0" anchor="ctr"/>
+          <a:lstStyle/>
+          <a:p>
+            <a:pPr algn="ctr" indent="0" marL="0">
+              <a:buNone/>
+            </a:pPr>
+            <a:r>
+              <a:rPr lang="en-US" sz="900" b="1" dirty="0">
+                <a:solidFill>
+                  <a:srgbClr val="9D174D"/>
+                </a:solidFill>
+                <a:latin typeface="Trebuchet MS" pitchFamily="34" charset="0"/>
+                <a:ea typeface="Trebuchet MS" pitchFamily="34" charset="-122"/>
+                <a:cs typeface="Trebuchet MS" pitchFamily="34" charset="-120"/>
+              </a:rPr>
+              <a:t>i</a:t>
+            </a:r>
+            <a:endParaRPr lang="en-US" sz="900" dirty="0"/>
+          </a:p>
+        </p:txBody>
+      </p:sp>
+      <p:sp>
+        <p:nvSpPr>
+          <p:cNvPr id="55" name="Shape 53"/>
+          <p:cNvSpPr/>
+          <p:nvPr/>
+        </p:nvSpPr>
+        <p:spPr>
+          <a:xfrm>
+            <a:off x="7759598" y="4169664"/>
+            <a:ext cx="676656" cy="475488"/>
+          </a:xfrm>
+          <a:prstGeom prst="rect">
+            <a:avLst>
+              <a:gd name="adj" fmla="val 7692"/>
+            </a:avLst>
+          </a:prstGeom>
+          <a:solidFill>
+            <a:srgbClr val="FFFFFF"/>
+          </a:solidFill>
+          <a:ln w="12700">
+            <a:solidFill>
+              <a:srgbClr val="DB2777"/>
+            </a:solidFill>
+            <a:prstDash val="solid"/>
+          </a:ln>
+        </p:spPr>
+      </p:sp>
+      <p:sp>
+        <p:nvSpPr>
+          <p:cNvPr id="56" name="Text 54"/>
+          <p:cNvSpPr/>
+          <p:nvPr/>
+        </p:nvSpPr>
+        <p:spPr>
+          <a:xfrm>
+            <a:off x="7759598" y="4169664"/>
+            <a:ext cx="676656" cy="475488"/>
+          </a:xfrm>
+          <a:prstGeom prst="rect">
+            <a:avLst/>
+          </a:prstGeom>
+          <a:noFill/>
+          <a:ln/>
+        </p:spPr>
+        <p:txBody>
+          <a:bodyPr wrap="square" lIns="0" tIns="0" rIns="0" bIns="0" rtlCol="0" anchor="ctr"/>
+          <a:lstStyle/>
+          <a:p>
+            <a:pPr algn="ctr" indent="0" marL="0">
+              <a:buNone/>
+            </a:pPr>
+            <a:r>
+              <a:rPr lang="en-US" sz="900" b="1" dirty="0">
+                <a:solidFill>
+                  <a:srgbClr val="9D174D"/>
+                </a:solidFill>
+                <a:latin typeface="Trebuchet MS" pitchFamily="34" charset="0"/>
+                <a:ea typeface="Trebuchet MS" pitchFamily="34" charset="-122"/>
+                <a:cs typeface="Trebuchet MS" pitchFamily="34" charset="-120"/>
+              </a:rPr>
+              <a:t>ng</a:t>
+            </a:r>
+            <a:endParaRPr lang="en-US" sz="900" dirty="0"/>
           </a:p>
         </p:txBody>
       </p:sp>
@@ -31821,7 +32664,7 @@
                 <a:ea typeface="Calibri" pitchFamily="34" charset="-122"/>
                 <a:cs typeface="Calibri" pitchFamily="34" charset="-120"/>
               </a:rPr>
-              <a:t>Word Labs  •  wordlabs.app  •  Root: 'spell' = to name letters in order</a:t>
+              <a:t>Word Labs  •  wordlabs.app  •  Root: 'spell' = to write or say letters in order</a:t>
             </a:r>
             <a:endParaRPr lang="en-US" sz="800" dirty="0"/>
           </a:p>
@@ -32990,7 +33833,7 @@
                 <a:ea typeface="Calibri" pitchFamily="34" charset="-122"/>
                 <a:cs typeface="Calibri" pitchFamily="34" charset="-120"/>
               </a:rPr>
-              <a:t>Word Labs  •  wordlabs.app  •  Root: 'spell' = to name letters in order</a:t>
+              <a:t>Word Labs  •  wordlabs.app  •  Root: 'spell' = to write or say letters in order</a:t>
             </a:r>
             <a:endParaRPr lang="en-US" sz="800" dirty="0"/>
           </a:p>
@@ -33440,7 +34283,7 @@
             <a:avLst/>
           </a:prstGeom>
           <a:solidFill>
-            <a:srgbClr val="DDD6FE"/>
+            <a:srgbClr val="F1F5F9"/>
           </a:solidFill>
           <a:ln w="12700">
             <a:solidFill>
@@ -33452,14 +34295,64 @@
       </p:sp>
       <p:sp>
         <p:nvSpPr>
-          <p:cNvPr id="24" name="Text 22"/>
-          <p:cNvSpPr/>
-          <p:nvPr/>
-        </p:nvSpPr>
-        <p:spPr>
-          <a:xfrm>
-            <a:off x="365760" y="1984248"/>
-            <a:ext cx="2468880" cy="402336"/>
+          <p:cNvPr id="24" name="Shape 22"/>
+          <p:cNvSpPr/>
+          <p:nvPr/>
+        </p:nvSpPr>
+        <p:spPr>
+          <a:xfrm>
+            <a:off x="2971800" y="1984248"/>
+            <a:ext cx="2834640" cy="402336"/>
+          </a:xfrm>
+          <a:prstGeom prst="rect">
+            <a:avLst/>
+          </a:prstGeom>
+          <a:solidFill>
+            <a:srgbClr val="F1F5F9"/>
+          </a:solidFill>
+          <a:ln w="12700">
+            <a:solidFill>
+              <a:srgbClr val="E2E8F0"/>
+            </a:solidFill>
+            <a:prstDash val="solid"/>
+          </a:ln>
+        </p:spPr>
+      </p:sp>
+      <p:sp>
+        <p:nvSpPr>
+          <p:cNvPr id="25" name="Shape 23"/>
+          <p:cNvSpPr/>
+          <p:nvPr/>
+        </p:nvSpPr>
+        <p:spPr>
+          <a:xfrm>
+            <a:off x="5943600" y="1984248"/>
+            <a:ext cx="2834640" cy="402336"/>
+          </a:xfrm>
+          <a:prstGeom prst="rect">
+            <a:avLst/>
+          </a:prstGeom>
+          <a:solidFill>
+            <a:srgbClr val="FCE7F3"/>
+          </a:solidFill>
+          <a:ln w="12700">
+            <a:solidFill>
+              <a:srgbClr val="E2E8F0"/>
+            </a:solidFill>
+            <a:prstDash val="solid"/>
+          </a:ln>
+        </p:spPr>
+      </p:sp>
+      <p:sp>
+        <p:nvSpPr>
+          <p:cNvPr id="26" name="Text 24"/>
+          <p:cNvSpPr/>
+          <p:nvPr/>
+        </p:nvSpPr>
+        <p:spPr>
+          <a:xfrm>
+            <a:off x="5943600" y="1984248"/>
+            <a:ext cx="2834640" cy="402336"/>
           </a:xfrm>
           <a:prstGeom prst="rect">
             <a:avLst/>
@@ -33477,13 +34370,13 @@
             <a:r>
               <a:rPr lang="en-US" sz="1300" b="1" dirty="0">
                 <a:solidFill>
-                  <a:srgbClr val="4C1D95"/>
+                  <a:srgbClr val="9D174D"/>
                 </a:solidFill>
                 <a:latin typeface="Trebuchet MS" pitchFamily="34" charset="0"/>
                 <a:ea typeface="Trebuchet MS" pitchFamily="34" charset="-122"/>
                 <a:cs typeface="Trebuchet MS" pitchFamily="34" charset="-120"/>
               </a:rPr>
-              <a:t>un-</a:t>
+              <a:t>-ed</a:t>
             </a:r>
             <a:endParaRPr lang="en-US" sz="1300" dirty="0"/>
           </a:p>
@@ -33491,20 +34384,45 @@
       </p:sp>
       <p:sp>
         <p:nvSpPr>
-          <p:cNvPr id="25" name="Shape 23"/>
-          <p:cNvSpPr/>
-          <p:nvPr/>
-        </p:nvSpPr>
-        <p:spPr>
-          <a:xfrm>
-            <a:off x="2971800" y="1984248"/>
+          <p:cNvPr id="27" name="Shape 25"/>
+          <p:cNvSpPr/>
+          <p:nvPr/>
+        </p:nvSpPr>
+        <p:spPr>
+          <a:xfrm>
+            <a:off x="365760" y="2404872"/>
+            <a:ext cx="2468880" cy="402336"/>
+          </a:xfrm>
+          <a:prstGeom prst="rect">
+            <a:avLst/>
+          </a:prstGeom>
+          <a:solidFill>
+            <a:srgbClr val="F8FAFC"/>
+          </a:solidFill>
+          <a:ln w="12700">
+            <a:solidFill>
+              <a:srgbClr val="E2E8F0"/>
+            </a:solidFill>
+            <a:prstDash val="solid"/>
+          </a:ln>
+        </p:spPr>
+      </p:sp>
+      <p:sp>
+        <p:nvSpPr>
+          <p:cNvPr id="28" name="Shape 26"/>
+          <p:cNvSpPr/>
+          <p:nvPr/>
+        </p:nvSpPr>
+        <p:spPr>
+          <a:xfrm>
+            <a:off x="2971800" y="2404872"/>
             <a:ext cx="2834640" cy="402336"/>
           </a:xfrm>
           <a:prstGeom prst="rect">
             <a:avLst/>
           </a:prstGeom>
           <a:solidFill>
-            <a:srgbClr val="F1F5F9"/>
+            <a:srgbClr val="F8FAFC"/>
           </a:solidFill>
           <a:ln w="12700">
             <a:solidFill>
@@ -33516,13 +34434,13 @@
       </p:sp>
       <p:sp>
         <p:nvSpPr>
-          <p:cNvPr id="26" name="Shape 24"/>
-          <p:cNvSpPr/>
-          <p:nvPr/>
-        </p:nvSpPr>
-        <p:spPr>
-          <a:xfrm>
-            <a:off x="5943600" y="1984248"/>
+          <p:cNvPr id="29" name="Shape 27"/>
+          <p:cNvSpPr/>
+          <p:nvPr/>
+        </p:nvSpPr>
+        <p:spPr>
+          <a:xfrm>
+            <a:off x="5943600" y="2404872"/>
             <a:ext cx="2834640" cy="402336"/>
           </a:xfrm>
           <a:prstGeom prst="rect">
@@ -33541,13 +34459,13 @@
       </p:sp>
       <p:sp>
         <p:nvSpPr>
-          <p:cNvPr id="27" name="Text 25"/>
-          <p:cNvSpPr/>
-          <p:nvPr/>
-        </p:nvSpPr>
-        <p:spPr>
-          <a:xfrm>
-            <a:off x="5943600" y="1984248"/>
+          <p:cNvPr id="30" name="Text 28"/>
+          <p:cNvSpPr/>
+          <p:nvPr/>
+        </p:nvSpPr>
+        <p:spPr>
+          <a:xfrm>
+            <a:off x="5943600" y="2404872"/>
             <a:ext cx="2834640" cy="402336"/>
           </a:xfrm>
           <a:prstGeom prst="rect">
@@ -33572,7 +34490,7 @@
                 <a:ea typeface="Trebuchet MS" pitchFamily="34" charset="-122"/>
                 <a:cs typeface="Trebuchet MS" pitchFamily="34" charset="-120"/>
               </a:rPr>
-              <a:t>-ed</a:t>
+              <a:t>-er</a:t>
             </a:r>
             <a:endParaRPr lang="en-US" sz="1300" dirty="0"/>
           </a:p>
@@ -33580,20 +34498,20 @@
       </p:sp>
       <p:sp>
         <p:nvSpPr>
-          <p:cNvPr id="28" name="Shape 26"/>
-          <p:cNvSpPr/>
-          <p:nvPr/>
-        </p:nvSpPr>
-        <p:spPr>
-          <a:xfrm>
-            <a:off x="365760" y="2404872"/>
+          <p:cNvPr id="31" name="Shape 29"/>
+          <p:cNvSpPr/>
+          <p:nvPr/>
+        </p:nvSpPr>
+        <p:spPr>
+          <a:xfrm>
+            <a:off x="365760" y="2825496"/>
             <a:ext cx="2468880" cy="402336"/>
           </a:xfrm>
           <a:prstGeom prst="rect">
             <a:avLst/>
           </a:prstGeom>
           <a:solidFill>
-            <a:srgbClr val="DDD6FE"/>
+            <a:srgbClr val="F1F5F9"/>
           </a:solidFill>
           <a:ln w="12700">
             <a:solidFill>
@@ -33605,14 +34523,64 @@
       </p:sp>
       <p:sp>
         <p:nvSpPr>
-          <p:cNvPr id="29" name="Text 27"/>
-          <p:cNvSpPr/>
-          <p:nvPr/>
-        </p:nvSpPr>
-        <p:spPr>
-          <a:xfrm>
-            <a:off x="365760" y="2404872"/>
-            <a:ext cx="2468880" cy="402336"/>
+          <p:cNvPr id="32" name="Shape 30"/>
+          <p:cNvSpPr/>
+          <p:nvPr/>
+        </p:nvSpPr>
+        <p:spPr>
+          <a:xfrm>
+            <a:off x="2971800" y="2825496"/>
+            <a:ext cx="2834640" cy="402336"/>
+          </a:xfrm>
+          <a:prstGeom prst="rect">
+            <a:avLst/>
+          </a:prstGeom>
+          <a:solidFill>
+            <a:srgbClr val="F1F5F9"/>
+          </a:solidFill>
+          <a:ln w="12700">
+            <a:solidFill>
+              <a:srgbClr val="E2E8F0"/>
+            </a:solidFill>
+            <a:prstDash val="solid"/>
+          </a:ln>
+        </p:spPr>
+      </p:sp>
+      <p:sp>
+        <p:nvSpPr>
+          <p:cNvPr id="33" name="Shape 31"/>
+          <p:cNvSpPr/>
+          <p:nvPr/>
+        </p:nvSpPr>
+        <p:spPr>
+          <a:xfrm>
+            <a:off x="5943600" y="2825496"/>
+            <a:ext cx="2834640" cy="402336"/>
+          </a:xfrm>
+          <a:prstGeom prst="rect">
+            <a:avLst/>
+          </a:prstGeom>
+          <a:solidFill>
+            <a:srgbClr val="FCE7F3"/>
+          </a:solidFill>
+          <a:ln w="12700">
+            <a:solidFill>
+              <a:srgbClr val="E2E8F0"/>
+            </a:solidFill>
+            <a:prstDash val="solid"/>
+          </a:ln>
+        </p:spPr>
+      </p:sp>
+      <p:sp>
+        <p:nvSpPr>
+          <p:cNvPr id="34" name="Text 32"/>
+          <p:cNvSpPr/>
+          <p:nvPr/>
+        </p:nvSpPr>
+        <p:spPr>
+          <a:xfrm>
+            <a:off x="5943600" y="2825496"/>
+            <a:ext cx="2834640" cy="402336"/>
           </a:xfrm>
           <a:prstGeom prst="rect">
             <a:avLst/>
@@ -33630,13 +34598,13 @@
             <a:r>
               <a:rPr lang="en-US" sz="1300" b="1" dirty="0">
                 <a:solidFill>
-                  <a:srgbClr val="4C1D95"/>
+                  <a:srgbClr val="9D174D"/>
                 </a:solidFill>
                 <a:latin typeface="Trebuchet MS" pitchFamily="34" charset="0"/>
                 <a:ea typeface="Trebuchet MS" pitchFamily="34" charset="-122"/>
                 <a:cs typeface="Trebuchet MS" pitchFamily="34" charset="-120"/>
               </a:rPr>
-              <a:t>re-</a:t>
+              <a:t>-s</a:t>
             </a:r>
             <a:endParaRPr lang="en-US" sz="1300" dirty="0"/>
           </a:p>
@@ -33644,64 +34612,14 @@
       </p:sp>
       <p:sp>
         <p:nvSpPr>
-          <p:cNvPr id="30" name="Shape 28"/>
-          <p:cNvSpPr/>
-          <p:nvPr/>
-        </p:nvSpPr>
-        <p:spPr>
-          <a:xfrm>
-            <a:off x="2971800" y="2404872"/>
-            <a:ext cx="2834640" cy="402336"/>
-          </a:xfrm>
-          <a:prstGeom prst="rect">
-            <a:avLst/>
-          </a:prstGeom>
-          <a:solidFill>
-            <a:srgbClr val="F8FAFC"/>
-          </a:solidFill>
-          <a:ln w="12700">
-            <a:solidFill>
-              <a:srgbClr val="E2E8F0"/>
-            </a:solidFill>
-            <a:prstDash val="solid"/>
-          </a:ln>
-        </p:spPr>
-      </p:sp>
-      <p:sp>
-        <p:nvSpPr>
-          <p:cNvPr id="31" name="Shape 29"/>
-          <p:cNvSpPr/>
-          <p:nvPr/>
-        </p:nvSpPr>
-        <p:spPr>
-          <a:xfrm>
-            <a:off x="5943600" y="2404872"/>
-            <a:ext cx="2834640" cy="402336"/>
-          </a:xfrm>
-          <a:prstGeom prst="rect">
-            <a:avLst/>
-          </a:prstGeom>
-          <a:solidFill>
-            <a:srgbClr val="FCE7F3"/>
-          </a:solidFill>
-          <a:ln w="12700">
-            <a:solidFill>
-              <a:srgbClr val="E2E8F0"/>
-            </a:solidFill>
-            <a:prstDash val="solid"/>
-          </a:ln>
-        </p:spPr>
-      </p:sp>
-      <p:sp>
-        <p:nvSpPr>
-          <p:cNvPr id="32" name="Text 30"/>
-          <p:cNvSpPr/>
-          <p:nvPr/>
-        </p:nvSpPr>
-        <p:spPr>
-          <a:xfrm>
-            <a:off x="5943600" y="2404872"/>
-            <a:ext cx="2834640" cy="402336"/>
+          <p:cNvPr id="35" name="Text 33"/>
+          <p:cNvSpPr/>
+          <p:nvPr/>
+        </p:nvSpPr>
+        <p:spPr>
+          <a:xfrm>
+            <a:off x="365760" y="3611880"/>
+            <a:ext cx="1828800" cy="347472"/>
           </a:xfrm>
           <a:prstGeom prst="rect">
             <a:avLst/>
@@ -33713,59 +34631,61 @@
           <a:bodyPr wrap="square" lIns="0" tIns="0" rIns="0" bIns="0" rtlCol="0" anchor="ctr"/>
           <a:lstStyle/>
           <a:p>
-            <a:pPr algn="ctr" indent="0" marL="0">
-              <a:buNone/>
-            </a:pPr>
-            <a:r>
-              <a:rPr lang="en-US" sz="1300" b="1" dirty="0">
-                <a:solidFill>
-                  <a:srgbClr val="9D174D"/>
+            <a:pPr algn="l" indent="0" marL="0">
+              <a:buNone/>
+            </a:pPr>
+            <a:r>
+              <a:rPr lang="en-US" sz="1200" b="1" dirty="0">
+                <a:solidFill>
+                  <a:srgbClr val="0F172A"/>
                 </a:solidFill>
                 <a:latin typeface="Trebuchet MS" pitchFamily="34" charset="0"/>
                 <a:ea typeface="Trebuchet MS" pitchFamily="34" charset="-122"/>
                 <a:cs typeface="Trebuchet MS" pitchFamily="34" charset="-120"/>
               </a:rPr>
-              <a:t>-er</a:t>
-            </a:r>
-            <a:endParaRPr lang="en-US" sz="1300" dirty="0"/>
-          </a:p>
-        </p:txBody>
-      </p:sp>
-      <p:sp>
-        <p:nvSpPr>
-          <p:cNvPr id="33" name="Shape 31"/>
-          <p:cNvSpPr/>
-          <p:nvPr/>
-        </p:nvSpPr>
-        <p:spPr>
-          <a:xfrm>
-            <a:off x="365760" y="2825496"/>
-            <a:ext cx="2468880" cy="402336"/>
-          </a:xfrm>
-          <a:prstGeom prst="rect">
-            <a:avLst/>
-          </a:prstGeom>
-          <a:solidFill>
-            <a:srgbClr val="DDD6FE"/>
-          </a:solidFill>
-          <a:ln w="12700">
-            <a:solidFill>
-              <a:srgbClr val="E2E8F0"/>
-            </a:solidFill>
-            <a:prstDash val="solid"/>
-          </a:ln>
-        </p:spPr>
-      </p:sp>
-      <p:sp>
-        <p:nvSpPr>
-          <p:cNvPr id="34" name="Text 32"/>
-          <p:cNvSpPr/>
-          <p:nvPr/>
-        </p:nvSpPr>
-        <p:spPr>
-          <a:xfrm>
-            <a:off x="365760" y="2825496"/>
-            <a:ext cx="2468880" cy="402336"/>
+              <a:t>Sample words:</a:t>
+            </a:r>
+            <a:endParaRPr lang="en-US" sz="1200" dirty="0"/>
+          </a:p>
+        </p:txBody>
+      </p:sp>
+      <p:sp>
+        <p:nvSpPr>
+          <p:cNvPr id="36" name="Shape 34"/>
+          <p:cNvSpPr/>
+          <p:nvPr/>
+        </p:nvSpPr>
+        <p:spPr>
+          <a:xfrm>
+            <a:off x="365760" y="4023360"/>
+            <a:ext cx="2011680" cy="402336"/>
+          </a:xfrm>
+          <a:prstGeom prst="rect">
+            <a:avLst>
+              <a:gd name="adj" fmla="val 13636"/>
+            </a:avLst>
+          </a:prstGeom>
+          <a:solidFill>
+            <a:srgbClr val="EEF2FF"/>
+          </a:solidFill>
+          <a:ln w="12700">
+            <a:solidFill>
+              <a:srgbClr val="6366F1"/>
+            </a:solidFill>
+            <a:prstDash val="solid"/>
+          </a:ln>
+        </p:spPr>
+      </p:sp>
+      <p:sp>
+        <p:nvSpPr>
+          <p:cNvPr id="37" name="Text 35"/>
+          <p:cNvSpPr/>
+          <p:nvPr/>
+        </p:nvSpPr>
+        <p:spPr>
+          <a:xfrm>
+            <a:off x="365760" y="4023360"/>
+            <a:ext cx="2011680" cy="402336"/>
           </a:xfrm>
           <a:prstGeom prst="rect">
             <a:avLst/>
@@ -33781,80 +34701,57 @@
               <a:buNone/>
             </a:pPr>
             <a:r>
-              <a:rPr lang="en-US" sz="1300" b="1" dirty="0">
-                <a:solidFill>
-                  <a:srgbClr val="4C1D95"/>
+              <a:rPr lang="en-US" sz="1200" b="1" dirty="0">
+                <a:solidFill>
+                  <a:srgbClr val="4338CA"/>
                 </a:solidFill>
                 <a:latin typeface="Trebuchet MS" pitchFamily="34" charset="0"/>
                 <a:ea typeface="Trebuchet MS" pitchFamily="34" charset="-122"/>
                 <a:cs typeface="Trebuchet MS" pitchFamily="34" charset="-120"/>
               </a:rPr>
-              <a:t>over-</a:t>
-            </a:r>
-            <a:endParaRPr lang="en-US" sz="1300" dirty="0"/>
-          </a:p>
-        </p:txBody>
-      </p:sp>
-      <p:sp>
-        <p:nvSpPr>
-          <p:cNvPr id="35" name="Shape 33"/>
-          <p:cNvSpPr/>
-          <p:nvPr/>
-        </p:nvSpPr>
-        <p:spPr>
-          <a:xfrm>
-            <a:off x="2971800" y="2825496"/>
-            <a:ext cx="2834640" cy="402336"/>
-          </a:xfrm>
-          <a:prstGeom prst="rect">
-            <a:avLst/>
-          </a:prstGeom>
-          <a:solidFill>
-            <a:srgbClr val="F1F5F9"/>
-          </a:solidFill>
-          <a:ln w="12700">
-            <a:solidFill>
-              <a:srgbClr val="E2E8F0"/>
-            </a:solidFill>
-            <a:prstDash val="solid"/>
-          </a:ln>
-        </p:spPr>
-      </p:sp>
-      <p:sp>
-        <p:nvSpPr>
-          <p:cNvPr id="36" name="Shape 34"/>
-          <p:cNvSpPr/>
-          <p:nvPr/>
-        </p:nvSpPr>
-        <p:spPr>
-          <a:xfrm>
-            <a:off x="5943600" y="2825496"/>
-            <a:ext cx="2834640" cy="402336"/>
-          </a:xfrm>
-          <a:prstGeom prst="rect">
-            <a:avLst/>
-          </a:prstGeom>
-          <a:solidFill>
-            <a:srgbClr val="FCE7F3"/>
-          </a:solidFill>
-          <a:ln w="12700">
-            <a:solidFill>
-              <a:srgbClr val="E2E8F0"/>
-            </a:solidFill>
-            <a:prstDash val="solid"/>
-          </a:ln>
-        </p:spPr>
-      </p:sp>
-      <p:sp>
-        <p:nvSpPr>
-          <p:cNvPr id="37" name="Text 35"/>
-          <p:cNvSpPr/>
-          <p:nvPr/>
-        </p:nvSpPr>
-        <p:spPr>
-          <a:xfrm>
-            <a:off x="5943600" y="2825496"/>
-            <a:ext cx="2834640" cy="402336"/>
+              <a:t>spell</a:t>
+            </a:r>
+            <a:endParaRPr lang="en-US" sz="1200" dirty="0"/>
+          </a:p>
+        </p:txBody>
+      </p:sp>
+      <p:sp>
+        <p:nvSpPr>
+          <p:cNvPr id="38" name="Shape 36"/>
+          <p:cNvSpPr/>
+          <p:nvPr/>
+        </p:nvSpPr>
+        <p:spPr>
+          <a:xfrm>
+            <a:off x="2542032" y="4023360"/>
+            <a:ext cx="2011680" cy="402336"/>
+          </a:xfrm>
+          <a:prstGeom prst="rect">
+            <a:avLst>
+              <a:gd name="adj" fmla="val 13636"/>
+            </a:avLst>
+          </a:prstGeom>
+          <a:solidFill>
+            <a:srgbClr val="EEF2FF"/>
+          </a:solidFill>
+          <a:ln w="12700">
+            <a:solidFill>
+              <a:srgbClr val="6366F1"/>
+            </a:solidFill>
+            <a:prstDash val="solid"/>
+          </a:ln>
+        </p:spPr>
+      </p:sp>
+      <p:sp>
+        <p:nvSpPr>
+          <p:cNvPr id="39" name="Text 37"/>
+          <p:cNvSpPr/>
+          <p:nvPr/>
+        </p:nvSpPr>
+        <p:spPr>
+          <a:xfrm>
+            <a:off x="2542032" y="4023360"/>
+            <a:ext cx="2011680" cy="402336"/>
           </a:xfrm>
           <a:prstGeom prst="rect">
             <a:avLst/>
@@ -33870,55 +34767,57 @@
               <a:buNone/>
             </a:pPr>
             <a:r>
-              <a:rPr lang="en-US" sz="1300" b="1" dirty="0">
-                <a:solidFill>
-                  <a:srgbClr val="9D174D"/>
+              <a:rPr lang="en-US" sz="1200" b="1" dirty="0">
+                <a:solidFill>
+                  <a:srgbClr val="4338CA"/>
                 </a:solidFill>
                 <a:latin typeface="Trebuchet MS" pitchFamily="34" charset="0"/>
                 <a:ea typeface="Trebuchet MS" pitchFamily="34" charset="-122"/>
                 <a:cs typeface="Trebuchet MS" pitchFamily="34" charset="-120"/>
               </a:rPr>
-              <a:t>-bound</a:t>
-            </a:r>
-            <a:endParaRPr lang="en-US" sz="1300" dirty="0"/>
-          </a:p>
-        </p:txBody>
-      </p:sp>
-      <p:sp>
-        <p:nvSpPr>
-          <p:cNvPr id="38" name="Shape 36"/>
-          <p:cNvSpPr/>
-          <p:nvPr/>
-        </p:nvSpPr>
-        <p:spPr>
-          <a:xfrm>
-            <a:off x="365760" y="3246120"/>
-            <a:ext cx="2468880" cy="402336"/>
-          </a:xfrm>
-          <a:prstGeom prst="rect">
-            <a:avLst/>
-          </a:prstGeom>
-          <a:solidFill>
-            <a:srgbClr val="DDD6FE"/>
-          </a:solidFill>
-          <a:ln w="12700">
-            <a:solidFill>
-              <a:srgbClr val="E2E8F0"/>
-            </a:solidFill>
-            <a:prstDash val="solid"/>
-          </a:ln>
-        </p:spPr>
-      </p:sp>
-      <p:sp>
-        <p:nvSpPr>
-          <p:cNvPr id="39" name="Text 37"/>
-          <p:cNvSpPr/>
-          <p:nvPr/>
-        </p:nvSpPr>
-        <p:spPr>
-          <a:xfrm>
-            <a:off x="365760" y="3246120"/>
-            <a:ext cx="2468880" cy="402336"/>
+              <a:t>spells</a:t>
+            </a:r>
+            <a:endParaRPr lang="en-US" sz="1200" dirty="0"/>
+          </a:p>
+        </p:txBody>
+      </p:sp>
+      <p:sp>
+        <p:nvSpPr>
+          <p:cNvPr id="40" name="Shape 38"/>
+          <p:cNvSpPr/>
+          <p:nvPr/>
+        </p:nvSpPr>
+        <p:spPr>
+          <a:xfrm>
+            <a:off x="4718304" y="4023360"/>
+            <a:ext cx="2011680" cy="402336"/>
+          </a:xfrm>
+          <a:prstGeom prst="rect">
+            <a:avLst>
+              <a:gd name="adj" fmla="val 13636"/>
+            </a:avLst>
+          </a:prstGeom>
+          <a:solidFill>
+            <a:srgbClr val="EEF2FF"/>
+          </a:solidFill>
+          <a:ln w="12700">
+            <a:solidFill>
+              <a:srgbClr val="6366F1"/>
+            </a:solidFill>
+            <a:prstDash val="solid"/>
+          </a:ln>
+        </p:spPr>
+      </p:sp>
+      <p:sp>
+        <p:nvSpPr>
+          <p:cNvPr id="41" name="Text 39"/>
+          <p:cNvSpPr/>
+          <p:nvPr/>
+        </p:nvSpPr>
+        <p:spPr>
+          <a:xfrm>
+            <a:off x="4718304" y="4023360"/>
+            <a:ext cx="2011680" cy="402336"/>
           </a:xfrm>
           <a:prstGeom prst="rect">
             <a:avLst/>
@@ -33934,671 +34833,15 @@
               <a:buNone/>
             </a:pPr>
             <a:r>
-              <a:rPr lang="en-US" sz="1300" b="1" dirty="0">
-                <a:solidFill>
-                  <a:srgbClr val="4C1D95"/>
+              <a:rPr lang="en-US" sz="1200" b="1" dirty="0">
+                <a:solidFill>
+                  <a:srgbClr val="4338CA"/>
                 </a:solidFill>
                 <a:latin typeface="Trebuchet MS" pitchFamily="34" charset="0"/>
                 <a:ea typeface="Trebuchet MS" pitchFamily="34" charset="-122"/>
                 <a:cs typeface="Trebuchet MS" pitchFamily="34" charset="-120"/>
               </a:rPr>
-              <a:t>fore-</a:t>
-            </a:r>
-            <a:endParaRPr lang="en-US" sz="1300" dirty="0"/>
-          </a:p>
-        </p:txBody>
-      </p:sp>
-      <p:sp>
-        <p:nvSpPr>
-          <p:cNvPr id="40" name="Shape 38"/>
-          <p:cNvSpPr/>
-          <p:nvPr/>
-        </p:nvSpPr>
-        <p:spPr>
-          <a:xfrm>
-            <a:off x="2971800" y="3246120"/>
-            <a:ext cx="2834640" cy="402336"/>
-          </a:xfrm>
-          <a:prstGeom prst="rect">
-            <a:avLst/>
-          </a:prstGeom>
-          <a:solidFill>
-            <a:srgbClr val="F8FAFC"/>
-          </a:solidFill>
-          <a:ln w="12700">
-            <a:solidFill>
-              <a:srgbClr val="E2E8F0"/>
-            </a:solidFill>
-            <a:prstDash val="solid"/>
-          </a:ln>
-        </p:spPr>
-      </p:sp>
-      <p:sp>
-        <p:nvSpPr>
-          <p:cNvPr id="41" name="Shape 39"/>
-          <p:cNvSpPr/>
-          <p:nvPr/>
-        </p:nvSpPr>
-        <p:spPr>
-          <a:xfrm>
-            <a:off x="5943600" y="3246120"/>
-            <a:ext cx="2834640" cy="402336"/>
-          </a:xfrm>
-          <a:prstGeom prst="rect">
-            <a:avLst/>
-          </a:prstGeom>
-          <a:solidFill>
-            <a:srgbClr val="FCE7F3"/>
-          </a:solidFill>
-          <a:ln w="12700">
-            <a:solidFill>
-              <a:srgbClr val="E2E8F0"/>
-            </a:solidFill>
-            <a:prstDash val="solid"/>
-          </a:ln>
-        </p:spPr>
-      </p:sp>
-      <p:sp>
-        <p:nvSpPr>
-          <p:cNvPr id="42" name="Text 40"/>
-          <p:cNvSpPr/>
-          <p:nvPr/>
-        </p:nvSpPr>
-        <p:spPr>
-          <a:xfrm>
-            <a:off x="5943600" y="3246120"/>
-            <a:ext cx="2834640" cy="402336"/>
-          </a:xfrm>
-          <a:prstGeom prst="rect">
-            <a:avLst/>
-          </a:prstGeom>
-          <a:noFill/>
-          <a:ln/>
-        </p:spPr>
-        <p:txBody>
-          <a:bodyPr wrap="square" lIns="0" tIns="0" rIns="0" bIns="0" rtlCol="0" anchor="ctr"/>
-          <a:lstStyle/>
-          <a:p>
-            <a:pPr algn="ctr" indent="0" marL="0">
-              <a:buNone/>
-            </a:pPr>
-            <a:r>
-              <a:rPr lang="en-US" sz="1300" b="1" dirty="0">
-                <a:solidFill>
-                  <a:srgbClr val="9D174D"/>
-                </a:solidFill>
-                <a:latin typeface="Trebuchet MS" pitchFamily="34" charset="0"/>
-                <a:ea typeface="Trebuchet MS" pitchFamily="34" charset="-122"/>
-                <a:cs typeface="Trebuchet MS" pitchFamily="34" charset="-120"/>
-              </a:rPr>
-              <a:t>-check</a:t>
-            </a:r>
-            <a:endParaRPr lang="en-US" sz="1300" dirty="0"/>
-          </a:p>
-        </p:txBody>
-      </p:sp>
-      <p:sp>
-        <p:nvSpPr>
-          <p:cNvPr id="43" name="Text 41"/>
-          <p:cNvSpPr/>
-          <p:nvPr/>
-        </p:nvSpPr>
-        <p:spPr>
-          <a:xfrm>
-            <a:off x="365760" y="3611880"/>
-            <a:ext cx="1828800" cy="347472"/>
-          </a:xfrm>
-          <a:prstGeom prst="rect">
-            <a:avLst/>
-          </a:prstGeom>
-          <a:noFill/>
-          <a:ln/>
-        </p:spPr>
-        <p:txBody>
-          <a:bodyPr wrap="square" lIns="0" tIns="0" rIns="0" bIns="0" rtlCol="0" anchor="ctr"/>
-          <a:lstStyle/>
-          <a:p>
-            <a:pPr algn="l" indent="0" marL="0">
-              <a:buNone/>
-            </a:pPr>
-            <a:r>
-              <a:rPr lang="en-US" sz="1200" b="1" dirty="0">
-                <a:solidFill>
-                  <a:srgbClr val="0F172A"/>
-                </a:solidFill>
-                <a:latin typeface="Trebuchet MS" pitchFamily="34" charset="0"/>
-                <a:ea typeface="Trebuchet MS" pitchFamily="34" charset="-122"/>
-                <a:cs typeface="Trebuchet MS" pitchFamily="34" charset="-120"/>
-              </a:rPr>
-              <a:t>Sample words:</a:t>
-            </a:r>
-            <a:endParaRPr lang="en-US" sz="1200" dirty="0"/>
-          </a:p>
-        </p:txBody>
-      </p:sp>
-      <p:sp>
-        <p:nvSpPr>
-          <p:cNvPr id="44" name="Shape 42"/>
-          <p:cNvSpPr/>
-          <p:nvPr/>
-        </p:nvSpPr>
-        <p:spPr>
-          <a:xfrm>
-            <a:off x="365760" y="4023360"/>
-            <a:ext cx="2011680" cy="402336"/>
-          </a:xfrm>
-          <a:prstGeom prst="rect">
-            <a:avLst>
-              <a:gd name="adj" fmla="val 13636"/>
-            </a:avLst>
-          </a:prstGeom>
-          <a:solidFill>
-            <a:srgbClr val="EEF2FF"/>
-          </a:solidFill>
-          <a:ln w="12700">
-            <a:solidFill>
-              <a:srgbClr val="6366F1"/>
-            </a:solidFill>
-            <a:prstDash val="solid"/>
-          </a:ln>
-        </p:spPr>
-      </p:sp>
-      <p:sp>
-        <p:nvSpPr>
-          <p:cNvPr id="45" name="Text 43"/>
-          <p:cNvSpPr/>
-          <p:nvPr/>
-        </p:nvSpPr>
-        <p:spPr>
-          <a:xfrm>
-            <a:off x="365760" y="4023360"/>
-            <a:ext cx="2011680" cy="402336"/>
-          </a:xfrm>
-          <a:prstGeom prst="rect">
-            <a:avLst/>
-          </a:prstGeom>
-          <a:noFill/>
-          <a:ln/>
-        </p:spPr>
-        <p:txBody>
-          <a:bodyPr wrap="square" lIns="0" tIns="0" rIns="0" bIns="0" rtlCol="0" anchor="ctr"/>
-          <a:lstStyle/>
-          <a:p>
-            <a:pPr algn="ctr" indent="0" marL="0">
-              <a:buNone/>
-            </a:pPr>
-            <a:r>
-              <a:rPr lang="en-US" sz="1200" b="1" dirty="0">
-                <a:solidFill>
-                  <a:srgbClr val="4338CA"/>
-                </a:solidFill>
-                <a:latin typeface="Trebuchet MS" pitchFamily="34" charset="0"/>
-                <a:ea typeface="Trebuchet MS" pitchFamily="34" charset="-122"/>
-                <a:cs typeface="Trebuchet MS" pitchFamily="34" charset="-120"/>
-              </a:rPr>
-              <a:t>spelling</a:t>
-            </a:r>
-            <a:endParaRPr lang="en-US" sz="1200" dirty="0"/>
-          </a:p>
-        </p:txBody>
-      </p:sp>
-      <p:sp>
-        <p:nvSpPr>
-          <p:cNvPr id="46" name="Shape 44"/>
-          <p:cNvSpPr/>
-          <p:nvPr/>
-        </p:nvSpPr>
-        <p:spPr>
-          <a:xfrm>
-            <a:off x="2542032" y="4023360"/>
-            <a:ext cx="2011680" cy="402336"/>
-          </a:xfrm>
-          <a:prstGeom prst="rect">
-            <a:avLst>
-              <a:gd name="adj" fmla="val 13636"/>
-            </a:avLst>
-          </a:prstGeom>
-          <a:solidFill>
-            <a:srgbClr val="EEF2FF"/>
-          </a:solidFill>
-          <a:ln w="12700">
-            <a:solidFill>
-              <a:srgbClr val="6366F1"/>
-            </a:solidFill>
-            <a:prstDash val="solid"/>
-          </a:ln>
-        </p:spPr>
-      </p:sp>
-      <p:sp>
-        <p:nvSpPr>
-          <p:cNvPr id="47" name="Text 45"/>
-          <p:cNvSpPr/>
-          <p:nvPr/>
-        </p:nvSpPr>
-        <p:spPr>
-          <a:xfrm>
-            <a:off x="2542032" y="4023360"/>
-            <a:ext cx="2011680" cy="402336"/>
-          </a:xfrm>
-          <a:prstGeom prst="rect">
-            <a:avLst/>
-          </a:prstGeom>
-          <a:noFill/>
-          <a:ln/>
-        </p:spPr>
-        <p:txBody>
-          <a:bodyPr wrap="square" lIns="0" tIns="0" rIns="0" bIns="0" rtlCol="0" anchor="ctr"/>
-          <a:lstStyle/>
-          <a:p>
-            <a:pPr algn="ctr" indent="0" marL="0">
-              <a:buNone/>
-            </a:pPr>
-            <a:r>
-              <a:rPr lang="en-US" sz="1200" b="1" dirty="0">
-                <a:solidFill>
-                  <a:srgbClr val="4338CA"/>
-                </a:solidFill>
-                <a:latin typeface="Trebuchet MS" pitchFamily="34" charset="0"/>
-                <a:ea typeface="Trebuchet MS" pitchFamily="34" charset="-122"/>
-                <a:cs typeface="Trebuchet MS" pitchFamily="34" charset="-120"/>
-              </a:rPr>
-              <a:t>misspell</a:t>
-            </a:r>
-            <a:endParaRPr lang="en-US" sz="1200" dirty="0"/>
-          </a:p>
-        </p:txBody>
-      </p:sp>
-      <p:sp>
-        <p:nvSpPr>
-          <p:cNvPr id="48" name="Shape 46"/>
-          <p:cNvSpPr/>
-          <p:nvPr/>
-        </p:nvSpPr>
-        <p:spPr>
-          <a:xfrm>
-            <a:off x="4718304" y="4023360"/>
-            <a:ext cx="2011680" cy="402336"/>
-          </a:xfrm>
-          <a:prstGeom prst="rect">
-            <a:avLst>
-              <a:gd name="adj" fmla="val 13636"/>
-            </a:avLst>
-          </a:prstGeom>
-          <a:solidFill>
-            <a:srgbClr val="EEF2FF"/>
-          </a:solidFill>
-          <a:ln w="12700">
-            <a:solidFill>
-              <a:srgbClr val="6366F1"/>
-            </a:solidFill>
-            <a:prstDash val="solid"/>
-          </a:ln>
-        </p:spPr>
-      </p:sp>
-      <p:sp>
-        <p:nvSpPr>
-          <p:cNvPr id="49" name="Text 47"/>
-          <p:cNvSpPr/>
-          <p:nvPr/>
-        </p:nvSpPr>
-        <p:spPr>
-          <a:xfrm>
-            <a:off x="4718304" y="4023360"/>
-            <a:ext cx="2011680" cy="402336"/>
-          </a:xfrm>
-          <a:prstGeom prst="rect">
-            <a:avLst/>
-          </a:prstGeom>
-          <a:noFill/>
-          <a:ln/>
-        </p:spPr>
-        <p:txBody>
-          <a:bodyPr wrap="square" lIns="0" tIns="0" rIns="0" bIns="0" rtlCol="0" anchor="ctr"/>
-          <a:lstStyle/>
-          <a:p>
-            <a:pPr algn="ctr" indent="0" marL="0">
-              <a:buNone/>
-            </a:pPr>
-            <a:r>
-              <a:rPr lang="en-US" sz="1200" b="1" dirty="0">
-                <a:solidFill>
-                  <a:srgbClr val="4338CA"/>
-                </a:solidFill>
-                <a:latin typeface="Trebuchet MS" pitchFamily="34" charset="0"/>
-                <a:ea typeface="Trebuchet MS" pitchFamily="34" charset="-122"/>
-                <a:cs typeface="Trebuchet MS" pitchFamily="34" charset="-120"/>
-              </a:rPr>
-              <a:t>speller</a:t>
-            </a:r>
-            <a:endParaRPr lang="en-US" sz="1200" dirty="0"/>
-          </a:p>
-        </p:txBody>
-      </p:sp>
-      <p:sp>
-        <p:nvSpPr>
-          <p:cNvPr id="50" name="Shape 48"/>
-          <p:cNvSpPr/>
-          <p:nvPr/>
-        </p:nvSpPr>
-        <p:spPr>
-          <a:xfrm>
-            <a:off x="6894576" y="4023360"/>
-            <a:ext cx="2011680" cy="402336"/>
-          </a:xfrm>
-          <a:prstGeom prst="rect">
-            <a:avLst>
-              <a:gd name="adj" fmla="val 13636"/>
-            </a:avLst>
-          </a:prstGeom>
-          <a:solidFill>
-            <a:srgbClr val="EEF2FF"/>
-          </a:solidFill>
-          <a:ln w="12700">
-            <a:solidFill>
-              <a:srgbClr val="6366F1"/>
-            </a:solidFill>
-            <a:prstDash val="solid"/>
-          </a:ln>
-        </p:spPr>
-      </p:sp>
-      <p:sp>
-        <p:nvSpPr>
-          <p:cNvPr id="51" name="Text 49"/>
-          <p:cNvSpPr/>
-          <p:nvPr/>
-        </p:nvSpPr>
-        <p:spPr>
-          <a:xfrm>
-            <a:off x="6894576" y="4023360"/>
-            <a:ext cx="2011680" cy="402336"/>
-          </a:xfrm>
-          <a:prstGeom prst="rect">
-            <a:avLst/>
-          </a:prstGeom>
-          <a:noFill/>
-          <a:ln/>
-        </p:spPr>
-        <p:txBody>
-          <a:bodyPr wrap="square" lIns="0" tIns="0" rIns="0" bIns="0" rtlCol="0" anchor="ctr"/>
-          <a:lstStyle/>
-          <a:p>
-            <a:pPr algn="ctr" indent="0" marL="0">
-              <a:buNone/>
-            </a:pPr>
-            <a:r>
-              <a:rPr lang="en-US" sz="1200" b="1" dirty="0">
-                <a:solidFill>
-                  <a:srgbClr val="4338CA"/>
-                </a:solidFill>
-                <a:latin typeface="Trebuchet MS" pitchFamily="34" charset="0"/>
-                <a:ea typeface="Trebuchet MS" pitchFamily="34" charset="-122"/>
-                <a:cs typeface="Trebuchet MS" pitchFamily="34" charset="-120"/>
-              </a:rPr>
-              <a:t>misspelled</a:t>
-            </a:r>
-            <a:endParaRPr lang="en-US" sz="1200" dirty="0"/>
-          </a:p>
-        </p:txBody>
-      </p:sp>
-      <p:sp>
-        <p:nvSpPr>
-          <p:cNvPr id="52" name="Shape 50"/>
-          <p:cNvSpPr/>
-          <p:nvPr/>
-        </p:nvSpPr>
-        <p:spPr>
-          <a:xfrm>
-            <a:off x="365760" y="4498848"/>
-            <a:ext cx="2011680" cy="402336"/>
-          </a:xfrm>
-          <a:prstGeom prst="rect">
-            <a:avLst>
-              <a:gd name="adj" fmla="val 13636"/>
-            </a:avLst>
-          </a:prstGeom>
-          <a:solidFill>
-            <a:srgbClr val="EEF2FF"/>
-          </a:solidFill>
-          <a:ln w="12700">
-            <a:solidFill>
-              <a:srgbClr val="6366F1"/>
-            </a:solidFill>
-            <a:prstDash val="solid"/>
-          </a:ln>
-        </p:spPr>
-      </p:sp>
-      <p:sp>
-        <p:nvSpPr>
-          <p:cNvPr id="53" name="Text 51"/>
-          <p:cNvSpPr/>
-          <p:nvPr/>
-        </p:nvSpPr>
-        <p:spPr>
-          <a:xfrm>
-            <a:off x="365760" y="4498848"/>
-            <a:ext cx="2011680" cy="402336"/>
-          </a:xfrm>
-          <a:prstGeom prst="rect">
-            <a:avLst/>
-          </a:prstGeom>
-          <a:noFill/>
-          <a:ln/>
-        </p:spPr>
-        <p:txBody>
-          <a:bodyPr wrap="square" lIns="0" tIns="0" rIns="0" bIns="0" rtlCol="0" anchor="ctr"/>
-          <a:lstStyle/>
-          <a:p>
-            <a:pPr algn="ctr" indent="0" marL="0">
-              <a:buNone/>
-            </a:pPr>
-            <a:r>
-              <a:rPr lang="en-US" sz="1200" b="1" dirty="0">
-                <a:solidFill>
-                  <a:srgbClr val="4338CA"/>
-                </a:solidFill>
-                <a:latin typeface="Trebuchet MS" pitchFamily="34" charset="0"/>
-                <a:ea typeface="Trebuchet MS" pitchFamily="34" charset="-122"/>
-                <a:cs typeface="Trebuchet MS" pitchFamily="34" charset="-120"/>
-              </a:rPr>
-              <a:t>spellbound</a:t>
-            </a:r>
-            <a:endParaRPr lang="en-US" sz="1200" dirty="0"/>
-          </a:p>
-        </p:txBody>
-      </p:sp>
-      <p:sp>
-        <p:nvSpPr>
-          <p:cNvPr id="54" name="Shape 52"/>
-          <p:cNvSpPr/>
-          <p:nvPr/>
-        </p:nvSpPr>
-        <p:spPr>
-          <a:xfrm>
-            <a:off x="2542032" y="4498848"/>
-            <a:ext cx="2011680" cy="402336"/>
-          </a:xfrm>
-          <a:prstGeom prst="rect">
-            <a:avLst>
-              <a:gd name="adj" fmla="val 13636"/>
-            </a:avLst>
-          </a:prstGeom>
-          <a:solidFill>
-            <a:srgbClr val="EEF2FF"/>
-          </a:solidFill>
-          <a:ln w="12700">
-            <a:solidFill>
-              <a:srgbClr val="6366F1"/>
-            </a:solidFill>
-            <a:prstDash val="solid"/>
-          </a:ln>
-        </p:spPr>
-      </p:sp>
-      <p:sp>
-        <p:nvSpPr>
-          <p:cNvPr id="55" name="Text 53"/>
-          <p:cNvSpPr/>
-          <p:nvPr/>
-        </p:nvSpPr>
-        <p:spPr>
-          <a:xfrm>
-            <a:off x="2542032" y="4498848"/>
-            <a:ext cx="2011680" cy="402336"/>
-          </a:xfrm>
-          <a:prstGeom prst="rect">
-            <a:avLst/>
-          </a:prstGeom>
-          <a:noFill/>
-          <a:ln/>
-        </p:spPr>
-        <p:txBody>
-          <a:bodyPr wrap="square" lIns="0" tIns="0" rIns="0" bIns="0" rtlCol="0" anchor="ctr"/>
-          <a:lstStyle/>
-          <a:p>
-            <a:pPr algn="ctr" indent="0" marL="0">
-              <a:buNone/>
-            </a:pPr>
-            <a:r>
-              <a:rPr lang="en-US" sz="1200" b="1" dirty="0">
-                <a:solidFill>
-                  <a:srgbClr val="4338CA"/>
-                </a:solidFill>
-                <a:latin typeface="Trebuchet MS" pitchFamily="34" charset="0"/>
-                <a:ea typeface="Trebuchet MS" pitchFamily="34" charset="-122"/>
-                <a:cs typeface="Trebuchet MS" pitchFamily="34" charset="-120"/>
-              </a:rPr>
-              <a:t>respell</a:t>
-            </a:r>
-            <a:endParaRPr lang="en-US" sz="1200" dirty="0"/>
-          </a:p>
-        </p:txBody>
-      </p:sp>
-      <p:sp>
-        <p:nvSpPr>
-          <p:cNvPr id="56" name="Shape 54"/>
-          <p:cNvSpPr/>
-          <p:nvPr/>
-        </p:nvSpPr>
-        <p:spPr>
-          <a:xfrm>
-            <a:off x="4718304" y="4498848"/>
-            <a:ext cx="2011680" cy="402336"/>
-          </a:xfrm>
-          <a:prstGeom prst="rect">
-            <a:avLst>
-              <a:gd name="adj" fmla="val 13636"/>
-            </a:avLst>
-          </a:prstGeom>
-          <a:solidFill>
-            <a:srgbClr val="EEF2FF"/>
-          </a:solidFill>
-          <a:ln w="12700">
-            <a:solidFill>
-              <a:srgbClr val="6366F1"/>
-            </a:solidFill>
-            <a:prstDash val="solid"/>
-          </a:ln>
-        </p:spPr>
-      </p:sp>
-      <p:sp>
-        <p:nvSpPr>
-          <p:cNvPr id="57" name="Text 55"/>
-          <p:cNvSpPr/>
-          <p:nvPr/>
-        </p:nvSpPr>
-        <p:spPr>
-          <a:xfrm>
-            <a:off x="4718304" y="4498848"/>
-            <a:ext cx="2011680" cy="402336"/>
-          </a:xfrm>
-          <a:prstGeom prst="rect">
-            <a:avLst/>
-          </a:prstGeom>
-          <a:noFill/>
-          <a:ln/>
-        </p:spPr>
-        <p:txBody>
-          <a:bodyPr wrap="square" lIns="0" tIns="0" rIns="0" bIns="0" rtlCol="0" anchor="ctr"/>
-          <a:lstStyle/>
-          <a:p>
-            <a:pPr algn="ctr" indent="0" marL="0">
-              <a:buNone/>
-            </a:pPr>
-            <a:r>
-              <a:rPr lang="en-US" sz="1200" b="1" dirty="0">
-                <a:solidFill>
-                  <a:srgbClr val="4338CA"/>
-                </a:solidFill>
-                <a:latin typeface="Trebuchet MS" pitchFamily="34" charset="0"/>
-                <a:ea typeface="Trebuchet MS" pitchFamily="34" charset="-122"/>
-                <a:cs typeface="Trebuchet MS" pitchFamily="34" charset="-120"/>
-              </a:rPr>
-              <a:t>spellcheck</a:t>
-            </a:r>
-            <a:endParaRPr lang="en-US" sz="1200" dirty="0"/>
-          </a:p>
-        </p:txBody>
-      </p:sp>
-      <p:sp>
-        <p:nvSpPr>
-          <p:cNvPr id="58" name="Shape 56"/>
-          <p:cNvSpPr/>
-          <p:nvPr/>
-        </p:nvSpPr>
-        <p:spPr>
-          <a:xfrm>
-            <a:off x="6894576" y="4498848"/>
-            <a:ext cx="2011680" cy="402336"/>
-          </a:xfrm>
-          <a:prstGeom prst="rect">
-            <a:avLst>
-              <a:gd name="adj" fmla="val 13636"/>
-            </a:avLst>
-          </a:prstGeom>
-          <a:solidFill>
-            <a:srgbClr val="EEF2FF"/>
-          </a:solidFill>
-          <a:ln w="12700">
-            <a:solidFill>
-              <a:srgbClr val="6366F1"/>
-            </a:solidFill>
-            <a:prstDash val="solid"/>
-          </a:ln>
-        </p:spPr>
-      </p:sp>
-      <p:sp>
-        <p:nvSpPr>
-          <p:cNvPr id="59" name="Text 57"/>
-          <p:cNvSpPr/>
-          <p:nvPr/>
-        </p:nvSpPr>
-        <p:spPr>
-          <a:xfrm>
-            <a:off x="6894576" y="4498848"/>
-            <a:ext cx="2011680" cy="402336"/>
-          </a:xfrm>
-          <a:prstGeom prst="rect">
-            <a:avLst/>
-          </a:prstGeom>
-          <a:noFill/>
-          <a:ln/>
-        </p:spPr>
-        <p:txBody>
-          <a:bodyPr wrap="square" lIns="0" tIns="0" rIns="0" bIns="0" rtlCol="0" anchor="ctr"/>
-          <a:lstStyle/>
-          <a:p>
-            <a:pPr algn="ctr" indent="0" marL="0">
-              <a:buNone/>
-            </a:pPr>
-            <a:r>
-              <a:rPr lang="en-US" sz="1200" b="1" dirty="0">
-                <a:solidFill>
-                  <a:srgbClr val="4338CA"/>
-                </a:solidFill>
-                <a:latin typeface="Trebuchet MS" pitchFamily="34" charset="0"/>
-                <a:ea typeface="Trebuchet MS" pitchFamily="34" charset="-122"/>
-                <a:cs typeface="Trebuchet MS" pitchFamily="34" charset="-120"/>
-              </a:rPr>
-              <a:t>misspelling</a:t>
+              <a:t>spelled</a:t>
             </a:r>
             <a:endParaRPr lang="en-US" sz="1200" dirty="0"/>
           </a:p>
@@ -34890,7 +35133,7 @@
                 <a:ea typeface="Calibri" pitchFamily="34" charset="-122"/>
                 <a:cs typeface="Calibri" pitchFamily="34" charset="-120"/>
               </a:rPr>
-              <a:t>Word Labs  •  wordlabs.app  •  Root: 'spell' = to name letters in order</a:t>
+              <a:t>Word Labs  •  wordlabs.app  •  Root: 'spell' = to write or say letters in order</a:t>
             </a:r>
             <a:endParaRPr lang="en-US" sz="800" dirty="0"/>
           </a:p>
@@ -35054,7 +35297,7 @@
                 <a:ea typeface="Calibri" pitchFamily="34" charset="-122"/>
                 <a:cs typeface="Calibri" pitchFamily="34" charset="-120"/>
               </a:rPr>
-              <a:t>The core part of a word carrying its basic meaning. For example, 'spell' means 'to name letters in order'.</a:t>
+              <a:t>The core part of a word carrying its basic meaning. For example, 'spell' means 'to write or say letters in order'.</a:t>
             </a:r>
             <a:endParaRPr lang="en-US" sz="1350" dirty="0"/>
           </a:p>
@@ -35674,7 +35917,7 @@
                 <a:ea typeface="Calibri" pitchFamily="34" charset="-122"/>
                 <a:cs typeface="Calibri" pitchFamily="34" charset="-120"/>
               </a:rPr>
-              <a:t>Word Labs  •  wordlabs.app  •  Root: 'spell' = to name letters in order</a:t>
+              <a:t>Word Labs  •  wordlabs.app  •  Root: 'spell' = to write or say letters in order</a:t>
             </a:r>
             <a:endParaRPr lang="en-US" sz="800" dirty="0"/>
           </a:p>
@@ -35786,7 +36029,7 @@
                 <a:ea typeface="Calibri" pitchFamily="34" charset="-122"/>
                 <a:cs typeface="Calibri" pitchFamily="34" charset="-120"/>
               </a:rPr>
-              <a:t>1.  The word 'spellbound' is made up of two parts: 'spell' and 'bound'.</a:t>
+              <a:t>1.  'spell' means 'to run as fast as possible'.</a:t>
             </a:r>
             <a:endParaRPr lang="en-US" sz="1300" dirty="0"/>
           </a:p>
@@ -35809,11 +36052,11 @@
             </a:avLst>
           </a:prstGeom>
           <a:solidFill>
-            <a:srgbClr val="DCFCE7"/>
-          </a:solidFill>
-          <a:ln w="12700">
-            <a:solidFill>
-              <a:srgbClr val="16A34A"/>
+            <a:srgbClr val="FEE2E2"/>
+          </a:solidFill>
+          <a:ln w="12700">
+            <a:solidFill>
+              <a:srgbClr val="DC2626"/>
             </a:solidFill>
             <a:prstDash val="solid"/>
           </a:ln>
@@ -35846,13 +36089,13 @@
             <a:r>
               <a:rPr lang="en-US" sz="1100" b="1" dirty="0">
                 <a:solidFill>
-                  <a:srgbClr val="16A34A"/>
+                  <a:srgbClr val="DC2626"/>
                 </a:solidFill>
                 <a:latin typeface="Trebuchet MS" pitchFamily="34" charset="0"/>
                 <a:ea typeface="Trebuchet MS" pitchFamily="34" charset="-122"/>
                 <a:cs typeface="Trebuchet MS" pitchFamily="34" charset="-120"/>
               </a:rPr>
-              <a:t>TRUE</a:t>
+              <a:t>FALSE</a:t>
             </a:r>
             <a:endParaRPr lang="en-US" sz="1100" dirty="0"/>
           </a:p>
@@ -35925,7 +36168,7 @@
                 <a:ea typeface="Calibri" pitchFamily="34" charset="-122"/>
                 <a:cs typeface="Calibri" pitchFamily="34" charset="-120"/>
               </a:rPr>
-              <a:t>2.  A spellcheck tool on a computer helps find spelling mistakes in your writing.</a:t>
+              <a:t>2.  'spells' means 'says or writes the letters of a word correctly'.</a:t>
             </a:r>
             <a:endParaRPr lang="en-US" sz="1300" dirty="0"/>
           </a:p>
@@ -36064,7 +36307,7 @@
                 <a:ea typeface="Calibri" pitchFamily="34" charset="-122"/>
                 <a:cs typeface="Calibri" pitchFamily="34" charset="-120"/>
               </a:rPr>
-              <a:t>3.  The root 'spell' comes from an ancient Greek word meaning to write with pictures.</a:t>
+              <a:t>3.  'spell' means 'to write or say letters in order'.</a:t>
             </a:r>
             <a:endParaRPr lang="en-US" sz="1300" dirty="0"/>
           </a:p>
@@ -36087,11 +36330,11 @@
             </a:avLst>
           </a:prstGeom>
           <a:solidFill>
-            <a:srgbClr val="FEE2E2"/>
-          </a:solidFill>
-          <a:ln w="12700">
-            <a:solidFill>
-              <a:srgbClr val="DC2626"/>
+            <a:srgbClr val="DCFCE7"/>
+          </a:solidFill>
+          <a:ln w="12700">
+            <a:solidFill>
+              <a:srgbClr val="16A34A"/>
             </a:solidFill>
             <a:prstDash val="solid"/>
           </a:ln>
@@ -36124,13 +36367,13 @@
             <a:r>
               <a:rPr lang="en-US" sz="1100" b="1" dirty="0">
                 <a:solidFill>
-                  <a:srgbClr val="DC2626"/>
+                  <a:srgbClr val="16A34A"/>
                 </a:solidFill>
                 <a:latin typeface="Trebuchet MS" pitchFamily="34" charset="0"/>
                 <a:ea typeface="Trebuchet MS" pitchFamily="34" charset="-122"/>
                 <a:cs typeface="Trebuchet MS" pitchFamily="34" charset="-120"/>
               </a:rPr>
-              <a:t>FALSE</a:t>
+              <a:t>TRUE</a:t>
             </a:r>
             <a:endParaRPr lang="en-US" sz="1100" dirty="0"/>
           </a:p>
@@ -36203,7 +36446,7 @@
                 <a:ea typeface="Calibri" pitchFamily="34" charset="-122"/>
                 <a:cs typeface="Calibri" pitchFamily="34" charset="-120"/>
               </a:rPr>
-              <a:t>4.  The word 'misspell' contains the prefix 'mis', which means wrongly or badly.</a:t>
+              <a:t>4.  'spells' means 'runs extremely fast down a track'.</a:t>
             </a:r>
             <a:endParaRPr lang="en-US" sz="1300" dirty="0"/>
           </a:p>
@@ -36226,11 +36469,11 @@
             </a:avLst>
           </a:prstGeom>
           <a:solidFill>
-            <a:srgbClr val="DCFCE7"/>
-          </a:solidFill>
-          <a:ln w="12700">
-            <a:solidFill>
-              <a:srgbClr val="16A34A"/>
+            <a:srgbClr val="FEE2E2"/>
+          </a:solidFill>
+          <a:ln w="12700">
+            <a:solidFill>
+              <a:srgbClr val="DC2626"/>
             </a:solidFill>
             <a:prstDash val="solid"/>
           </a:ln>
@@ -36263,13 +36506,13 @@
             <a:r>
               <a:rPr lang="en-US" sz="1100" b="1" dirty="0">
                 <a:solidFill>
-                  <a:srgbClr val="16A34A"/>
+                  <a:srgbClr val="DC2626"/>
                 </a:solidFill>
                 <a:latin typeface="Trebuchet MS" pitchFamily="34" charset="0"/>
                 <a:ea typeface="Trebuchet MS" pitchFamily="34" charset="-122"/>
                 <a:cs typeface="Trebuchet MS" pitchFamily="34" charset="-120"/>
               </a:rPr>
-              <a:t>TRUE</a:t>
+              <a:t>FALSE</a:t>
             </a:r>
             <a:endParaRPr lang="en-US" sz="1100" dirty="0"/>
           </a:p>
@@ -36342,7 +36585,7 @@
                 <a:ea typeface="Calibri" pitchFamily="34" charset="-122"/>
                 <a:cs typeface="Calibri" pitchFamily="34" charset="-120"/>
               </a:rPr>
-              <a:t>5.  Adding the prefix 're' to 'spell' means to spell something for the very first time.</a:t>
+              <a:t>5.  'spell' means 'to say or write the letters of a word in the correct order'.</a:t>
             </a:r>
             <a:endParaRPr lang="en-US" sz="1300" dirty="0"/>
           </a:p>
@@ -36365,11 +36608,11 @@
             </a:avLst>
           </a:prstGeom>
           <a:solidFill>
-            <a:srgbClr val="FEE2E2"/>
-          </a:solidFill>
-          <a:ln w="12700">
-            <a:solidFill>
-              <a:srgbClr val="DC2626"/>
+            <a:srgbClr val="DCFCE7"/>
+          </a:solidFill>
+          <a:ln w="12700">
+            <a:solidFill>
+              <a:srgbClr val="16A34A"/>
             </a:solidFill>
             <a:prstDash val="solid"/>
           </a:ln>
@@ -36402,13 +36645,13 @@
             <a:r>
               <a:rPr lang="en-US" sz="1100" b="1" dirty="0">
                 <a:solidFill>
-                  <a:srgbClr val="DC2626"/>
+                  <a:srgbClr val="16A34A"/>
                 </a:solidFill>
                 <a:latin typeface="Trebuchet MS" pitchFamily="34" charset="0"/>
                 <a:ea typeface="Trebuchet MS" pitchFamily="34" charset="-122"/>
                 <a:cs typeface="Trebuchet MS" pitchFamily="34" charset="-120"/>
               </a:rPr>
-              <a:t>FALSE</a:t>
+              <a:t>TRUE</a:t>
             </a:r>
             <a:endParaRPr lang="en-US" sz="1100" dirty="0"/>
           </a:p>
@@ -36700,7 +36943,7 @@
                 <a:ea typeface="Calibri" pitchFamily="34" charset="-122"/>
                 <a:cs typeface="Calibri" pitchFamily="34" charset="-120"/>
               </a:rPr>
-              <a:t>Word Labs  •  wordlabs.app  •  Root: 'spell' = to name letters in order</a:t>
+              <a:t>Word Labs  •  wordlabs.app  •  Root: 'spell' = to write or say letters in order</a:t>
             </a:r>
             <a:endParaRPr lang="en-US" sz="800" dirty="0"/>
           </a:p>
@@ -36837,7 +37080,7 @@
                 <a:ea typeface="Trebuchet MS" pitchFamily="34" charset="-122"/>
                 <a:cs typeface="Trebuchet MS" pitchFamily="34" charset="-120"/>
               </a:rPr>
-              <a:t>to name letters in order</a:t>
+              <a:t>to write or say letters in order</a:t>
             </a:r>
             <a:endParaRPr lang="en-US" sz="2000" dirty="0"/>
           </a:p>
@@ -36876,7 +37119,7 @@
                 <a:ea typeface="Calibri" pitchFamily="34" charset="-122"/>
                 <a:cs typeface="Calibri" pitchFamily="34" charset="-120"/>
               </a:rPr>
-              <a:t>Origin: Latin: spellan</a:t>
+              <a:t>Origin: Anglo-Saxon (Old English) root</a:t>
             </a:r>
             <a:endParaRPr lang="en-US" sz="1100" dirty="0"/>
           </a:p>
@@ -36981,7 +37224,7 @@
                 <a:ea typeface="Trebuchet MS" pitchFamily="34" charset="-122"/>
                 <a:cs typeface="Trebuchet MS" pitchFamily="34" charset="-120"/>
               </a:rPr>
-              <a:t>spelling</a:t>
+              <a:t>spell</a:t>
             </a:r>
             <a:endParaRPr lang="en-US" sz="1300" dirty="0"/>
           </a:p>
@@ -37047,7 +37290,7 @@
                 <a:ea typeface="Trebuchet MS" pitchFamily="34" charset="-122"/>
                 <a:cs typeface="Trebuchet MS" pitchFamily="34" charset="-120"/>
               </a:rPr>
-              <a:t>misspell</a:t>
+              <a:t>spells</a:t>
             </a:r>
             <a:endParaRPr lang="en-US" sz="1300" dirty="0"/>
           </a:p>
@@ -37113,271 +37356,7 @@
                 <a:ea typeface="Trebuchet MS" pitchFamily="34" charset="-122"/>
                 <a:cs typeface="Trebuchet MS" pitchFamily="34" charset="-120"/>
               </a:rPr>
-              <a:t>speller</a:t>
-            </a:r>
-            <a:endParaRPr lang="en-US" sz="1300" dirty="0"/>
-          </a:p>
-        </p:txBody>
-      </p:sp>
-      <p:sp>
-        <p:nvSpPr>
-          <p:cNvPr id="22" name="Shape 20"/>
-          <p:cNvSpPr/>
-          <p:nvPr/>
-        </p:nvSpPr>
-        <p:spPr>
-          <a:xfrm>
-            <a:off x="6812280" y="2743200"/>
-            <a:ext cx="2011680" cy="502920"/>
-          </a:xfrm>
-          <a:prstGeom prst="rect">
-            <a:avLst>
-              <a:gd name="adj" fmla="val 14545"/>
-            </a:avLst>
-          </a:prstGeom>
-          <a:solidFill>
-            <a:srgbClr val="EEF2FF"/>
-          </a:solidFill>
-          <a:ln w="12700">
-            <a:solidFill>
-              <a:srgbClr val="6366F1"/>
-            </a:solidFill>
-            <a:prstDash val="solid"/>
-          </a:ln>
-        </p:spPr>
-      </p:sp>
-      <p:sp>
-        <p:nvSpPr>
-          <p:cNvPr id="23" name="Text 21"/>
-          <p:cNvSpPr/>
-          <p:nvPr/>
-        </p:nvSpPr>
-        <p:spPr>
-          <a:xfrm>
-            <a:off x="6812280" y="2743200"/>
-            <a:ext cx="2011680" cy="502920"/>
-          </a:xfrm>
-          <a:prstGeom prst="rect">
-            <a:avLst/>
-          </a:prstGeom>
-          <a:noFill/>
-          <a:ln/>
-        </p:spPr>
-        <p:txBody>
-          <a:bodyPr wrap="square" lIns="0" tIns="0" rIns="0" bIns="0" rtlCol="0" anchor="ctr"/>
-          <a:lstStyle/>
-          <a:p>
-            <a:pPr algn="ctr" indent="0" marL="0">
-              <a:buNone/>
-            </a:pPr>
-            <a:r>
-              <a:rPr lang="en-US" sz="1300" b="1" dirty="0">
-                <a:solidFill>
-                  <a:srgbClr val="4338CA"/>
-                </a:solidFill>
-                <a:latin typeface="Trebuchet MS" pitchFamily="34" charset="0"/>
-                <a:ea typeface="Trebuchet MS" pitchFamily="34" charset="-122"/>
-                <a:cs typeface="Trebuchet MS" pitchFamily="34" charset="-120"/>
-              </a:rPr>
-              <a:t>misspelled</a:t>
-            </a:r>
-            <a:endParaRPr lang="en-US" sz="1300" dirty="0"/>
-          </a:p>
-        </p:txBody>
-      </p:sp>
-      <p:sp>
-        <p:nvSpPr>
-          <p:cNvPr id="24" name="Shape 22"/>
-          <p:cNvSpPr/>
-          <p:nvPr/>
-        </p:nvSpPr>
-        <p:spPr>
-          <a:xfrm>
-            <a:off x="365760" y="3401568"/>
-            <a:ext cx="2011680" cy="502920"/>
-          </a:xfrm>
-          <a:prstGeom prst="rect">
-            <a:avLst>
-              <a:gd name="adj" fmla="val 14545"/>
-            </a:avLst>
-          </a:prstGeom>
-          <a:solidFill>
-            <a:srgbClr val="EEF2FF"/>
-          </a:solidFill>
-          <a:ln w="12700">
-            <a:solidFill>
-              <a:srgbClr val="6366F1"/>
-            </a:solidFill>
-            <a:prstDash val="solid"/>
-          </a:ln>
-        </p:spPr>
-      </p:sp>
-      <p:sp>
-        <p:nvSpPr>
-          <p:cNvPr id="25" name="Text 23"/>
-          <p:cNvSpPr/>
-          <p:nvPr/>
-        </p:nvSpPr>
-        <p:spPr>
-          <a:xfrm>
-            <a:off x="365760" y="3401568"/>
-            <a:ext cx="2011680" cy="502920"/>
-          </a:xfrm>
-          <a:prstGeom prst="rect">
-            <a:avLst/>
-          </a:prstGeom>
-          <a:noFill/>
-          <a:ln/>
-        </p:spPr>
-        <p:txBody>
-          <a:bodyPr wrap="square" lIns="0" tIns="0" rIns="0" bIns="0" rtlCol="0" anchor="ctr"/>
-          <a:lstStyle/>
-          <a:p>
-            <a:pPr algn="ctr" indent="0" marL="0">
-              <a:buNone/>
-            </a:pPr>
-            <a:r>
-              <a:rPr lang="en-US" sz="1300" b="1" dirty="0">
-                <a:solidFill>
-                  <a:srgbClr val="4338CA"/>
-                </a:solidFill>
-                <a:latin typeface="Trebuchet MS" pitchFamily="34" charset="0"/>
-                <a:ea typeface="Trebuchet MS" pitchFamily="34" charset="-122"/>
-                <a:cs typeface="Trebuchet MS" pitchFamily="34" charset="-120"/>
-              </a:rPr>
-              <a:t>spellbound</a:t>
-            </a:r>
-            <a:endParaRPr lang="en-US" sz="1300" dirty="0"/>
-          </a:p>
-        </p:txBody>
-      </p:sp>
-      <p:sp>
-        <p:nvSpPr>
-          <p:cNvPr id="26" name="Shape 24"/>
-          <p:cNvSpPr/>
-          <p:nvPr/>
-        </p:nvSpPr>
-        <p:spPr>
-          <a:xfrm>
-            <a:off x="2514600" y="3401568"/>
-            <a:ext cx="2011680" cy="502920"/>
-          </a:xfrm>
-          <a:prstGeom prst="rect">
-            <a:avLst>
-              <a:gd name="adj" fmla="val 14545"/>
-            </a:avLst>
-          </a:prstGeom>
-          <a:solidFill>
-            <a:srgbClr val="EEF2FF"/>
-          </a:solidFill>
-          <a:ln w="12700">
-            <a:solidFill>
-              <a:srgbClr val="6366F1"/>
-            </a:solidFill>
-            <a:prstDash val="solid"/>
-          </a:ln>
-        </p:spPr>
-      </p:sp>
-      <p:sp>
-        <p:nvSpPr>
-          <p:cNvPr id="27" name="Text 25"/>
-          <p:cNvSpPr/>
-          <p:nvPr/>
-        </p:nvSpPr>
-        <p:spPr>
-          <a:xfrm>
-            <a:off x="2514600" y="3401568"/>
-            <a:ext cx="2011680" cy="502920"/>
-          </a:xfrm>
-          <a:prstGeom prst="rect">
-            <a:avLst/>
-          </a:prstGeom>
-          <a:noFill/>
-          <a:ln/>
-        </p:spPr>
-        <p:txBody>
-          <a:bodyPr wrap="square" lIns="0" tIns="0" rIns="0" bIns="0" rtlCol="0" anchor="ctr"/>
-          <a:lstStyle/>
-          <a:p>
-            <a:pPr algn="ctr" indent="0" marL="0">
-              <a:buNone/>
-            </a:pPr>
-            <a:r>
-              <a:rPr lang="en-US" sz="1300" b="1" dirty="0">
-                <a:solidFill>
-                  <a:srgbClr val="4338CA"/>
-                </a:solidFill>
-                <a:latin typeface="Trebuchet MS" pitchFamily="34" charset="0"/>
-                <a:ea typeface="Trebuchet MS" pitchFamily="34" charset="-122"/>
-                <a:cs typeface="Trebuchet MS" pitchFamily="34" charset="-120"/>
-              </a:rPr>
-              <a:t>respell</a:t>
-            </a:r>
-            <a:endParaRPr lang="en-US" sz="1300" dirty="0"/>
-          </a:p>
-        </p:txBody>
-      </p:sp>
-      <p:sp>
-        <p:nvSpPr>
-          <p:cNvPr id="28" name="Shape 26"/>
-          <p:cNvSpPr/>
-          <p:nvPr/>
-        </p:nvSpPr>
-        <p:spPr>
-          <a:xfrm>
-            <a:off x="4663440" y="3401568"/>
-            <a:ext cx="2011680" cy="502920"/>
-          </a:xfrm>
-          <a:prstGeom prst="rect">
-            <a:avLst>
-              <a:gd name="adj" fmla="val 14545"/>
-            </a:avLst>
-          </a:prstGeom>
-          <a:solidFill>
-            <a:srgbClr val="EEF2FF"/>
-          </a:solidFill>
-          <a:ln w="12700">
-            <a:solidFill>
-              <a:srgbClr val="6366F1"/>
-            </a:solidFill>
-            <a:prstDash val="solid"/>
-          </a:ln>
-        </p:spPr>
-      </p:sp>
-      <p:sp>
-        <p:nvSpPr>
-          <p:cNvPr id="29" name="Text 27"/>
-          <p:cNvSpPr/>
-          <p:nvPr/>
-        </p:nvSpPr>
-        <p:spPr>
-          <a:xfrm>
-            <a:off x="4663440" y="3401568"/>
-            <a:ext cx="2011680" cy="502920"/>
-          </a:xfrm>
-          <a:prstGeom prst="rect">
-            <a:avLst/>
-          </a:prstGeom>
-          <a:noFill/>
-          <a:ln/>
-        </p:spPr>
-        <p:txBody>
-          <a:bodyPr wrap="square" lIns="0" tIns="0" rIns="0" bIns="0" rtlCol="0" anchor="ctr"/>
-          <a:lstStyle/>
-          <a:p>
-            <a:pPr algn="ctr" indent="0" marL="0">
-              <a:buNone/>
-            </a:pPr>
-            <a:r>
-              <a:rPr lang="en-US" sz="1300" b="1" dirty="0">
-                <a:solidFill>
-                  <a:srgbClr val="4338CA"/>
-                </a:solidFill>
-                <a:latin typeface="Trebuchet MS" pitchFamily="34" charset="0"/>
-                <a:ea typeface="Trebuchet MS" pitchFamily="34" charset="-122"/>
-                <a:cs typeface="Trebuchet MS" pitchFamily="34" charset="-120"/>
-              </a:rPr>
-              <a:t>spellcheck</a:t>
+              <a:t>spelled</a:t>
             </a:r>
             <a:endParaRPr lang="en-US" sz="1300" dirty="0"/>
           </a:p>
@@ -37669,7 +37648,7 @@
                 <a:ea typeface="Calibri" pitchFamily="34" charset="-122"/>
                 <a:cs typeface="Calibri" pitchFamily="34" charset="-120"/>
               </a:rPr>
-              <a:t>Word Labs  •  wordlabs.app  •  Root: 'spell' = to name letters in order</a:t>
+              <a:t>Word Labs  •  wordlabs.app  •  Root: 'spell' = to write or say letters in order</a:t>
             </a:r>
             <a:endParaRPr lang="en-US" sz="800" dirty="0"/>
           </a:p>
@@ -38119,7 +38098,7 @@
             <a:avLst/>
           </a:prstGeom>
           <a:solidFill>
-            <a:srgbClr val="DDD6FE"/>
+            <a:srgbClr val="F1F5F9"/>
           </a:solidFill>
           <a:ln w="12700">
             <a:solidFill>
@@ -38131,18 +38110,68 @@
       </p:sp>
       <p:sp>
         <p:nvSpPr>
-          <p:cNvPr id="24" name="Text 22"/>
-          <p:cNvSpPr/>
-          <p:nvPr/>
-        </p:nvSpPr>
-        <p:spPr>
-          <a:xfrm>
-            <a:off x="640080" y="2212848"/>
+          <p:cNvPr id="24" name="Shape 22"/>
+          <p:cNvSpPr/>
+          <p:nvPr/>
+        </p:nvSpPr>
+        <p:spPr>
+          <a:xfrm>
+            <a:off x="3291840" y="2212848"/>
+            <a:ext cx="1645920" cy="420624"/>
+          </a:xfrm>
+          <a:prstGeom prst="rect">
+            <a:avLst/>
+          </a:prstGeom>
+          <a:solidFill>
+            <a:srgbClr val="F1F5F9"/>
+          </a:solidFill>
+          <a:ln w="12700">
+            <a:solidFill>
+              <a:srgbClr val="E5E7EB"/>
+            </a:solidFill>
+            <a:prstDash val="solid"/>
+          </a:ln>
+        </p:spPr>
+      </p:sp>
+      <p:sp>
+        <p:nvSpPr>
+          <p:cNvPr id="25" name="Shape 23"/>
+          <p:cNvSpPr/>
+          <p:nvPr/>
+        </p:nvSpPr>
+        <p:spPr>
+          <a:xfrm>
+            <a:off x="5943600" y="2212848"/>
             <a:ext cx="1463040" cy="420624"/>
           </a:xfrm>
           <a:prstGeom prst="rect">
             <a:avLst/>
           </a:prstGeom>
+          <a:solidFill>
+            <a:srgbClr val="FCE7F3"/>
+          </a:solidFill>
+          <a:ln w="12700">
+            <a:solidFill>
+              <a:srgbClr val="E5E7EB"/>
+            </a:solidFill>
+            <a:prstDash val="solid"/>
+          </a:ln>
+        </p:spPr>
+      </p:sp>
+      <p:sp>
+        <p:nvSpPr>
+          <p:cNvPr id="26" name="Text 24"/>
+          <p:cNvSpPr/>
+          <p:nvPr/>
+        </p:nvSpPr>
+        <p:spPr>
+          <a:xfrm>
+            <a:off x="5943600" y="2212848"/>
+            <a:ext cx="1463040" cy="420624"/>
+          </a:xfrm>
+          <a:prstGeom prst="rect">
+            <a:avLst/>
+          </a:prstGeom>
           <a:noFill/>
           <a:ln/>
         </p:spPr>
@@ -38156,13 +38185,13 @@
             <a:r>
               <a:rPr lang="en-US" sz="1300" b="1" dirty="0">
                 <a:solidFill>
-                  <a:srgbClr val="4C1D95"/>
+                  <a:srgbClr val="9D174D"/>
                 </a:solidFill>
                 <a:latin typeface="Trebuchet MS" pitchFamily="34" charset="0"/>
                 <a:ea typeface="Trebuchet MS" pitchFamily="34" charset="-122"/>
                 <a:cs typeface="Trebuchet MS" pitchFamily="34" charset="-120"/>
               </a:rPr>
-              <a:t>un-</a:t>
+              <a:t>-ed</a:t>
             </a:r>
             <a:endParaRPr lang="en-US" sz="1300" dirty="0"/>
           </a:p>
@@ -38170,20 +38199,45 @@
       </p:sp>
       <p:sp>
         <p:nvSpPr>
-          <p:cNvPr id="25" name="Shape 23"/>
-          <p:cNvSpPr/>
-          <p:nvPr/>
-        </p:nvSpPr>
-        <p:spPr>
-          <a:xfrm>
-            <a:off x="3291840" y="2212848"/>
+          <p:cNvPr id="27" name="Shape 25"/>
+          <p:cNvSpPr/>
+          <p:nvPr/>
+        </p:nvSpPr>
+        <p:spPr>
+          <a:xfrm>
+            <a:off x="640080" y="2670048"/>
+            <a:ext cx="1463040" cy="420624"/>
+          </a:xfrm>
+          <a:prstGeom prst="rect">
+            <a:avLst/>
+          </a:prstGeom>
+          <a:solidFill>
+            <a:srgbClr val="F8FAFC"/>
+          </a:solidFill>
+          <a:ln w="12700">
+            <a:solidFill>
+              <a:srgbClr val="E5E7EB"/>
+            </a:solidFill>
+            <a:prstDash val="solid"/>
+          </a:ln>
+        </p:spPr>
+      </p:sp>
+      <p:sp>
+        <p:nvSpPr>
+          <p:cNvPr id="28" name="Shape 26"/>
+          <p:cNvSpPr/>
+          <p:nvPr/>
+        </p:nvSpPr>
+        <p:spPr>
+          <a:xfrm>
+            <a:off x="3291840" y="2670048"/>
             <a:ext cx="1645920" cy="420624"/>
           </a:xfrm>
           <a:prstGeom prst="rect">
             <a:avLst/>
           </a:prstGeom>
           <a:solidFill>
-            <a:srgbClr val="F1F5F9"/>
+            <a:srgbClr val="F8FAFC"/>
           </a:solidFill>
           <a:ln w="12700">
             <a:solidFill>
@@ -38195,13 +38249,13 @@
       </p:sp>
       <p:sp>
         <p:nvSpPr>
-          <p:cNvPr id="26" name="Shape 24"/>
-          <p:cNvSpPr/>
-          <p:nvPr/>
-        </p:nvSpPr>
-        <p:spPr>
-          <a:xfrm>
-            <a:off x="5943600" y="2212848"/>
+          <p:cNvPr id="29" name="Shape 27"/>
+          <p:cNvSpPr/>
+          <p:nvPr/>
+        </p:nvSpPr>
+        <p:spPr>
+          <a:xfrm>
+            <a:off x="5943600" y="2670048"/>
             <a:ext cx="1463040" cy="420624"/>
           </a:xfrm>
           <a:prstGeom prst="rect">
@@ -38220,13 +38274,13 @@
       </p:sp>
       <p:sp>
         <p:nvSpPr>
-          <p:cNvPr id="27" name="Text 25"/>
-          <p:cNvSpPr/>
-          <p:nvPr/>
-        </p:nvSpPr>
-        <p:spPr>
-          <a:xfrm>
-            <a:off x="5943600" y="2212848"/>
+          <p:cNvPr id="30" name="Text 28"/>
+          <p:cNvSpPr/>
+          <p:nvPr/>
+        </p:nvSpPr>
+        <p:spPr>
+          <a:xfrm>
+            <a:off x="5943600" y="2670048"/>
             <a:ext cx="1463040" cy="420624"/>
           </a:xfrm>
           <a:prstGeom prst="rect">
@@ -38251,7 +38305,7 @@
                 <a:ea typeface="Trebuchet MS" pitchFamily="34" charset="-122"/>
                 <a:cs typeface="Trebuchet MS" pitchFamily="34" charset="-120"/>
               </a:rPr>
-              <a:t>-ed</a:t>
+              <a:t>-er</a:t>
             </a:r>
             <a:endParaRPr lang="en-US" sz="1300" dirty="0"/>
           </a:p>
@@ -38259,20 +38313,20 @@
       </p:sp>
       <p:sp>
         <p:nvSpPr>
-          <p:cNvPr id="28" name="Shape 26"/>
-          <p:cNvSpPr/>
-          <p:nvPr/>
-        </p:nvSpPr>
-        <p:spPr>
-          <a:xfrm>
-            <a:off x="640080" y="2670048"/>
+          <p:cNvPr id="31" name="Shape 29"/>
+          <p:cNvSpPr/>
+          <p:nvPr/>
+        </p:nvSpPr>
+        <p:spPr>
+          <a:xfrm>
+            <a:off x="640080" y="3127248"/>
             <a:ext cx="1463040" cy="420624"/>
           </a:xfrm>
           <a:prstGeom prst="rect">
             <a:avLst/>
           </a:prstGeom>
           <a:solidFill>
-            <a:srgbClr val="DDD6FE"/>
+            <a:srgbClr val="F1F5F9"/>
           </a:solidFill>
           <a:ln w="12700">
             <a:solidFill>
@@ -38284,18 +38338,68 @@
       </p:sp>
       <p:sp>
         <p:nvSpPr>
-          <p:cNvPr id="29" name="Text 27"/>
-          <p:cNvSpPr/>
-          <p:nvPr/>
-        </p:nvSpPr>
-        <p:spPr>
-          <a:xfrm>
-            <a:off x="640080" y="2670048"/>
+          <p:cNvPr id="32" name="Shape 30"/>
+          <p:cNvSpPr/>
+          <p:nvPr/>
+        </p:nvSpPr>
+        <p:spPr>
+          <a:xfrm>
+            <a:off x="3291840" y="3127248"/>
+            <a:ext cx="1645920" cy="420624"/>
+          </a:xfrm>
+          <a:prstGeom prst="rect">
+            <a:avLst/>
+          </a:prstGeom>
+          <a:solidFill>
+            <a:srgbClr val="F1F5F9"/>
+          </a:solidFill>
+          <a:ln w="12700">
+            <a:solidFill>
+              <a:srgbClr val="E5E7EB"/>
+            </a:solidFill>
+            <a:prstDash val="solid"/>
+          </a:ln>
+        </p:spPr>
+      </p:sp>
+      <p:sp>
+        <p:nvSpPr>
+          <p:cNvPr id="33" name="Shape 31"/>
+          <p:cNvSpPr/>
+          <p:nvPr/>
+        </p:nvSpPr>
+        <p:spPr>
+          <a:xfrm>
+            <a:off x="5943600" y="3127248"/>
             <a:ext cx="1463040" cy="420624"/>
           </a:xfrm>
           <a:prstGeom prst="rect">
             <a:avLst/>
           </a:prstGeom>
+          <a:solidFill>
+            <a:srgbClr val="FCE7F3"/>
+          </a:solidFill>
+          <a:ln w="12700">
+            <a:solidFill>
+              <a:srgbClr val="E5E7EB"/>
+            </a:solidFill>
+            <a:prstDash val="solid"/>
+          </a:ln>
+        </p:spPr>
+      </p:sp>
+      <p:sp>
+        <p:nvSpPr>
+          <p:cNvPr id="34" name="Text 32"/>
+          <p:cNvSpPr/>
+          <p:nvPr/>
+        </p:nvSpPr>
+        <p:spPr>
+          <a:xfrm>
+            <a:off x="5943600" y="3127248"/>
+            <a:ext cx="1463040" cy="420624"/>
+          </a:xfrm>
+          <a:prstGeom prst="rect">
+            <a:avLst/>
+          </a:prstGeom>
           <a:noFill/>
           <a:ln/>
         </p:spPr>
@@ -38309,13 +38413,13 @@
             <a:r>
               <a:rPr lang="en-US" sz="1300" b="1" dirty="0">
                 <a:solidFill>
-                  <a:srgbClr val="4C1D95"/>
+                  <a:srgbClr val="9D174D"/>
                 </a:solidFill>
                 <a:latin typeface="Trebuchet MS" pitchFamily="34" charset="0"/>
                 <a:ea typeface="Trebuchet MS" pitchFamily="34" charset="-122"/>
                 <a:cs typeface="Trebuchet MS" pitchFamily="34" charset="-120"/>
               </a:rPr>
-              <a:t>re-</a:t>
+              <a:t>-s</a:t>
             </a:r>
             <a:endParaRPr lang="en-US" sz="1300" dirty="0"/>
           </a:p>
@@ -38323,408 +38427,13 @@
       </p:sp>
       <p:sp>
         <p:nvSpPr>
-          <p:cNvPr id="30" name="Shape 28"/>
-          <p:cNvSpPr/>
-          <p:nvPr/>
-        </p:nvSpPr>
-        <p:spPr>
-          <a:xfrm>
-            <a:off x="3291840" y="2670048"/>
-            <a:ext cx="1645920" cy="420624"/>
-          </a:xfrm>
-          <a:prstGeom prst="rect">
-            <a:avLst/>
-          </a:prstGeom>
-          <a:solidFill>
-            <a:srgbClr val="F8FAFC"/>
-          </a:solidFill>
-          <a:ln w="12700">
-            <a:solidFill>
-              <a:srgbClr val="E5E7EB"/>
-            </a:solidFill>
-            <a:prstDash val="solid"/>
-          </a:ln>
-        </p:spPr>
-      </p:sp>
-      <p:sp>
-        <p:nvSpPr>
-          <p:cNvPr id="31" name="Shape 29"/>
-          <p:cNvSpPr/>
-          <p:nvPr/>
-        </p:nvSpPr>
-        <p:spPr>
-          <a:xfrm>
-            <a:off x="5943600" y="2670048"/>
-            <a:ext cx="1463040" cy="420624"/>
-          </a:xfrm>
-          <a:prstGeom prst="rect">
-            <a:avLst/>
-          </a:prstGeom>
-          <a:solidFill>
-            <a:srgbClr val="FCE7F3"/>
-          </a:solidFill>
-          <a:ln w="12700">
-            <a:solidFill>
-              <a:srgbClr val="E5E7EB"/>
-            </a:solidFill>
-            <a:prstDash val="solid"/>
-          </a:ln>
-        </p:spPr>
-      </p:sp>
-      <p:sp>
-        <p:nvSpPr>
-          <p:cNvPr id="32" name="Text 30"/>
-          <p:cNvSpPr/>
-          <p:nvPr/>
-        </p:nvSpPr>
-        <p:spPr>
-          <a:xfrm>
-            <a:off x="5943600" y="2670048"/>
-            <a:ext cx="1463040" cy="420624"/>
-          </a:xfrm>
-          <a:prstGeom prst="rect">
-            <a:avLst/>
-          </a:prstGeom>
-          <a:noFill/>
-          <a:ln/>
-        </p:spPr>
-        <p:txBody>
-          <a:bodyPr wrap="square" lIns="0" tIns="0" rIns="0" bIns="0" rtlCol="0" anchor="ctr"/>
-          <a:lstStyle/>
-          <a:p>
-            <a:pPr algn="ctr" indent="0" marL="0">
-              <a:buNone/>
-            </a:pPr>
-            <a:r>
-              <a:rPr lang="en-US" sz="1300" b="1" dirty="0">
-                <a:solidFill>
-                  <a:srgbClr val="9D174D"/>
-                </a:solidFill>
-                <a:latin typeface="Trebuchet MS" pitchFamily="34" charset="0"/>
-                <a:ea typeface="Trebuchet MS" pitchFamily="34" charset="-122"/>
-                <a:cs typeface="Trebuchet MS" pitchFamily="34" charset="-120"/>
-              </a:rPr>
-              <a:t>-er</a:t>
-            </a:r>
-            <a:endParaRPr lang="en-US" sz="1300" dirty="0"/>
-          </a:p>
-        </p:txBody>
-      </p:sp>
-      <p:sp>
-        <p:nvSpPr>
-          <p:cNvPr id="33" name="Shape 31"/>
-          <p:cNvSpPr/>
-          <p:nvPr/>
-        </p:nvSpPr>
-        <p:spPr>
-          <a:xfrm>
-            <a:off x="640080" y="3127248"/>
-            <a:ext cx="1463040" cy="420624"/>
-          </a:xfrm>
-          <a:prstGeom prst="rect">
-            <a:avLst/>
-          </a:prstGeom>
-          <a:solidFill>
-            <a:srgbClr val="DDD6FE"/>
-          </a:solidFill>
-          <a:ln w="12700">
-            <a:solidFill>
-              <a:srgbClr val="E5E7EB"/>
-            </a:solidFill>
-            <a:prstDash val="solid"/>
-          </a:ln>
-        </p:spPr>
-      </p:sp>
-      <p:sp>
-        <p:nvSpPr>
-          <p:cNvPr id="34" name="Text 32"/>
-          <p:cNvSpPr/>
-          <p:nvPr/>
-        </p:nvSpPr>
-        <p:spPr>
-          <a:xfrm>
-            <a:off x="640080" y="3127248"/>
-            <a:ext cx="1463040" cy="420624"/>
-          </a:xfrm>
-          <a:prstGeom prst="rect">
-            <a:avLst/>
-          </a:prstGeom>
-          <a:noFill/>
-          <a:ln/>
-        </p:spPr>
-        <p:txBody>
-          <a:bodyPr wrap="square" lIns="0" tIns="0" rIns="0" bIns="0" rtlCol="0" anchor="ctr"/>
-          <a:lstStyle/>
-          <a:p>
-            <a:pPr algn="ctr" indent="0" marL="0">
-              <a:buNone/>
-            </a:pPr>
-            <a:r>
-              <a:rPr lang="en-US" sz="1300" b="1" dirty="0">
-                <a:solidFill>
-                  <a:srgbClr val="4C1D95"/>
-                </a:solidFill>
-                <a:latin typeface="Trebuchet MS" pitchFamily="34" charset="0"/>
-                <a:ea typeface="Trebuchet MS" pitchFamily="34" charset="-122"/>
-                <a:cs typeface="Trebuchet MS" pitchFamily="34" charset="-120"/>
-              </a:rPr>
-              <a:t>over-</a:t>
-            </a:r>
-            <a:endParaRPr lang="en-US" sz="1300" dirty="0"/>
-          </a:p>
-        </p:txBody>
-      </p:sp>
-      <p:sp>
-        <p:nvSpPr>
-          <p:cNvPr id="35" name="Shape 33"/>
-          <p:cNvSpPr/>
-          <p:nvPr/>
-        </p:nvSpPr>
-        <p:spPr>
-          <a:xfrm>
-            <a:off x="3291840" y="3127248"/>
-            <a:ext cx="1645920" cy="420624"/>
-          </a:xfrm>
-          <a:prstGeom prst="rect">
-            <a:avLst/>
-          </a:prstGeom>
-          <a:solidFill>
-            <a:srgbClr val="F1F5F9"/>
-          </a:solidFill>
-          <a:ln w="12700">
-            <a:solidFill>
-              <a:srgbClr val="E5E7EB"/>
-            </a:solidFill>
-            <a:prstDash val="solid"/>
-          </a:ln>
-        </p:spPr>
-      </p:sp>
-      <p:sp>
-        <p:nvSpPr>
-          <p:cNvPr id="36" name="Shape 34"/>
-          <p:cNvSpPr/>
-          <p:nvPr/>
-        </p:nvSpPr>
-        <p:spPr>
-          <a:xfrm>
-            <a:off x="5943600" y="3127248"/>
-            <a:ext cx="1463040" cy="420624"/>
-          </a:xfrm>
-          <a:prstGeom prst="rect">
-            <a:avLst/>
-          </a:prstGeom>
-          <a:solidFill>
-            <a:srgbClr val="FCE7F3"/>
-          </a:solidFill>
-          <a:ln w="12700">
-            <a:solidFill>
-              <a:srgbClr val="E5E7EB"/>
-            </a:solidFill>
-            <a:prstDash val="solid"/>
-          </a:ln>
-        </p:spPr>
-      </p:sp>
-      <p:sp>
-        <p:nvSpPr>
-          <p:cNvPr id="37" name="Text 35"/>
-          <p:cNvSpPr/>
-          <p:nvPr/>
-        </p:nvSpPr>
-        <p:spPr>
-          <a:xfrm>
-            <a:off x="5943600" y="3127248"/>
-            <a:ext cx="1463040" cy="420624"/>
-          </a:xfrm>
-          <a:prstGeom prst="rect">
-            <a:avLst/>
-          </a:prstGeom>
-          <a:noFill/>
-          <a:ln/>
-        </p:spPr>
-        <p:txBody>
-          <a:bodyPr wrap="square" lIns="0" tIns="0" rIns="0" bIns="0" rtlCol="0" anchor="ctr"/>
-          <a:lstStyle/>
-          <a:p>
-            <a:pPr algn="ctr" indent="0" marL="0">
-              <a:buNone/>
-            </a:pPr>
-            <a:r>
-              <a:rPr lang="en-US" sz="1300" b="1" dirty="0">
-                <a:solidFill>
-                  <a:srgbClr val="9D174D"/>
-                </a:solidFill>
-                <a:latin typeface="Trebuchet MS" pitchFamily="34" charset="0"/>
-                <a:ea typeface="Trebuchet MS" pitchFamily="34" charset="-122"/>
-                <a:cs typeface="Trebuchet MS" pitchFamily="34" charset="-120"/>
-              </a:rPr>
-              <a:t>-bound</a:t>
-            </a:r>
-            <a:endParaRPr lang="en-US" sz="1300" dirty="0"/>
-          </a:p>
-        </p:txBody>
-      </p:sp>
-      <p:sp>
-        <p:nvSpPr>
-          <p:cNvPr id="38" name="Shape 36"/>
-          <p:cNvSpPr/>
-          <p:nvPr/>
-        </p:nvSpPr>
-        <p:spPr>
-          <a:xfrm>
-            <a:off x="640080" y="3584448"/>
-            <a:ext cx="1463040" cy="420624"/>
-          </a:xfrm>
-          <a:prstGeom prst="rect">
-            <a:avLst/>
-          </a:prstGeom>
-          <a:solidFill>
-            <a:srgbClr val="DDD6FE"/>
-          </a:solidFill>
-          <a:ln w="12700">
-            <a:solidFill>
-              <a:srgbClr val="E5E7EB"/>
-            </a:solidFill>
-            <a:prstDash val="solid"/>
-          </a:ln>
-        </p:spPr>
-      </p:sp>
-      <p:sp>
-        <p:nvSpPr>
-          <p:cNvPr id="39" name="Text 37"/>
-          <p:cNvSpPr/>
-          <p:nvPr/>
-        </p:nvSpPr>
-        <p:spPr>
-          <a:xfrm>
-            <a:off x="640080" y="3584448"/>
-            <a:ext cx="1463040" cy="420624"/>
-          </a:xfrm>
-          <a:prstGeom prst="rect">
-            <a:avLst/>
-          </a:prstGeom>
-          <a:noFill/>
-          <a:ln/>
-        </p:spPr>
-        <p:txBody>
-          <a:bodyPr wrap="square" lIns="0" tIns="0" rIns="0" bIns="0" rtlCol="0" anchor="ctr"/>
-          <a:lstStyle/>
-          <a:p>
-            <a:pPr algn="ctr" indent="0" marL="0">
-              <a:buNone/>
-            </a:pPr>
-            <a:r>
-              <a:rPr lang="en-US" sz="1300" b="1" dirty="0">
-                <a:solidFill>
-                  <a:srgbClr val="4C1D95"/>
-                </a:solidFill>
-                <a:latin typeface="Trebuchet MS" pitchFamily="34" charset="0"/>
-                <a:ea typeface="Trebuchet MS" pitchFamily="34" charset="-122"/>
-                <a:cs typeface="Trebuchet MS" pitchFamily="34" charset="-120"/>
-              </a:rPr>
-              <a:t>fore-</a:t>
-            </a:r>
-            <a:endParaRPr lang="en-US" sz="1300" dirty="0"/>
-          </a:p>
-        </p:txBody>
-      </p:sp>
-      <p:sp>
-        <p:nvSpPr>
-          <p:cNvPr id="40" name="Shape 38"/>
-          <p:cNvSpPr/>
-          <p:nvPr/>
-        </p:nvSpPr>
-        <p:spPr>
-          <a:xfrm>
-            <a:off x="3291840" y="3584448"/>
-            <a:ext cx="1645920" cy="420624"/>
-          </a:xfrm>
-          <a:prstGeom prst="rect">
-            <a:avLst/>
-          </a:prstGeom>
-          <a:solidFill>
-            <a:srgbClr val="F8FAFC"/>
-          </a:solidFill>
-          <a:ln w="12700">
-            <a:solidFill>
-              <a:srgbClr val="E5E7EB"/>
-            </a:solidFill>
-            <a:prstDash val="solid"/>
-          </a:ln>
-        </p:spPr>
-      </p:sp>
-      <p:sp>
-        <p:nvSpPr>
-          <p:cNvPr id="41" name="Shape 39"/>
-          <p:cNvSpPr/>
-          <p:nvPr/>
-        </p:nvSpPr>
-        <p:spPr>
-          <a:xfrm>
-            <a:off x="5943600" y="3584448"/>
-            <a:ext cx="1463040" cy="420624"/>
-          </a:xfrm>
-          <a:prstGeom prst="rect">
-            <a:avLst/>
-          </a:prstGeom>
-          <a:solidFill>
-            <a:srgbClr val="FCE7F3"/>
-          </a:solidFill>
-          <a:ln w="12700">
-            <a:solidFill>
-              <a:srgbClr val="E5E7EB"/>
-            </a:solidFill>
-            <a:prstDash val="solid"/>
-          </a:ln>
-        </p:spPr>
-      </p:sp>
-      <p:sp>
-        <p:nvSpPr>
-          <p:cNvPr id="42" name="Text 40"/>
-          <p:cNvSpPr/>
-          <p:nvPr/>
-        </p:nvSpPr>
-        <p:spPr>
-          <a:xfrm>
-            <a:off x="5943600" y="3584448"/>
-            <a:ext cx="1463040" cy="420624"/>
-          </a:xfrm>
-          <a:prstGeom prst="rect">
-            <a:avLst/>
-          </a:prstGeom>
-          <a:noFill/>
-          <a:ln/>
-        </p:spPr>
-        <p:txBody>
-          <a:bodyPr wrap="square" lIns="0" tIns="0" rIns="0" bIns="0" rtlCol="0" anchor="ctr"/>
-          <a:lstStyle/>
-          <a:p>
-            <a:pPr algn="ctr" indent="0" marL="0">
-              <a:buNone/>
-            </a:pPr>
-            <a:r>
-              <a:rPr lang="en-US" sz="1300" b="1" dirty="0">
-                <a:solidFill>
-                  <a:srgbClr val="9D174D"/>
-                </a:solidFill>
-                <a:latin typeface="Trebuchet MS" pitchFamily="34" charset="0"/>
-                <a:ea typeface="Trebuchet MS" pitchFamily="34" charset="-122"/>
-                <a:cs typeface="Trebuchet MS" pitchFamily="34" charset="-120"/>
-              </a:rPr>
-              <a:t>-check</a:t>
-            </a:r>
-            <a:endParaRPr lang="en-US" sz="1300" dirty="0"/>
-          </a:p>
-        </p:txBody>
-      </p:sp>
-      <p:sp>
-        <p:nvSpPr>
-          <p:cNvPr id="43" name="Text 41"/>
-          <p:cNvSpPr/>
-          <p:nvPr/>
-        </p:nvSpPr>
-        <p:spPr>
-          <a:xfrm>
-            <a:off x="365760" y="4178808"/>
+          <p:cNvPr id="35" name="Text 33"/>
+          <p:cNvSpPr/>
+          <p:nvPr/>
+        </p:nvSpPr>
+        <p:spPr>
+          <a:xfrm>
+            <a:off x="365760" y="3721608"/>
             <a:ext cx="1097280" cy="420624"/>
           </a:xfrm>
           <a:prstGeom prst="rect">
@@ -38757,13 +38466,13 @@
       </p:sp>
       <p:sp>
         <p:nvSpPr>
-          <p:cNvPr id="44" name="Shape 42"/>
-          <p:cNvSpPr/>
-          <p:nvPr/>
-        </p:nvSpPr>
-        <p:spPr>
-          <a:xfrm>
-            <a:off x="1508760" y="4178808"/>
+          <p:cNvPr id="36" name="Shape 34"/>
+          <p:cNvSpPr/>
+          <p:nvPr/>
+        </p:nvSpPr>
+        <p:spPr>
+          <a:xfrm>
+            <a:off x="1508760" y="3721608"/>
             <a:ext cx="950976" cy="420624"/>
           </a:xfrm>
           <a:prstGeom prst="rect">
@@ -38791,13 +38500,13 @@
       </p:sp>
       <p:sp>
         <p:nvSpPr>
-          <p:cNvPr id="45" name="Text 43"/>
-          <p:cNvSpPr/>
-          <p:nvPr/>
-        </p:nvSpPr>
-        <p:spPr>
-          <a:xfrm>
-            <a:off x="1508760" y="4178808"/>
+          <p:cNvPr id="37" name="Text 35"/>
+          <p:cNvSpPr/>
+          <p:nvPr/>
+        </p:nvSpPr>
+        <p:spPr>
+          <a:xfrm>
+            <a:off x="1508760" y="3721608"/>
             <a:ext cx="950976" cy="420624"/>
           </a:xfrm>
           <a:prstGeom prst="rect">
@@ -38830,13 +38539,13 @@
       </p:sp>
       <p:sp>
         <p:nvSpPr>
-          <p:cNvPr id="46" name="Text 44"/>
-          <p:cNvSpPr/>
-          <p:nvPr/>
-        </p:nvSpPr>
-        <p:spPr>
-          <a:xfrm>
-            <a:off x="2487168" y="4178808"/>
+          <p:cNvPr id="38" name="Text 36"/>
+          <p:cNvSpPr/>
+          <p:nvPr/>
+        </p:nvSpPr>
+        <p:spPr>
+          <a:xfrm>
+            <a:off x="2487168" y="3721608"/>
             <a:ext cx="320040" cy="420624"/>
           </a:xfrm>
           <a:prstGeom prst="rect">
@@ -38869,13 +38578,13 @@
       </p:sp>
       <p:sp>
         <p:nvSpPr>
-          <p:cNvPr id="47" name="Shape 45"/>
-          <p:cNvSpPr/>
-          <p:nvPr/>
-        </p:nvSpPr>
-        <p:spPr>
-          <a:xfrm>
-            <a:off x="2834640" y="4178808"/>
+          <p:cNvPr id="39" name="Shape 37"/>
+          <p:cNvSpPr/>
+          <p:nvPr/>
+        </p:nvSpPr>
+        <p:spPr>
+          <a:xfrm>
+            <a:off x="2834640" y="3721608"/>
             <a:ext cx="1389888" cy="420624"/>
           </a:xfrm>
           <a:prstGeom prst="rect">
@@ -38903,13 +38612,13 @@
       </p:sp>
       <p:sp>
         <p:nvSpPr>
-          <p:cNvPr id="48" name="Text 46"/>
-          <p:cNvSpPr/>
-          <p:nvPr/>
-        </p:nvSpPr>
-        <p:spPr>
-          <a:xfrm>
-            <a:off x="2834640" y="4178808"/>
+          <p:cNvPr id="40" name="Text 38"/>
+          <p:cNvSpPr/>
+          <p:nvPr/>
+        </p:nvSpPr>
+        <p:spPr>
+          <a:xfrm>
+            <a:off x="2834640" y="3721608"/>
             <a:ext cx="1389888" cy="420624"/>
           </a:xfrm>
           <a:prstGeom prst="rect">
@@ -38942,13 +38651,13 @@
       </p:sp>
       <p:sp>
         <p:nvSpPr>
-          <p:cNvPr id="49" name="Text 47"/>
-          <p:cNvSpPr/>
-          <p:nvPr/>
-        </p:nvSpPr>
-        <p:spPr>
-          <a:xfrm>
-            <a:off x="4251960" y="4178808"/>
+          <p:cNvPr id="41" name="Text 39"/>
+          <p:cNvSpPr/>
+          <p:nvPr/>
+        </p:nvSpPr>
+        <p:spPr>
+          <a:xfrm>
+            <a:off x="4251960" y="3721608"/>
             <a:ext cx="320040" cy="420624"/>
           </a:xfrm>
           <a:prstGeom prst="rect">
@@ -38981,13 +38690,13 @@
       </p:sp>
       <p:sp>
         <p:nvSpPr>
-          <p:cNvPr id="50" name="Shape 48"/>
-          <p:cNvSpPr/>
-          <p:nvPr/>
-        </p:nvSpPr>
-        <p:spPr>
-          <a:xfrm>
-            <a:off x="4599432" y="4178808"/>
+          <p:cNvPr id="42" name="Shape 40"/>
+          <p:cNvSpPr/>
+          <p:nvPr/>
+        </p:nvSpPr>
+        <p:spPr>
+          <a:xfrm>
+            <a:off x="4599432" y="3721608"/>
             <a:ext cx="950976" cy="420624"/>
           </a:xfrm>
           <a:prstGeom prst="rect">
@@ -39015,13 +38724,13 @@
       </p:sp>
       <p:sp>
         <p:nvSpPr>
-          <p:cNvPr id="51" name="Text 49"/>
-          <p:cNvSpPr/>
-          <p:nvPr/>
-        </p:nvSpPr>
-        <p:spPr>
-          <a:xfrm>
-            <a:off x="4599432" y="4178808"/>
+          <p:cNvPr id="43" name="Text 41"/>
+          <p:cNvSpPr/>
+          <p:nvPr/>
+        </p:nvSpPr>
+        <p:spPr>
+          <a:xfrm>
+            <a:off x="4599432" y="3721608"/>
             <a:ext cx="950976" cy="420624"/>
           </a:xfrm>
           <a:prstGeom prst="rect">
@@ -39054,13 +38763,13 @@
       </p:sp>
       <p:sp>
         <p:nvSpPr>
-          <p:cNvPr id="52" name="Text 50"/>
-          <p:cNvSpPr/>
-          <p:nvPr/>
-        </p:nvSpPr>
-        <p:spPr>
-          <a:xfrm>
-            <a:off x="5623560" y="4178808"/>
+          <p:cNvPr id="44" name="Text 42"/>
+          <p:cNvSpPr/>
+          <p:nvPr/>
+        </p:nvSpPr>
+        <p:spPr>
+          <a:xfrm>
+            <a:off x="5623560" y="3721608"/>
             <a:ext cx="365760" cy="420624"/>
           </a:xfrm>
           <a:prstGeom prst="rect">
@@ -39093,13 +38802,13 @@
       </p:sp>
       <p:sp>
         <p:nvSpPr>
-          <p:cNvPr id="53" name="Shape 51"/>
-          <p:cNvSpPr/>
-          <p:nvPr/>
-        </p:nvSpPr>
-        <p:spPr>
-          <a:xfrm>
-            <a:off x="6035040" y="4178808"/>
+          <p:cNvPr id="45" name="Shape 43"/>
+          <p:cNvSpPr/>
+          <p:nvPr/>
+        </p:nvSpPr>
+        <p:spPr>
+          <a:xfrm>
+            <a:off x="6035040" y="3721608"/>
             <a:ext cx="2194560" cy="420624"/>
           </a:xfrm>
           <a:prstGeom prst="rect">
@@ -39120,13 +38829,13 @@
       </p:sp>
       <p:sp>
         <p:nvSpPr>
-          <p:cNvPr id="54" name="Text 52"/>
-          <p:cNvSpPr/>
-          <p:nvPr/>
-        </p:nvSpPr>
-        <p:spPr>
-          <a:xfrm>
-            <a:off x="6035040" y="4178808"/>
+          <p:cNvPr id="46" name="Text 44"/>
+          <p:cNvSpPr/>
+          <p:nvPr/>
+        </p:nvSpPr>
+        <p:spPr>
+          <a:xfrm>
+            <a:off x="6035040" y="3721608"/>
             <a:ext cx="2194560" cy="420624"/>
           </a:xfrm>
           <a:prstGeom prst="rect">
@@ -39151,7 +38860,7 @@
                 <a:ea typeface="Trebuchet MS" pitchFamily="34" charset="-122"/>
                 <a:cs typeface="Trebuchet MS" pitchFamily="34" charset="-120"/>
               </a:rPr>
-              <a:t>spelling</a:t>
+              <a:t>spell</a:t>
             </a:r>
             <a:endParaRPr lang="en-US" sz="1400" dirty="0"/>
           </a:p>
@@ -39443,7 +39152,7 @@
                 <a:ea typeface="Calibri" pitchFamily="34" charset="-122"/>
                 <a:cs typeface="Calibri" pitchFamily="34" charset="-120"/>
               </a:rPr>
-              <a:t>Word Labs  •  wordlabs.app  •  Root: 'spell' = to name letters in order</a:t>
+              <a:t>Word Labs  •  wordlabs.app  •  Root: 'spell' = to write or say letters in order</a:t>
             </a:r>
             <a:endParaRPr lang="en-US" sz="800" dirty="0"/>
           </a:p>
@@ -39555,7 +39264,7 @@
                 <a:ea typeface="Trebuchet MS" pitchFamily="34" charset="-122"/>
                 <a:cs typeface="Trebuchet MS" pitchFamily="34" charset="-120"/>
               </a:rPr>
-              <a:t>spelling</a:t>
+              <a:t>spell</a:t>
             </a:r>
             <a:endParaRPr lang="en-US" sz="1200" dirty="0"/>
           </a:p>
@@ -39621,7 +39330,7 @@
                 <a:ea typeface="Calibri" pitchFamily="34" charset="-122"/>
                 <a:cs typeface="Calibri" pitchFamily="34" charset="-120"/>
               </a:rPr>
-              <a:t>A computer tool that finds and fixes spelling mistakes in your writing.</a:t>
+              <a:t>says or writes the letters of a word correctly</a:t>
             </a:r>
             <a:endParaRPr lang="en-US" sz="1200" dirty="0"/>
           </a:p>
@@ -39694,7 +39403,7 @@
                 <a:ea typeface="Trebuchet MS" pitchFamily="34" charset="-122"/>
                 <a:cs typeface="Trebuchet MS" pitchFamily="34" charset="-120"/>
               </a:rPr>
-              <a:t>misspell</a:t>
+              <a:t>spells</a:t>
             </a:r>
             <a:endParaRPr lang="en-US" sz="1200" dirty="0"/>
           </a:p>
@@ -39760,7 +39469,7 @@
                 <a:ea typeface="Calibri" pitchFamily="34" charset="-122"/>
                 <a:cs typeface="Calibri" pitchFamily="34" charset="-120"/>
               </a:rPr>
-              <a:t>So interested or amazed by something that you cannot look away.</a:t>
+              <a:t>said or wrote the letters of a word correctly, in the past</a:t>
             </a:r>
             <a:endParaRPr lang="en-US" sz="1200" dirty="0"/>
           </a:p>
@@ -39833,7 +39542,7 @@
                 <a:ea typeface="Trebuchet MS" pitchFamily="34" charset="-122"/>
                 <a:cs typeface="Trebuchet MS" pitchFamily="34" charset="-120"/>
               </a:rPr>
-              <a:t>speller</a:t>
+              <a:t>spelled</a:t>
             </a:r>
             <a:endParaRPr lang="en-US" sz="1200" dirty="0"/>
           </a:p>
@@ -39899,563 +39608,7 @@
                 <a:ea typeface="Calibri" pitchFamily="34" charset="-122"/>
                 <a:cs typeface="Calibri" pitchFamily="34" charset="-120"/>
               </a:rPr>
-              <a:t>Having written or said the letters of a word in the wrong order.</a:t>
-            </a:r>
-            <a:endParaRPr lang="en-US" sz="1200" dirty="0"/>
-          </a:p>
-        </p:txBody>
-      </p:sp>
-      <p:sp>
-        <p:nvSpPr>
-          <p:cNvPr id="23" name="Shape 21"/>
-          <p:cNvSpPr/>
-          <p:nvPr/>
-        </p:nvSpPr>
-        <p:spPr>
-          <a:xfrm>
-            <a:off x="365760" y="2779776"/>
-            <a:ext cx="2011680" cy="457200"/>
-          </a:xfrm>
-          <a:prstGeom prst="rect">
-            <a:avLst>
-              <a:gd name="adj" fmla="val 12000"/>
-            </a:avLst>
-          </a:prstGeom>
-          <a:solidFill>
-            <a:srgbClr val="EEF2FF"/>
-          </a:solidFill>
-          <a:ln w="12700">
-            <a:solidFill>
-              <a:srgbClr val="6366F1"/>
-            </a:solidFill>
-            <a:prstDash val="solid"/>
-          </a:ln>
-          <a:effectLst>
-            <a:outerShdw sx="100000" sy="100000" kx="0" ky="0" algn="bl" rotWithShape="0" blurRad="101600" dist="38100" dir="8100000">
-              <a:srgbClr val="000000">
-                <a:alpha val="12000"/>
-              </a:srgbClr>
-            </a:outerShdw>
-          </a:effectLst>
-        </p:spPr>
-      </p:sp>
-      <p:sp>
-        <p:nvSpPr>
-          <p:cNvPr id="24" name="Text 22"/>
-          <p:cNvSpPr/>
-          <p:nvPr/>
-        </p:nvSpPr>
-        <p:spPr>
-          <a:xfrm>
-            <a:off x="365760" y="2779776"/>
-            <a:ext cx="2011680" cy="457200"/>
-          </a:xfrm>
-          <a:prstGeom prst="rect">
-            <a:avLst/>
-          </a:prstGeom>
-          <a:noFill/>
-          <a:ln/>
-        </p:spPr>
-        <p:txBody>
-          <a:bodyPr wrap="square" lIns="0" tIns="0" rIns="0" bIns="0" rtlCol="0" anchor="ctr"/>
-          <a:lstStyle/>
-          <a:p>
-            <a:pPr algn="ctr" indent="0" marL="0">
-              <a:buNone/>
-            </a:pPr>
-            <a:r>
-              <a:rPr lang="en-US" sz="1200" b="1" dirty="0">
-                <a:solidFill>
-                  <a:srgbClr val="4338CA"/>
-                </a:solidFill>
-                <a:latin typeface="Trebuchet MS" pitchFamily="34" charset="0"/>
-                <a:ea typeface="Trebuchet MS" pitchFamily="34" charset="-122"/>
-                <a:cs typeface="Trebuchet MS" pitchFamily="34" charset="-120"/>
-              </a:rPr>
-              <a:t>misspelled</a:t>
-            </a:r>
-            <a:endParaRPr lang="en-US" sz="1200" dirty="0"/>
-          </a:p>
-        </p:txBody>
-      </p:sp>
-      <p:sp>
-        <p:nvSpPr>
-          <p:cNvPr id="25" name="Shape 23"/>
-          <p:cNvSpPr/>
-          <p:nvPr/>
-        </p:nvSpPr>
-        <p:spPr>
-          <a:xfrm>
-            <a:off x="2514600" y="2779776"/>
-            <a:ext cx="6263640" cy="457200"/>
-          </a:xfrm>
-          <a:prstGeom prst="rect">
-            <a:avLst>
-              <a:gd name="adj" fmla="val 12000"/>
-            </a:avLst>
-          </a:prstGeom>
-          <a:solidFill>
-            <a:srgbClr val="F8FAFC"/>
-          </a:solidFill>
-          <a:ln w="12700">
-            <a:solidFill>
-              <a:srgbClr val="E2E8F0"/>
-            </a:solidFill>
-            <a:prstDash val="solid"/>
-          </a:ln>
-        </p:spPr>
-      </p:sp>
-      <p:sp>
-        <p:nvSpPr>
-          <p:cNvPr id="26" name="Text 24"/>
-          <p:cNvSpPr/>
-          <p:nvPr/>
-        </p:nvSpPr>
-        <p:spPr>
-          <a:xfrm>
-            <a:off x="2651760" y="2779776"/>
-            <a:ext cx="6035040" cy="457200"/>
-          </a:xfrm>
-          <a:prstGeom prst="rect">
-            <a:avLst/>
-          </a:prstGeom>
-          <a:noFill/>
-          <a:ln/>
-        </p:spPr>
-        <p:txBody>
-          <a:bodyPr wrap="square" rtlCol="0" anchor="ctr"/>
-          <a:lstStyle/>
-          <a:p>
-            <a:pPr algn="l" indent="0" marL="0">
-              <a:buNone/>
-            </a:pPr>
-            <a:r>
-              <a:rPr lang="en-US" sz="1200" dirty="0">
-                <a:solidFill>
-                  <a:srgbClr val="0F172A"/>
-                </a:solidFill>
-                <a:latin typeface="Calibri" pitchFamily="34" charset="0"/>
-                <a:ea typeface="Calibri" pitchFamily="34" charset="-122"/>
-                <a:cs typeface="Calibri" pitchFamily="34" charset="-120"/>
-              </a:rPr>
-              <a:t>To spell a word again, often in a different or clearer way.</a:t>
-            </a:r>
-            <a:endParaRPr lang="en-US" sz="1200" dirty="0"/>
-          </a:p>
-        </p:txBody>
-      </p:sp>
-      <p:sp>
-        <p:nvSpPr>
-          <p:cNvPr id="27" name="Shape 25"/>
-          <p:cNvSpPr/>
-          <p:nvPr/>
-        </p:nvSpPr>
-        <p:spPr>
-          <a:xfrm>
-            <a:off x="365760" y="3310128"/>
-            <a:ext cx="2011680" cy="457200"/>
-          </a:xfrm>
-          <a:prstGeom prst="rect">
-            <a:avLst>
-              <a:gd name="adj" fmla="val 12000"/>
-            </a:avLst>
-          </a:prstGeom>
-          <a:solidFill>
-            <a:srgbClr val="EEF2FF"/>
-          </a:solidFill>
-          <a:ln w="12700">
-            <a:solidFill>
-              <a:srgbClr val="6366F1"/>
-            </a:solidFill>
-            <a:prstDash val="solid"/>
-          </a:ln>
-          <a:effectLst>
-            <a:outerShdw sx="100000" sy="100000" kx="0" ky="0" algn="bl" rotWithShape="0" blurRad="101600" dist="38100" dir="8100000">
-              <a:srgbClr val="000000">
-                <a:alpha val="12000"/>
-              </a:srgbClr>
-            </a:outerShdw>
-          </a:effectLst>
-        </p:spPr>
-      </p:sp>
-      <p:sp>
-        <p:nvSpPr>
-          <p:cNvPr id="28" name="Text 26"/>
-          <p:cNvSpPr/>
-          <p:nvPr/>
-        </p:nvSpPr>
-        <p:spPr>
-          <a:xfrm>
-            <a:off x="365760" y="3310128"/>
-            <a:ext cx="2011680" cy="457200"/>
-          </a:xfrm>
-          <a:prstGeom prst="rect">
-            <a:avLst/>
-          </a:prstGeom>
-          <a:noFill/>
-          <a:ln/>
-        </p:spPr>
-        <p:txBody>
-          <a:bodyPr wrap="square" lIns="0" tIns="0" rIns="0" bIns="0" rtlCol="0" anchor="ctr"/>
-          <a:lstStyle/>
-          <a:p>
-            <a:pPr algn="ctr" indent="0" marL="0">
-              <a:buNone/>
-            </a:pPr>
-            <a:r>
-              <a:rPr lang="en-US" sz="1200" b="1" dirty="0">
-                <a:solidFill>
-                  <a:srgbClr val="4338CA"/>
-                </a:solidFill>
-                <a:latin typeface="Trebuchet MS" pitchFamily="34" charset="0"/>
-                <a:ea typeface="Trebuchet MS" pitchFamily="34" charset="-122"/>
-                <a:cs typeface="Trebuchet MS" pitchFamily="34" charset="-120"/>
-              </a:rPr>
-              <a:t>spellbound</a:t>
-            </a:r>
-            <a:endParaRPr lang="en-US" sz="1200" dirty="0"/>
-          </a:p>
-        </p:txBody>
-      </p:sp>
-      <p:sp>
-        <p:nvSpPr>
-          <p:cNvPr id="29" name="Shape 27"/>
-          <p:cNvSpPr/>
-          <p:nvPr/>
-        </p:nvSpPr>
-        <p:spPr>
-          <a:xfrm>
-            <a:off x="2514600" y="3310128"/>
-            <a:ext cx="6263640" cy="457200"/>
-          </a:xfrm>
-          <a:prstGeom prst="rect">
-            <a:avLst>
-              <a:gd name="adj" fmla="val 12000"/>
-            </a:avLst>
-          </a:prstGeom>
-          <a:solidFill>
-            <a:srgbClr val="F8FAFC"/>
-          </a:solidFill>
-          <a:ln w="12700">
-            <a:solidFill>
-              <a:srgbClr val="E2E8F0"/>
-            </a:solidFill>
-            <a:prstDash val="solid"/>
-          </a:ln>
-        </p:spPr>
-      </p:sp>
-      <p:sp>
-        <p:nvSpPr>
-          <p:cNvPr id="30" name="Text 28"/>
-          <p:cNvSpPr/>
-          <p:nvPr/>
-        </p:nvSpPr>
-        <p:spPr>
-          <a:xfrm>
-            <a:off x="2651760" y="3310128"/>
-            <a:ext cx="6035040" cy="457200"/>
-          </a:xfrm>
-          <a:prstGeom prst="rect">
-            <a:avLst/>
-          </a:prstGeom>
-          <a:noFill/>
-          <a:ln/>
-        </p:spPr>
-        <p:txBody>
-          <a:bodyPr wrap="square" rtlCol="0" anchor="ctr"/>
-          <a:lstStyle/>
-          <a:p>
-            <a:pPr algn="l" indent="0" marL="0">
-              <a:buNone/>
-            </a:pPr>
-            <a:r>
-              <a:rPr lang="en-US" sz="1200" dirty="0">
-                <a:solidFill>
-                  <a:srgbClr val="0F172A"/>
-                </a:solidFill>
-                <a:latin typeface="Calibri" pitchFamily="34" charset="0"/>
-                <a:ea typeface="Calibri" pitchFamily="34" charset="-122"/>
-                <a:cs typeface="Calibri" pitchFamily="34" charset="-120"/>
-              </a:rPr>
-              <a:t>A person who spells words, or a book used to practise spelling.</a:t>
-            </a:r>
-            <a:endParaRPr lang="en-US" sz="1200" dirty="0"/>
-          </a:p>
-        </p:txBody>
-      </p:sp>
-      <p:sp>
-        <p:nvSpPr>
-          <p:cNvPr id="31" name="Shape 29"/>
-          <p:cNvSpPr/>
-          <p:nvPr/>
-        </p:nvSpPr>
-        <p:spPr>
-          <a:xfrm>
-            <a:off x="365760" y="3840480"/>
-            <a:ext cx="2011680" cy="457200"/>
-          </a:xfrm>
-          <a:prstGeom prst="rect">
-            <a:avLst>
-              <a:gd name="adj" fmla="val 12000"/>
-            </a:avLst>
-          </a:prstGeom>
-          <a:solidFill>
-            <a:srgbClr val="EEF2FF"/>
-          </a:solidFill>
-          <a:ln w="12700">
-            <a:solidFill>
-              <a:srgbClr val="6366F1"/>
-            </a:solidFill>
-            <a:prstDash val="solid"/>
-          </a:ln>
-          <a:effectLst>
-            <a:outerShdw sx="100000" sy="100000" kx="0" ky="0" algn="bl" rotWithShape="0" blurRad="101600" dist="38100" dir="8100000">
-              <a:srgbClr val="000000">
-                <a:alpha val="12000"/>
-              </a:srgbClr>
-            </a:outerShdw>
-          </a:effectLst>
-        </p:spPr>
-      </p:sp>
-      <p:sp>
-        <p:nvSpPr>
-          <p:cNvPr id="32" name="Text 30"/>
-          <p:cNvSpPr/>
-          <p:nvPr/>
-        </p:nvSpPr>
-        <p:spPr>
-          <a:xfrm>
-            <a:off x="365760" y="3840480"/>
-            <a:ext cx="2011680" cy="457200"/>
-          </a:xfrm>
-          <a:prstGeom prst="rect">
-            <a:avLst/>
-          </a:prstGeom>
-          <a:noFill/>
-          <a:ln/>
-        </p:spPr>
-        <p:txBody>
-          <a:bodyPr wrap="square" lIns="0" tIns="0" rIns="0" bIns="0" rtlCol="0" anchor="ctr"/>
-          <a:lstStyle/>
-          <a:p>
-            <a:pPr algn="ctr" indent="0" marL="0">
-              <a:buNone/>
-            </a:pPr>
-            <a:r>
-              <a:rPr lang="en-US" sz="1200" b="1" dirty="0">
-                <a:solidFill>
-                  <a:srgbClr val="4338CA"/>
-                </a:solidFill>
-                <a:latin typeface="Trebuchet MS" pitchFamily="34" charset="0"/>
-                <a:ea typeface="Trebuchet MS" pitchFamily="34" charset="-122"/>
-                <a:cs typeface="Trebuchet MS" pitchFamily="34" charset="-120"/>
-              </a:rPr>
-              <a:t>respell</a:t>
-            </a:r>
-            <a:endParaRPr lang="en-US" sz="1200" dirty="0"/>
-          </a:p>
-        </p:txBody>
-      </p:sp>
-      <p:sp>
-        <p:nvSpPr>
-          <p:cNvPr id="33" name="Shape 31"/>
-          <p:cNvSpPr/>
-          <p:nvPr/>
-        </p:nvSpPr>
-        <p:spPr>
-          <a:xfrm>
-            <a:off x="2514600" y="3840480"/>
-            <a:ext cx="6263640" cy="457200"/>
-          </a:xfrm>
-          <a:prstGeom prst="rect">
-            <a:avLst>
-              <a:gd name="adj" fmla="val 12000"/>
-            </a:avLst>
-          </a:prstGeom>
-          <a:solidFill>
-            <a:srgbClr val="F8FAFC"/>
-          </a:solidFill>
-          <a:ln w="12700">
-            <a:solidFill>
-              <a:srgbClr val="E2E8F0"/>
-            </a:solidFill>
-            <a:prstDash val="solid"/>
-          </a:ln>
-        </p:spPr>
-      </p:sp>
-      <p:sp>
-        <p:nvSpPr>
-          <p:cNvPr id="34" name="Text 32"/>
-          <p:cNvSpPr/>
-          <p:nvPr/>
-        </p:nvSpPr>
-        <p:spPr>
-          <a:xfrm>
-            <a:off x="2651760" y="3840480"/>
-            <a:ext cx="6035040" cy="457200"/>
-          </a:xfrm>
-          <a:prstGeom prst="rect">
-            <a:avLst/>
-          </a:prstGeom>
-          <a:noFill/>
-          <a:ln/>
-        </p:spPr>
-        <p:txBody>
-          <a:bodyPr wrap="square" rtlCol="0" anchor="ctr"/>
-          <a:lstStyle/>
-          <a:p>
-            <a:pPr algn="l" indent="0" marL="0">
-              <a:buNone/>
-            </a:pPr>
-            <a:r>
-              <a:rPr lang="en-US" sz="1200" dirty="0">
-                <a:solidFill>
-                  <a:srgbClr val="0F172A"/>
-                </a:solidFill>
-                <a:latin typeface="Calibri" pitchFamily="34" charset="0"/>
-                <a:ea typeface="Calibri" pitchFamily="34" charset="-122"/>
-                <a:cs typeface="Calibri" pitchFamily="34" charset="-120"/>
-              </a:rPr>
-              <a:t>Writing or saying the letters of a word in the correct order.</a:t>
-            </a:r>
-            <a:endParaRPr lang="en-US" sz="1200" dirty="0"/>
-          </a:p>
-        </p:txBody>
-      </p:sp>
-      <p:sp>
-        <p:nvSpPr>
-          <p:cNvPr id="35" name="Shape 33"/>
-          <p:cNvSpPr/>
-          <p:nvPr/>
-        </p:nvSpPr>
-        <p:spPr>
-          <a:xfrm>
-            <a:off x="365760" y="4370832"/>
-            <a:ext cx="2011680" cy="457200"/>
-          </a:xfrm>
-          <a:prstGeom prst="rect">
-            <a:avLst>
-              <a:gd name="adj" fmla="val 12000"/>
-            </a:avLst>
-          </a:prstGeom>
-          <a:solidFill>
-            <a:srgbClr val="EEF2FF"/>
-          </a:solidFill>
-          <a:ln w="12700">
-            <a:solidFill>
-              <a:srgbClr val="6366F1"/>
-            </a:solidFill>
-            <a:prstDash val="solid"/>
-          </a:ln>
-          <a:effectLst>
-            <a:outerShdw sx="100000" sy="100000" kx="0" ky="0" algn="bl" rotWithShape="0" blurRad="101600" dist="38100" dir="8100000">
-              <a:srgbClr val="000000">
-                <a:alpha val="12000"/>
-              </a:srgbClr>
-            </a:outerShdw>
-          </a:effectLst>
-        </p:spPr>
-      </p:sp>
-      <p:sp>
-        <p:nvSpPr>
-          <p:cNvPr id="36" name="Text 34"/>
-          <p:cNvSpPr/>
-          <p:nvPr/>
-        </p:nvSpPr>
-        <p:spPr>
-          <a:xfrm>
-            <a:off x="365760" y="4370832"/>
-            <a:ext cx="2011680" cy="457200"/>
-          </a:xfrm>
-          <a:prstGeom prst="rect">
-            <a:avLst/>
-          </a:prstGeom>
-          <a:noFill/>
-          <a:ln/>
-        </p:spPr>
-        <p:txBody>
-          <a:bodyPr wrap="square" lIns="0" tIns="0" rIns="0" bIns="0" rtlCol="0" anchor="ctr"/>
-          <a:lstStyle/>
-          <a:p>
-            <a:pPr algn="ctr" indent="0" marL="0">
-              <a:buNone/>
-            </a:pPr>
-            <a:r>
-              <a:rPr lang="en-US" sz="1200" b="1" dirty="0">
-                <a:solidFill>
-                  <a:srgbClr val="4338CA"/>
-                </a:solidFill>
-                <a:latin typeface="Trebuchet MS" pitchFamily="34" charset="0"/>
-                <a:ea typeface="Trebuchet MS" pitchFamily="34" charset="-122"/>
-                <a:cs typeface="Trebuchet MS" pitchFamily="34" charset="-120"/>
-              </a:rPr>
-              <a:t>spellcheck</a:t>
-            </a:r>
-            <a:endParaRPr lang="en-US" sz="1200" dirty="0"/>
-          </a:p>
-        </p:txBody>
-      </p:sp>
-      <p:sp>
-        <p:nvSpPr>
-          <p:cNvPr id="37" name="Shape 35"/>
-          <p:cNvSpPr/>
-          <p:nvPr/>
-        </p:nvSpPr>
-        <p:spPr>
-          <a:xfrm>
-            <a:off x="2514600" y="4370832"/>
-            <a:ext cx="6263640" cy="457200"/>
-          </a:xfrm>
-          <a:prstGeom prst="rect">
-            <a:avLst>
-              <a:gd name="adj" fmla="val 12000"/>
-            </a:avLst>
-          </a:prstGeom>
-          <a:solidFill>
-            <a:srgbClr val="F8FAFC"/>
-          </a:solidFill>
-          <a:ln w="12700">
-            <a:solidFill>
-              <a:srgbClr val="E2E8F0"/>
-            </a:solidFill>
-            <a:prstDash val="solid"/>
-          </a:ln>
-        </p:spPr>
-      </p:sp>
-      <p:sp>
-        <p:nvSpPr>
-          <p:cNvPr id="38" name="Text 36"/>
-          <p:cNvSpPr/>
-          <p:nvPr/>
-        </p:nvSpPr>
-        <p:spPr>
-          <a:xfrm>
-            <a:off x="2651760" y="4370832"/>
-            <a:ext cx="6035040" cy="457200"/>
-          </a:xfrm>
-          <a:prstGeom prst="rect">
-            <a:avLst/>
-          </a:prstGeom>
-          <a:noFill/>
-          <a:ln/>
-        </p:spPr>
-        <p:txBody>
-          <a:bodyPr wrap="square" rtlCol="0" anchor="ctr"/>
-          <a:lstStyle/>
-          <a:p>
-            <a:pPr algn="l" indent="0" marL="0">
-              <a:buNone/>
-            </a:pPr>
-            <a:r>
-              <a:rPr lang="en-US" sz="1200" dirty="0">
-                <a:solidFill>
-                  <a:srgbClr val="0F172A"/>
-                </a:solidFill>
-                <a:latin typeface="Calibri" pitchFamily="34" charset="0"/>
-                <a:ea typeface="Calibri" pitchFamily="34" charset="-122"/>
-                <a:cs typeface="Calibri" pitchFamily="34" charset="-120"/>
-              </a:rPr>
-              <a:t>To spell a word incorrectly or in the wrong way.</a:t>
+              <a:t>to say or write the letters of a word in the correct order</a:t>
             </a:r>
             <a:endParaRPr lang="en-US" sz="1200" dirty="0"/>
           </a:p>
@@ -40747,7 +39900,7 @@
                 <a:ea typeface="Calibri" pitchFamily="34" charset="-122"/>
                 <a:cs typeface="Calibri" pitchFamily="34" charset="-120"/>
               </a:rPr>
-              <a:t>Word Labs  •  wordlabs.app  •  Root: 'spell' = to name letters in order</a:t>
+              <a:t>Word Labs  •  wordlabs.app  •  Root: 'spell' = to write or say letters in order</a:t>
             </a:r>
             <a:endParaRPr lang="en-US" sz="800" dirty="0"/>
           </a:p>
@@ -40950,7 +40103,7 @@
                 <a:ea typeface="Calibri" pitchFamily="34" charset="-122"/>
                 <a:cs typeface="Calibri" pitchFamily="34" charset="-120"/>
               </a:rPr>
-              <a:t>The teacher asked the class to practise their spelling words every night before bed.</a:t>
+              <a:t>Can you spell the word 'necessary' correctly?</a:t>
             </a:r>
             <a:endParaRPr lang="en-US" sz="1500" dirty="0"/>
           </a:p>
@@ -41114,7 +40267,7 @@
                 <a:ea typeface="Calibri" pitchFamily="34" charset="-122"/>
                 <a:cs typeface="Calibri" pitchFamily="34" charset="-120"/>
               </a:rPr>
-              <a:t>Jake was spellbound by the magician's tricks at the school assembly.</a:t>
+              <a:t>He always spells difficult words correctly.</a:t>
             </a:r>
             <a:endParaRPr lang="en-US" sz="1500" dirty="0"/>
           </a:p>
@@ -41278,7 +40431,7 @@
                 <a:ea typeface="Calibri" pitchFamily="34" charset="-122"/>
                 <a:cs typeface="Calibri" pitchFamily="34" charset="-120"/>
               </a:rPr>
-              <a:t>Always use spellcheck before you hand in your writing to make sure you have not misspelled any words.</a:t>
+              <a:t>She spelled her name out loud for the new teacher.</a:t>
             </a:r>
             <a:endParaRPr lang="en-US" sz="1500" dirty="0"/>
           </a:p>
